--- a/docs/MIP_MMA_PPE_apresentacao.pptx
+++ b/docs/MIP_MMA_PPE_apresentacao.pptx
@@ -2239,37 +2239,28 @@
             <a:off x="0" y="0"/>
             <a:ext cx="9144000" cy="6858000"/>
           </a:xfrm>
-        </p:spPr>
-        <p:txBody>
-          <a:bodyPr/>
-          <a:lstStyle/>
-          <a:p>
-            <a:pPr algn="l" marL="0" marR="0">
-              <a:lnSpc>
-                <a:spcPct val="100000"/>
-              </a:lnSpc>
-              <a:spcBef>
-                <a:spcPts val="0"/>
-              </a:spcBef>
-              <a:spcAft>
-                <a:spcPts val="0"/>
-              </a:spcAft>
-              <a:buNone/>
-            </a:pPr>
-            <a:r>
-              <a:rPr cap="none" sz="100" i="0" b="0" u="none" strike="noStrike">
-                <a:solidFill>
-                  <a:srgbClr val="1C2B4A">
-                    <a:alpha val="100000"/>
-                  </a:srgbClr>
-                </a:solidFill>
-                <a:latin typeface="Calibri"/>
-                <a:cs typeface="Calibri"/>
-                <a:ea typeface="Calibri"/>
-                <a:sym typeface="Calibri"/>
-              </a:rPr>
-              <a:t/>
-            </a:r>
+          <a:solidFill>
+            <a:srgbClr val="1C2B4A">
+              <a:alpha val="100000"/>
+            </a:srgbClr>
+          </a:solidFill>
+        </p:spPr>
+        <p:txBody>
+          <a:bodyPr/>
+          <a:lstStyle/>
+          <a:p>
+            <a:pPr algn="l" marL="0" marR="0">
+              <a:lnSpc>
+                <a:spcPct val="100000"/>
+              </a:lnSpc>
+              <a:spcBef>
+                <a:spcPts val="0"/>
+              </a:spcBef>
+              <a:spcAft>
+                <a:spcPts val="0"/>
+              </a:spcAft>
+              <a:buNone/>
+            </a:pPr>
           </a:p>
         </p:txBody>
       </p:sp>
@@ -2285,28 +2276,68 @@
         </p:nvSpPr>
         <p:spPr>
           <a:xfrm>
-            <a:off x="320040" y="1417320"/>
-            <a:ext cx="73152" cy="3931920"/>
-          </a:xfrm>
-        </p:spPr>
-        <p:txBody>
-          <a:bodyPr/>
-          <a:lstStyle/>
-          <a:p>
-            <a:pPr algn="l" marL="0" marR="0">
-              <a:lnSpc>
-                <a:spcPct val="100000"/>
-              </a:lnSpc>
-              <a:spcBef>
-                <a:spcPts val="0"/>
-              </a:spcBef>
-              <a:spcAft>
-                <a:spcPts val="0"/>
-              </a:spcAft>
-              <a:buNone/>
-            </a:pPr>
-            <a:r>
-              <a:rPr cap="none" sz="100" i="0" b="0" u="none" strike="noStrike">
+            <a:off x="347472" y="1417320"/>
+            <a:ext cx="64008" cy="3931920"/>
+          </a:xfrm>
+          <a:solidFill>
+            <a:srgbClr val="1D9E75">
+              <a:alpha val="100000"/>
+            </a:srgbClr>
+          </a:solidFill>
+        </p:spPr>
+        <p:txBody>
+          <a:bodyPr/>
+          <a:lstStyle/>
+          <a:p>
+            <a:pPr algn="l" marL="0" marR="0">
+              <a:lnSpc>
+                <a:spcPct val="100000"/>
+              </a:lnSpc>
+              <a:spcBef>
+                <a:spcPts val="0"/>
+              </a:spcBef>
+              <a:spcAft>
+                <a:spcPts val="0"/>
+              </a:spcAft>
+              <a:buNone/>
+            </a:pPr>
+          </a:p>
+        </p:txBody>
+      </p:sp>
+      <p:sp>
+        <p:nvSpPr>
+          <p:cNvPr id="4" name=""/>
+          <p:cNvSpPr>
+            <a:spLocks noGrp="1"/>
+          </p:cNvSpPr>
+          <p:nvPr>
+            <p:ph/>
+          </p:nvPr>
+        </p:nvSpPr>
+        <p:spPr>
+          <a:xfrm>
+            <a:off x="640080" y="1417320"/>
+            <a:ext cx="8229600" cy="1005840"/>
+          </a:xfrm>
+        </p:spPr>
+        <p:txBody>
+          <a:bodyPr/>
+          <a:lstStyle/>
+          <a:p>
+            <a:pPr algn="l" marL="0" marR="0">
+              <a:lnSpc>
+                <a:spcPct val="100000"/>
+              </a:lnSpc>
+              <a:spcBef>
+                <a:spcPts val="0"/>
+              </a:spcBef>
+              <a:spcAft>
+                <a:spcPts val="0"/>
+              </a:spcAft>
+              <a:buNone/>
+            </a:pPr>
+            <a:r>
+              <a:rPr cap="none" sz="4000" i="0" b="1" u="none" strike="noStrike">
                 <a:solidFill>
                   <a:srgbClr val="1D9E75">
                     <a:alpha val="100000"/>
@@ -2317,55 +2348,6 @@
                 <a:ea typeface="Calibri"/>
                 <a:sym typeface="Calibri"/>
               </a:rPr>
-              <a:t/>
-            </a:r>
-          </a:p>
-        </p:txBody>
-      </p:sp>
-      <p:sp>
-        <p:nvSpPr>
-          <p:cNvPr id="4" name=""/>
-          <p:cNvSpPr>
-            <a:spLocks noGrp="1"/>
-          </p:cNvSpPr>
-          <p:nvPr>
-            <p:ph/>
-          </p:nvPr>
-        </p:nvSpPr>
-        <p:spPr>
-          <a:xfrm>
-            <a:off x="914400" y="1463040"/>
-            <a:ext cx="8229600" cy="1005840"/>
-          </a:xfrm>
-        </p:spPr>
-        <p:txBody>
-          <a:bodyPr/>
-          <a:lstStyle/>
-          <a:p>
-            <a:pPr algn="l" marL="0" marR="0">
-              <a:lnSpc>
-                <a:spcPct val="100000"/>
-              </a:lnSpc>
-              <a:spcBef>
-                <a:spcPts val="0"/>
-              </a:spcBef>
-              <a:spcAft>
-                <a:spcPts val="0"/>
-              </a:spcAft>
-              <a:buNone/>
-            </a:pPr>
-            <a:r>
-              <a:rPr cap="none" sz="4000" i="0" b="1" u="none" strike="noStrike">
-                <a:solidFill>
-                  <a:srgbClr val="1D9E75">
-                    <a:alpha val="100000"/>
-                  </a:srgbClr>
-                </a:solidFill>
-                <a:latin typeface="Calibri"/>
-                <a:cs typeface="Calibri"/>
-                <a:ea typeface="Calibri"/>
-                <a:sym typeface="Calibri"/>
-              </a:rPr>
               <a:t>MIP × MMA</a:t>
             </a:r>
           </a:p>
@@ -2383,7 +2365,7 @@
         </p:nvSpPr>
         <p:spPr>
           <a:xfrm>
-            <a:off x="914400" y="2514600"/>
+            <a:off x="640080" y="2514600"/>
             <a:ext cx="7772400" cy="1371600"/>
           </a:xfrm>
         </p:spPr>
@@ -2433,7 +2415,7 @@
         </p:nvSpPr>
         <p:spPr>
           <a:xfrm>
-            <a:off x="914400" y="3977640"/>
+            <a:off x="640080" y="3977640"/>
             <a:ext cx="8229600" cy="457200"/>
           </a:xfrm>
         </p:spPr>
@@ -2482,7 +2464,7 @@
         </p:nvSpPr>
         <p:spPr>
           <a:xfrm>
-            <a:off x="914400" y="5852160"/>
+            <a:off x="640080" y="5852160"/>
             <a:ext cx="4572000" cy="365760"/>
           </a:xfrm>
         </p:spPr>
@@ -2608,37 +2590,28 @@
             <a:off x="0" y="0"/>
             <a:ext cx="9144000" cy="6858000"/>
           </a:xfrm>
-        </p:spPr>
-        <p:txBody>
-          <a:bodyPr/>
-          <a:lstStyle/>
-          <a:p>
-            <a:pPr algn="l" marL="0" marR="0">
-              <a:lnSpc>
-                <a:spcPct val="100000"/>
-              </a:lnSpc>
-              <a:spcBef>
-                <a:spcPts val="0"/>
-              </a:spcBef>
-              <a:spcAft>
-                <a:spcPts val="0"/>
-              </a:spcAft>
-              <a:buNone/>
-            </a:pPr>
-            <a:r>
-              <a:rPr cap="none" sz="100" i="0" b="0" u="none" strike="noStrike">
-                <a:solidFill>
-                  <a:srgbClr val="1C2B4A">
-                    <a:alpha val="100000"/>
-                  </a:srgbClr>
-                </a:solidFill>
-                <a:latin typeface="Calibri"/>
-                <a:cs typeface="Calibri"/>
-                <a:ea typeface="Calibri"/>
-                <a:sym typeface="Calibri"/>
-              </a:rPr>
-              <a:t/>
-            </a:r>
+          <a:solidFill>
+            <a:srgbClr val="1C2B4A">
+              <a:alpha val="100000"/>
+            </a:srgbClr>
+          </a:solidFill>
+        </p:spPr>
+        <p:txBody>
+          <a:bodyPr/>
+          <a:lstStyle/>
+          <a:p>
+            <a:pPr algn="l" marL="0" marR="0">
+              <a:lnSpc>
+                <a:spcPct val="100000"/>
+              </a:lnSpc>
+              <a:spcBef>
+                <a:spcPts val="0"/>
+              </a:spcBef>
+              <a:spcAft>
+                <a:spcPts val="0"/>
+              </a:spcAft>
+              <a:buNone/>
+            </a:pPr>
           </a:p>
         </p:txBody>
       </p:sp>
@@ -2657,37 +2630,28 @@
             <a:off x="0" y="0"/>
             <a:ext cx="9144000" cy="822960"/>
           </a:xfrm>
-        </p:spPr>
-        <p:txBody>
-          <a:bodyPr/>
-          <a:lstStyle/>
-          <a:p>
-            <a:pPr algn="l" marL="0" marR="0">
-              <a:lnSpc>
-                <a:spcPct val="100000"/>
-              </a:lnSpc>
-              <a:spcBef>
-                <a:spcPts val="0"/>
-              </a:spcBef>
-              <a:spcAft>
-                <a:spcPts val="0"/>
-              </a:spcAft>
-              <a:buNone/>
-            </a:pPr>
-            <a:r>
-              <a:rPr cap="none" sz="100" i="0" b="0" u="none" strike="noStrike">
-                <a:solidFill>
-                  <a:srgbClr val="F39C12">
-                    <a:alpha val="100000"/>
-                  </a:srgbClr>
-                </a:solidFill>
-                <a:latin typeface="Calibri"/>
-                <a:cs typeface="Calibri"/>
-                <a:ea typeface="Calibri"/>
-                <a:sym typeface="Calibri"/>
-              </a:rPr>
-              <a:t/>
-            </a:r>
+          <a:solidFill>
+            <a:srgbClr val="F39C12">
+              <a:alpha val="100000"/>
+            </a:srgbClr>
+          </a:solidFill>
+        </p:spPr>
+        <p:txBody>
+          <a:bodyPr/>
+          <a:lstStyle/>
+          <a:p>
+            <a:pPr algn="l" marL="0" marR="0">
+              <a:lnSpc>
+                <a:spcPct val="100000"/>
+              </a:lnSpc>
+              <a:spcBef>
+                <a:spcPts val="0"/>
+              </a:spcBef>
+              <a:spcAft>
+                <a:spcPts val="0"/>
+              </a:spcAft>
+              <a:buNone/>
+            </a:pPr>
           </a:p>
         </p:txBody>
       </p:sp>
@@ -2755,37 +2719,28 @@
             <a:off x="182880" y="914400"/>
             <a:ext cx="4297680" cy="5715000"/>
           </a:xfrm>
-        </p:spPr>
-        <p:txBody>
-          <a:bodyPr/>
-          <a:lstStyle/>
-          <a:p>
-            <a:pPr algn="l" marL="0" marR="0">
-              <a:lnSpc>
-                <a:spcPct val="100000"/>
-              </a:lnSpc>
-              <a:spcBef>
-                <a:spcPts val="0"/>
-              </a:spcBef>
-              <a:spcAft>
-                <a:spcPts val="0"/>
-              </a:spcAft>
-              <a:buNone/>
-            </a:pPr>
-            <a:r>
-              <a:rPr cap="none" sz="100" i="0" b="0" u="none" strike="noStrike">
-                <a:solidFill>
-                  <a:srgbClr val="1A2840">
-                    <a:alpha val="100000"/>
-                  </a:srgbClr>
-                </a:solidFill>
-                <a:latin typeface="Calibri"/>
-                <a:cs typeface="Calibri"/>
-                <a:ea typeface="Calibri"/>
-                <a:sym typeface="Calibri"/>
-              </a:rPr>
-              <a:t/>
-            </a:r>
+          <a:solidFill>
+            <a:srgbClr val="1A2840">
+              <a:alpha val="100000"/>
+            </a:srgbClr>
+          </a:solidFill>
+        </p:spPr>
+        <p:txBody>
+          <a:bodyPr/>
+          <a:lstStyle/>
+          <a:p>
+            <a:pPr algn="l" marL="0" marR="0">
+              <a:lnSpc>
+                <a:spcPct val="100000"/>
+              </a:lnSpc>
+              <a:spcBef>
+                <a:spcPts val="0"/>
+              </a:spcBef>
+              <a:spcAft>
+                <a:spcPts val="0"/>
+              </a:spcAft>
+              <a:buNone/>
+            </a:pPr>
           </a:p>
         </p:txBody>
       </p:sp>
@@ -2931,7 +2886,7 @@
                 <a:ea typeface="Calibri"/>
                 <a:sym typeface="Calibri"/>
               </a:rPr>
-              <a:t>Pesos de FBCF por setor são premissas manuais. Precisam ser derivados do detalhamento por tema/tecnologia do Plano MMA (eólica, solar, VEs, biocombustíveis…) mapeado para códigos IO.</a:t>
+              <a:t>Pesos de FBCF são premissas manuais. Precisam ser derivados do detalhamento por tema/tecnologia do Plano MMA (eólica, solar, VEs, biocombustíveis) e mapeados para códigos IO.</a:t>
             </a:r>
           </a:p>
         </p:txBody>
@@ -3029,7 +2984,7 @@
                 <a:ea typeface="Calibri"/>
                 <a:sym typeface="Calibri"/>
               </a:rPr>
-              <a:t>O aumento de insumos de biomassa na produção de biometano (S43) não está implementado por falta de coef. técnico (ktep biomassa / PJ biometano). Fonte sugerida: EPE BEN ou ANP.</a:t>
+              <a:t>Aumento de insumos de biomassa na produção de biometano não implementado. Requer coef. técnico (ktep biomassa / PJ biometano). Fonte: EPE BEN ou ANP.</a:t>
             </a:r>
           </a:p>
         </p:txBody>
@@ -3176,7 +3131,7 @@
                 <a:ea typeface="Calibri"/>
                 <a:sym typeface="Calibri"/>
               </a:rPr>
-              <a:t>Componente residencial de Cidades</a:t>
+              <a:t>Componente residencial (Cidades)</a:t>
             </a:r>
           </a:p>
         </p:txBody>
@@ -3225,7 +3180,7 @@
                 <a:ea typeface="Calibri"/>
                 <a:sym typeface="Calibri"/>
               </a:rPr>
-              <a:t>Uso energético domiciliar é demanda final (famílias), não insumo intermediário. Modelagem correta requer choque direto no vetor f (coluna Famílias) da MIP.</a:t>
+              <a:t>Uso energético domiciliar é demanda final (famílias), não insumo intermediário. Modelagem correta requer choque no vetor f (coluna Famílias).</a:t>
             </a:r>
           </a:p>
         </p:txBody>
@@ -3323,7 +3278,7 @@
                 <a:ea typeface="Calibri"/>
                 <a:sym typeface="Calibri"/>
               </a:rPr>
-              <a:t>Coeficientes ALPHA foram construídos com dados EPE 2018. Recomenda-se confronto com série histórica do BEN e BEU setorial para confirmar consistência e atualizar base.</a:t>
+              <a:t>Coef. ALPHA construídos com dados EPE 2018. Recomenda-se confronto com série histórica BEN/BEU setorial para confirmar consistência.</a:t>
             </a:r>
           </a:p>
         </p:txBody>
@@ -3343,37 +3298,28 @@
             <a:off x="4663440" y="914400"/>
             <a:ext cx="4297680" cy="5715000"/>
           </a:xfrm>
-        </p:spPr>
-        <p:txBody>
-          <a:bodyPr/>
-          <a:lstStyle/>
-          <a:p>
-            <a:pPr algn="l" marL="0" marR="0">
-              <a:lnSpc>
-                <a:spcPct val="100000"/>
-              </a:lnSpc>
-              <a:spcBef>
-                <a:spcPts val="0"/>
-              </a:spcBef>
-              <a:spcAft>
-                <a:spcPts val="0"/>
-              </a:spcAft>
-              <a:buNone/>
-            </a:pPr>
-            <a:r>
-              <a:rPr cap="none" sz="100" i="0" b="0" u="none" strike="noStrike">
-                <a:solidFill>
-                  <a:srgbClr val="1A2840">
-                    <a:alpha val="100000"/>
-                  </a:srgbClr>
-                </a:solidFill>
-                <a:latin typeface="Calibri"/>
-                <a:cs typeface="Calibri"/>
-                <a:ea typeface="Calibri"/>
-                <a:sym typeface="Calibri"/>
-              </a:rPr>
-              <a:t/>
-            </a:r>
+          <a:solidFill>
+            <a:srgbClr val="1A2840">
+              <a:alpha val="100000"/>
+            </a:srgbClr>
+          </a:solidFill>
+        </p:spPr>
+        <p:txBody>
+          <a:bodyPr/>
+          <a:lstStyle/>
+          <a:p>
+            <a:pPr algn="l" marL="0" marR="0">
+              <a:lnSpc>
+                <a:spcPct val="100000"/>
+              </a:lnSpc>
+              <a:spcBef>
+                <a:spcPts val="0"/>
+              </a:spcBef>
+              <a:spcAft>
+                <a:spcPts val="0"/>
+              </a:spcAft>
+              <a:buNone/>
+            </a:pPr>
           </a:p>
         </p:txBody>
       </p:sp>
@@ -3519,7 +3465,7 @@
                 <a:ea typeface="Calibri"/>
                 <a:sym typeface="Calibri"/>
               </a:rPr>
-              <a:t>Série histórica de consumo energético por setor e por fonte (BEN/BEU), para calibrar e validar a matriz ALPHA de intensidade energética.</a:t>
+              <a:t>Série histórica de consumo energético por setor e por fonte, para calibrar e validar a matriz ALPHA de intensidade energética.</a:t>
             </a:r>
           </a:p>
         </p:txBody>
@@ -3617,7 +3563,7 @@
                 <a:ea typeface="Calibri"/>
                 <a:sym typeface="Calibri"/>
               </a:rPr>
-              <a:t>Coef. técnicos de entrada de biomassa/H₂ para siderurgia e cimento (EPE, IPT, IABR, SNIC) — necessários para Engine 2 desagregado por produto.</a:t>
+              <a:t>Coef. técnicos de entrada de biomassa/H₂ para siderurgia e cimento (EPE, IPT, IABR, SNIC) para Engine 2 desagregado.</a:t>
             </a:r>
           </a:p>
         </p:txBody>
@@ -3666,7 +3612,7 @@
                 <a:ea typeface="Calibri"/>
                 <a:sym typeface="Calibri"/>
               </a:rPr>
-              <a:t>Confronto com modelos BLUES / MAED-BR</a:t>
+              <a:t>Confronto com BLUES / MAED-BR</a:t>
             </a:r>
           </a:p>
         </p:txBody>
@@ -3813,7 +3759,7 @@
                 <a:ea typeface="Calibri"/>
                 <a:sym typeface="Calibri"/>
               </a:rPr>
-              <a:t>Modelos biofísicos de uso da terra → choques IO nos setores S01-S09 (agricultura, pecuária, silvicultura) com dados de área e produtividade MMA.</a:t>
+              <a:t>Modelos biofísicos de uso da terra → choques IO em S01-S09 com dados de área e produtividade do Plano MMA.</a:t>
             </a:r>
           </a:p>
         </p:txBody>
@@ -3862,7 +3808,7 @@
                 <a:ea typeface="Calibri"/>
                 <a:sym typeface="Calibri"/>
               </a:rPr>
-              <a:t>Análise de incerteza / sensibilidade</a:t>
+              <a:t>Análise de sensibilidade</a:t>
             </a:r>
           </a:p>
         </p:txBody>
@@ -3911,7 +3857,7 @@
                 <a:ea typeface="Calibri"/>
                 <a:sym typeface="Calibri"/>
               </a:rPr>
-              <a:t>Sensibilidade dos prêmios de PIB e emprego às premissas de ALOC_INV, taxas de crescimento e trajetórias de mix energético (análise paramétrica ou Monte Carlo).</a:t>
+              <a:t>Sensibilidade dos prêmios de PIB e emprego às premissas de ALOC_INV, taxas de crescimento e trajetórias de mix (análise paramétrica).</a:t>
             </a:r>
           </a:p>
         </p:txBody>
@@ -3956,37 +3902,28 @@
             <a:off x="0" y="0"/>
             <a:ext cx="9144000" cy="6858000"/>
           </a:xfrm>
-        </p:spPr>
-        <p:txBody>
-          <a:bodyPr/>
-          <a:lstStyle/>
-          <a:p>
-            <a:pPr algn="l" marL="0" marR="0">
-              <a:lnSpc>
-                <a:spcPct val="100000"/>
-              </a:lnSpc>
-              <a:spcBef>
-                <a:spcPts val="0"/>
-              </a:spcBef>
-              <a:spcAft>
-                <a:spcPts val="0"/>
-              </a:spcAft>
-              <a:buNone/>
-            </a:pPr>
-            <a:r>
-              <a:rPr cap="none" sz="100" i="0" b="0" u="none" strike="noStrike">
-                <a:solidFill>
-                  <a:srgbClr val="1C2B4A">
-                    <a:alpha val="100000"/>
-                  </a:srgbClr>
-                </a:solidFill>
-                <a:latin typeface="Calibri"/>
-                <a:cs typeface="Calibri"/>
-                <a:ea typeface="Calibri"/>
-                <a:sym typeface="Calibri"/>
-              </a:rPr>
-              <a:t/>
-            </a:r>
+          <a:solidFill>
+            <a:srgbClr val="1C2B4A">
+              <a:alpha val="100000"/>
+            </a:srgbClr>
+          </a:solidFill>
+        </p:spPr>
+        <p:txBody>
+          <a:bodyPr/>
+          <a:lstStyle/>
+          <a:p>
+            <a:pPr algn="l" marL="0" marR="0">
+              <a:lnSpc>
+                <a:spcPct val="100000"/>
+              </a:lnSpc>
+              <a:spcBef>
+                <a:spcPts val="0"/>
+              </a:spcBef>
+              <a:spcAft>
+                <a:spcPts val="0"/>
+              </a:spcAft>
+              <a:buNone/>
+            </a:pPr>
           </a:p>
         </p:txBody>
       </p:sp>
@@ -4003,27 +3940,67 @@
         <p:spPr>
           <a:xfrm>
             <a:off x="320040" y="1828800"/>
-            <a:ext cx="73152" cy="3200400"/>
-          </a:xfrm>
-        </p:spPr>
-        <p:txBody>
-          <a:bodyPr/>
-          <a:lstStyle/>
-          <a:p>
-            <a:pPr algn="l" marL="0" marR="0">
-              <a:lnSpc>
-                <a:spcPct val="100000"/>
-              </a:lnSpc>
-              <a:spcBef>
-                <a:spcPts val="0"/>
-              </a:spcBef>
-              <a:spcAft>
-                <a:spcPts val="0"/>
-              </a:spcAft>
-              <a:buNone/>
-            </a:pPr>
-            <a:r>
-              <a:rPr cap="none" sz="100" i="0" b="0" u="none" strike="noStrike">
+            <a:ext cx="64008" cy="3200400"/>
+          </a:xfrm>
+          <a:solidFill>
+            <a:srgbClr val="1D9E75">
+              <a:alpha val="100000"/>
+            </a:srgbClr>
+          </a:solidFill>
+        </p:spPr>
+        <p:txBody>
+          <a:bodyPr/>
+          <a:lstStyle/>
+          <a:p>
+            <a:pPr algn="l" marL="0" marR="0">
+              <a:lnSpc>
+                <a:spcPct val="100000"/>
+              </a:lnSpc>
+              <a:spcBef>
+                <a:spcPts val="0"/>
+              </a:spcBef>
+              <a:spcAft>
+                <a:spcPts val="0"/>
+              </a:spcAft>
+              <a:buNone/>
+            </a:pPr>
+          </a:p>
+        </p:txBody>
+      </p:sp>
+      <p:sp>
+        <p:nvSpPr>
+          <p:cNvPr id="4" name=""/>
+          <p:cNvSpPr>
+            <a:spLocks noGrp="1"/>
+          </p:cNvSpPr>
+          <p:nvPr>
+            <p:ph/>
+          </p:nvPr>
+        </p:nvSpPr>
+        <p:spPr>
+          <a:xfrm>
+            <a:off x="640080" y="1920240"/>
+            <a:ext cx="8229600" cy="914400"/>
+          </a:xfrm>
+        </p:spPr>
+        <p:txBody>
+          <a:bodyPr/>
+          <a:lstStyle/>
+          <a:p>
+            <a:pPr algn="l" marL="0" marR="0">
+              <a:lnSpc>
+                <a:spcPct val="100000"/>
+              </a:lnSpc>
+              <a:spcBef>
+                <a:spcPts val="0"/>
+              </a:spcBef>
+              <a:spcAft>
+                <a:spcPts val="0"/>
+              </a:spcAft>
+              <a:buNone/>
+            </a:pPr>
+            <a:r>
+              <a:rPr cap="none" sz="4000" i="0" b="1" u="none" strike="noStrike">
                 <a:solidFill>
                   <a:srgbClr val="1D9E75">
                     <a:alpha val="100000"/>
@@ -4034,55 +4011,6 @@
                 <a:ea typeface="Calibri"/>
                 <a:sym typeface="Calibri"/>
               </a:rPr>
-              <a:t/>
-            </a:r>
-          </a:p>
-        </p:txBody>
-      </p:sp>
-      <p:sp>
-        <p:nvSpPr>
-          <p:cNvPr id="4" name=""/>
-          <p:cNvSpPr>
-            <a:spLocks noGrp="1"/>
-          </p:cNvSpPr>
-          <p:nvPr>
-            <p:ph/>
-          </p:nvPr>
-        </p:nvSpPr>
-        <p:spPr>
-          <a:xfrm>
-            <a:off x="914400" y="1920240"/>
-            <a:ext cx="8229600" cy="914400"/>
-          </a:xfrm>
-        </p:spPr>
-        <p:txBody>
-          <a:bodyPr/>
-          <a:lstStyle/>
-          <a:p>
-            <a:pPr algn="l" marL="0" marR="0">
-              <a:lnSpc>
-                <a:spcPct val="100000"/>
-              </a:lnSpc>
-              <a:spcBef>
-                <a:spcPts val="0"/>
-              </a:spcBef>
-              <a:spcAft>
-                <a:spcPts val="0"/>
-              </a:spcAft>
-              <a:buNone/>
-            </a:pPr>
-            <a:r>
-              <a:rPr cap="none" sz="4000" i="0" b="1" u="none" strike="noStrike">
-                <a:solidFill>
-                  <a:srgbClr val="1D9E75">
-                    <a:alpha val="100000"/>
-                  </a:srgbClr>
-                </a:solidFill>
-                <a:latin typeface="Calibri"/>
-                <a:cs typeface="Calibri"/>
-                <a:ea typeface="Calibri"/>
-                <a:sym typeface="Calibri"/>
-              </a:rPr>
               <a:t>Obrigada!</a:t>
             </a:r>
           </a:p>
@@ -4100,7 +4028,7 @@
         </p:nvSpPr>
         <p:spPr>
           <a:xfrm>
-            <a:off x="914400" y="2926080"/>
+            <a:off x="640080" y="2926080"/>
             <a:ext cx="7772400" cy="548640"/>
           </a:xfrm>
         </p:spPr>
@@ -4149,7 +4077,7 @@
         </p:nvSpPr>
         <p:spPr>
           <a:xfrm>
-            <a:off x="914400" y="3611880"/>
+            <a:off x="640080" y="3611880"/>
             <a:ext cx="2651760" cy="411480"/>
           </a:xfrm>
         </p:spPr>
@@ -4198,8 +4126,8 @@
         </p:nvSpPr>
         <p:spPr>
           <a:xfrm>
-            <a:off x="3566160" y="3611880"/>
-            <a:ext cx="5303520" cy="411480"/>
+            <a:off x="3383280" y="3611880"/>
+            <a:ext cx="5394960" cy="411480"/>
           </a:xfrm>
         </p:spPr>
         <p:txBody>
@@ -4247,7 +4175,7 @@
         </p:nvSpPr>
         <p:spPr>
           <a:xfrm>
-            <a:off x="914400" y="4251960"/>
+            <a:off x="640080" y="4251960"/>
             <a:ext cx="2651760" cy="411480"/>
           </a:xfrm>
         </p:spPr>
@@ -4296,8 +4224,8 @@
         </p:nvSpPr>
         <p:spPr>
           <a:xfrm>
-            <a:off x="3566160" y="4251960"/>
-            <a:ext cx="5303520" cy="411480"/>
+            <a:off x="3383280" y="4251960"/>
+            <a:ext cx="5394960" cy="411480"/>
           </a:xfrm>
         </p:spPr>
         <p:txBody>
@@ -4345,7 +4273,7 @@
         </p:nvSpPr>
         <p:spPr>
           <a:xfrm>
-            <a:off x="914400" y="4892040"/>
+            <a:off x="640080" y="4892040"/>
             <a:ext cx="2651760" cy="411480"/>
           </a:xfrm>
         </p:spPr>
@@ -4394,8 +4322,8 @@
         </p:nvSpPr>
         <p:spPr>
           <a:xfrm>
-            <a:off x="3566160" y="4892040"/>
-            <a:ext cx="5303520" cy="411480"/>
+            <a:off x="3383280" y="4892040"/>
+            <a:ext cx="5394960" cy="411480"/>
           </a:xfrm>
         </p:spPr>
         <p:txBody>
@@ -4471,37 +4399,28 @@
             <a:off x="0" y="0"/>
             <a:ext cx="9144000" cy="6858000"/>
           </a:xfrm>
-        </p:spPr>
-        <p:txBody>
-          <a:bodyPr/>
-          <a:lstStyle/>
-          <a:p>
-            <a:pPr algn="l" marL="0" marR="0">
-              <a:lnSpc>
-                <a:spcPct val="100000"/>
-              </a:lnSpc>
-              <a:spcBef>
-                <a:spcPts val="0"/>
-              </a:spcBef>
-              <a:spcAft>
-                <a:spcPts val="0"/>
-              </a:spcAft>
-              <a:buNone/>
-            </a:pPr>
-            <a:r>
-              <a:rPr cap="none" sz="100" i="0" b="0" u="none" strike="noStrike">
-                <a:solidFill>
-                  <a:srgbClr val="1C2B4A">
-                    <a:alpha val="100000"/>
-                  </a:srgbClr>
-                </a:solidFill>
-                <a:latin typeface="Calibri"/>
-                <a:cs typeface="Calibri"/>
-                <a:ea typeface="Calibri"/>
-                <a:sym typeface="Calibri"/>
-              </a:rPr>
-              <a:t/>
-            </a:r>
+          <a:solidFill>
+            <a:srgbClr val="1C2B4A">
+              <a:alpha val="100000"/>
+            </a:srgbClr>
+          </a:solidFill>
+        </p:spPr>
+        <p:txBody>
+          <a:bodyPr/>
+          <a:lstStyle/>
+          <a:p>
+            <a:pPr algn="l" marL="0" marR="0">
+              <a:lnSpc>
+                <a:spcPct val="100000"/>
+              </a:lnSpc>
+              <a:spcBef>
+                <a:spcPts val="0"/>
+              </a:spcBef>
+              <a:spcAft>
+                <a:spcPts val="0"/>
+              </a:spcAft>
+              <a:buNone/>
+            </a:pPr>
           </a:p>
         </p:txBody>
       </p:sp>
@@ -4520,37 +4439,28 @@
             <a:off x="0" y="0"/>
             <a:ext cx="9144000" cy="822960"/>
           </a:xfrm>
-        </p:spPr>
-        <p:txBody>
-          <a:bodyPr/>
-          <a:lstStyle/>
-          <a:p>
-            <a:pPr algn="l" marL="0" marR="0">
-              <a:lnSpc>
-                <a:spcPct val="100000"/>
-              </a:lnSpc>
-              <a:spcBef>
-                <a:spcPts val="0"/>
-              </a:spcBef>
-              <a:spcAft>
-                <a:spcPts val="0"/>
-              </a:spcAft>
-              <a:buNone/>
-            </a:pPr>
-            <a:r>
-              <a:rPr cap="none" sz="100" i="0" b="0" u="none" strike="noStrike">
-                <a:solidFill>
-                  <a:srgbClr val="1D9E75">
-                    <a:alpha val="100000"/>
-                  </a:srgbClr>
-                </a:solidFill>
-                <a:latin typeface="Calibri"/>
-                <a:cs typeface="Calibri"/>
-                <a:ea typeface="Calibri"/>
-                <a:sym typeface="Calibri"/>
-              </a:rPr>
-              <a:t/>
-            </a:r>
+          <a:solidFill>
+            <a:srgbClr val="1D9E75">
+              <a:alpha val="100000"/>
+            </a:srgbClr>
+          </a:solidFill>
+        </p:spPr>
+        <p:txBody>
+          <a:bodyPr/>
+          <a:lstStyle/>
+          <a:p>
+            <a:pPr algn="l" marL="0" marR="0">
+              <a:lnSpc>
+                <a:spcPct val="100000"/>
+              </a:lnSpc>
+              <a:spcBef>
+                <a:spcPts val="0"/>
+              </a:spcBef>
+              <a:spcAft>
+                <a:spcPts val="0"/>
+              </a:spcAft>
+              <a:buNone/>
+            </a:pPr>
           </a:p>
         </p:txBody>
       </p:sp>
@@ -4618,37 +4528,28 @@
             <a:off x="182880" y="960120"/>
             <a:ext cx="2880360" cy="5212080"/>
           </a:xfrm>
-        </p:spPr>
-        <p:txBody>
-          <a:bodyPr/>
-          <a:lstStyle/>
-          <a:p>
-            <a:pPr algn="l" marL="0" marR="0">
-              <a:lnSpc>
-                <a:spcPct val="100000"/>
-              </a:lnSpc>
-              <a:spcBef>
-                <a:spcPts val="0"/>
-              </a:spcBef>
-              <a:spcAft>
-                <a:spcPts val="0"/>
-              </a:spcAft>
-              <a:buNone/>
-            </a:pPr>
-            <a:r>
-              <a:rPr cap="none" sz="100" i="0" b="0" u="none" strike="noStrike">
-                <a:solidFill>
-                  <a:srgbClr val="1A2840">
-                    <a:alpha val="100000"/>
-                  </a:srgbClr>
-                </a:solidFill>
-                <a:latin typeface="Calibri"/>
-                <a:cs typeface="Calibri"/>
-                <a:ea typeface="Calibri"/>
-                <a:sym typeface="Calibri"/>
-              </a:rPr>
-              <a:t/>
-            </a:r>
+          <a:solidFill>
+            <a:srgbClr val="1A2840">
+              <a:alpha val="100000"/>
+            </a:srgbClr>
+          </a:solidFill>
+        </p:spPr>
+        <p:txBody>
+          <a:bodyPr/>
+          <a:lstStyle/>
+          <a:p>
+            <a:pPr algn="l" marL="0" marR="0">
+              <a:lnSpc>
+                <a:spcPct val="100000"/>
+              </a:lnSpc>
+              <a:spcBef>
+                <a:spcPts val="0"/>
+              </a:spcBef>
+              <a:spcAft>
+                <a:spcPts val="0"/>
+              </a:spcAft>
+              <a:buNone/>
+            </a:pPr>
           </a:p>
         </p:txBody>
       </p:sp>
@@ -4667,37 +4568,28 @@
             <a:off x="292608" y="1024128"/>
             <a:ext cx="2651760" cy="54864"/>
           </a:xfrm>
-        </p:spPr>
-        <p:txBody>
-          <a:bodyPr/>
-          <a:lstStyle/>
-          <a:p>
-            <a:pPr algn="l" marL="0" marR="0">
-              <a:lnSpc>
-                <a:spcPct val="100000"/>
-              </a:lnSpc>
-              <a:spcBef>
-                <a:spcPts val="0"/>
-              </a:spcBef>
-              <a:spcAft>
-                <a:spcPts val="0"/>
-              </a:spcAft>
-              <a:buNone/>
-            </a:pPr>
-            <a:r>
-              <a:rPr cap="none" sz="100" i="0" b="0" u="none" strike="noStrike">
-                <a:solidFill>
-                  <a:srgbClr val="F39C12">
-                    <a:alpha val="100000"/>
-                  </a:srgbClr>
-                </a:solidFill>
-                <a:latin typeface="Calibri"/>
-                <a:cs typeface="Calibri"/>
-                <a:ea typeface="Calibri"/>
-                <a:sym typeface="Calibri"/>
-              </a:rPr>
-              <a:t/>
-            </a:r>
+          <a:solidFill>
+            <a:srgbClr val="F39C12">
+              <a:alpha val="100000"/>
+            </a:srgbClr>
+          </a:solidFill>
+        </p:spPr>
+        <p:txBody>
+          <a:bodyPr/>
+          <a:lstStyle/>
+          <a:p>
+            <a:pPr algn="l" marL="0" marR="0">
+              <a:lnSpc>
+                <a:spcPct val="100000"/>
+              </a:lnSpc>
+              <a:spcBef>
+                <a:spcPts val="0"/>
+              </a:spcBef>
+              <a:spcAft>
+                <a:spcPts val="0"/>
+              </a:spcAft>
+              <a:buNone/>
+            </a:pPr>
           </a:p>
         </p:txBody>
       </p:sp>
@@ -4898,37 +4790,28 @@
             <a:off x="3172968" y="960120"/>
             <a:ext cx="2880360" cy="5212080"/>
           </a:xfrm>
-        </p:spPr>
-        <p:txBody>
-          <a:bodyPr/>
-          <a:lstStyle/>
-          <a:p>
-            <a:pPr algn="l" marL="0" marR="0">
-              <a:lnSpc>
-                <a:spcPct val="100000"/>
-              </a:lnSpc>
-              <a:spcBef>
-                <a:spcPts val="0"/>
-              </a:spcBef>
-              <a:spcAft>
-                <a:spcPts val="0"/>
-              </a:spcAft>
-              <a:buNone/>
-            </a:pPr>
-            <a:r>
-              <a:rPr cap="none" sz="100" i="0" b="0" u="none" strike="noStrike">
-                <a:solidFill>
-                  <a:srgbClr val="1A2840">
-                    <a:alpha val="100000"/>
-                  </a:srgbClr>
-                </a:solidFill>
-                <a:latin typeface="Calibri"/>
-                <a:cs typeface="Calibri"/>
-                <a:ea typeface="Calibri"/>
-                <a:sym typeface="Calibri"/>
-              </a:rPr>
-              <a:t/>
-            </a:r>
+          <a:solidFill>
+            <a:srgbClr val="1A2840">
+              <a:alpha val="100000"/>
+            </a:srgbClr>
+          </a:solidFill>
+        </p:spPr>
+        <p:txBody>
+          <a:bodyPr/>
+          <a:lstStyle/>
+          <a:p>
+            <a:pPr algn="l" marL="0" marR="0">
+              <a:lnSpc>
+                <a:spcPct val="100000"/>
+              </a:lnSpc>
+              <a:spcBef>
+                <a:spcPts val="0"/>
+              </a:spcBef>
+              <a:spcAft>
+                <a:spcPts val="0"/>
+              </a:spcAft>
+              <a:buNone/>
+            </a:pPr>
           </a:p>
         </p:txBody>
       </p:sp>
@@ -4947,37 +4830,28 @@
             <a:off x="3282696" y="1024128"/>
             <a:ext cx="2651760" cy="54864"/>
           </a:xfrm>
-        </p:spPr>
-        <p:txBody>
-          <a:bodyPr/>
-          <a:lstStyle/>
-          <a:p>
-            <a:pPr algn="l" marL="0" marR="0">
-              <a:lnSpc>
-                <a:spcPct val="100000"/>
-              </a:lnSpc>
-              <a:spcBef>
-                <a:spcPts val="0"/>
-              </a:spcBef>
-              <a:spcAft>
-                <a:spcPts val="0"/>
-              </a:spcAft>
-              <a:buNone/>
-            </a:pPr>
-            <a:r>
-              <a:rPr cap="none" sz="100" i="0" b="0" u="none" strike="noStrike">
-                <a:solidFill>
-                  <a:srgbClr val="378ADD">
-                    <a:alpha val="100000"/>
-                  </a:srgbClr>
-                </a:solidFill>
-                <a:latin typeface="Calibri"/>
-                <a:cs typeface="Calibri"/>
-                <a:ea typeface="Calibri"/>
-                <a:sym typeface="Calibri"/>
-              </a:rPr>
-              <a:t/>
-            </a:r>
+          <a:solidFill>
+            <a:srgbClr val="378ADD">
+              <a:alpha val="100000"/>
+            </a:srgbClr>
+          </a:solidFill>
+        </p:spPr>
+        <p:txBody>
+          <a:bodyPr/>
+          <a:lstStyle/>
+          <a:p>
+            <a:pPr algn="l" marL="0" marR="0">
+              <a:lnSpc>
+                <a:spcPct val="100000"/>
+              </a:lnSpc>
+              <a:spcBef>
+                <a:spcPts val="0"/>
+              </a:spcBef>
+              <a:spcAft>
+                <a:spcPts val="0"/>
+              </a:spcAft>
+              <a:buNone/>
+            </a:pPr>
           </a:p>
         </p:txBody>
       </p:sp>
@@ -5102,7 +4976,7 @@
                 <a:ea typeface="Calibri"/>
                 <a:sym typeface="Calibri"/>
               </a:rPr>
-              <a:t>▸  Não há tradução automática para R$, empregos, PIB</a:t>
+              <a:t>▸  Não há tradução automática para R$, empregos e PIB</a:t>
             </a:r>
           </a:p>
           <a:p>
@@ -5178,37 +5052,28 @@
             <a:off x="6163056" y="960120"/>
             <a:ext cx="2880360" cy="5212080"/>
           </a:xfrm>
-        </p:spPr>
-        <p:txBody>
-          <a:bodyPr/>
-          <a:lstStyle/>
-          <a:p>
-            <a:pPr algn="l" marL="0" marR="0">
-              <a:lnSpc>
-                <a:spcPct val="100000"/>
-              </a:lnSpc>
-              <a:spcBef>
-                <a:spcPts val="0"/>
-              </a:spcBef>
-              <a:spcAft>
-                <a:spcPts val="0"/>
-              </a:spcAft>
-              <a:buNone/>
-            </a:pPr>
-            <a:r>
-              <a:rPr cap="none" sz="100" i="0" b="0" u="none" strike="noStrike">
-                <a:solidFill>
-                  <a:srgbClr val="1A2840">
-                    <a:alpha val="100000"/>
-                  </a:srgbClr>
-                </a:solidFill>
-                <a:latin typeface="Calibri"/>
-                <a:cs typeface="Calibri"/>
-                <a:ea typeface="Calibri"/>
-                <a:sym typeface="Calibri"/>
-              </a:rPr>
-              <a:t/>
-            </a:r>
+          <a:solidFill>
+            <a:srgbClr val="1A2840">
+              <a:alpha val="100000"/>
+            </a:srgbClr>
+          </a:solidFill>
+        </p:spPr>
+        <p:txBody>
+          <a:bodyPr/>
+          <a:lstStyle/>
+          <a:p>
+            <a:pPr algn="l" marL="0" marR="0">
+              <a:lnSpc>
+                <a:spcPct val="100000"/>
+              </a:lnSpc>
+              <a:spcBef>
+                <a:spcPts val="0"/>
+              </a:spcBef>
+              <a:spcAft>
+                <a:spcPts val="0"/>
+              </a:spcAft>
+              <a:buNone/>
+            </a:pPr>
           </a:p>
         </p:txBody>
       </p:sp>
@@ -5227,37 +5092,28 @@
             <a:off x="6272784" y="1024128"/>
             <a:ext cx="2651760" cy="54864"/>
           </a:xfrm>
-        </p:spPr>
-        <p:txBody>
-          <a:bodyPr/>
-          <a:lstStyle/>
-          <a:p>
-            <a:pPr algn="l" marL="0" marR="0">
-              <a:lnSpc>
-                <a:spcPct val="100000"/>
-              </a:lnSpc>
-              <a:spcBef>
-                <a:spcPts val="0"/>
-              </a:spcBef>
-              <a:spcAft>
-                <a:spcPts val="0"/>
-              </a:spcAft>
-              <a:buNone/>
-            </a:pPr>
-            <a:r>
-              <a:rPr cap="none" sz="100" i="0" b="0" u="none" strike="noStrike">
-                <a:solidFill>
-                  <a:srgbClr val="1D9E75">
-                    <a:alpha val="100000"/>
-                  </a:srgbClr>
-                </a:solidFill>
-                <a:latin typeface="Calibri"/>
-                <a:cs typeface="Calibri"/>
-                <a:ea typeface="Calibri"/>
-                <a:sym typeface="Calibri"/>
-              </a:rPr>
-              <a:t/>
-            </a:r>
+          <a:solidFill>
+            <a:srgbClr val="1D9E75">
+              <a:alpha val="100000"/>
+            </a:srgbClr>
+          </a:solidFill>
+        </p:spPr>
+        <p:txBody>
+          <a:bodyPr/>
+          <a:lstStyle/>
+          <a:p>
+            <a:pPr algn="l" marL="0" marR="0">
+              <a:lnSpc>
+                <a:spcPct val="100000"/>
+              </a:lnSpc>
+              <a:spcBef>
+                <a:spcPts val="0"/>
+              </a:spcBef>
+              <a:spcAft>
+                <a:spcPts val="0"/>
+              </a:spcAft>
+              <a:buNone/>
+            </a:pPr>
           </a:p>
         </p:txBody>
       </p:sp>
@@ -5532,37 +5388,28 @@
             <a:off x="0" y="0"/>
             <a:ext cx="9144000" cy="6858000"/>
           </a:xfrm>
-        </p:spPr>
-        <p:txBody>
-          <a:bodyPr/>
-          <a:lstStyle/>
-          <a:p>
-            <a:pPr algn="l" marL="0" marR="0">
-              <a:lnSpc>
-                <a:spcPct val="100000"/>
-              </a:lnSpc>
-              <a:spcBef>
-                <a:spcPts val="0"/>
-              </a:spcBef>
-              <a:spcAft>
-                <a:spcPts val="0"/>
-              </a:spcAft>
-              <a:buNone/>
-            </a:pPr>
-            <a:r>
-              <a:rPr cap="none" sz="100" i="0" b="0" u="none" strike="noStrike">
-                <a:solidFill>
-                  <a:srgbClr val="1C2B4A">
-                    <a:alpha val="100000"/>
-                  </a:srgbClr>
-                </a:solidFill>
-                <a:latin typeface="Calibri"/>
-                <a:cs typeface="Calibri"/>
-                <a:ea typeface="Calibri"/>
-                <a:sym typeface="Calibri"/>
-              </a:rPr>
-              <a:t/>
-            </a:r>
+          <a:solidFill>
+            <a:srgbClr val="1C2B4A">
+              <a:alpha val="100000"/>
+            </a:srgbClr>
+          </a:solidFill>
+        </p:spPr>
+        <p:txBody>
+          <a:bodyPr/>
+          <a:lstStyle/>
+          <a:p>
+            <a:pPr algn="l" marL="0" marR="0">
+              <a:lnSpc>
+                <a:spcPct val="100000"/>
+              </a:lnSpc>
+              <a:spcBef>
+                <a:spcPts val="0"/>
+              </a:spcBef>
+              <a:spcAft>
+                <a:spcPts val="0"/>
+              </a:spcAft>
+              <a:buNone/>
+            </a:pPr>
           </a:p>
         </p:txBody>
       </p:sp>
@@ -5581,37 +5428,28 @@
             <a:off x="0" y="0"/>
             <a:ext cx="9144000" cy="822960"/>
           </a:xfrm>
-        </p:spPr>
-        <p:txBody>
-          <a:bodyPr/>
-          <a:lstStyle/>
-          <a:p>
-            <a:pPr algn="l" marL="0" marR="0">
-              <a:lnSpc>
-                <a:spcPct val="100000"/>
-              </a:lnSpc>
-              <a:spcBef>
-                <a:spcPts val="0"/>
-              </a:spcBef>
-              <a:spcAft>
-                <a:spcPts val="0"/>
-              </a:spcAft>
-              <a:buNone/>
-            </a:pPr>
-            <a:r>
-              <a:rPr cap="none" sz="100" i="0" b="0" u="none" strike="noStrike">
-                <a:solidFill>
-                  <a:srgbClr val="1D9E75">
-                    <a:alpha val="100000"/>
-                  </a:srgbClr>
-                </a:solidFill>
-                <a:latin typeface="Calibri"/>
-                <a:cs typeface="Calibri"/>
-                <a:ea typeface="Calibri"/>
-                <a:sym typeface="Calibri"/>
-              </a:rPr>
-              <a:t/>
-            </a:r>
+          <a:solidFill>
+            <a:srgbClr val="1D9E75">
+              <a:alpha val="100000"/>
+            </a:srgbClr>
+          </a:solidFill>
+        </p:spPr>
+        <p:txBody>
+          <a:bodyPr/>
+          <a:lstStyle/>
+          <a:p>
+            <a:pPr algn="l" marL="0" marR="0">
+              <a:lnSpc>
+                <a:spcPct val="100000"/>
+              </a:lnSpc>
+              <a:spcBef>
+                <a:spcPts val="0"/>
+              </a:spcBef>
+              <a:spcAft>
+                <a:spcPts val="0"/>
+              </a:spcAft>
+              <a:buNone/>
+            </a:pPr>
           </a:p>
         </p:txBody>
       </p:sp>
@@ -5774,8 +5612,8 @@
         </p:nvSpPr>
         <p:spPr>
           <a:xfrm>
-            <a:off x="6858000" y="987552"/>
-            <a:ext cx="2011680" cy="320040"/>
+            <a:off x="6949440" y="987552"/>
+            <a:ext cx="1920240" cy="320040"/>
           </a:xfrm>
         </p:spPr>
         <p:txBody>
@@ -5806,7 +5644,7 @@
                 <a:ea typeface="Calibri"/>
                 <a:sym typeface="Calibri"/>
               </a:rPr>
-              <a:t>MODELO IO</a:t>
+              <a:t>RESULTADOS</a:t>
             </a:r>
           </a:p>
         </p:txBody>
@@ -5814,55 +5652,6 @@
       <p:sp>
         <p:nvSpPr>
           <p:cNvPr id="8" name=""/>
-          <p:cNvSpPr>
-            <a:spLocks noGrp="1"/>
-          </p:cNvSpPr>
-          <p:nvPr>
-            <p:ph/>
-          </p:nvPr>
-        </p:nvSpPr>
-        <p:spPr>
-          <a:xfrm>
-            <a:off x="6949440" y="987552"/>
-            <a:ext cx="2011680" cy="320040"/>
-          </a:xfrm>
-        </p:spPr>
-        <p:txBody>
-          <a:bodyPr/>
-          <a:lstStyle/>
-          <a:p>
-            <a:pPr algn="ctr" marL="0" marR="0">
-              <a:lnSpc>
-                <a:spcPct val="100000"/>
-              </a:lnSpc>
-              <a:spcBef>
-                <a:spcPts val="0"/>
-              </a:spcBef>
-              <a:spcAft>
-                <a:spcPts val="0"/>
-              </a:spcAft>
-              <a:buNone/>
-            </a:pPr>
-            <a:r>
-              <a:rPr cap="none" sz="1000" i="0" b="1" u="none" strike="noStrike">
-                <a:solidFill>
-                  <a:srgbClr val="8A9BB0">
-                    <a:alpha val="100000"/>
-                  </a:srgbClr>
-                </a:solidFill>
-                <a:latin typeface="Calibri"/>
-                <a:cs typeface="Calibri"/>
-                <a:ea typeface="Calibri"/>
-                <a:sym typeface="Calibri"/>
-              </a:rPr>
-              <a:t>RESULTADOS</a:t>
-            </a:r>
-          </a:p>
-        </p:txBody>
-      </p:sp>
-      <p:sp>
-        <p:nvSpPr>
-          <p:cNvPr id="9" name=""/>
           <p:cNvSpPr>
             <a:spLocks noGrp="1"/>
           </p:cNvSpPr>
@@ -5875,43 +5664,34 @@
             <a:off x="137160" y="1371600"/>
             <a:ext cx="2377440" cy="2011680"/>
           </a:xfrm>
-        </p:spPr>
-        <p:txBody>
-          <a:bodyPr/>
-          <a:lstStyle/>
-          <a:p>
-            <a:pPr algn="l" marL="0" marR="0">
-              <a:lnSpc>
-                <a:spcPct val="100000"/>
-              </a:lnSpc>
-              <a:spcBef>
-                <a:spcPts val="0"/>
-              </a:spcBef>
-              <a:spcAft>
-                <a:spcPts val="0"/>
-              </a:spcAft>
-              <a:buNone/>
-            </a:pPr>
-            <a:r>
-              <a:rPr cap="none" sz="100" i="0" b="0" u="none" strike="noStrike">
-                <a:solidFill>
-                  <a:srgbClr val="2A3F6A">
-                    <a:alpha val="100000"/>
-                  </a:srgbClr>
-                </a:solidFill>
-                <a:latin typeface="Calibri"/>
-                <a:cs typeface="Calibri"/>
-                <a:ea typeface="Calibri"/>
-                <a:sym typeface="Calibri"/>
-              </a:rPr>
-              <a:t/>
-            </a:r>
-          </a:p>
-        </p:txBody>
-      </p:sp>
-      <p:sp>
-        <p:nvSpPr>
-          <p:cNvPr id="10" name=""/>
+          <a:solidFill>
+            <a:srgbClr val="2A3F6A">
+              <a:alpha val="100000"/>
+            </a:srgbClr>
+          </a:solidFill>
+        </p:spPr>
+        <p:txBody>
+          <a:bodyPr/>
+          <a:lstStyle/>
+          <a:p>
+            <a:pPr algn="l" marL="0" marR="0">
+              <a:lnSpc>
+                <a:spcPct val="100000"/>
+              </a:lnSpc>
+              <a:spcBef>
+                <a:spcPts val="0"/>
+              </a:spcBef>
+              <a:spcAft>
+                <a:spcPts val="0"/>
+              </a:spcAft>
+              <a:buNone/>
+            </a:pPr>
+          </a:p>
+        </p:txBody>
+      </p:sp>
+      <p:sp>
+        <p:nvSpPr>
+          <p:cNvPr id="9" name=""/>
           <p:cNvSpPr>
             <a:spLocks noGrp="1"/>
           </p:cNvSpPr>
@@ -5961,7 +5741,7 @@
       </p:sp>
       <p:sp>
         <p:nvSpPr>
-          <p:cNvPr id="11" name=""/>
+          <p:cNvPr id="10" name=""/>
           <p:cNvSpPr>
             <a:spLocks noGrp="1"/>
           </p:cNvSpPr>
@@ -6094,7 +5874,7 @@
       </p:sp>
       <p:sp>
         <p:nvSpPr>
-          <p:cNvPr id="12" name=""/>
+          <p:cNvPr id="11" name=""/>
           <p:cNvSpPr>
             <a:spLocks noGrp="1"/>
           </p:cNvSpPr>
@@ -6107,43 +5887,34 @@
             <a:off x="137160" y="3566160"/>
             <a:ext cx="2377440" cy="2011680"/>
           </a:xfrm>
-        </p:spPr>
-        <p:txBody>
-          <a:bodyPr/>
-          <a:lstStyle/>
-          <a:p>
-            <a:pPr algn="l" marL="0" marR="0">
-              <a:lnSpc>
-                <a:spcPct val="100000"/>
-              </a:lnSpc>
-              <a:spcBef>
-                <a:spcPts val="0"/>
-              </a:spcBef>
-              <a:spcAft>
-                <a:spcPts val="0"/>
-              </a:spcAft>
-              <a:buNone/>
-            </a:pPr>
-            <a:r>
-              <a:rPr cap="none" sz="100" i="0" b="0" u="none" strike="noStrike">
-                <a:solidFill>
-                  <a:srgbClr val="2A3F6A">
-                    <a:alpha val="100000"/>
-                  </a:srgbClr>
-                </a:solidFill>
-                <a:latin typeface="Calibri"/>
-                <a:cs typeface="Calibri"/>
-                <a:ea typeface="Calibri"/>
-                <a:sym typeface="Calibri"/>
-              </a:rPr>
-              <a:t/>
-            </a:r>
-          </a:p>
-        </p:txBody>
-      </p:sp>
-      <p:sp>
-        <p:nvSpPr>
-          <p:cNvPr id="13" name=""/>
+          <a:solidFill>
+            <a:srgbClr val="2A3F6A">
+              <a:alpha val="100000"/>
+            </a:srgbClr>
+          </a:solidFill>
+        </p:spPr>
+        <p:txBody>
+          <a:bodyPr/>
+          <a:lstStyle/>
+          <a:p>
+            <a:pPr algn="l" marL="0" marR="0">
+              <a:lnSpc>
+                <a:spcPct val="100000"/>
+              </a:lnSpc>
+              <a:spcBef>
+                <a:spcPts val="0"/>
+              </a:spcBef>
+              <a:spcAft>
+                <a:spcPts val="0"/>
+              </a:spcAft>
+              <a:buNone/>
+            </a:pPr>
+          </a:p>
+        </p:txBody>
+      </p:sp>
+      <p:sp>
+        <p:nvSpPr>
+          <p:cNvPr id="12" name=""/>
           <p:cNvSpPr>
             <a:spLocks noGrp="1"/>
           </p:cNvSpPr>
@@ -6193,7 +5964,7 @@
       </p:sp>
       <p:sp>
         <p:nvSpPr>
-          <p:cNvPr id="14" name=""/>
+          <p:cNvPr id="13" name=""/>
           <p:cNvSpPr>
             <a:spLocks noGrp="1"/>
           </p:cNvSpPr>
@@ -6319,14 +6090,14 @@
                 <a:ea typeface="Calibri"/>
                 <a:sym typeface="Calibri"/>
               </a:rPr>
-              <a:t>• ALPHA: ktep / R$M (6 fontes)</a:t>
-            </a:r>
-          </a:p>
-        </p:txBody>
-      </p:sp>
-      <p:sp>
-        <p:nvSpPr>
-          <p:cNvPr id="15" name=""/>
+              <a:t>• ALPHA: ktep/R$M (6 fontes)</a:t>
+            </a:r>
+          </a:p>
+        </p:txBody>
+      </p:sp>
+      <p:sp>
+        <p:nvSpPr>
+          <p:cNvPr id="14" name=""/>
           <p:cNvSpPr>
             <a:spLocks noGrp="1"/>
           </p:cNvSpPr>
@@ -6375,7 +6146,7 @@
       </p:sp>
       <p:sp>
         <p:nvSpPr>
-          <p:cNvPr id="16" name=""/>
+          <p:cNvPr id="15" name=""/>
           <p:cNvSpPr>
             <a:spLocks noGrp="1"/>
           </p:cNvSpPr>
@@ -6424,6 +6195,55 @@
       </p:sp>
       <p:sp>
         <p:nvSpPr>
+          <p:cNvPr id="16" name=""/>
+          <p:cNvSpPr>
+            <a:spLocks noGrp="1"/>
+          </p:cNvSpPr>
+          <p:nvPr>
+            <p:ph/>
+          </p:nvPr>
+        </p:nvSpPr>
+        <p:spPr>
+          <a:xfrm>
+            <a:off x="6675120" y="3017520"/>
+            <a:ext cx="274320" cy="457200"/>
+          </a:xfrm>
+        </p:spPr>
+        <p:txBody>
+          <a:bodyPr/>
+          <a:lstStyle/>
+          <a:p>
+            <a:pPr algn="ctr" marL="0" marR="0">
+              <a:lnSpc>
+                <a:spcPct val="100000"/>
+              </a:lnSpc>
+              <a:spcBef>
+                <a:spcPts val="0"/>
+              </a:spcBef>
+              <a:spcAft>
+                <a:spcPts val="0"/>
+              </a:spcAft>
+              <a:buNone/>
+            </a:pPr>
+            <a:r>
+              <a:rPr cap="none" sz="2200" i="0" b="1" u="none" strike="noStrike">
+                <a:solidFill>
+                  <a:srgbClr val="8A9BB0">
+                    <a:alpha val="100000"/>
+                  </a:srgbClr>
+                </a:solidFill>
+                <a:latin typeface="Calibri"/>
+                <a:cs typeface="Calibri"/>
+                <a:ea typeface="Calibri"/>
+                <a:sym typeface="Calibri"/>
+              </a:rPr>
+              <a:t>→</a:t>
+            </a:r>
+          </a:p>
+        </p:txBody>
+      </p:sp>
+      <p:sp>
+        <p:nvSpPr>
           <p:cNvPr id="17" name=""/>
           <p:cNvSpPr>
             <a:spLocks noGrp="1"/>
@@ -6437,37 +6257,28 @@
             <a:off x="2743200" y="1371600"/>
             <a:ext cx="3931920" cy="1234440"/>
           </a:xfrm>
-        </p:spPr>
-        <p:txBody>
-          <a:bodyPr/>
-          <a:lstStyle/>
-          <a:p>
-            <a:pPr algn="l" marL="0" marR="0">
-              <a:lnSpc>
-                <a:spcPct val="100000"/>
-              </a:lnSpc>
-              <a:spcBef>
-                <a:spcPts val="0"/>
-              </a:spcBef>
-              <a:spcAft>
-                <a:spcPts val="0"/>
-              </a:spcAft>
-              <a:buNone/>
-            </a:pPr>
-            <a:r>
-              <a:rPr cap="none" sz="100" i="0" b="0" u="none" strike="noStrike">
-                <a:solidFill>
-                  <a:srgbClr val="1D5C46">
-                    <a:alpha val="100000"/>
-                  </a:srgbClr>
-                </a:solidFill>
-                <a:latin typeface="Calibri"/>
-                <a:cs typeface="Calibri"/>
-                <a:ea typeface="Calibri"/>
-                <a:sym typeface="Calibri"/>
-              </a:rPr>
-              <a:t/>
-            </a:r>
+          <a:solidFill>
+            <a:srgbClr val="1D5C46">
+              <a:alpha val="100000"/>
+            </a:srgbClr>
+          </a:solidFill>
+        </p:spPr>
+        <p:txBody>
+          <a:bodyPr/>
+          <a:lstStyle/>
+          <a:p>
+            <a:pPr algn="l" marL="0" marR="0">
+              <a:lnSpc>
+                <a:spcPct val="100000"/>
+              </a:lnSpc>
+              <a:spcBef>
+                <a:spcPts val="0"/>
+              </a:spcBef>
+              <a:spcAft>
+                <a:spcPts val="0"/>
+              </a:spcAft>
+              <a:buNone/>
+            </a:pPr>
           </a:p>
         </p:txBody>
       </p:sp>
@@ -6612,37 +6423,28 @@
             <a:off x="2743200" y="2788920"/>
             <a:ext cx="3931920" cy="1234440"/>
           </a:xfrm>
-        </p:spPr>
-        <p:txBody>
-          <a:bodyPr/>
-          <a:lstStyle/>
-          <a:p>
-            <a:pPr algn="l" marL="0" marR="0">
-              <a:lnSpc>
-                <a:spcPct val="100000"/>
-              </a:lnSpc>
-              <a:spcBef>
-                <a:spcPts val="0"/>
-              </a:spcBef>
-              <a:spcAft>
-                <a:spcPts val="0"/>
-              </a:spcAft>
-              <a:buNone/>
-            </a:pPr>
-            <a:r>
-              <a:rPr cap="none" sz="100" i="0" b="0" u="none" strike="noStrike">
-                <a:solidFill>
-                  <a:srgbClr val="1A4A7A">
-                    <a:alpha val="100000"/>
-                  </a:srgbClr>
-                </a:solidFill>
-                <a:latin typeface="Calibri"/>
-                <a:cs typeface="Calibri"/>
-                <a:ea typeface="Calibri"/>
-                <a:sym typeface="Calibri"/>
-              </a:rPr>
-              <a:t/>
-            </a:r>
+          <a:solidFill>
+            <a:srgbClr val="1A4A7A">
+              <a:alpha val="100000"/>
+            </a:srgbClr>
+          </a:solidFill>
+        </p:spPr>
+        <p:txBody>
+          <a:bodyPr/>
+          <a:lstStyle/>
+          <a:p>
+            <a:pPr algn="l" marL="0" marR="0">
+              <a:lnSpc>
+                <a:spcPct val="100000"/>
+              </a:lnSpc>
+              <a:spcBef>
+                <a:spcPts val="0"/>
+              </a:spcBef>
+              <a:spcAft>
+                <a:spcPts val="0"/>
+              </a:spcAft>
+              <a:buNone/>
+            </a:pPr>
           </a:p>
         </p:txBody>
       </p:sp>
@@ -6787,37 +6589,28 @@
             <a:off x="2743200" y="4206240"/>
             <a:ext cx="3931920" cy="1234440"/>
           </a:xfrm>
-        </p:spPr>
-        <p:txBody>
-          <a:bodyPr/>
-          <a:lstStyle/>
-          <a:p>
-            <a:pPr algn="l" marL="0" marR="0">
-              <a:lnSpc>
-                <a:spcPct val="100000"/>
-              </a:lnSpc>
-              <a:spcBef>
-                <a:spcPts val="0"/>
-              </a:spcBef>
-              <a:spcAft>
-                <a:spcPts val="0"/>
-              </a:spcAft>
-              <a:buNone/>
-            </a:pPr>
-            <a:r>
-              <a:rPr cap="none" sz="100" i="0" b="0" u="none" strike="noStrike">
-                <a:solidFill>
-                  <a:srgbClr val="6B4C1A">
-                    <a:alpha val="100000"/>
-                  </a:srgbClr>
-                </a:solidFill>
-                <a:latin typeface="Calibri"/>
-                <a:cs typeface="Calibri"/>
-                <a:ea typeface="Calibri"/>
-                <a:sym typeface="Calibri"/>
-              </a:rPr>
-              <a:t/>
-            </a:r>
+          <a:solidFill>
+            <a:srgbClr val="6B4C1A">
+              <a:alpha val="100000"/>
+            </a:srgbClr>
+          </a:solidFill>
+        </p:spPr>
+        <p:txBody>
+          <a:bodyPr/>
+          <a:lstStyle/>
+          <a:p>
+            <a:pPr algn="l" marL="0" marR="0">
+              <a:lnSpc>
+                <a:spcPct val="100000"/>
+              </a:lnSpc>
+              <a:spcBef>
+                <a:spcPts val="0"/>
+              </a:spcBef>
+              <a:spcAft>
+                <a:spcPts val="0"/>
+              </a:spcAft>
+              <a:buNone/>
+            </a:pPr>
           </a:p>
         </p:txBody>
       </p:sp>
@@ -6942,7 +6735,7 @@
                 <a:ea typeface="Calibri"/>
                 <a:sym typeface="Calibri"/>
               </a:rPr>
-              <a:t>▸  Petróleo, Elétrica, Biocomb., Siderurgia…</a:t>
+              <a:t>▸  Petróleo, Eletricidade, Biocomb., Siderurgia</a:t>
             </a:r>
           </a:p>
         </p:txBody>
@@ -6950,55 +6743,6 @@
       <p:sp>
         <p:nvSpPr>
           <p:cNvPr id="26" name=""/>
-          <p:cNvSpPr>
-            <a:spLocks noGrp="1"/>
-          </p:cNvSpPr>
-          <p:nvPr>
-            <p:ph/>
-          </p:nvPr>
-        </p:nvSpPr>
-        <p:spPr>
-          <a:xfrm>
-            <a:off x="6675120" y="3108960"/>
-            <a:ext cx="274320" cy="457200"/>
-          </a:xfrm>
-        </p:spPr>
-        <p:txBody>
-          <a:bodyPr/>
-          <a:lstStyle/>
-          <a:p>
-            <a:pPr algn="ctr" marL="0" marR="0">
-              <a:lnSpc>
-                <a:spcPct val="100000"/>
-              </a:lnSpc>
-              <a:spcBef>
-                <a:spcPts val="0"/>
-              </a:spcBef>
-              <a:spcAft>
-                <a:spcPts val="0"/>
-              </a:spcAft>
-              <a:buNone/>
-            </a:pPr>
-            <a:r>
-              <a:rPr cap="none" sz="2200" i="0" b="1" u="none" strike="noStrike">
-                <a:solidFill>
-                  <a:srgbClr val="8A9BB0">
-                    <a:alpha val="100000"/>
-                  </a:srgbClr>
-                </a:solidFill>
-                <a:latin typeface="Calibri"/>
-                <a:cs typeface="Calibri"/>
-                <a:ea typeface="Calibri"/>
-                <a:sym typeface="Calibri"/>
-              </a:rPr>
-              <a:t>→</a:t>
-            </a:r>
-          </a:p>
-        </p:txBody>
-      </p:sp>
-      <p:sp>
-        <p:nvSpPr>
-          <p:cNvPr id="27" name=""/>
           <p:cNvSpPr>
             <a:spLocks noGrp="1"/>
           </p:cNvSpPr>
@@ -7011,43 +6755,34 @@
             <a:off x="6949440" y="1371600"/>
             <a:ext cx="2011680" cy="4663440"/>
           </a:xfrm>
-        </p:spPr>
-        <p:txBody>
-          <a:bodyPr/>
-          <a:lstStyle/>
-          <a:p>
-            <a:pPr algn="l" marL="0" marR="0">
-              <a:lnSpc>
-                <a:spcPct val="100000"/>
-              </a:lnSpc>
-              <a:spcBef>
-                <a:spcPts val="0"/>
-              </a:spcBef>
-              <a:spcAft>
-                <a:spcPts val="0"/>
-              </a:spcAft>
-              <a:buNone/>
-            </a:pPr>
-            <a:r>
-              <a:rPr cap="none" sz="100" i="0" b="0" u="none" strike="noStrike">
-                <a:solidFill>
-                  <a:srgbClr val="1D5038">
-                    <a:alpha val="100000"/>
-                  </a:srgbClr>
-                </a:solidFill>
-                <a:latin typeface="Calibri"/>
-                <a:cs typeface="Calibri"/>
-                <a:ea typeface="Calibri"/>
-                <a:sym typeface="Calibri"/>
-              </a:rPr>
-              <a:t/>
-            </a:r>
-          </a:p>
-        </p:txBody>
-      </p:sp>
-      <p:sp>
-        <p:nvSpPr>
-          <p:cNvPr id="28" name=""/>
+          <a:solidFill>
+            <a:srgbClr val="1D5038">
+              <a:alpha val="100000"/>
+            </a:srgbClr>
+          </a:solidFill>
+        </p:spPr>
+        <p:txBody>
+          <a:bodyPr/>
+          <a:lstStyle/>
+          <a:p>
+            <a:pPr algn="l" marL="0" marR="0">
+              <a:lnSpc>
+                <a:spcPct val="100000"/>
+              </a:lnSpc>
+              <a:spcBef>
+                <a:spcPts val="0"/>
+              </a:spcBef>
+              <a:spcAft>
+                <a:spcPts val="0"/>
+              </a:spcAft>
+              <a:buNone/>
+            </a:pPr>
+          </a:p>
+        </p:txBody>
+      </p:sp>
+      <p:sp>
+        <p:nvSpPr>
+          <p:cNvPr id="27" name=""/>
           <p:cNvSpPr>
             <a:spLocks noGrp="1"/>
           </p:cNvSpPr>
@@ -7096,7 +6831,7 @@
       </p:sp>
       <p:sp>
         <p:nvSpPr>
-          <p:cNvPr id="29" name=""/>
+          <p:cNvPr id="28" name=""/>
           <p:cNvSpPr>
             <a:spLocks noGrp="1"/>
           </p:cNvSpPr>
@@ -7222,7 +6957,7 @@
                 <a:ea typeface="Calibri"/>
                 <a:sym typeface="Calibri"/>
               </a:rPr>
-              <a:t>• Δ Renda</a:t>
+              <a:t>• Δ Renda salarial</a:t>
             </a:r>
           </a:p>
           <a:p>
@@ -7379,37 +7114,28 @@
             <a:off x="0" y="0"/>
             <a:ext cx="9144000" cy="6858000"/>
           </a:xfrm>
-        </p:spPr>
-        <p:txBody>
-          <a:bodyPr/>
-          <a:lstStyle/>
-          <a:p>
-            <a:pPr algn="l" marL="0" marR="0">
-              <a:lnSpc>
-                <a:spcPct val="100000"/>
-              </a:lnSpc>
-              <a:spcBef>
-                <a:spcPts val="0"/>
-              </a:spcBef>
-              <a:spcAft>
-                <a:spcPts val="0"/>
-              </a:spcAft>
-              <a:buNone/>
-            </a:pPr>
-            <a:r>
-              <a:rPr cap="none" sz="100" i="0" b="0" u="none" strike="noStrike">
-                <a:solidFill>
-                  <a:srgbClr val="1C2B4A">
-                    <a:alpha val="100000"/>
-                  </a:srgbClr>
-                </a:solidFill>
-                <a:latin typeface="Calibri"/>
-                <a:cs typeface="Calibri"/>
-                <a:ea typeface="Calibri"/>
-                <a:sym typeface="Calibri"/>
-              </a:rPr>
-              <a:t/>
-            </a:r>
+          <a:solidFill>
+            <a:srgbClr val="1C2B4A">
+              <a:alpha val="100000"/>
+            </a:srgbClr>
+          </a:solidFill>
+        </p:spPr>
+        <p:txBody>
+          <a:bodyPr/>
+          <a:lstStyle/>
+          <a:p>
+            <a:pPr algn="l" marL="0" marR="0">
+              <a:lnSpc>
+                <a:spcPct val="100000"/>
+              </a:lnSpc>
+              <a:spcBef>
+                <a:spcPts val="0"/>
+              </a:spcBef>
+              <a:spcAft>
+                <a:spcPts val="0"/>
+              </a:spcAft>
+              <a:buNone/>
+            </a:pPr>
           </a:p>
         </p:txBody>
       </p:sp>
@@ -7428,37 +7154,28 @@
             <a:off x="0" y="0"/>
             <a:ext cx="9144000" cy="822960"/>
           </a:xfrm>
-        </p:spPr>
-        <p:txBody>
-          <a:bodyPr/>
-          <a:lstStyle/>
-          <a:p>
-            <a:pPr algn="l" marL="0" marR="0">
-              <a:lnSpc>
-                <a:spcPct val="100000"/>
-              </a:lnSpc>
-              <a:spcBef>
-                <a:spcPts val="0"/>
-              </a:spcBef>
-              <a:spcAft>
-                <a:spcPts val="0"/>
-              </a:spcAft>
-              <a:buNone/>
-            </a:pPr>
-            <a:r>
-              <a:rPr cap="none" sz="100" i="0" b="0" u="none" strike="noStrike">
-                <a:solidFill>
-                  <a:srgbClr val="1D9E75">
-                    <a:alpha val="100000"/>
-                  </a:srgbClr>
-                </a:solidFill>
-                <a:latin typeface="Calibri"/>
-                <a:cs typeface="Calibri"/>
-                <a:ea typeface="Calibri"/>
-                <a:sym typeface="Calibri"/>
-              </a:rPr>
-              <a:t/>
-            </a:r>
+          <a:solidFill>
+            <a:srgbClr val="1D9E75">
+              <a:alpha val="100000"/>
+            </a:srgbClr>
+          </a:solidFill>
+        </p:spPr>
+        <p:txBody>
+          <a:bodyPr/>
+          <a:lstStyle/>
+          <a:p>
+            <a:pPr algn="l" marL="0" marR="0">
+              <a:lnSpc>
+                <a:spcPct val="100000"/>
+              </a:lnSpc>
+              <a:spcBef>
+                <a:spcPts val="0"/>
+              </a:spcBef>
+              <a:spcAft>
+                <a:spcPts val="0"/>
+              </a:spcAft>
+              <a:buNone/>
+            </a:pPr>
           </a:p>
         </p:txBody>
       </p:sp>
@@ -7526,37 +7243,28 @@
             <a:off x="274320" y="1005840"/>
             <a:ext cx="2103120" cy="1508760"/>
           </a:xfrm>
-        </p:spPr>
-        <p:txBody>
-          <a:bodyPr/>
-          <a:lstStyle/>
-          <a:p>
-            <a:pPr algn="l" marL="0" marR="0">
-              <a:lnSpc>
-                <a:spcPct val="100000"/>
-              </a:lnSpc>
-              <a:spcBef>
-                <a:spcPts val="0"/>
-              </a:spcBef>
-              <a:spcAft>
-                <a:spcPts val="0"/>
-              </a:spcAft>
-              <a:buNone/>
-            </a:pPr>
-            <a:r>
-              <a:rPr cap="none" sz="100" i="0" b="0" u="none" strike="noStrike">
-                <a:solidFill>
-                  <a:srgbClr val="1A2840">
-                    <a:alpha val="100000"/>
-                  </a:srgbClr>
-                </a:solidFill>
-                <a:latin typeface="Calibri"/>
-                <a:cs typeface="Calibri"/>
-                <a:ea typeface="Calibri"/>
-                <a:sym typeface="Calibri"/>
-              </a:rPr>
-              <a:t/>
-            </a:r>
+          <a:solidFill>
+            <a:srgbClr val="1A2840">
+              <a:alpha val="100000"/>
+            </a:srgbClr>
+          </a:solidFill>
+        </p:spPr>
+        <p:txBody>
+          <a:bodyPr/>
+          <a:lstStyle/>
+          <a:p>
+            <a:pPr algn="l" marL="0" marR="0">
+              <a:lnSpc>
+                <a:spcPct val="100000"/>
+              </a:lnSpc>
+              <a:spcBef>
+                <a:spcPts val="0"/>
+              </a:spcBef>
+              <a:spcAft>
+                <a:spcPts val="0"/>
+              </a:spcAft>
+              <a:buNone/>
+            </a:pPr>
           </a:p>
         </p:txBody>
       </p:sp>
@@ -7575,37 +7283,28 @@
             <a:off x="338328" y="1143000"/>
             <a:ext cx="64008" cy="1188720"/>
           </a:xfrm>
-        </p:spPr>
-        <p:txBody>
-          <a:bodyPr/>
-          <a:lstStyle/>
-          <a:p>
-            <a:pPr algn="l" marL="0" marR="0">
-              <a:lnSpc>
-                <a:spcPct val="100000"/>
-              </a:lnSpc>
-              <a:spcBef>
-                <a:spcPts val="0"/>
-              </a:spcBef>
-              <a:spcAft>
-                <a:spcPts val="0"/>
-              </a:spcAft>
-              <a:buNone/>
-            </a:pPr>
-            <a:r>
-              <a:rPr cap="none" sz="100" i="0" b="0" u="none" strike="noStrike">
-                <a:solidFill>
-                  <a:srgbClr val="1D9E75">
-                    <a:alpha val="100000"/>
-                  </a:srgbClr>
-                </a:solidFill>
-                <a:latin typeface="Calibri"/>
-                <a:cs typeface="Calibri"/>
-                <a:ea typeface="Calibri"/>
-                <a:sym typeface="Calibri"/>
-              </a:rPr>
-              <a:t/>
-            </a:r>
+          <a:solidFill>
+            <a:srgbClr val="1D9E75">
+              <a:alpha val="100000"/>
+            </a:srgbClr>
+          </a:solidFill>
+        </p:spPr>
+        <p:txBody>
+          <a:bodyPr/>
+          <a:lstStyle/>
+          <a:p>
+            <a:pPr algn="l" marL="0" marR="0">
+              <a:lnSpc>
+                <a:spcPct val="100000"/>
+              </a:lnSpc>
+              <a:spcBef>
+                <a:spcPts val="0"/>
+              </a:spcBef>
+              <a:spcAft>
+                <a:spcPts val="0"/>
+              </a:spcAft>
+              <a:buNone/>
+            </a:pPr>
           </a:p>
         </p:txBody>
       </p:sp>
@@ -7771,37 +7470,28 @@
             <a:off x="2514600" y="1005840"/>
             <a:ext cx="2103120" cy="1508760"/>
           </a:xfrm>
-        </p:spPr>
-        <p:txBody>
-          <a:bodyPr/>
-          <a:lstStyle/>
-          <a:p>
-            <a:pPr algn="l" marL="0" marR="0">
-              <a:lnSpc>
-                <a:spcPct val="100000"/>
-              </a:lnSpc>
-              <a:spcBef>
-                <a:spcPts val="0"/>
-              </a:spcBef>
-              <a:spcAft>
-                <a:spcPts val="0"/>
-              </a:spcAft>
-              <a:buNone/>
-            </a:pPr>
-            <a:r>
-              <a:rPr cap="none" sz="100" i="0" b="0" u="none" strike="noStrike">
-                <a:solidFill>
-                  <a:srgbClr val="1A2840">
-                    <a:alpha val="100000"/>
-                  </a:srgbClr>
-                </a:solidFill>
-                <a:latin typeface="Calibri"/>
-                <a:cs typeface="Calibri"/>
-                <a:ea typeface="Calibri"/>
-                <a:sym typeface="Calibri"/>
-              </a:rPr>
-              <a:t/>
-            </a:r>
+          <a:solidFill>
+            <a:srgbClr val="1A2840">
+              <a:alpha val="100000"/>
+            </a:srgbClr>
+          </a:solidFill>
+        </p:spPr>
+        <p:txBody>
+          <a:bodyPr/>
+          <a:lstStyle/>
+          <a:p>
+            <a:pPr algn="l" marL="0" marR="0">
+              <a:lnSpc>
+                <a:spcPct val="100000"/>
+              </a:lnSpc>
+              <a:spcBef>
+                <a:spcPts val="0"/>
+              </a:spcBef>
+              <a:spcAft>
+                <a:spcPts val="0"/>
+              </a:spcAft>
+              <a:buNone/>
+            </a:pPr>
           </a:p>
         </p:txBody>
       </p:sp>
@@ -7820,37 +7510,28 @@
             <a:off x="2578608" y="1143000"/>
             <a:ext cx="64008" cy="1188720"/>
           </a:xfrm>
-        </p:spPr>
-        <p:txBody>
-          <a:bodyPr/>
-          <a:lstStyle/>
-          <a:p>
-            <a:pPr algn="l" marL="0" marR="0">
-              <a:lnSpc>
-                <a:spcPct val="100000"/>
-              </a:lnSpc>
-              <a:spcBef>
-                <a:spcPts val="0"/>
-              </a:spcBef>
-              <a:spcAft>
-                <a:spcPts val="0"/>
-              </a:spcAft>
-              <a:buNone/>
-            </a:pPr>
-            <a:r>
-              <a:rPr cap="none" sz="100" i="0" b="0" u="none" strike="noStrike">
-                <a:solidFill>
-                  <a:srgbClr val="F39C12">
-                    <a:alpha val="100000"/>
-                  </a:srgbClr>
-                </a:solidFill>
-                <a:latin typeface="Calibri"/>
-                <a:cs typeface="Calibri"/>
-                <a:ea typeface="Calibri"/>
-                <a:sym typeface="Calibri"/>
-              </a:rPr>
-              <a:t/>
-            </a:r>
+          <a:solidFill>
+            <a:srgbClr val="F39C12">
+              <a:alpha val="100000"/>
+            </a:srgbClr>
+          </a:solidFill>
+        </p:spPr>
+        <p:txBody>
+          <a:bodyPr/>
+          <a:lstStyle/>
+          <a:p>
+            <a:pPr algn="l" marL="0" marR="0">
+              <a:lnSpc>
+                <a:spcPct val="100000"/>
+              </a:lnSpc>
+              <a:spcBef>
+                <a:spcPts val="0"/>
+              </a:spcBef>
+              <a:spcAft>
+                <a:spcPts val="0"/>
+              </a:spcAft>
+              <a:buNone/>
+            </a:pPr>
           </a:p>
         </p:txBody>
       </p:sp>
@@ -8016,37 +7697,28 @@
             <a:off x="274320" y="2743200"/>
             <a:ext cx="2103120" cy="1508760"/>
           </a:xfrm>
-        </p:spPr>
-        <p:txBody>
-          <a:bodyPr/>
-          <a:lstStyle/>
-          <a:p>
-            <a:pPr algn="l" marL="0" marR="0">
-              <a:lnSpc>
-                <a:spcPct val="100000"/>
-              </a:lnSpc>
-              <a:spcBef>
-                <a:spcPts val="0"/>
-              </a:spcBef>
-              <a:spcAft>
-                <a:spcPts val="0"/>
-              </a:spcAft>
-              <a:buNone/>
-            </a:pPr>
-            <a:r>
-              <a:rPr cap="none" sz="100" i="0" b="0" u="none" strike="noStrike">
-                <a:solidFill>
-                  <a:srgbClr val="1A2840">
-                    <a:alpha val="100000"/>
-                  </a:srgbClr>
-                </a:solidFill>
-                <a:latin typeface="Calibri"/>
-                <a:cs typeface="Calibri"/>
-                <a:ea typeface="Calibri"/>
-                <a:sym typeface="Calibri"/>
-              </a:rPr>
-              <a:t/>
-            </a:r>
+          <a:solidFill>
+            <a:srgbClr val="1A2840">
+              <a:alpha val="100000"/>
+            </a:srgbClr>
+          </a:solidFill>
+        </p:spPr>
+        <p:txBody>
+          <a:bodyPr/>
+          <a:lstStyle/>
+          <a:p>
+            <a:pPr algn="l" marL="0" marR="0">
+              <a:lnSpc>
+                <a:spcPct val="100000"/>
+              </a:lnSpc>
+              <a:spcBef>
+                <a:spcPts val="0"/>
+              </a:spcBef>
+              <a:spcAft>
+                <a:spcPts val="0"/>
+              </a:spcAft>
+              <a:buNone/>
+            </a:pPr>
           </a:p>
         </p:txBody>
       </p:sp>
@@ -8065,37 +7737,28 @@
             <a:off x="338328" y="2880360"/>
             <a:ext cx="64008" cy="1188720"/>
           </a:xfrm>
-        </p:spPr>
-        <p:txBody>
-          <a:bodyPr/>
-          <a:lstStyle/>
-          <a:p>
-            <a:pPr algn="l" marL="0" marR="0">
-              <a:lnSpc>
-                <a:spcPct val="100000"/>
-              </a:lnSpc>
-              <a:spcBef>
-                <a:spcPts val="0"/>
-              </a:spcBef>
-              <a:spcAft>
-                <a:spcPts val="0"/>
-              </a:spcAft>
-              <a:buNone/>
-            </a:pPr>
-            <a:r>
-              <a:rPr cap="none" sz="100" i="0" b="0" u="none" strike="noStrike">
-                <a:solidFill>
-                  <a:srgbClr val="378ADD">
-                    <a:alpha val="100000"/>
-                  </a:srgbClr>
-                </a:solidFill>
-                <a:latin typeface="Calibri"/>
-                <a:cs typeface="Calibri"/>
-                <a:ea typeface="Calibri"/>
-                <a:sym typeface="Calibri"/>
-              </a:rPr>
-              <a:t/>
-            </a:r>
+          <a:solidFill>
+            <a:srgbClr val="378ADD">
+              <a:alpha val="100000"/>
+            </a:srgbClr>
+          </a:solidFill>
+        </p:spPr>
+        <p:txBody>
+          <a:bodyPr/>
+          <a:lstStyle/>
+          <a:p>
+            <a:pPr algn="l" marL="0" marR="0">
+              <a:lnSpc>
+                <a:spcPct val="100000"/>
+              </a:lnSpc>
+              <a:spcBef>
+                <a:spcPts val="0"/>
+              </a:spcBef>
+              <a:spcAft>
+                <a:spcPts val="0"/>
+              </a:spcAft>
+              <a:buNone/>
+            </a:pPr>
           </a:p>
         </p:txBody>
       </p:sp>
@@ -8261,37 +7924,28 @@
             <a:off x="2514600" y="2743200"/>
             <a:ext cx="2103120" cy="1508760"/>
           </a:xfrm>
-        </p:spPr>
-        <p:txBody>
-          <a:bodyPr/>
-          <a:lstStyle/>
-          <a:p>
-            <a:pPr algn="l" marL="0" marR="0">
-              <a:lnSpc>
-                <a:spcPct val="100000"/>
-              </a:lnSpc>
-              <a:spcBef>
-                <a:spcPts val="0"/>
-              </a:spcBef>
-              <a:spcAft>
-                <a:spcPts val="0"/>
-              </a:spcAft>
-              <a:buNone/>
-            </a:pPr>
-            <a:r>
-              <a:rPr cap="none" sz="100" i="0" b="0" u="none" strike="noStrike">
-                <a:solidFill>
-                  <a:srgbClr val="1A2840">
-                    <a:alpha val="100000"/>
-                  </a:srgbClr>
-                </a:solidFill>
-                <a:latin typeface="Calibri"/>
-                <a:cs typeface="Calibri"/>
-                <a:ea typeface="Calibri"/>
-                <a:sym typeface="Calibri"/>
-              </a:rPr>
-              <a:t/>
-            </a:r>
+          <a:solidFill>
+            <a:srgbClr val="1A2840">
+              <a:alpha val="100000"/>
+            </a:srgbClr>
+          </a:solidFill>
+        </p:spPr>
+        <p:txBody>
+          <a:bodyPr/>
+          <a:lstStyle/>
+          <a:p>
+            <a:pPr algn="l" marL="0" marR="0">
+              <a:lnSpc>
+                <a:spcPct val="100000"/>
+              </a:lnSpc>
+              <a:spcBef>
+                <a:spcPts val="0"/>
+              </a:spcBef>
+              <a:spcAft>
+                <a:spcPts val="0"/>
+              </a:spcAft>
+              <a:buNone/>
+            </a:pPr>
           </a:p>
         </p:txBody>
       </p:sp>
@@ -8310,37 +7964,28 @@
             <a:off x="2578608" y="2880360"/>
             <a:ext cx="64008" cy="1188720"/>
           </a:xfrm>
-        </p:spPr>
-        <p:txBody>
-          <a:bodyPr/>
-          <a:lstStyle/>
-          <a:p>
-            <a:pPr algn="l" marL="0" marR="0">
-              <a:lnSpc>
-                <a:spcPct val="100000"/>
-              </a:lnSpc>
-              <a:spcBef>
-                <a:spcPts val="0"/>
-              </a:spcBef>
-              <a:spcAft>
-                <a:spcPts val="0"/>
-              </a:spcAft>
-              <a:buNone/>
-            </a:pPr>
-            <a:r>
-              <a:rPr cap="none" sz="100" i="0" b="0" u="none" strike="noStrike">
-                <a:solidFill>
-                  <a:srgbClr val="3DC494">
-                    <a:alpha val="100000"/>
-                  </a:srgbClr>
-                </a:solidFill>
-                <a:latin typeface="Calibri"/>
-                <a:cs typeface="Calibri"/>
-                <a:ea typeface="Calibri"/>
-                <a:sym typeface="Calibri"/>
-              </a:rPr>
-              <a:t/>
-            </a:r>
+          <a:solidFill>
+            <a:srgbClr val="3DC494">
+              <a:alpha val="100000"/>
+            </a:srgbClr>
+          </a:solidFill>
+        </p:spPr>
+        <p:txBody>
+          <a:bodyPr/>
+          <a:lstStyle/>
+          <a:p>
+            <a:pPr algn="l" marL="0" marR="0">
+              <a:lnSpc>
+                <a:spcPct val="100000"/>
+              </a:lnSpc>
+              <a:spcBef>
+                <a:spcPts val="0"/>
+              </a:spcBef>
+              <a:spcAft>
+                <a:spcPts val="0"/>
+              </a:spcAft>
+              <a:buNone/>
+            </a:pPr>
           </a:p>
         </p:txBody>
       </p:sp>
@@ -8506,37 +8151,28 @@
             <a:off x="4800600" y="1005840"/>
             <a:ext cx="4160520" cy="5394960"/>
           </a:xfrm>
-        </p:spPr>
-        <p:txBody>
-          <a:bodyPr/>
-          <a:lstStyle/>
-          <a:p>
-            <a:pPr algn="l" marL="0" marR="0">
-              <a:lnSpc>
-                <a:spcPct val="100000"/>
-              </a:lnSpc>
-              <a:spcBef>
-                <a:spcPts val="0"/>
-              </a:spcBef>
-              <a:spcAft>
-                <a:spcPts val="0"/>
-              </a:spcAft>
-              <a:buNone/>
-            </a:pPr>
-            <a:r>
-              <a:rPr cap="none" sz="100" i="0" b="0" u="none" strike="noStrike">
-                <a:solidFill>
-                  <a:srgbClr val="1A2840">
-                    <a:alpha val="100000"/>
-                  </a:srgbClr>
-                </a:solidFill>
-                <a:latin typeface="Calibri"/>
-                <a:cs typeface="Calibri"/>
-                <a:ea typeface="Calibri"/>
-                <a:sym typeface="Calibri"/>
-              </a:rPr>
-              <a:t/>
-            </a:r>
+          <a:solidFill>
+            <a:srgbClr val="1A2840">
+              <a:alpha val="100000"/>
+            </a:srgbClr>
+          </a:solidFill>
+        </p:spPr>
+        <p:txBody>
+          <a:bodyPr/>
+          <a:lstStyle/>
+          <a:p>
+            <a:pPr algn="l" marL="0" marR="0">
+              <a:lnSpc>
+                <a:spcPct val="100000"/>
+              </a:lnSpc>
+              <a:spcBef>
+                <a:spcPts val="0"/>
+              </a:spcBef>
+              <a:spcAft>
+                <a:spcPts val="0"/>
+              </a:spcAft>
+              <a:buNone/>
+            </a:pPr>
           </a:p>
         </p:txBody>
       </p:sp>
@@ -8653,37 +8289,28 @@
             <a:off x="5001768" y="1920240"/>
             <a:ext cx="64008" cy="457200"/>
           </a:xfrm>
-        </p:spPr>
-        <p:txBody>
-          <a:bodyPr/>
-          <a:lstStyle/>
-          <a:p>
-            <a:pPr algn="l" marL="0" marR="0">
-              <a:lnSpc>
-                <a:spcPct val="100000"/>
-              </a:lnSpc>
-              <a:spcBef>
-                <a:spcPts val="0"/>
-              </a:spcBef>
-              <a:spcAft>
-                <a:spcPts val="0"/>
-              </a:spcAft>
-              <a:buNone/>
-            </a:pPr>
-            <a:r>
-              <a:rPr cap="none" sz="100" i="0" b="0" u="none" strike="noStrike">
-                <a:solidFill>
-                  <a:srgbClr val="F39C12">
-                    <a:alpha val="100000"/>
-                  </a:srgbClr>
-                </a:solidFill>
-                <a:latin typeface="Calibri"/>
-                <a:cs typeface="Calibri"/>
-                <a:ea typeface="Calibri"/>
-                <a:sym typeface="Calibri"/>
-              </a:rPr>
-              <a:t/>
-            </a:r>
+          <a:solidFill>
+            <a:srgbClr val="F39C12">
+              <a:alpha val="100000"/>
+            </a:srgbClr>
+          </a:solidFill>
+        </p:spPr>
+        <p:txBody>
+          <a:bodyPr/>
+          <a:lstStyle/>
+          <a:p>
+            <a:pPr algn="l" marL="0" marR="0">
+              <a:lnSpc>
+                <a:spcPct val="100000"/>
+              </a:lnSpc>
+              <a:spcBef>
+                <a:spcPts val="0"/>
+              </a:spcBef>
+              <a:spcAft>
+                <a:spcPts val="0"/>
+              </a:spcAft>
+              <a:buNone/>
+            </a:pPr>
           </a:p>
         </p:txBody>
       </p:sp>
@@ -8800,37 +8427,28 @@
             <a:off x="5001768" y="2624328"/>
             <a:ext cx="64008" cy="457200"/>
           </a:xfrm>
-        </p:spPr>
-        <p:txBody>
-          <a:bodyPr/>
-          <a:lstStyle/>
-          <a:p>
-            <a:pPr algn="l" marL="0" marR="0">
-              <a:lnSpc>
-                <a:spcPct val="100000"/>
-              </a:lnSpc>
-              <a:spcBef>
-                <a:spcPts val="0"/>
-              </a:spcBef>
-              <a:spcAft>
-                <a:spcPts val="0"/>
-              </a:spcAft>
-              <a:buNone/>
-            </a:pPr>
-            <a:r>
-              <a:rPr cap="none" sz="100" i="0" b="0" u="none" strike="noStrike">
-                <a:solidFill>
-                  <a:srgbClr val="F0A050">
-                    <a:alpha val="100000"/>
-                  </a:srgbClr>
-                </a:solidFill>
-                <a:latin typeface="Calibri"/>
-                <a:cs typeface="Calibri"/>
-                <a:ea typeface="Calibri"/>
-                <a:sym typeface="Calibri"/>
-              </a:rPr>
-              <a:t/>
-            </a:r>
+          <a:solidFill>
+            <a:srgbClr val="F0A050">
+              <a:alpha val="100000"/>
+            </a:srgbClr>
+          </a:solidFill>
+        </p:spPr>
+        <p:txBody>
+          <a:bodyPr/>
+          <a:lstStyle/>
+          <a:p>
+            <a:pPr algn="l" marL="0" marR="0">
+              <a:lnSpc>
+                <a:spcPct val="100000"/>
+              </a:lnSpc>
+              <a:spcBef>
+                <a:spcPts val="0"/>
+              </a:spcBef>
+              <a:spcAft>
+                <a:spcPts val="0"/>
+              </a:spcAft>
+              <a:buNone/>
+            </a:pPr>
           </a:p>
         </p:txBody>
       </p:sp>
@@ -8947,37 +8565,28 @@
             <a:off x="5001768" y="3328416"/>
             <a:ext cx="64008" cy="457200"/>
           </a:xfrm>
-        </p:spPr>
-        <p:txBody>
-          <a:bodyPr/>
-          <a:lstStyle/>
-          <a:p>
-            <a:pPr algn="l" marL="0" marR="0">
-              <a:lnSpc>
-                <a:spcPct val="100000"/>
-              </a:lnSpc>
-              <a:spcBef>
-                <a:spcPts val="0"/>
-              </a:spcBef>
-              <a:spcAft>
-                <a:spcPts val="0"/>
-              </a:spcAft>
-              <a:buNone/>
-            </a:pPr>
-            <a:r>
-              <a:rPr cap="none" sz="100" i="0" b="0" u="none" strike="noStrike">
-                <a:solidFill>
-                  <a:srgbClr val="1D9E75">
-                    <a:alpha val="100000"/>
-                  </a:srgbClr>
-                </a:solidFill>
-                <a:latin typeface="Calibri"/>
-                <a:cs typeface="Calibri"/>
-                <a:ea typeface="Calibri"/>
-                <a:sym typeface="Calibri"/>
-              </a:rPr>
-              <a:t/>
-            </a:r>
+          <a:solidFill>
+            <a:srgbClr val="1D9E75">
+              <a:alpha val="100000"/>
+            </a:srgbClr>
+          </a:solidFill>
+        </p:spPr>
+        <p:txBody>
+          <a:bodyPr/>
+          <a:lstStyle/>
+          <a:p>
+            <a:pPr algn="l" marL="0" marR="0">
+              <a:lnSpc>
+                <a:spcPct val="100000"/>
+              </a:lnSpc>
+              <a:spcBef>
+                <a:spcPts val="0"/>
+              </a:spcBef>
+              <a:spcAft>
+                <a:spcPts val="0"/>
+              </a:spcAft>
+              <a:buNone/>
+            </a:pPr>
           </a:p>
         </p:txBody>
       </p:sp>
@@ -9094,37 +8703,28 @@
             <a:off x="5001768" y="4032504"/>
             <a:ext cx="64008" cy="457200"/>
           </a:xfrm>
-        </p:spPr>
-        <p:txBody>
-          <a:bodyPr/>
-          <a:lstStyle/>
-          <a:p>
-            <a:pPr algn="l" marL="0" marR="0">
-              <a:lnSpc>
-                <a:spcPct val="100000"/>
-              </a:lnSpc>
-              <a:spcBef>
-                <a:spcPts val="0"/>
-              </a:spcBef>
-              <a:spcAft>
-                <a:spcPts val="0"/>
-              </a:spcAft>
-              <a:buNone/>
-            </a:pPr>
-            <a:r>
-              <a:rPr cap="none" sz="100" i="0" b="0" u="none" strike="noStrike">
-                <a:solidFill>
-                  <a:srgbClr val="3DC494">
-                    <a:alpha val="100000"/>
-                  </a:srgbClr>
-                </a:solidFill>
-                <a:latin typeface="Calibri"/>
-                <a:cs typeface="Calibri"/>
-                <a:ea typeface="Calibri"/>
-                <a:sym typeface="Calibri"/>
-              </a:rPr>
-              <a:t/>
-            </a:r>
+          <a:solidFill>
+            <a:srgbClr val="3DC494">
+              <a:alpha val="100000"/>
+            </a:srgbClr>
+          </a:solidFill>
+        </p:spPr>
+        <p:txBody>
+          <a:bodyPr/>
+          <a:lstStyle/>
+          <a:p>
+            <a:pPr algn="l" marL="0" marR="0">
+              <a:lnSpc>
+                <a:spcPct val="100000"/>
+              </a:lnSpc>
+              <a:spcBef>
+                <a:spcPts val="0"/>
+              </a:spcBef>
+              <a:spcAft>
+                <a:spcPts val="0"/>
+              </a:spcAft>
+              <a:buNone/>
+            </a:pPr>
           </a:p>
         </p:txBody>
       </p:sp>
@@ -9241,37 +8841,28 @@
             <a:off x="5001768" y="4736592"/>
             <a:ext cx="64008" cy="457200"/>
           </a:xfrm>
-        </p:spPr>
-        <p:txBody>
-          <a:bodyPr/>
-          <a:lstStyle/>
-          <a:p>
-            <a:pPr algn="l" marL="0" marR="0">
-              <a:lnSpc>
-                <a:spcPct val="100000"/>
-              </a:lnSpc>
-              <a:spcBef>
-                <a:spcPts val="0"/>
-              </a:spcBef>
-              <a:spcAft>
-                <a:spcPts val="0"/>
-              </a:spcAft>
-              <a:buNone/>
-            </a:pPr>
-            <a:r>
-              <a:rPr cap="none" sz="100" i="0" b="0" u="none" strike="noStrike">
-                <a:solidFill>
-                  <a:srgbClr val="378ADD">
-                    <a:alpha val="100000"/>
-                  </a:srgbClr>
-                </a:solidFill>
-                <a:latin typeface="Calibri"/>
-                <a:cs typeface="Calibri"/>
-                <a:ea typeface="Calibri"/>
-                <a:sym typeface="Calibri"/>
-              </a:rPr>
-              <a:t/>
-            </a:r>
+          <a:solidFill>
+            <a:srgbClr val="378ADD">
+              <a:alpha val="100000"/>
+            </a:srgbClr>
+          </a:solidFill>
+        </p:spPr>
+        <p:txBody>
+          <a:bodyPr/>
+          <a:lstStyle/>
+          <a:p>
+            <a:pPr algn="l" marL="0" marR="0">
+              <a:lnSpc>
+                <a:spcPct val="100000"/>
+              </a:lnSpc>
+              <a:spcBef>
+                <a:spcPts val="0"/>
+              </a:spcBef>
+              <a:spcAft>
+                <a:spcPts val="0"/>
+              </a:spcAft>
+              <a:buNone/>
+            </a:pPr>
           </a:p>
         </p:txBody>
       </p:sp>
@@ -9319,7 +8910,7 @@
                 <a:ea typeface="Calibri"/>
                 <a:sym typeface="Calibri"/>
               </a:rPr>
-              <a:t>EE Centralizada</a:t>
+              <a:t>EE Centralizada (S40)</a:t>
             </a:r>
           </a:p>
         </p:txBody>
@@ -9368,7 +8959,7 @@
                 <a:ea typeface="Calibri"/>
                 <a:sym typeface="Calibri"/>
               </a:rPr>
-              <a:t>Geração S40, distribuidoras</a:t>
+              <a:t>Geração e distribuidoras</a:t>
             </a:r>
           </a:p>
         </p:txBody>
@@ -9388,37 +8979,28 @@
             <a:off x="5001768" y="5440680"/>
             <a:ext cx="64008" cy="457200"/>
           </a:xfrm>
-        </p:spPr>
-        <p:txBody>
-          <a:bodyPr/>
-          <a:lstStyle/>
-          <a:p>
-            <a:pPr algn="l" marL="0" marR="0">
-              <a:lnSpc>
-                <a:spcPct val="100000"/>
-              </a:lnSpc>
-              <a:spcBef>
-                <a:spcPts val="0"/>
-              </a:spcBef>
-              <a:spcAft>
-                <a:spcPts val="0"/>
-              </a:spcAft>
-              <a:buNone/>
-            </a:pPr>
-            <a:r>
-              <a:rPr cap="none" sz="100" i="0" b="0" u="none" strike="noStrike">
-                <a:solidFill>
-                  <a:srgbClr val="6AADF5">
-                    <a:alpha val="100000"/>
-                  </a:srgbClr>
-                </a:solidFill>
-                <a:latin typeface="Calibri"/>
-                <a:cs typeface="Calibri"/>
-                <a:ea typeface="Calibri"/>
-                <a:sym typeface="Calibri"/>
-              </a:rPr>
-              <a:t/>
-            </a:r>
+          <a:solidFill>
+            <a:srgbClr val="6AADF5">
+              <a:alpha val="100000"/>
+            </a:srgbClr>
+          </a:solidFill>
+        </p:spPr>
+        <p:txBody>
+          <a:bodyPr/>
+          <a:lstStyle/>
+          <a:p>
+            <a:pPr algn="l" marL="0" marR="0">
+              <a:lnSpc>
+                <a:spcPct val="100000"/>
+              </a:lnSpc>
+              <a:spcBef>
+                <a:spcPts val="0"/>
+              </a:spcBef>
+              <a:spcAft>
+                <a:spcPts val="0"/>
+              </a:spcAft>
+              <a:buNone/>
+            </a:pPr>
           </a:p>
         </p:txBody>
       </p:sp>
@@ -9466,7 +9048,7 @@
                 <a:ea typeface="Calibri"/>
                 <a:sym typeface="Calibri"/>
               </a:rPr>
-              <a:t>EE Distribuída</a:t>
+              <a:t>EE Distribuída (S41)</a:t>
             </a:r>
           </a:p>
         </p:txBody>
@@ -9515,7 +9097,7 @@
                 <a:ea typeface="Calibri"/>
                 <a:sym typeface="Calibri"/>
               </a:rPr>
-              <a:t>Solar FV, micro-hidro (S41)</a:t>
+              <a:t>Solar FV, micro-hidro</a:t>
             </a:r>
           </a:p>
         </p:txBody>
@@ -9609,37 +9191,28 @@
             <a:off x="0" y="0"/>
             <a:ext cx="9144000" cy="6858000"/>
           </a:xfrm>
-        </p:spPr>
-        <p:txBody>
-          <a:bodyPr/>
-          <a:lstStyle/>
-          <a:p>
-            <a:pPr algn="l" marL="0" marR="0">
-              <a:lnSpc>
-                <a:spcPct val="100000"/>
-              </a:lnSpc>
-              <a:spcBef>
-                <a:spcPts val="0"/>
-              </a:spcBef>
-              <a:spcAft>
-                <a:spcPts val="0"/>
-              </a:spcAft>
-              <a:buNone/>
-            </a:pPr>
-            <a:r>
-              <a:rPr cap="none" sz="100" i="0" b="0" u="none" strike="noStrike">
-                <a:solidFill>
-                  <a:srgbClr val="1C2B4A">
-                    <a:alpha val="100000"/>
-                  </a:srgbClr>
-                </a:solidFill>
-                <a:latin typeface="Calibri"/>
-                <a:cs typeface="Calibri"/>
-                <a:ea typeface="Calibri"/>
-                <a:sym typeface="Calibri"/>
-              </a:rPr>
-              <a:t/>
-            </a:r>
+          <a:solidFill>
+            <a:srgbClr val="1C2B4A">
+              <a:alpha val="100000"/>
+            </a:srgbClr>
+          </a:solidFill>
+        </p:spPr>
+        <p:txBody>
+          <a:bodyPr/>
+          <a:lstStyle/>
+          <a:p>
+            <a:pPr algn="l" marL="0" marR="0">
+              <a:lnSpc>
+                <a:spcPct val="100000"/>
+              </a:lnSpc>
+              <a:spcBef>
+                <a:spcPts val="0"/>
+              </a:spcBef>
+              <a:spcAft>
+                <a:spcPts val="0"/>
+              </a:spcAft>
+              <a:buNone/>
+            </a:pPr>
           </a:p>
         </p:txBody>
       </p:sp>
@@ -9658,37 +9231,28 @@
             <a:off x="0" y="0"/>
             <a:ext cx="9144000" cy="822960"/>
           </a:xfrm>
-        </p:spPr>
-        <p:txBody>
-          <a:bodyPr/>
-          <a:lstStyle/>
-          <a:p>
-            <a:pPr algn="l" marL="0" marR="0">
-              <a:lnSpc>
-                <a:spcPct val="100000"/>
-              </a:lnSpc>
-              <a:spcBef>
-                <a:spcPts val="0"/>
-              </a:spcBef>
-              <a:spcAft>
-                <a:spcPts val="0"/>
-              </a:spcAft>
-              <a:buNone/>
-            </a:pPr>
-            <a:r>
-              <a:rPr cap="none" sz="100" i="0" b="0" u="none" strike="noStrike">
-                <a:solidFill>
-                  <a:srgbClr val="F39C12">
-                    <a:alpha val="100000"/>
-                  </a:srgbClr>
-                </a:solidFill>
-                <a:latin typeface="Calibri"/>
-                <a:cs typeface="Calibri"/>
-                <a:ea typeface="Calibri"/>
-                <a:sym typeface="Calibri"/>
-              </a:rPr>
-              <a:t/>
-            </a:r>
+          <a:solidFill>
+            <a:srgbClr val="F39C12">
+              <a:alpha val="100000"/>
+            </a:srgbClr>
+          </a:solidFill>
+        </p:spPr>
+        <p:txBody>
+          <a:bodyPr/>
+          <a:lstStyle/>
+          <a:p>
+            <a:pPr algn="l" marL="0" marR="0">
+              <a:lnSpc>
+                <a:spcPct val="100000"/>
+              </a:lnSpc>
+              <a:spcBef>
+                <a:spcPts val="0"/>
+              </a:spcBef>
+              <a:spcAft>
+                <a:spcPts val="0"/>
+              </a:spcAft>
+              <a:buNone/>
+            </a:pPr>
           </a:p>
         </p:txBody>
       </p:sp>
@@ -9756,37 +9320,28 @@
             <a:off x="182880" y="1005840"/>
             <a:ext cx="4160520" cy="5303520"/>
           </a:xfrm>
-        </p:spPr>
-        <p:txBody>
-          <a:bodyPr/>
-          <a:lstStyle/>
-          <a:p>
-            <a:pPr algn="l" marL="0" marR="0">
-              <a:lnSpc>
-                <a:spcPct val="100000"/>
-              </a:lnSpc>
-              <a:spcBef>
-                <a:spcPts val="0"/>
-              </a:spcBef>
-              <a:spcAft>
-                <a:spcPts val="0"/>
-              </a:spcAft>
-              <a:buNone/>
-            </a:pPr>
-            <a:r>
-              <a:rPr cap="none" sz="100" i="0" b="0" u="none" strike="noStrike">
-                <a:solidFill>
-                  <a:srgbClr val="1A2840">
-                    <a:alpha val="100000"/>
-                  </a:srgbClr>
-                </a:solidFill>
-                <a:latin typeface="Calibri"/>
-                <a:cs typeface="Calibri"/>
-                <a:ea typeface="Calibri"/>
-                <a:sym typeface="Calibri"/>
-              </a:rPr>
-              <a:t/>
-            </a:r>
+          <a:solidFill>
+            <a:srgbClr val="1A2840">
+              <a:alpha val="100000"/>
+            </a:srgbClr>
+          </a:solidFill>
+        </p:spPr>
+        <p:txBody>
+          <a:bodyPr/>
+          <a:lstStyle/>
+          <a:p>
+            <a:pPr algn="l" marL="0" marR="0">
+              <a:lnSpc>
+                <a:spcPct val="100000"/>
+              </a:lnSpc>
+              <a:spcBef>
+                <a:spcPts val="0"/>
+              </a:spcBef>
+              <a:spcAft>
+                <a:spcPts val="0"/>
+              </a:spcAft>
+              <a:buNone/>
+            </a:pPr>
           </a:p>
         </p:txBody>
       </p:sp>
@@ -9995,7 +9550,7 @@
                 <a:ea typeface="Calibri"/>
                 <a:sym typeface="Calibri"/>
               </a:rPr>
-              <a:t>▸  Setores calibrados por Engine 3 recebem Δf=0 para evitar dupla contagem</a:t>
+              <a:t>▸  Setores Engine 3 recebem Δf=0 (evita dupla contagem)</a:t>
             </a:r>
           </a:p>
           <a:p>
@@ -10023,7 +9578,7 @@
                 <a:ea typeface="Calibri"/>
                 <a:sym typeface="Calibri"/>
               </a:rPr>
-              <a:t>▸  ENGINE3: S05 (petróleo), S19 (refino), S40 (geração), S42 (transmissão)</a:t>
+              <a:t>▸  E3: S05 petróleo, S19 refino, S40 geração, S42 transmissão</a:t>
             </a:r>
           </a:p>
         </p:txBody>
@@ -10043,37 +9598,28 @@
             <a:off x="4617720" y="1005840"/>
             <a:ext cx="4343400" cy="5303520"/>
           </a:xfrm>
-        </p:spPr>
-        <p:txBody>
-          <a:bodyPr/>
-          <a:lstStyle/>
-          <a:p>
-            <a:pPr algn="l" marL="0" marR="0">
-              <a:lnSpc>
-                <a:spcPct val="100000"/>
-              </a:lnSpc>
-              <a:spcBef>
-                <a:spcPts val="0"/>
-              </a:spcBef>
-              <a:spcAft>
-                <a:spcPts val="0"/>
-              </a:spcAft>
-              <a:buNone/>
-            </a:pPr>
-            <a:r>
-              <a:rPr cap="none" sz="100" i="0" b="0" u="none" strike="noStrike">
-                <a:solidFill>
-                  <a:srgbClr val="1A2840">
-                    <a:alpha val="100000"/>
-                  </a:srgbClr>
-                </a:solidFill>
-                <a:latin typeface="Calibri"/>
-                <a:cs typeface="Calibri"/>
-                <a:ea typeface="Calibri"/>
-                <a:sym typeface="Calibri"/>
-              </a:rPr>
-              <a:t/>
-            </a:r>
+          <a:solidFill>
+            <a:srgbClr val="1A2840">
+              <a:alpha val="100000"/>
+            </a:srgbClr>
+          </a:solidFill>
+        </p:spPr>
+        <p:txBody>
+          <a:bodyPr/>
+          <a:lstStyle/>
+          <a:p>
+            <a:pPr algn="l" marL="0" marR="0">
+              <a:lnSpc>
+                <a:spcPct val="100000"/>
+              </a:lnSpc>
+              <a:spcBef>
+                <a:spcPts val="0"/>
+              </a:spcBef>
+              <a:spcAft>
+                <a:spcPts val="0"/>
+              </a:spcAft>
+              <a:buNone/>
+            </a:pPr>
           </a:p>
         </p:txBody>
       </p:sp>
@@ -10139,7 +9685,7 @@
         <p:spPr>
           <a:xfrm>
             <a:off x="4800600" y="1645920"/>
-            <a:ext cx="4023360" cy="3200400"/>
+            <a:ext cx="4023360" cy="4389120"/>
           </a:xfrm>
         </p:spPr>
         <p:txBody>
@@ -10170,7 +9716,7 @@
                 <a:ea typeface="Calibri"/>
                 <a:sym typeface="Calibri"/>
               </a:rPr>
-              <a:t>▸  Fonte: Custos MMA — Custo Anual Equivalente (CAE)</a:t>
+              <a:t>▸  Fonte: Aba Custos MMA — Custo Anual Equivalente (CAE)</a:t>
             </a:r>
           </a:p>
           <a:p>
@@ -10198,7 +9744,7 @@
                 <a:ea typeface="Calibri"/>
                 <a:sym typeface="Calibri"/>
               </a:rPr>
-              <a:t>▸  Conversão: bi USD2023 → R$2018 (fator 2,92 = câmbio/CPI)</a:t>
+              <a:t>▸  Conversão: bi USD2023 → R$2018 (fator 2,92)</a:t>
             </a:r>
           </a:p>
           <a:p>
@@ -10254,7 +9800,7 @@
                 <a:ea typeface="Calibri"/>
                 <a:sym typeface="Calibri"/>
               </a:rPr>
-              <a:t>▸  Adicionado como FBCF (formação bruta de capital fixo) setorial</a:t>
+              <a:t>▸  Adicionado como FBCF setorial (formação bruta de capital fixo)</a:t>
             </a:r>
           </a:p>
           <a:p>
@@ -10282,7 +9828,7 @@
                 <a:ea typeface="Calibri"/>
                 <a:sym typeface="Calibri"/>
               </a:rPr>
-              <a:t>▸  ALOC_INV: pesos manuais por setor IO — premissa a calibrar</a:t>
+              <a:t>▸  ALOC_INV: pesos por setor IO — premissa a calibrar com dados MMA</a:t>
             </a:r>
           </a:p>
           <a:p>
@@ -10310,217 +9856,7 @@
                 <a:ea typeface="Calibri"/>
                 <a:sym typeface="Calibri"/>
               </a:rPr>
-              <a:t>▸  Maiores receptores: geração elétrica, construção, biocombustíveis, veículos</a:t>
-            </a:r>
-          </a:p>
-        </p:txBody>
-      </p:sp>
-      <p:sp>
-        <p:nvSpPr>
-          <p:cNvPr id="11" name=""/>
-          <p:cNvSpPr>
-            <a:spLocks noGrp="1"/>
-          </p:cNvSpPr>
-          <p:nvPr>
-            <p:ph/>
-          </p:nvPr>
-        </p:nvSpPr>
-        <p:spPr>
-          <a:xfrm>
-            <a:off x="4800600" y="4937760"/>
-            <a:ext cx="4023360" cy="320040"/>
-          </a:xfrm>
-        </p:spPr>
-        <p:txBody>
-          <a:bodyPr/>
-          <a:lstStyle/>
-          <a:p>
-            <a:pPr algn="l" marL="0" marR="0">
-              <a:lnSpc>
-                <a:spcPct val="100000"/>
-              </a:lnSpc>
-              <a:spcBef>
-                <a:spcPts val="0"/>
-              </a:spcBef>
-              <a:spcAft>
-                <a:spcPts val="0"/>
-              </a:spcAft>
-              <a:buNone/>
-            </a:pPr>
-            <a:r>
-              <a:rPr cap="none" sz="1100" i="0" b="1" u="none" strike="noStrike">
-                <a:solidFill>
-                  <a:srgbClr val="F39C12">
-                    <a:alpha val="100000"/>
-                  </a:srgbClr>
-                </a:solidFill>
-                <a:latin typeface="Calibri"/>
-                <a:cs typeface="Calibri"/>
-                <a:ea typeface="Calibri"/>
-                <a:sym typeface="Calibri"/>
-              </a:rPr>
-              <a:t>Principais setores receptores de FBCF:</a:t>
-            </a:r>
-          </a:p>
-        </p:txBody>
-      </p:sp>
-      <p:sp>
-        <p:nvSpPr>
-          <p:cNvPr id="12" name=""/>
-          <p:cNvSpPr>
-            <a:spLocks noGrp="1"/>
-          </p:cNvSpPr>
-          <p:nvPr>
-            <p:ph/>
-          </p:nvPr>
-        </p:nvSpPr>
-        <p:spPr>
-          <a:xfrm>
-            <a:off x="4800600" y="5285232"/>
-            <a:ext cx="4023360" cy="1005840"/>
-          </a:xfrm>
-        </p:spPr>
-        <p:txBody>
-          <a:bodyPr/>
-          <a:lstStyle/>
-          <a:p>
-            <a:pPr algn="l" marL="88900" marR="0">
-              <a:lnSpc>
-                <a:spcPct val="100000"/>
-              </a:lnSpc>
-              <a:spcBef>
-                <a:spcPts val="0"/>
-              </a:spcBef>
-              <a:spcAft>
-                <a:spcPts val="0"/>
-              </a:spcAft>
-              <a:buNone/>
-            </a:pPr>
-            <a:r>
-              <a:rPr cap="none" sz="1000" i="0" b="0" u="none" strike="noStrike">
-                <a:solidFill>
-                  <a:srgbClr val="E8ECF0">
-                    <a:alpha val="100000"/>
-                  </a:srgbClr>
-                </a:solidFill>
-                <a:latin typeface="Calibri"/>
-                <a:cs typeface="Calibri"/>
-                <a:ea typeface="Calibri"/>
-                <a:sym typeface="Calibri"/>
-              </a:rPr>
-              <a:t>• S40 Geração elétrica: 15%</a:t>
-            </a:r>
-          </a:p>
-          <a:p>
-            <a:pPr algn="l" marL="88900" marR="0">
-              <a:lnSpc>
-                <a:spcPct val="100000"/>
-              </a:lnSpc>
-              <a:spcBef>
-                <a:spcPts val="0"/>
-              </a:spcBef>
-              <a:spcAft>
-                <a:spcPts val="0"/>
-              </a:spcAft>
-              <a:buNone/>
-            </a:pPr>
-            <a:r>
-              <a:rPr cap="none" sz="1000" i="0" b="0" u="none" strike="noStrike">
-                <a:solidFill>
-                  <a:srgbClr val="E8ECF0">
-                    <a:alpha val="100000"/>
-                  </a:srgbClr>
-                </a:solidFill>
-                <a:latin typeface="Calibri"/>
-                <a:cs typeface="Calibri"/>
-                <a:ea typeface="Calibri"/>
-                <a:sym typeface="Calibri"/>
-              </a:rPr>
-              <a:t>• S44/S45 Construção: 16%</a:t>
-            </a:r>
-          </a:p>
-          <a:p>
-            <a:pPr algn="l" marL="88900" marR="0">
-              <a:lnSpc>
-                <a:spcPct val="100000"/>
-              </a:lnSpc>
-              <a:spcBef>
-                <a:spcPts val="0"/>
-              </a:spcBef>
-              <a:spcAft>
-                <a:spcPts val="0"/>
-              </a:spcAft>
-              <a:buNone/>
-            </a:pPr>
-            <a:r>
-              <a:rPr cap="none" sz="1000" i="0" b="0" u="none" strike="noStrike">
-                <a:solidFill>
-                  <a:srgbClr val="E8ECF0">
-                    <a:alpha val="100000"/>
-                  </a:srgbClr>
-                </a:solidFill>
-                <a:latin typeface="Calibri"/>
-                <a:cs typeface="Calibri"/>
-                <a:ea typeface="Calibri"/>
-                <a:sym typeface="Calibri"/>
-              </a:rPr>
-              <a:t>• S22 Biocombustíveis: 8%</a:t>
-            </a:r>
-          </a:p>
-          <a:p>
-            <a:pPr algn="l" marL="88900" marR="0">
-              <a:lnSpc>
-                <a:spcPct val="100000"/>
-              </a:lnSpc>
-              <a:spcBef>
-                <a:spcPts val="0"/>
-              </a:spcBef>
-              <a:spcAft>
-                <a:spcPts val="0"/>
-              </a:spcAft>
-              <a:buNone/>
-            </a:pPr>
-            <a:r>
-              <a:rPr cap="none" sz="1000" i="0" b="0" u="none" strike="noStrike">
-                <a:solidFill>
-                  <a:srgbClr val="E8ECF0">
-                    <a:alpha val="100000"/>
-                  </a:srgbClr>
-                </a:solidFill>
-                <a:latin typeface="Calibri"/>
-                <a:cs typeface="Calibri"/>
-                <a:ea typeface="Calibri"/>
-                <a:sym typeface="Calibri"/>
-              </a:rPr>
-              <a:t>• S27 Plásticos/borracha: 8%</a:t>
-            </a:r>
-          </a:p>
-          <a:p>
-            <a:pPr algn="l" marL="88900" marR="0">
-              <a:lnSpc>
-                <a:spcPct val="100000"/>
-              </a:lnSpc>
-              <a:spcBef>
-                <a:spcPts val="0"/>
-              </a:spcBef>
-              <a:spcAft>
-                <a:spcPts val="0"/>
-              </a:spcAft>
-              <a:buNone/>
-            </a:pPr>
-            <a:r>
-              <a:rPr cap="none" sz="1000" i="0" b="0" u="none" strike="noStrike">
-                <a:solidFill>
-                  <a:srgbClr val="E8ECF0">
-                    <a:alpha val="100000"/>
-                  </a:srgbClr>
-                </a:solidFill>
-                <a:latin typeface="Calibri"/>
-                <a:cs typeface="Calibri"/>
-                <a:ea typeface="Calibri"/>
-                <a:sym typeface="Calibri"/>
-              </a:rPr>
-              <a:t>• S36+S37 Veículos: 12%</a:t>
+              <a:t>▸  Maiores receptores: geração, construção, biocomb., veículos</a:t>
             </a:r>
           </a:p>
         </p:txBody>
@@ -10565,37 +9901,28 @@
             <a:off x="0" y="0"/>
             <a:ext cx="9144000" cy="6858000"/>
           </a:xfrm>
-        </p:spPr>
-        <p:txBody>
-          <a:bodyPr/>
-          <a:lstStyle/>
-          <a:p>
-            <a:pPr algn="l" marL="0" marR="0">
-              <a:lnSpc>
-                <a:spcPct val="100000"/>
-              </a:lnSpc>
-              <a:spcBef>
-                <a:spcPts val="0"/>
-              </a:spcBef>
-              <a:spcAft>
-                <a:spcPts val="0"/>
-              </a:spcAft>
-              <a:buNone/>
-            </a:pPr>
-            <a:r>
-              <a:rPr cap="none" sz="100" i="0" b="0" u="none" strike="noStrike">
-                <a:solidFill>
-                  <a:srgbClr val="1C2B4A">
-                    <a:alpha val="100000"/>
-                  </a:srgbClr>
-                </a:solidFill>
-                <a:latin typeface="Calibri"/>
-                <a:cs typeface="Calibri"/>
-                <a:ea typeface="Calibri"/>
-                <a:sym typeface="Calibri"/>
-              </a:rPr>
-              <a:t/>
-            </a:r>
+          <a:solidFill>
+            <a:srgbClr val="1C2B4A">
+              <a:alpha val="100000"/>
+            </a:srgbClr>
+          </a:solidFill>
+        </p:spPr>
+        <p:txBody>
+          <a:bodyPr/>
+          <a:lstStyle/>
+          <a:p>
+            <a:pPr algn="l" marL="0" marR="0">
+              <a:lnSpc>
+                <a:spcPct val="100000"/>
+              </a:lnSpc>
+              <a:spcBef>
+                <a:spcPts val="0"/>
+              </a:spcBef>
+              <a:spcAft>
+                <a:spcPts val="0"/>
+              </a:spcAft>
+              <a:buNone/>
+            </a:pPr>
           </a:p>
         </p:txBody>
       </p:sp>
@@ -10614,37 +9941,28 @@
             <a:off x="0" y="0"/>
             <a:ext cx="9144000" cy="822960"/>
           </a:xfrm>
-        </p:spPr>
-        <p:txBody>
-          <a:bodyPr/>
-          <a:lstStyle/>
-          <a:p>
-            <a:pPr algn="l" marL="0" marR="0">
-              <a:lnSpc>
-                <a:spcPct val="100000"/>
-              </a:lnSpc>
-              <a:spcBef>
-                <a:spcPts val="0"/>
-              </a:spcBef>
-              <a:spcAft>
-                <a:spcPts val="0"/>
-              </a:spcAft>
-              <a:buNone/>
-            </a:pPr>
-            <a:r>
-              <a:rPr cap="none" sz="100" i="0" b="0" u="none" strike="noStrike">
-                <a:solidFill>
-                  <a:srgbClr val="378ADD">
-                    <a:alpha val="100000"/>
-                  </a:srgbClr>
-                </a:solidFill>
-                <a:latin typeface="Calibri"/>
-                <a:cs typeface="Calibri"/>
-                <a:ea typeface="Calibri"/>
-                <a:sym typeface="Calibri"/>
-              </a:rPr>
-              <a:t/>
-            </a:r>
+          <a:solidFill>
+            <a:srgbClr val="378ADD">
+              <a:alpha val="100000"/>
+            </a:srgbClr>
+          </a:solidFill>
+        </p:spPr>
+        <p:txBody>
+          <a:bodyPr/>
+          <a:lstStyle/>
+          <a:p>
+            <a:pPr algn="l" marL="0" marR="0">
+              <a:lnSpc>
+                <a:spcPct val="100000"/>
+              </a:lnSpc>
+              <a:spcBef>
+                <a:spcPts val="0"/>
+              </a:spcBef>
+              <a:spcAft>
+                <a:spcPts val="0"/>
+              </a:spcAft>
+              <a:buNone/>
+            </a:pPr>
           </a:p>
         </p:txBody>
       </p:sp>
@@ -10810,37 +10128,28 @@
             <a:off x="137160" y="1874520"/>
             <a:ext cx="2148840" cy="2057400"/>
           </a:xfrm>
-        </p:spPr>
-        <p:txBody>
-          <a:bodyPr/>
-          <a:lstStyle/>
-          <a:p>
-            <a:pPr algn="l" marL="0" marR="0">
-              <a:lnSpc>
-                <a:spcPct val="100000"/>
-              </a:lnSpc>
-              <a:spcBef>
-                <a:spcPts val="0"/>
-              </a:spcBef>
-              <a:spcAft>
-                <a:spcPts val="0"/>
-              </a:spcAft>
-              <a:buNone/>
-            </a:pPr>
-            <a:r>
-              <a:rPr cap="none" sz="100" i="0" b="0" u="none" strike="noStrike">
-                <a:solidFill>
-                  <a:srgbClr val="1A2840">
-                    <a:alpha val="100000"/>
-                  </a:srgbClr>
-                </a:solidFill>
-                <a:latin typeface="Calibri"/>
-                <a:cs typeface="Calibri"/>
-                <a:ea typeface="Calibri"/>
-                <a:sym typeface="Calibri"/>
-              </a:rPr>
-              <a:t/>
-            </a:r>
+          <a:solidFill>
+            <a:srgbClr val="1A2840">
+              <a:alpha val="100000"/>
+            </a:srgbClr>
+          </a:solidFill>
+        </p:spPr>
+        <p:txBody>
+          <a:bodyPr/>
+          <a:lstStyle/>
+          <a:p>
+            <a:pPr algn="l" marL="0" marR="0">
+              <a:lnSpc>
+                <a:spcPct val="100000"/>
+              </a:lnSpc>
+              <a:spcBef>
+                <a:spcPts val="0"/>
+              </a:spcBef>
+              <a:spcAft>
+                <a:spcPts val="0"/>
+              </a:spcAft>
+              <a:buNone/>
+            </a:pPr>
           </a:p>
         </p:txBody>
       </p:sp>
@@ -10859,37 +10168,28 @@
             <a:off x="228600" y="1938528"/>
             <a:ext cx="1965960" cy="54864"/>
           </a:xfrm>
-        </p:spPr>
-        <p:txBody>
-          <a:bodyPr/>
-          <a:lstStyle/>
-          <a:p>
-            <a:pPr algn="l" marL="0" marR="0">
-              <a:lnSpc>
-                <a:spcPct val="100000"/>
-              </a:lnSpc>
-              <a:spcBef>
-                <a:spcPts val="0"/>
-              </a:spcBef>
-              <a:spcAft>
-                <a:spcPts val="0"/>
-              </a:spcAft>
-              <a:buNone/>
-            </a:pPr>
-            <a:r>
-              <a:rPr cap="none" sz="100" i="0" b="0" u="none" strike="noStrike">
-                <a:solidFill>
-                  <a:srgbClr val="F39C12">
-                    <a:alpha val="100000"/>
-                  </a:srgbClr>
-                </a:solidFill>
-                <a:latin typeface="Calibri"/>
-                <a:cs typeface="Calibri"/>
-                <a:ea typeface="Calibri"/>
-                <a:sym typeface="Calibri"/>
-              </a:rPr>
-              <a:t/>
-            </a:r>
+          <a:solidFill>
+            <a:srgbClr val="F39C12">
+              <a:alpha val="100000"/>
+            </a:srgbClr>
+          </a:solidFill>
+        </p:spPr>
+        <p:txBody>
+          <a:bodyPr/>
+          <a:lstStyle/>
+          <a:p>
+            <a:pPr algn="l" marL="0" marR="0">
+              <a:lnSpc>
+                <a:spcPct val="100000"/>
+              </a:lnSpc>
+              <a:spcBef>
+                <a:spcPts val="0"/>
+              </a:spcBef>
+              <a:spcAft>
+                <a:spcPts val="0"/>
+              </a:spcAft>
+              <a:buNone/>
+            </a:pPr>
           </a:p>
         </p:txBody>
       </p:sp>
@@ -10986,7 +10286,7 @@
                 <a:ea typeface="Calibri"/>
                 <a:sym typeface="Calibri"/>
               </a:rPr>
-              <a:t>Combustível fóssil → eletricidade + H₂</a:t>
+              <a:t>Foss+H₂ → eletricidade</a:t>
             </a:r>
           </a:p>
         </p:txBody>
@@ -11055,37 +10355,28 @@
             <a:off x="2395728" y="1874520"/>
             <a:ext cx="2148840" cy="2057400"/>
           </a:xfrm>
-        </p:spPr>
-        <p:txBody>
-          <a:bodyPr/>
-          <a:lstStyle/>
-          <a:p>
-            <a:pPr algn="l" marL="0" marR="0">
-              <a:lnSpc>
-                <a:spcPct val="100000"/>
-              </a:lnSpc>
-              <a:spcBef>
-                <a:spcPts val="0"/>
-              </a:spcBef>
-              <a:spcAft>
-                <a:spcPts val="0"/>
-              </a:spcAft>
-              <a:buNone/>
-            </a:pPr>
-            <a:r>
-              <a:rPr cap="none" sz="100" i="0" b="0" u="none" strike="noStrike">
-                <a:solidFill>
-                  <a:srgbClr val="1A2840">
-                    <a:alpha val="100000"/>
-                  </a:srgbClr>
-                </a:solidFill>
-                <a:latin typeface="Calibri"/>
-                <a:cs typeface="Calibri"/>
-                <a:ea typeface="Calibri"/>
-                <a:sym typeface="Calibri"/>
-              </a:rPr>
-              <a:t/>
-            </a:r>
+          <a:solidFill>
+            <a:srgbClr val="1A2840">
+              <a:alpha val="100000"/>
+            </a:srgbClr>
+          </a:solidFill>
+        </p:spPr>
+        <p:txBody>
+          <a:bodyPr/>
+          <a:lstStyle/>
+          <a:p>
+            <a:pPr algn="l" marL="0" marR="0">
+              <a:lnSpc>
+                <a:spcPct val="100000"/>
+              </a:lnSpc>
+              <a:spcBef>
+                <a:spcPts val="0"/>
+              </a:spcBef>
+              <a:spcAft>
+                <a:spcPts val="0"/>
+              </a:spcAft>
+              <a:buNone/>
+            </a:pPr>
           </a:p>
         </p:txBody>
       </p:sp>
@@ -11104,37 +10395,28 @@
             <a:off x="2487168" y="1938528"/>
             <a:ext cx="1965960" cy="54864"/>
           </a:xfrm>
-        </p:spPr>
-        <p:txBody>
-          <a:bodyPr/>
-          <a:lstStyle/>
-          <a:p>
-            <a:pPr algn="l" marL="0" marR="0">
-              <a:lnSpc>
-                <a:spcPct val="100000"/>
-              </a:lnSpc>
-              <a:spcBef>
-                <a:spcPts val="0"/>
-              </a:spcBef>
-              <a:spcAft>
-                <a:spcPts val="0"/>
-              </a:spcAft>
-              <a:buNone/>
-            </a:pPr>
-            <a:r>
-              <a:rPr cap="none" sz="100" i="0" b="0" u="none" strike="noStrike">
-                <a:solidFill>
-                  <a:srgbClr val="F39C12">
-                    <a:alpha val="100000"/>
-                  </a:srgbClr>
-                </a:solidFill>
-                <a:latin typeface="Calibri"/>
-                <a:cs typeface="Calibri"/>
-                <a:ea typeface="Calibri"/>
-                <a:sym typeface="Calibri"/>
-              </a:rPr>
-              <a:t/>
-            </a:r>
+          <a:solidFill>
+            <a:srgbClr val="F39C12">
+              <a:alpha val="100000"/>
+            </a:srgbClr>
+          </a:solidFill>
+        </p:spPr>
+        <p:txBody>
+          <a:bodyPr/>
+          <a:lstStyle/>
+          <a:p>
+            <a:pPr algn="l" marL="0" marR="0">
+              <a:lnSpc>
+                <a:spcPct val="100000"/>
+              </a:lnSpc>
+              <a:spcBef>
+                <a:spcPts val="0"/>
+              </a:spcBef>
+              <a:spcAft>
+                <a:spcPts val="0"/>
+              </a:spcAft>
+              <a:buNone/>
+            </a:pPr>
           </a:p>
         </p:txBody>
       </p:sp>
@@ -11231,7 +10513,7 @@
                 <a:ea typeface="Calibri"/>
                 <a:sym typeface="Calibri"/>
               </a:rPr>
-              <a:t>Calcário + biomassa substituem coque</a:t>
+              <a:t>Coque → biomassa + clínquer</a:t>
             </a:r>
           </a:p>
         </p:txBody>
@@ -11300,37 +10582,28 @@
             <a:off x="4654296" y="1874520"/>
             <a:ext cx="2148840" cy="2057400"/>
           </a:xfrm>
-        </p:spPr>
-        <p:txBody>
-          <a:bodyPr/>
-          <a:lstStyle/>
-          <a:p>
-            <a:pPr algn="l" marL="0" marR="0">
-              <a:lnSpc>
-                <a:spcPct val="100000"/>
-              </a:lnSpc>
-              <a:spcBef>
-                <a:spcPts val="0"/>
-              </a:spcBef>
-              <a:spcAft>
-                <a:spcPts val="0"/>
-              </a:spcAft>
-              <a:buNone/>
-            </a:pPr>
-            <a:r>
-              <a:rPr cap="none" sz="100" i="0" b="0" u="none" strike="noStrike">
-                <a:solidFill>
-                  <a:srgbClr val="1A2840">
-                    <a:alpha val="100000"/>
-                  </a:srgbClr>
-                </a:solidFill>
-                <a:latin typeface="Calibri"/>
-                <a:cs typeface="Calibri"/>
-                <a:ea typeface="Calibri"/>
-                <a:sym typeface="Calibri"/>
-              </a:rPr>
-              <a:t/>
-            </a:r>
+          <a:solidFill>
+            <a:srgbClr val="1A2840">
+              <a:alpha val="100000"/>
+            </a:srgbClr>
+          </a:solidFill>
+        </p:spPr>
+        <p:txBody>
+          <a:bodyPr/>
+          <a:lstStyle/>
+          <a:p>
+            <a:pPr algn="l" marL="0" marR="0">
+              <a:lnSpc>
+                <a:spcPct val="100000"/>
+              </a:lnSpc>
+              <a:spcBef>
+                <a:spcPts val="0"/>
+              </a:spcBef>
+              <a:spcAft>
+                <a:spcPts val="0"/>
+              </a:spcAft>
+              <a:buNone/>
+            </a:pPr>
           </a:p>
         </p:txBody>
       </p:sp>
@@ -11349,37 +10622,28 @@
             <a:off x="4745736" y="1938528"/>
             <a:ext cx="1965960" cy="54864"/>
           </a:xfrm>
-        </p:spPr>
-        <p:txBody>
-          <a:bodyPr/>
-          <a:lstStyle/>
-          <a:p>
-            <a:pPr algn="l" marL="0" marR="0">
-              <a:lnSpc>
-                <a:spcPct val="100000"/>
-              </a:lnSpc>
-              <a:spcBef>
-                <a:spcPts val="0"/>
-              </a:spcBef>
-              <a:spcAft>
-                <a:spcPts val="0"/>
-              </a:spcAft>
-              <a:buNone/>
-            </a:pPr>
-            <a:r>
-              <a:rPr cap="none" sz="100" i="0" b="0" u="none" strike="noStrike">
-                <a:solidFill>
-                  <a:srgbClr val="F39C12">
-                    <a:alpha val="100000"/>
-                  </a:srgbClr>
-                </a:solidFill>
-                <a:latin typeface="Calibri"/>
-                <a:cs typeface="Calibri"/>
-                <a:ea typeface="Calibri"/>
-                <a:sym typeface="Calibri"/>
-              </a:rPr>
-              <a:t/>
-            </a:r>
+          <a:solidFill>
+            <a:srgbClr val="F39C12">
+              <a:alpha val="100000"/>
+            </a:srgbClr>
+          </a:solidFill>
+        </p:spPr>
+        <p:txBody>
+          <a:bodyPr/>
+          <a:lstStyle/>
+          <a:p>
+            <a:pPr algn="l" marL="0" marR="0">
+              <a:lnSpc>
+                <a:spcPct val="100000"/>
+              </a:lnSpc>
+              <a:spcBef>
+                <a:spcPts val="0"/>
+              </a:spcBef>
+              <a:spcAft>
+                <a:spcPts val="0"/>
+              </a:spcAft>
+              <a:buNone/>
+            </a:pPr>
           </a:p>
         </p:txBody>
       </p:sp>
@@ -11476,7 +10740,7 @@
                 <a:ea typeface="Calibri"/>
                 <a:sym typeface="Calibri"/>
               </a:rPr>
-              <a:t>Nafta → bioquímicos / eletroquímica</a:t>
+              <a:t>Nafta → bioquímicos</a:t>
             </a:r>
           </a:p>
         </p:txBody>
@@ -11545,37 +10809,28 @@
             <a:off x="6912864" y="1874520"/>
             <a:ext cx="2148840" cy="2057400"/>
           </a:xfrm>
-        </p:spPr>
-        <p:txBody>
-          <a:bodyPr/>
-          <a:lstStyle/>
-          <a:p>
-            <a:pPr algn="l" marL="0" marR="0">
-              <a:lnSpc>
-                <a:spcPct val="100000"/>
-              </a:lnSpc>
-              <a:spcBef>
-                <a:spcPts val="0"/>
-              </a:spcBef>
-              <a:spcAft>
-                <a:spcPts val="0"/>
-              </a:spcAft>
-              <a:buNone/>
-            </a:pPr>
-            <a:r>
-              <a:rPr cap="none" sz="100" i="0" b="0" u="none" strike="noStrike">
-                <a:solidFill>
-                  <a:srgbClr val="1A2840">
-                    <a:alpha val="100000"/>
-                  </a:srgbClr>
-                </a:solidFill>
-                <a:latin typeface="Calibri"/>
-                <a:cs typeface="Calibri"/>
-                <a:ea typeface="Calibri"/>
-                <a:sym typeface="Calibri"/>
-              </a:rPr>
-              <a:t/>
-            </a:r>
+          <a:solidFill>
+            <a:srgbClr val="1A2840">
+              <a:alpha val="100000"/>
+            </a:srgbClr>
+          </a:solidFill>
+        </p:spPr>
+        <p:txBody>
+          <a:bodyPr/>
+          <a:lstStyle/>
+          <a:p>
+            <a:pPr algn="l" marL="0" marR="0">
+              <a:lnSpc>
+                <a:spcPct val="100000"/>
+              </a:lnSpc>
+              <a:spcBef>
+                <a:spcPts val="0"/>
+              </a:spcBef>
+              <a:spcAft>
+                <a:spcPts val="0"/>
+              </a:spcAft>
+              <a:buNone/>
+            </a:pPr>
           </a:p>
         </p:txBody>
       </p:sp>
@@ -11594,37 +10849,28 @@
             <a:off x="7004304" y="1938528"/>
             <a:ext cx="1965960" cy="54864"/>
           </a:xfrm>
-        </p:spPr>
-        <p:txBody>
-          <a:bodyPr/>
-          <a:lstStyle/>
-          <a:p>
-            <a:pPr algn="l" marL="0" marR="0">
-              <a:lnSpc>
-                <a:spcPct val="100000"/>
-              </a:lnSpc>
-              <a:spcBef>
-                <a:spcPts val="0"/>
-              </a:spcBef>
-              <a:spcAft>
-                <a:spcPts val="0"/>
-              </a:spcAft>
-              <a:buNone/>
-            </a:pPr>
-            <a:r>
-              <a:rPr cap="none" sz="100" i="0" b="0" u="none" strike="noStrike">
-                <a:solidFill>
-                  <a:srgbClr val="F39C12">
-                    <a:alpha val="100000"/>
-                  </a:srgbClr>
-                </a:solidFill>
-                <a:latin typeface="Calibri"/>
-                <a:cs typeface="Calibri"/>
-                <a:ea typeface="Calibri"/>
-                <a:sym typeface="Calibri"/>
-              </a:rPr>
-              <a:t/>
-            </a:r>
+          <a:solidFill>
+            <a:srgbClr val="F39C12">
+              <a:alpha val="100000"/>
+            </a:srgbClr>
+          </a:solidFill>
+        </p:spPr>
+        <p:txBody>
+          <a:bodyPr/>
+          <a:lstStyle/>
+          <a:p>
+            <a:pPr algn="l" marL="0" marR="0">
+              <a:lnSpc>
+                <a:spcPct val="100000"/>
+              </a:lnSpc>
+              <a:spcBef>
+                <a:spcPts val="0"/>
+              </a:spcBef>
+              <a:spcAft>
+                <a:spcPts val="0"/>
+              </a:spcAft>
+              <a:buNone/>
+            </a:pPr>
           </a:p>
         </p:txBody>
       </p:sp>
@@ -11770,7 +11016,7 @@
                 <a:ea typeface="Calibri"/>
                 <a:sym typeface="Calibri"/>
               </a:rPr>
-              <a:t>Foss 30,7% | Bio 26,1% | Elec 43,3%</a:t>
+              <a:t>Mix diverso BLUES-style</a:t>
             </a:r>
           </a:p>
         </p:txBody>
@@ -11790,37 +11036,28 @@
             <a:off x="137160" y="4160520"/>
             <a:ext cx="2148840" cy="2057400"/>
           </a:xfrm>
-        </p:spPr>
-        <p:txBody>
-          <a:bodyPr/>
-          <a:lstStyle/>
-          <a:p>
-            <a:pPr algn="l" marL="0" marR="0">
-              <a:lnSpc>
-                <a:spcPct val="100000"/>
-              </a:lnSpc>
-              <a:spcBef>
-                <a:spcPts val="0"/>
-              </a:spcBef>
-              <a:spcAft>
-                <a:spcPts val="0"/>
-              </a:spcAft>
-              <a:buNone/>
-            </a:pPr>
-            <a:r>
-              <a:rPr cap="none" sz="100" i="0" b="0" u="none" strike="noStrike">
-                <a:solidFill>
-                  <a:srgbClr val="1A2840">
-                    <a:alpha val="100000"/>
-                  </a:srgbClr>
-                </a:solidFill>
-                <a:latin typeface="Calibri"/>
-                <a:cs typeface="Calibri"/>
-                <a:ea typeface="Calibri"/>
-                <a:sym typeface="Calibri"/>
-              </a:rPr>
-              <a:t/>
-            </a:r>
+          <a:solidFill>
+            <a:srgbClr val="1A2840">
+              <a:alpha val="100000"/>
+            </a:srgbClr>
+          </a:solidFill>
+        </p:spPr>
+        <p:txBody>
+          <a:bodyPr/>
+          <a:lstStyle/>
+          <a:p>
+            <a:pPr algn="l" marL="0" marR="0">
+              <a:lnSpc>
+                <a:spcPct val="100000"/>
+              </a:lnSpc>
+              <a:spcBef>
+                <a:spcPts val="0"/>
+              </a:spcBef>
+              <a:spcAft>
+                <a:spcPts val="0"/>
+              </a:spcAft>
+              <a:buNone/>
+            </a:pPr>
           </a:p>
         </p:txBody>
       </p:sp>
@@ -11839,37 +11076,28 @@
             <a:off x="228600" y="4224528"/>
             <a:ext cx="1965960" cy="54864"/>
           </a:xfrm>
-        </p:spPr>
-        <p:txBody>
-          <a:bodyPr/>
-          <a:lstStyle/>
-          <a:p>
-            <a:pPr algn="l" marL="0" marR="0">
-              <a:lnSpc>
-                <a:spcPct val="100000"/>
-              </a:lnSpc>
-              <a:spcBef>
-                <a:spcPts val="0"/>
-              </a:spcBef>
-              <a:spcAft>
-                <a:spcPts val="0"/>
-              </a:spcAft>
-              <a:buNone/>
-            </a:pPr>
-            <a:r>
-              <a:rPr cap="none" sz="100" i="0" b="0" u="none" strike="noStrike">
-                <a:solidFill>
-                  <a:srgbClr val="378ADD">
-                    <a:alpha val="100000"/>
-                  </a:srgbClr>
-                </a:solidFill>
-                <a:latin typeface="Calibri"/>
-                <a:cs typeface="Calibri"/>
-                <a:ea typeface="Calibri"/>
-                <a:sym typeface="Calibri"/>
-              </a:rPr>
-              <a:t/>
-            </a:r>
+          <a:solidFill>
+            <a:srgbClr val="378ADD">
+              <a:alpha val="100000"/>
+            </a:srgbClr>
+          </a:solidFill>
+        </p:spPr>
+        <p:txBody>
+          <a:bodyPr/>
+          <a:lstStyle/>
+          <a:p>
+            <a:pPr algn="l" marL="0" marR="0">
+              <a:lnSpc>
+                <a:spcPct val="100000"/>
+              </a:lnSpc>
+              <a:spcBef>
+                <a:spcPts val="0"/>
+              </a:spcBef>
+              <a:spcAft>
+                <a:spcPts val="0"/>
+              </a:spcAft>
+              <a:buNone/>
+            </a:pPr>
           </a:p>
         </p:txBody>
       </p:sp>
@@ -11966,7 +11194,7 @@
                 <a:ea typeface="Calibri"/>
                 <a:sym typeface="Calibri"/>
               </a:rPr>
-              <a:t>Eletrificação + biocombustíveis (BLUES)</a:t>
+              <a:t>Eletrificação + biocombustíveis</a:t>
             </a:r>
           </a:p>
         </p:txBody>
@@ -12015,7 +11243,7 @@
                 <a:ea typeface="Calibri"/>
                 <a:sym typeface="Calibri"/>
               </a:rPr>
-              <a:t>Elec 0,36%→1,4×%| Bio 30,3%→?</a:t>
+              <a:t>Elec 0,4%→17% | Bio 30,3%→?</a:t>
             </a:r>
           </a:p>
         </p:txBody>
@@ -12035,37 +11263,28 @@
             <a:off x="2395728" y="4160520"/>
             <a:ext cx="2148840" cy="2057400"/>
           </a:xfrm>
-        </p:spPr>
-        <p:txBody>
-          <a:bodyPr/>
-          <a:lstStyle/>
-          <a:p>
-            <a:pPr algn="l" marL="0" marR="0">
-              <a:lnSpc>
-                <a:spcPct val="100000"/>
-              </a:lnSpc>
-              <a:spcBef>
-                <a:spcPts val="0"/>
-              </a:spcBef>
-              <a:spcAft>
-                <a:spcPts val="0"/>
-              </a:spcAft>
-              <a:buNone/>
-            </a:pPr>
-            <a:r>
-              <a:rPr cap="none" sz="100" i="0" b="0" u="none" strike="noStrike">
-                <a:solidFill>
-                  <a:srgbClr val="1A2840">
-                    <a:alpha val="100000"/>
-                  </a:srgbClr>
-                </a:solidFill>
-                <a:latin typeface="Calibri"/>
-                <a:cs typeface="Calibri"/>
-                <a:ea typeface="Calibri"/>
-                <a:sym typeface="Calibri"/>
-              </a:rPr>
-              <a:t/>
-            </a:r>
+          <a:solidFill>
+            <a:srgbClr val="1A2840">
+              <a:alpha val="100000"/>
+            </a:srgbClr>
+          </a:solidFill>
+        </p:spPr>
+        <p:txBody>
+          <a:bodyPr/>
+          <a:lstStyle/>
+          <a:p>
+            <a:pPr algn="l" marL="0" marR="0">
+              <a:lnSpc>
+                <a:spcPct val="100000"/>
+              </a:lnSpc>
+              <a:spcBef>
+                <a:spcPts val="0"/>
+              </a:spcBef>
+              <a:spcAft>
+                <a:spcPts val="0"/>
+              </a:spcAft>
+              <a:buNone/>
+            </a:pPr>
           </a:p>
         </p:txBody>
       </p:sp>
@@ -12084,37 +11303,28 @@
             <a:off x="2487168" y="4224528"/>
             <a:ext cx="1965960" cy="54864"/>
           </a:xfrm>
-        </p:spPr>
-        <p:txBody>
-          <a:bodyPr/>
-          <a:lstStyle/>
-          <a:p>
-            <a:pPr algn="l" marL="0" marR="0">
-              <a:lnSpc>
-                <a:spcPct val="100000"/>
-              </a:lnSpc>
-              <a:spcBef>
-                <a:spcPts val="0"/>
-              </a:spcBef>
-              <a:spcAft>
-                <a:spcPts val="0"/>
-              </a:spcAft>
-              <a:buNone/>
-            </a:pPr>
-            <a:r>
-              <a:rPr cap="none" sz="100" i="0" b="0" u="none" strike="noStrike">
-                <a:solidFill>
-                  <a:srgbClr val="1D9E75">
-                    <a:alpha val="100000"/>
-                  </a:srgbClr>
-                </a:solidFill>
-                <a:latin typeface="Calibri"/>
-                <a:cs typeface="Calibri"/>
-                <a:ea typeface="Calibri"/>
-                <a:sym typeface="Calibri"/>
-              </a:rPr>
-              <a:t/>
-            </a:r>
+          <a:solidFill>
+            <a:srgbClr val="1D9E75">
+              <a:alpha val="100000"/>
+            </a:srgbClr>
+          </a:solidFill>
+        </p:spPr>
+        <p:txBody>
+          <a:bodyPr/>
+          <a:lstStyle/>
+          <a:p>
+            <a:pPr algn="l" marL="0" marR="0">
+              <a:lnSpc>
+                <a:spcPct val="100000"/>
+              </a:lnSpc>
+              <a:spcBef>
+                <a:spcPts val="0"/>
+              </a:spcBef>
+              <a:spcAft>
+                <a:spcPts val="0"/>
+              </a:spcAft>
+              <a:buNone/>
+            </a:pPr>
           </a:p>
         </p:txBody>
       </p:sp>
@@ -12211,7 +11421,7 @@
                 <a:ea typeface="Calibri"/>
                 <a:sym typeface="Calibri"/>
               </a:rPr>
-              <a:t>S52/53/59/66-70: hotéis, imóveis, saúde, educação</a:t>
+              <a:t>S52/53/59/S66-70</a:t>
             </a:r>
           </a:p>
         </p:txBody>
@@ -12260,7 +11470,7 @@
                 <a:ea typeface="Calibri"/>
                 <a:sym typeface="Calibri"/>
               </a:rPr>
-              <a:t>Elec 62,5%→~95% | Gás 26%→5%</a:t>
+              <a:t>Elec 62,5%→95% | Gás 26%→5%</a:t>
             </a:r>
           </a:p>
         </p:txBody>
@@ -12280,37 +11490,28 @@
             <a:off x="4654296" y="4160520"/>
             <a:ext cx="2148840" cy="2057400"/>
           </a:xfrm>
-        </p:spPr>
-        <p:txBody>
-          <a:bodyPr/>
-          <a:lstStyle/>
-          <a:p>
-            <a:pPr algn="l" marL="0" marR="0">
-              <a:lnSpc>
-                <a:spcPct val="100000"/>
-              </a:lnSpc>
-              <a:spcBef>
-                <a:spcPts val="0"/>
-              </a:spcBef>
-              <a:spcAft>
-                <a:spcPts val="0"/>
-              </a:spcAft>
-              <a:buNone/>
-            </a:pPr>
-            <a:r>
-              <a:rPr cap="none" sz="100" i="0" b="0" u="none" strike="noStrike">
-                <a:solidFill>
-                  <a:srgbClr val="1A2840">
-                    <a:alpha val="100000"/>
-                  </a:srgbClr>
-                </a:solidFill>
-                <a:latin typeface="Calibri"/>
-                <a:cs typeface="Calibri"/>
-                <a:ea typeface="Calibri"/>
-                <a:sym typeface="Calibri"/>
-              </a:rPr>
-              <a:t/>
-            </a:r>
+          <a:solidFill>
+            <a:srgbClr val="1A2840">
+              <a:alpha val="100000"/>
+            </a:srgbClr>
+          </a:solidFill>
+        </p:spPr>
+        <p:txBody>
+          <a:bodyPr/>
+          <a:lstStyle/>
+          <a:p>
+            <a:pPr algn="l" marL="0" marR="0">
+              <a:lnSpc>
+                <a:spcPct val="100000"/>
+              </a:lnSpc>
+              <a:spcBef>
+                <a:spcPts val="0"/>
+              </a:spcBef>
+              <a:spcAft>
+                <a:spcPts val="0"/>
+              </a:spcAft>
+              <a:buNone/>
+            </a:pPr>
           </a:p>
         </p:txBody>
       </p:sp>
@@ -12329,37 +11530,28 @@
             <a:off x="4745736" y="4224528"/>
             <a:ext cx="1965960" cy="54864"/>
           </a:xfrm>
-        </p:spPr>
-        <p:txBody>
-          <a:bodyPr/>
-          <a:lstStyle/>
-          <a:p>
-            <a:pPr algn="l" marL="0" marR="0">
-              <a:lnSpc>
-                <a:spcPct val="100000"/>
-              </a:lnSpc>
-              <a:spcBef>
-                <a:spcPts val="0"/>
-              </a:spcBef>
-              <a:spcAft>
-                <a:spcPts val="0"/>
-              </a:spcAft>
-              <a:buNone/>
-            </a:pPr>
-            <a:r>
-              <a:rPr cap="none" sz="100" i="0" b="0" u="none" strike="noStrike">
-                <a:solidFill>
-                  <a:srgbClr val="3DC494">
-                    <a:alpha val="100000"/>
-                  </a:srgbClr>
-                </a:solidFill>
-                <a:latin typeface="Calibri"/>
-                <a:cs typeface="Calibri"/>
-                <a:ea typeface="Calibri"/>
-                <a:sym typeface="Calibri"/>
-              </a:rPr>
-              <a:t/>
-            </a:r>
+          <a:solidFill>
+            <a:srgbClr val="3DC494">
+              <a:alpha val="100000"/>
+            </a:srgbClr>
+          </a:solidFill>
+        </p:spPr>
+        <p:txBody>
+          <a:bodyPr/>
+          <a:lstStyle/>
+          <a:p>
+            <a:pPr algn="l" marL="0" marR="0">
+              <a:lnSpc>
+                <a:spcPct val="100000"/>
+              </a:lnSpc>
+              <a:spcBef>
+                <a:spcPts val="0"/>
+              </a:spcBef>
+              <a:spcAft>
+                <a:spcPts val="0"/>
+              </a:spcAft>
+              <a:buNone/>
+            </a:pPr>
           </a:p>
         </p:txBody>
       </p:sp>
@@ -12456,7 +11648,7 @@
                 <a:ea typeface="Calibri"/>
                 <a:sym typeface="Calibri"/>
               </a:rPr>
-              <a:t>Fóssil 14,6%→0,7% (normalize=FALSE)</a:t>
+              <a:t>Fóssil 14,6%→0,7% (2050)</a:t>
             </a:r>
           </a:p>
         </p:txBody>
@@ -12505,7 +11697,7 @@
                 <a:ea typeface="Calibri"/>
                 <a:sym typeface="Calibri"/>
               </a:rPr>
-              <a:t>Bio 9,3%→12,6% | Elec: sc=1</a:t>
+              <a:t>normalize=FALSE: redução genuína</a:t>
             </a:r>
           </a:p>
         </p:txBody>
@@ -12525,37 +11717,28 @@
             <a:off x="6912864" y="4160520"/>
             <a:ext cx="2148840" cy="2057400"/>
           </a:xfrm>
-        </p:spPr>
-        <p:txBody>
-          <a:bodyPr/>
-          <a:lstStyle/>
-          <a:p>
-            <a:pPr algn="l" marL="0" marR="0">
-              <a:lnSpc>
-                <a:spcPct val="100000"/>
-              </a:lnSpc>
-              <a:spcBef>
-                <a:spcPts val="0"/>
-              </a:spcBef>
-              <a:spcAft>
-                <a:spcPts val="0"/>
-              </a:spcAft>
-              <a:buNone/>
-            </a:pPr>
-            <a:r>
-              <a:rPr cap="none" sz="100" i="0" b="0" u="none" strike="noStrike">
-                <a:solidFill>
-                  <a:srgbClr val="1A2840">
-                    <a:alpha val="100000"/>
-                  </a:srgbClr>
-                </a:solidFill>
-                <a:latin typeface="Calibri"/>
-                <a:cs typeface="Calibri"/>
-                <a:ea typeface="Calibri"/>
-                <a:sym typeface="Calibri"/>
-              </a:rPr>
-              <a:t/>
-            </a:r>
+          <a:solidFill>
+            <a:srgbClr val="1A2840">
+              <a:alpha val="100000"/>
+            </a:srgbClr>
+          </a:solidFill>
+        </p:spPr>
+        <p:txBody>
+          <a:bodyPr/>
+          <a:lstStyle/>
+          <a:p>
+            <a:pPr algn="l" marL="0" marR="0">
+              <a:lnSpc>
+                <a:spcPct val="100000"/>
+              </a:lnSpc>
+              <a:spcBef>
+                <a:spcPts val="0"/>
+              </a:spcBef>
+              <a:spcAft>
+                <a:spcPts val="0"/>
+              </a:spcAft>
+              <a:buNone/>
+            </a:pPr>
           </a:p>
         </p:txBody>
       </p:sp>
@@ -12574,37 +11757,28 @@
             <a:off x="7004304" y="4224528"/>
             <a:ext cx="1965960" cy="54864"/>
           </a:xfrm>
-        </p:spPr>
-        <p:txBody>
-          <a:bodyPr/>
-          <a:lstStyle/>
-          <a:p>
-            <a:pPr algn="l" marL="0" marR="0">
-              <a:lnSpc>
-                <a:spcPct val="100000"/>
-              </a:lnSpc>
-              <a:spcBef>
-                <a:spcPts val="0"/>
-              </a:spcBef>
-              <a:spcAft>
-                <a:spcPts val="0"/>
-              </a:spcAft>
-              <a:buNone/>
-            </a:pPr>
-            <a:r>
-              <a:rPr cap="none" sz="100" i="0" b="0" u="none" strike="noStrike">
-                <a:solidFill>
-                  <a:srgbClr val="3DC494">
-                    <a:alpha val="100000"/>
-                  </a:srgbClr>
-                </a:solidFill>
-                <a:latin typeface="Calibri"/>
-                <a:cs typeface="Calibri"/>
-                <a:ea typeface="Calibri"/>
-                <a:sym typeface="Calibri"/>
-              </a:rPr>
-              <a:t/>
-            </a:r>
+          <a:solidFill>
+            <a:srgbClr val="3DC494">
+              <a:alpha val="100000"/>
+            </a:srgbClr>
+          </a:solidFill>
+        </p:spPr>
+        <p:txBody>
+          <a:bodyPr/>
+          <a:lstStyle/>
+          <a:p>
+            <a:pPr algn="l" marL="0" marR="0">
+              <a:lnSpc>
+                <a:spcPct val="100000"/>
+              </a:lnSpc>
+              <a:spcBef>
+                <a:spcPts val="0"/>
+              </a:spcBef>
+              <a:spcAft>
+                <a:spcPts val="0"/>
+              </a:spcAft>
+              <a:buNone/>
+            </a:pPr>
           </a:p>
         </p:txBody>
       </p:sp>
@@ -12652,7 +11826,7 @@
                 <a:ea typeface="Calibri"/>
                 <a:sym typeface="Calibri"/>
               </a:rPr>
-              <a:t>Refino / Gás (S19/43)</a:t>
+              <a:t>Refino/Gás (S19/43)</a:t>
             </a:r>
           </a:p>
         </p:txBody>
@@ -12701,7 +11875,7 @@
                 <a:ea typeface="Calibri"/>
                 <a:sym typeface="Calibri"/>
               </a:rPr>
-              <a:t>Indicador coprocessamento + biometano</a:t>
+              <a:t>Coprocessamento + biometano</a:t>
             </a:r>
           </a:p>
         </p:txBody>
@@ -12750,7 +11924,7 @@
                 <a:ea typeface="Calibri"/>
                 <a:sym typeface="Calibri"/>
               </a:rPr>
-              <a:t>S43: 0→~780 PJ biometano em 2050</a:t>
+              <a:t>S43: 0→~780 PJ biometano 2050</a:t>
             </a:r>
           </a:p>
         </p:txBody>
@@ -12799,7 +11973,7 @@
                 <a:ea typeface="Calibri"/>
                 <a:sym typeface="Calibri"/>
               </a:rPr>
-              <a:t>normalize=TRUE: preserva intensidade energética total (transporte, indústria)    |    normalize=FALSE: permite redução genuína (geração elétrica -95% fóssil)</a:t>
+              <a:t>normalize=TRUE preserva intensidade energética total (transporte, indústria)  |  normalize=FALSE permite redução genuína (geração elétrica −95% fóssil)</a:t>
             </a:r>
           </a:p>
         </p:txBody>
@@ -12844,37 +12018,28 @@
             <a:off x="0" y="0"/>
             <a:ext cx="9144000" cy="6858000"/>
           </a:xfrm>
-        </p:spPr>
-        <p:txBody>
-          <a:bodyPr/>
-          <a:lstStyle/>
-          <a:p>
-            <a:pPr algn="l" marL="0" marR="0">
-              <a:lnSpc>
-                <a:spcPct val="100000"/>
-              </a:lnSpc>
-              <a:spcBef>
-                <a:spcPts val="0"/>
-              </a:spcBef>
-              <a:spcAft>
-                <a:spcPts val="0"/>
-              </a:spcAft>
-              <a:buNone/>
-            </a:pPr>
-            <a:r>
-              <a:rPr cap="none" sz="100" i="0" b="0" u="none" strike="noStrike">
-                <a:solidFill>
-                  <a:srgbClr val="1C2B4A">
-                    <a:alpha val="100000"/>
-                  </a:srgbClr>
-                </a:solidFill>
-                <a:latin typeface="Calibri"/>
-                <a:cs typeface="Calibri"/>
-                <a:ea typeface="Calibri"/>
-                <a:sym typeface="Calibri"/>
-              </a:rPr>
-              <a:t/>
-            </a:r>
+          <a:solidFill>
+            <a:srgbClr val="1C2B4A">
+              <a:alpha val="100000"/>
+            </a:srgbClr>
+          </a:solidFill>
+        </p:spPr>
+        <p:txBody>
+          <a:bodyPr/>
+          <a:lstStyle/>
+          <a:p>
+            <a:pPr algn="l" marL="0" marR="0">
+              <a:lnSpc>
+                <a:spcPct val="100000"/>
+              </a:lnSpc>
+              <a:spcBef>
+                <a:spcPts val="0"/>
+              </a:spcBef>
+              <a:spcAft>
+                <a:spcPts val="0"/>
+              </a:spcAft>
+              <a:buNone/>
+            </a:pPr>
           </a:p>
         </p:txBody>
       </p:sp>
@@ -12893,37 +12058,28 @@
             <a:off x="0" y="0"/>
             <a:ext cx="9144000" cy="822960"/>
           </a:xfrm>
-        </p:spPr>
-        <p:txBody>
-          <a:bodyPr/>
-          <a:lstStyle/>
-          <a:p>
-            <a:pPr algn="l" marL="0" marR="0">
-              <a:lnSpc>
-                <a:spcPct val="100000"/>
-              </a:lnSpc>
-              <a:spcBef>
-                <a:spcPts val="0"/>
-              </a:spcBef>
-              <a:spcAft>
-                <a:spcPts val="0"/>
-              </a:spcAft>
-              <a:buNone/>
-            </a:pPr>
-            <a:r>
-              <a:rPr cap="none" sz="100" i="0" b="0" u="none" strike="noStrike">
-                <a:solidFill>
-                  <a:srgbClr val="F39C12">
-                    <a:alpha val="100000"/>
-                  </a:srgbClr>
-                </a:solidFill>
-                <a:latin typeface="Calibri"/>
-                <a:cs typeface="Calibri"/>
-                <a:ea typeface="Calibri"/>
-                <a:sym typeface="Calibri"/>
-              </a:rPr>
-              <a:t/>
-            </a:r>
+          <a:solidFill>
+            <a:srgbClr val="F39C12">
+              <a:alpha val="100000"/>
+            </a:srgbClr>
+          </a:solidFill>
+        </p:spPr>
+        <p:txBody>
+          <a:bodyPr/>
+          <a:lstStyle/>
+          <a:p>
+            <a:pPr algn="l" marL="0" marR="0">
+              <a:lnSpc>
+                <a:spcPct val="100000"/>
+              </a:lnSpc>
+              <a:spcBef>
+                <a:spcPts val="0"/>
+              </a:spcBef>
+              <a:spcAft>
+                <a:spcPts val="0"/>
+              </a:spcAft>
+              <a:buNone/>
+            </a:pPr>
           </a:p>
         </p:txBody>
       </p:sp>
@@ -13020,7 +12176,7 @@
                 <a:ea typeface="Calibri"/>
                 <a:sym typeface="Calibri"/>
               </a:rPr>
-              <a:t>Para setores energéticos-chave, a produção é ancorada em metas físicas do MMA — não apenas escala PIB</a:t>
+              <a:t>Para setores energéticos-chave, a produção é ancorada em metas físicas do MMA — não apenas escala PIB.</a:t>
             </a:r>
           </a:p>
         </p:txBody>
@@ -13040,37 +12196,28 @@
             <a:off x="182880" y="1508760"/>
             <a:ext cx="2834640" cy="2194560"/>
           </a:xfrm>
-        </p:spPr>
-        <p:txBody>
-          <a:bodyPr/>
-          <a:lstStyle/>
-          <a:p>
-            <a:pPr algn="l" marL="0" marR="0">
-              <a:lnSpc>
-                <a:spcPct val="100000"/>
-              </a:lnSpc>
-              <a:spcBef>
-                <a:spcPts val="0"/>
-              </a:spcBef>
-              <a:spcAft>
-                <a:spcPts val="0"/>
-              </a:spcAft>
-              <a:buNone/>
-            </a:pPr>
-            <a:r>
-              <a:rPr cap="none" sz="100" i="0" b="0" u="none" strike="noStrike">
-                <a:solidFill>
-                  <a:srgbClr val="1A2840">
-                    <a:alpha val="100000"/>
-                  </a:srgbClr>
-                </a:solidFill>
-                <a:latin typeface="Calibri"/>
-                <a:cs typeface="Calibri"/>
-                <a:ea typeface="Calibri"/>
-                <a:sym typeface="Calibri"/>
-              </a:rPr>
-              <a:t/>
-            </a:r>
+          <a:solidFill>
+            <a:srgbClr val="1A2840">
+              <a:alpha val="100000"/>
+            </a:srgbClr>
+          </a:solidFill>
+        </p:spPr>
+        <p:txBody>
+          <a:bodyPr/>
+          <a:lstStyle/>
+          <a:p>
+            <a:pPr algn="l" marL="0" marR="0">
+              <a:lnSpc>
+                <a:spcPct val="100000"/>
+              </a:lnSpc>
+              <a:spcBef>
+                <a:spcPts val="0"/>
+              </a:spcBef>
+              <a:spcAft>
+                <a:spcPts val="0"/>
+              </a:spcAft>
+              <a:buNone/>
+            </a:pPr>
           </a:p>
         </p:txBody>
       </p:sp>
@@ -13216,7 +12363,7 @@
                 <a:ea typeface="Calibri"/>
                 <a:sym typeface="Calibri"/>
               </a:rPr>
-              <a:t>Pico 2030, declínio 58% até 2050 (plano MMA)</a:t>
+              <a:t>Pico 2030, declínio 58% até 2050</a:t>
             </a:r>
           </a:p>
         </p:txBody>
@@ -13236,37 +12383,28 @@
             <a:off x="3172968" y="1508760"/>
             <a:ext cx="2834640" cy="2194560"/>
           </a:xfrm>
-        </p:spPr>
-        <p:txBody>
-          <a:bodyPr/>
-          <a:lstStyle/>
-          <a:p>
-            <a:pPr algn="l" marL="0" marR="0">
-              <a:lnSpc>
-                <a:spcPct val="100000"/>
-              </a:lnSpc>
-              <a:spcBef>
-                <a:spcPts val="0"/>
-              </a:spcBef>
-              <a:spcAft>
-                <a:spcPts val="0"/>
-              </a:spcAft>
-              <a:buNone/>
-            </a:pPr>
-            <a:r>
-              <a:rPr cap="none" sz="100" i="0" b="0" u="none" strike="noStrike">
-                <a:solidFill>
-                  <a:srgbClr val="1A2840">
-                    <a:alpha val="100000"/>
-                  </a:srgbClr>
-                </a:solidFill>
-                <a:latin typeface="Calibri"/>
-                <a:cs typeface="Calibri"/>
-                <a:ea typeface="Calibri"/>
-                <a:sym typeface="Calibri"/>
-              </a:rPr>
-              <a:t/>
-            </a:r>
+          <a:solidFill>
+            <a:srgbClr val="1A2840">
+              <a:alpha val="100000"/>
+            </a:srgbClr>
+          </a:solidFill>
+        </p:spPr>
+        <p:txBody>
+          <a:bodyPr/>
+          <a:lstStyle/>
+          <a:p>
+            <a:pPr algn="l" marL="0" marR="0">
+              <a:lnSpc>
+                <a:spcPct val="100000"/>
+              </a:lnSpc>
+              <a:spcBef>
+                <a:spcPts val="0"/>
+              </a:spcBef>
+              <a:spcAft>
+                <a:spcPts val="0"/>
+              </a:spcAft>
+              <a:buNone/>
+            </a:pPr>
           </a:p>
         </p:txBody>
       </p:sp>
@@ -13314,7 +12452,7 @@
                 <a:ea typeface="Calibri"/>
                 <a:sym typeface="Calibri"/>
               </a:rPr>
-              <a:t>S19 — Refino / Derivados</a:t>
+              <a:t>S19 — Refino/Derivados</a:t>
             </a:r>
           </a:p>
         </p:txBody>
@@ -13363,7 +12501,7 @@
                 <a:ea typeface="Calibri"/>
                 <a:sym typeface="Calibri"/>
               </a:rPr>
-              <a:t>MMA R40+R41: derivados doméstico + exportação (ktep)</a:t>
+              <a:t>MMA R40+R41: derivados dom. + exp. (ktep)</a:t>
             </a:r>
           </a:p>
         </p:txBody>
@@ -13412,7 +12550,7 @@
                 <a:ea typeface="Calibri"/>
                 <a:sym typeface="Calibri"/>
               </a:rPr>
-              <a:t>Permanece +6% mesmo com queda do cru (coprocessamento biomassa)</a:t>
+              <a:t>Permanece +6% com coprocessamento</a:t>
             </a:r>
           </a:p>
         </p:txBody>
@@ -13432,37 +12570,28 @@
             <a:off x="6163056" y="1508760"/>
             <a:ext cx="2834640" cy="2194560"/>
           </a:xfrm>
-        </p:spPr>
-        <p:txBody>
-          <a:bodyPr/>
-          <a:lstStyle/>
-          <a:p>
-            <a:pPr algn="l" marL="0" marR="0">
-              <a:lnSpc>
-                <a:spcPct val="100000"/>
-              </a:lnSpc>
-              <a:spcBef>
-                <a:spcPts val="0"/>
-              </a:spcBef>
-              <a:spcAft>
-                <a:spcPts val="0"/>
-              </a:spcAft>
-              <a:buNone/>
-            </a:pPr>
-            <a:r>
-              <a:rPr cap="none" sz="100" i="0" b="0" u="none" strike="noStrike">
-                <a:solidFill>
-                  <a:srgbClr val="1A2840">
-                    <a:alpha val="100000"/>
-                  </a:srgbClr>
-                </a:solidFill>
-                <a:latin typeface="Calibri"/>
-                <a:cs typeface="Calibri"/>
-                <a:ea typeface="Calibri"/>
-                <a:sym typeface="Calibri"/>
-              </a:rPr>
-              <a:t/>
-            </a:r>
+          <a:solidFill>
+            <a:srgbClr val="1A2840">
+              <a:alpha val="100000"/>
+            </a:srgbClr>
+          </a:solidFill>
+        </p:spPr>
+        <p:txBody>
+          <a:bodyPr/>
+          <a:lstStyle/>
+          <a:p>
+            <a:pPr algn="l" marL="0" marR="0">
+              <a:lnSpc>
+                <a:spcPct val="100000"/>
+              </a:lnSpc>
+              <a:spcBef>
+                <a:spcPts val="0"/>
+              </a:spcBef>
+              <a:spcAft>
+                <a:spcPts val="0"/>
+              </a:spcAft>
+              <a:buNone/>
+            </a:pPr>
           </a:p>
         </p:txBody>
       </p:sp>
@@ -13510,7 +12639,7 @@
                 <a:ea typeface="Calibri"/>
                 <a:sym typeface="Calibri"/>
               </a:rPr>
-              <a:t>S40/S42 — Geração e Transmissão</a:t>
+              <a:t>S40/S42 — Geração/Transm.</a:t>
             </a:r>
           </a:p>
         </p:txBody>
@@ -13559,7 +12688,7 @@
                 <a:ea typeface="Calibri"/>
                 <a:sym typeface="Calibri"/>
               </a:rPr>
-              <a:t>MMA R49: geração total TWh (base 2020 = 679 TWh)</a:t>
+              <a:t>MMA R49: geração total TWh (base 679 TWh)</a:t>
             </a:r>
           </a:p>
         </p:txBody>
@@ -13628,37 +12757,28 @@
             <a:off x="182880" y="3886200"/>
             <a:ext cx="2834640" cy="2194560"/>
           </a:xfrm>
-        </p:spPr>
-        <p:txBody>
-          <a:bodyPr/>
-          <a:lstStyle/>
-          <a:p>
-            <a:pPr algn="l" marL="0" marR="0">
-              <a:lnSpc>
-                <a:spcPct val="100000"/>
-              </a:lnSpc>
-              <a:spcBef>
-                <a:spcPts val="0"/>
-              </a:spcBef>
-              <a:spcAft>
-                <a:spcPts val="0"/>
-              </a:spcAft>
-              <a:buNone/>
-            </a:pPr>
-            <a:r>
-              <a:rPr cap="none" sz="100" i="0" b="0" u="none" strike="noStrike">
-                <a:solidFill>
-                  <a:srgbClr val="1A2840">
-                    <a:alpha val="100000"/>
-                  </a:srgbClr>
-                </a:solidFill>
-                <a:latin typeface="Calibri"/>
-                <a:cs typeface="Calibri"/>
-                <a:ea typeface="Calibri"/>
-                <a:sym typeface="Calibri"/>
-              </a:rPr>
-              <a:t/>
-            </a:r>
+          <a:solidFill>
+            <a:srgbClr val="1A2840">
+              <a:alpha val="100000"/>
+            </a:srgbClr>
+          </a:solidFill>
+        </p:spPr>
+        <p:txBody>
+          <a:bodyPr/>
+          <a:lstStyle/>
+          <a:p>
+            <a:pPr algn="l" marL="0" marR="0">
+              <a:lnSpc>
+                <a:spcPct val="100000"/>
+              </a:lnSpc>
+              <a:spcBef>
+                <a:spcPts val="0"/>
+              </a:spcBef>
+              <a:spcAft>
+                <a:spcPts val="0"/>
+              </a:spcAft>
+              <a:buNone/>
+            </a:pPr>
           </a:p>
         </p:txBody>
       </p:sp>
@@ -13706,7 +12826,7 @@
                 <a:ea typeface="Calibri"/>
                 <a:sym typeface="Calibri"/>
               </a:rPr>
-              <a:t>S22 — Biocombustíveis Avançados</a:t>
+              <a:t>S22 — Biocomb. Avançados</a:t>
             </a:r>
           </a:p>
         </p:txBody>
@@ -13755,7 +12875,7 @@
                 <a:ea typeface="Calibri"/>
                 <a:sym typeface="Calibri"/>
               </a:rPr>
-              <a:t>Etanol+CCS + Gasolina Verde + BioQAV + Bunker Verde</a:t>
+              <a:t>Etanol+CCS + Gasolina Verde + BioQAV + Bunker</a:t>
             </a:r>
           </a:p>
         </p:txBody>
@@ -13804,7 +12924,7 @@
                 <a:ea typeface="Calibri"/>
                 <a:sym typeface="Calibri"/>
               </a:rPr>
-              <a:t>Base 1020 PJ + incremento de cenário</a:t>
+              <a:t>Base 1020 PJ + incremento cenário</a:t>
             </a:r>
           </a:p>
         </p:txBody>
@@ -13824,37 +12944,28 @@
             <a:off x="3172968" y="3886200"/>
             <a:ext cx="2834640" cy="2194560"/>
           </a:xfrm>
-        </p:spPr>
-        <p:txBody>
-          <a:bodyPr/>
-          <a:lstStyle/>
-          <a:p>
-            <a:pPr algn="l" marL="0" marR="0">
-              <a:lnSpc>
-                <a:spcPct val="100000"/>
-              </a:lnSpc>
-              <a:spcBef>
-                <a:spcPts val="0"/>
-              </a:spcBef>
-              <a:spcAft>
-                <a:spcPts val="0"/>
-              </a:spcAft>
-              <a:buNone/>
-            </a:pPr>
-            <a:r>
-              <a:rPr cap="none" sz="100" i="0" b="0" u="none" strike="noStrike">
-                <a:solidFill>
-                  <a:srgbClr val="1A2840">
-                    <a:alpha val="100000"/>
-                  </a:srgbClr>
-                </a:solidFill>
-                <a:latin typeface="Calibri"/>
-                <a:cs typeface="Calibri"/>
-                <a:ea typeface="Calibri"/>
-                <a:sym typeface="Calibri"/>
-              </a:rPr>
-              <a:t/>
-            </a:r>
+          <a:solidFill>
+            <a:srgbClr val="1A2840">
+              <a:alpha val="100000"/>
+            </a:srgbClr>
+          </a:solidFill>
+        </p:spPr>
+        <p:txBody>
+          <a:bodyPr/>
+          <a:lstStyle/>
+          <a:p>
+            <a:pPr algn="l" marL="0" marR="0">
+              <a:lnSpc>
+                <a:spcPct val="100000"/>
+              </a:lnSpc>
+              <a:spcBef>
+                <a:spcPts val="0"/>
+              </a:spcBef>
+              <a:spcAft>
+                <a:spcPts val="0"/>
+              </a:spcAft>
+              <a:buNone/>
+            </a:pPr>
           </a:p>
         </p:txBody>
       </p:sp>
@@ -13951,7 +13062,7 @@
                 <a:ea typeface="Calibri"/>
                 <a:sym typeface="Calibri"/>
               </a:rPr>
-              <a:t>MMA R78: Diesel Verde (PJ) + base 230 PJ</a:t>
+              <a:t>MMA R78: Diesel Verde PJ + base 230 PJ</a:t>
             </a:r>
           </a:p>
         </p:txBody>
@@ -14000,7 +13111,7 @@
                 <a:ea typeface="Calibri"/>
                 <a:sym typeface="Calibri"/>
               </a:rPr>
-              <a:t>Substitui diesel mineral em frotas pesadas</a:t>
+              <a:t>Substitui diesel mineral em frotas</a:t>
             </a:r>
           </a:p>
         </p:txBody>
@@ -14020,37 +13131,28 @@
             <a:off x="6163056" y="3886200"/>
             <a:ext cx="2834640" cy="2194560"/>
           </a:xfrm>
-        </p:spPr>
-        <p:txBody>
-          <a:bodyPr/>
-          <a:lstStyle/>
-          <a:p>
-            <a:pPr algn="l" marL="0" marR="0">
-              <a:lnSpc>
-                <a:spcPct val="100000"/>
-              </a:lnSpc>
-              <a:spcBef>
-                <a:spcPts val="0"/>
-              </a:spcBef>
-              <a:spcAft>
-                <a:spcPts val="0"/>
-              </a:spcAft>
-              <a:buNone/>
-            </a:pPr>
-            <a:r>
-              <a:rPr cap="none" sz="100" i="0" b="0" u="none" strike="noStrike">
-                <a:solidFill>
-                  <a:srgbClr val="1A2840">
-                    <a:alpha val="100000"/>
-                  </a:srgbClr>
-                </a:solidFill>
-                <a:latin typeface="Calibri"/>
-                <a:cs typeface="Calibri"/>
-                <a:ea typeface="Calibri"/>
-                <a:sym typeface="Calibri"/>
-              </a:rPr>
-              <a:t/>
-            </a:r>
+          <a:solidFill>
+            <a:srgbClr val="1A2840">
+              <a:alpha val="100000"/>
+            </a:srgbClr>
+          </a:solidFill>
+        </p:spPr>
+        <p:txBody>
+          <a:bodyPr/>
+          <a:lstStyle/>
+          <a:p>
+            <a:pPr algn="l" marL="0" marR="0">
+              <a:lnSpc>
+                <a:spcPct val="100000"/>
+              </a:lnSpc>
+              <a:spcBef>
+                <a:spcPts val="0"/>
+              </a:spcBef>
+              <a:spcAft>
+                <a:spcPts val="0"/>
+              </a:spcAft>
+              <a:buNone/>
+            </a:pPr>
           </a:p>
         </p:txBody>
       </p:sp>
@@ -14098,7 +13200,7 @@
                 <a:ea typeface="Calibri"/>
                 <a:sym typeface="Calibri"/>
               </a:rPr>
-              <a:t>S29/S28 — Siderurgia / Cimento</a:t>
+              <a:t>S29/S28 — Sid./Cimento</a:t>
             </a:r>
           </a:p>
         </p:txBody>
@@ -14147,7 +13249,7 @@
                 <a:ea typeface="Calibri"/>
                 <a:sym typeface="Calibri"/>
               </a:rPr>
-              <a:t>MMA R27 aço (Mt) + R41 clinker (Mt)</a:t>
+              <a:t>MMA R27 aço (Mt) + R41 clínquer (Mt)</a:t>
             </a:r>
           </a:p>
         </p:txBody>
@@ -14241,37 +13343,28 @@
             <a:off x="0" y="0"/>
             <a:ext cx="9144000" cy="6858000"/>
           </a:xfrm>
-        </p:spPr>
-        <p:txBody>
-          <a:bodyPr/>
-          <a:lstStyle/>
-          <a:p>
-            <a:pPr algn="l" marL="0" marR="0">
-              <a:lnSpc>
-                <a:spcPct val="100000"/>
-              </a:lnSpc>
-              <a:spcBef>
-                <a:spcPts val="0"/>
-              </a:spcBef>
-              <a:spcAft>
-                <a:spcPts val="0"/>
-              </a:spcAft>
-              <a:buNone/>
-            </a:pPr>
-            <a:r>
-              <a:rPr cap="none" sz="100" i="0" b="0" u="none" strike="noStrike">
-                <a:solidFill>
-                  <a:srgbClr val="1C2B4A">
-                    <a:alpha val="100000"/>
-                  </a:srgbClr>
-                </a:solidFill>
-                <a:latin typeface="Calibri"/>
-                <a:cs typeface="Calibri"/>
-                <a:ea typeface="Calibri"/>
-                <a:sym typeface="Calibri"/>
-              </a:rPr>
-              <a:t/>
-            </a:r>
+          <a:solidFill>
+            <a:srgbClr val="1C2B4A">
+              <a:alpha val="100000"/>
+            </a:srgbClr>
+          </a:solidFill>
+        </p:spPr>
+        <p:txBody>
+          <a:bodyPr/>
+          <a:lstStyle/>
+          <a:p>
+            <a:pPr algn="l" marL="0" marR="0">
+              <a:lnSpc>
+                <a:spcPct val="100000"/>
+              </a:lnSpc>
+              <a:spcBef>
+                <a:spcPts val="0"/>
+              </a:spcBef>
+              <a:spcAft>
+                <a:spcPts val="0"/>
+              </a:spcAft>
+              <a:buNone/>
+            </a:pPr>
           </a:p>
         </p:txBody>
       </p:sp>
@@ -14290,37 +13383,28 @@
             <a:off x="0" y="0"/>
             <a:ext cx="9144000" cy="822960"/>
           </a:xfrm>
-        </p:spPr>
-        <p:txBody>
-          <a:bodyPr/>
-          <a:lstStyle/>
-          <a:p>
-            <a:pPr algn="l" marL="0" marR="0">
-              <a:lnSpc>
-                <a:spcPct val="100000"/>
-              </a:lnSpc>
-              <a:spcBef>
-                <a:spcPts val="0"/>
-              </a:spcBef>
-              <a:spcAft>
-                <a:spcPts val="0"/>
-              </a:spcAft>
-              <a:buNone/>
-            </a:pPr>
-            <a:r>
-              <a:rPr cap="none" sz="100" i="0" b="0" u="none" strike="noStrike">
-                <a:solidFill>
-                  <a:srgbClr val="1D9E75">
-                    <a:alpha val="100000"/>
-                  </a:srgbClr>
-                </a:solidFill>
-                <a:latin typeface="Calibri"/>
-                <a:cs typeface="Calibri"/>
-                <a:ea typeface="Calibri"/>
-                <a:sym typeface="Calibri"/>
-              </a:rPr>
-              <a:t/>
-            </a:r>
+          <a:solidFill>
+            <a:srgbClr val="1D9E75">
+              <a:alpha val="100000"/>
+            </a:srgbClr>
+          </a:solidFill>
+        </p:spPr>
+        <p:txBody>
+          <a:bodyPr/>
+          <a:lstStyle/>
+          <a:p>
+            <a:pPr algn="l" marL="0" marR="0">
+              <a:lnSpc>
+                <a:spcPct val="100000"/>
+              </a:lnSpc>
+              <a:spcBef>
+                <a:spcPts val="0"/>
+              </a:spcBef>
+              <a:spcAft>
+                <a:spcPts val="0"/>
+              </a:spcAft>
+              <a:buNone/>
+            </a:pPr>
           </a:p>
         </p:txBody>
       </p:sp>
@@ -14417,7 +13501,7 @@
                 <a:ea typeface="Calibri"/>
                 <a:sym typeface="Calibri"/>
               </a:rPr>
-              <a:t>Prêmio = efeito líquido da política 100D vs. crescimento de base (PIB sem transição)</a:t>
+              <a:t>Prêmio = efeito líquido 100D vs. crescimento de base (PIB sem transição — apenas escala GDP)</a:t>
             </a:r>
           </a:p>
         </p:txBody>
@@ -14437,37 +13521,28 @@
             <a:off x="137160" y="1325880"/>
             <a:ext cx="1691640" cy="1463040"/>
           </a:xfrm>
-        </p:spPr>
-        <p:txBody>
-          <a:bodyPr/>
-          <a:lstStyle/>
-          <a:p>
-            <a:pPr algn="l" marL="0" marR="0">
-              <a:lnSpc>
-                <a:spcPct val="100000"/>
-              </a:lnSpc>
-              <a:spcBef>
-                <a:spcPts val="0"/>
-              </a:spcBef>
-              <a:spcAft>
-                <a:spcPts val="0"/>
-              </a:spcAft>
-              <a:buNone/>
-            </a:pPr>
-            <a:r>
-              <a:rPr cap="none" sz="100" i="0" b="0" u="none" strike="noStrike">
-                <a:solidFill>
-                  <a:srgbClr val="1A2840">
-                    <a:alpha val="100000"/>
-                  </a:srgbClr>
-                </a:solidFill>
-                <a:latin typeface="Calibri"/>
-                <a:cs typeface="Calibri"/>
-                <a:ea typeface="Calibri"/>
-                <a:sym typeface="Calibri"/>
-              </a:rPr>
-              <a:t/>
-            </a:r>
+          <a:solidFill>
+            <a:srgbClr val="1A2840">
+              <a:alpha val="100000"/>
+            </a:srgbClr>
+          </a:solidFill>
+        </p:spPr>
+        <p:txBody>
+          <a:bodyPr/>
+          <a:lstStyle/>
+          <a:p>
+            <a:pPr algn="l" marL="0" marR="0">
+              <a:lnSpc>
+                <a:spcPct val="100000"/>
+              </a:lnSpc>
+              <a:spcBef>
+                <a:spcPts val="0"/>
+              </a:spcBef>
+              <a:spcAft>
+                <a:spcPts val="0"/>
+              </a:spcAft>
+              <a:buNone/>
+            </a:pPr>
           </a:p>
         </p:txBody>
       </p:sp>
@@ -14613,7 +13688,7 @@
                 <a:ea typeface="Calibri"/>
                 <a:sym typeface="Calibri"/>
               </a:rPr>
-              <a:t>Valor Adicionado Total 2050</a:t>
+              <a:t>Valor Adicionado 2050</a:t>
             </a:r>
           </a:p>
         </p:txBody>
@@ -14633,37 +13708,28 @@
             <a:off x="1938528" y="1325880"/>
             <a:ext cx="1691640" cy="1463040"/>
           </a:xfrm>
-        </p:spPr>
-        <p:txBody>
-          <a:bodyPr/>
-          <a:lstStyle/>
-          <a:p>
-            <a:pPr algn="l" marL="0" marR="0">
-              <a:lnSpc>
-                <a:spcPct val="100000"/>
-              </a:lnSpc>
-              <a:spcBef>
-                <a:spcPts val="0"/>
-              </a:spcBef>
-              <a:spcAft>
-                <a:spcPts val="0"/>
-              </a:spcAft>
-              <a:buNone/>
-            </a:pPr>
-            <a:r>
-              <a:rPr cap="none" sz="100" i="0" b="0" u="none" strike="noStrike">
-                <a:solidFill>
-                  <a:srgbClr val="1A2840">
-                    <a:alpha val="100000"/>
-                  </a:srgbClr>
-                </a:solidFill>
-                <a:latin typeface="Calibri"/>
-                <a:cs typeface="Calibri"/>
-                <a:ea typeface="Calibri"/>
-                <a:sym typeface="Calibri"/>
-              </a:rPr>
-              <a:t/>
-            </a:r>
+          <a:solidFill>
+            <a:srgbClr val="1A2840">
+              <a:alpha val="100000"/>
+            </a:srgbClr>
+          </a:solidFill>
+        </p:spPr>
+        <p:txBody>
+          <a:bodyPr/>
+          <a:lstStyle/>
+          <a:p>
+            <a:pPr algn="l" marL="0" marR="0">
+              <a:lnSpc>
+                <a:spcPct val="100000"/>
+              </a:lnSpc>
+              <a:spcBef>
+                <a:spcPts val="0"/>
+              </a:spcBef>
+              <a:spcAft>
+                <a:spcPts val="0"/>
+              </a:spcAft>
+              <a:buNone/>
+            </a:pPr>
           </a:p>
         </p:txBody>
       </p:sp>
@@ -14829,37 +13895,28 @@
             <a:off x="3739896" y="1325880"/>
             <a:ext cx="1691640" cy="1463040"/>
           </a:xfrm>
-        </p:spPr>
-        <p:txBody>
-          <a:bodyPr/>
-          <a:lstStyle/>
-          <a:p>
-            <a:pPr algn="l" marL="0" marR="0">
-              <a:lnSpc>
-                <a:spcPct val="100000"/>
-              </a:lnSpc>
-              <a:spcBef>
-                <a:spcPts val="0"/>
-              </a:spcBef>
-              <a:spcAft>
-                <a:spcPts val="0"/>
-              </a:spcAft>
-              <a:buNone/>
-            </a:pPr>
-            <a:r>
-              <a:rPr cap="none" sz="100" i="0" b="0" u="none" strike="noStrike">
-                <a:solidFill>
-                  <a:srgbClr val="1A2840">
-                    <a:alpha val="100000"/>
-                  </a:srgbClr>
-                </a:solidFill>
-                <a:latin typeface="Calibri"/>
-                <a:cs typeface="Calibri"/>
-                <a:ea typeface="Calibri"/>
-                <a:sym typeface="Calibri"/>
-              </a:rPr>
-              <a:t/>
-            </a:r>
+          <a:solidFill>
+            <a:srgbClr val="1A2840">
+              <a:alpha val="100000"/>
+            </a:srgbClr>
+          </a:solidFill>
+        </p:spPr>
+        <p:txBody>
+          <a:bodyPr/>
+          <a:lstStyle/>
+          <a:p>
+            <a:pPr algn="l" marL="0" marR="0">
+              <a:lnSpc>
+                <a:spcPct val="100000"/>
+              </a:lnSpc>
+              <a:spcBef>
+                <a:spcPts val="0"/>
+              </a:spcBef>
+              <a:spcAft>
+                <a:spcPts val="0"/>
+              </a:spcAft>
+              <a:buNone/>
+            </a:pPr>
           </a:p>
         </p:txBody>
       </p:sp>
@@ -14956,7 +14013,7 @@
                 <a:ea typeface="Calibri"/>
                 <a:sym typeface="Calibri"/>
               </a:rPr>
-              <a:t>Empregos — Nível 100D</a:t>
+              <a:t>Empregos 100D</a:t>
             </a:r>
           </a:p>
         </p:txBody>
@@ -15005,7 +14062,7 @@
                 <a:ea typeface="Calibri"/>
                 <a:sym typeface="Calibri"/>
               </a:rPr>
-              <a:t>Total postos trabalho 2050</a:t>
+              <a:t>Postos de trabalho 2050</a:t>
             </a:r>
           </a:p>
         </p:txBody>
@@ -15025,37 +14082,28 @@
             <a:off x="5541264" y="1325880"/>
             <a:ext cx="1691640" cy="1463040"/>
           </a:xfrm>
-        </p:spPr>
-        <p:txBody>
-          <a:bodyPr/>
-          <a:lstStyle/>
-          <a:p>
-            <a:pPr algn="l" marL="0" marR="0">
-              <a:lnSpc>
-                <a:spcPct val="100000"/>
-              </a:lnSpc>
-              <a:spcBef>
-                <a:spcPts val="0"/>
-              </a:spcBef>
-              <a:spcAft>
-                <a:spcPts val="0"/>
-              </a:spcAft>
-              <a:buNone/>
-            </a:pPr>
-            <a:r>
-              <a:rPr cap="none" sz="100" i="0" b="0" u="none" strike="noStrike">
-                <a:solidFill>
-                  <a:srgbClr val="1A2840">
-                    <a:alpha val="100000"/>
-                  </a:srgbClr>
-                </a:solidFill>
-                <a:latin typeface="Calibri"/>
-                <a:cs typeface="Calibri"/>
-                <a:ea typeface="Calibri"/>
-                <a:sym typeface="Calibri"/>
-              </a:rPr>
-              <a:t/>
-            </a:r>
+          <a:solidFill>
+            <a:srgbClr val="1A2840">
+              <a:alpha val="100000"/>
+            </a:srgbClr>
+          </a:solidFill>
+        </p:spPr>
+        <p:txBody>
+          <a:bodyPr/>
+          <a:lstStyle/>
+          <a:p>
+            <a:pPr algn="l" marL="0" marR="0">
+              <a:lnSpc>
+                <a:spcPct val="100000"/>
+              </a:lnSpc>
+              <a:spcBef>
+                <a:spcPts val="0"/>
+              </a:spcBef>
+              <a:spcAft>
+                <a:spcPts val="0"/>
+              </a:spcAft>
+              <a:buNone/>
+            </a:pPr>
           </a:p>
         </p:txBody>
       </p:sp>
@@ -15152,7 +14200,7 @@
                 <a:ea typeface="Calibri"/>
                 <a:sym typeface="Calibri"/>
               </a:rPr>
-              <a:t>Prêmio Empregos 2050</a:t>
+              <a:t>Prêmio Emprego 2050</a:t>
             </a:r>
           </a:p>
         </p:txBody>
@@ -15221,37 +14269,28 @@
             <a:off x="7342632" y="1325880"/>
             <a:ext cx="1691640" cy="1463040"/>
           </a:xfrm>
-        </p:spPr>
-        <p:txBody>
-          <a:bodyPr/>
-          <a:lstStyle/>
-          <a:p>
-            <a:pPr algn="l" marL="0" marR="0">
-              <a:lnSpc>
-                <a:spcPct val="100000"/>
-              </a:lnSpc>
-              <a:spcBef>
-                <a:spcPts val="0"/>
-              </a:spcBef>
-              <a:spcAft>
-                <a:spcPts val="0"/>
-              </a:spcAft>
-              <a:buNone/>
-            </a:pPr>
-            <a:r>
-              <a:rPr cap="none" sz="100" i="0" b="0" u="none" strike="noStrike">
-                <a:solidFill>
-                  <a:srgbClr val="1A2840">
-                    <a:alpha val="100000"/>
-                  </a:srgbClr>
-                </a:solidFill>
-                <a:latin typeface="Calibri"/>
-                <a:cs typeface="Calibri"/>
-                <a:ea typeface="Calibri"/>
-                <a:sym typeface="Calibri"/>
-              </a:rPr>
-              <a:t/>
-            </a:r>
+          <a:solidFill>
+            <a:srgbClr val="1A2840">
+              <a:alpha val="100000"/>
+            </a:srgbClr>
+          </a:solidFill>
+        </p:spPr>
+        <p:txBody>
+          <a:bodyPr/>
+          <a:lstStyle/>
+          <a:p>
+            <a:pPr algn="l" marL="0" marR="0">
+              <a:lnSpc>
+                <a:spcPct val="100000"/>
+              </a:lnSpc>
+              <a:spcBef>
+                <a:spcPts val="0"/>
+              </a:spcBef>
+              <a:spcAft>
+                <a:spcPts val="0"/>
+              </a:spcAft>
+              <a:buNone/>
+            </a:pPr>
           </a:p>
         </p:txBody>
       </p:sp>
@@ -15348,7 +14387,7 @@
                 <a:ea typeface="Calibri"/>
                 <a:sym typeface="Calibri"/>
               </a:rPr>
-              <a:t>Prêmio Empregos 2030</a:t>
+              <a:t>Prêmio Emprego 2030</a:t>
             </a:r>
           </a:p>
         </p:txBody>
@@ -15466,37 +14505,28 @@
             <a:off x="228600" y="3383280"/>
             <a:ext cx="1005840" cy="347472"/>
           </a:xfrm>
-        </p:spPr>
-        <p:txBody>
-          <a:bodyPr/>
-          <a:lstStyle/>
-          <a:p>
-            <a:pPr algn="l" marL="0" marR="0">
-              <a:lnSpc>
-                <a:spcPct val="100000"/>
-              </a:lnSpc>
-              <a:spcBef>
-                <a:spcPts val="0"/>
-              </a:spcBef>
-              <a:spcAft>
-                <a:spcPts val="0"/>
-              </a:spcAft>
-              <a:buNone/>
-            </a:pPr>
-            <a:r>
-              <a:rPr cap="none" sz="100" i="0" b="0" u="none" strike="noStrike">
-                <a:solidFill>
-                  <a:srgbClr val="0D1F3C">
-                    <a:alpha val="100000"/>
-                  </a:srgbClr>
-                </a:solidFill>
-                <a:latin typeface="Calibri"/>
-                <a:cs typeface="Calibri"/>
-                <a:ea typeface="Calibri"/>
-                <a:sym typeface="Calibri"/>
-              </a:rPr>
-              <a:t/>
-            </a:r>
+          <a:solidFill>
+            <a:srgbClr val="0D1F3C">
+              <a:alpha val="100000"/>
+            </a:srgbClr>
+          </a:solidFill>
+        </p:spPr>
+        <p:txBody>
+          <a:bodyPr/>
+          <a:lstStyle/>
+          <a:p>
+            <a:pPr algn="l" marL="0" marR="0">
+              <a:lnSpc>
+                <a:spcPct val="100000"/>
+              </a:lnSpc>
+              <a:spcBef>
+                <a:spcPts val="0"/>
+              </a:spcBef>
+              <a:spcAft>
+                <a:spcPts val="0"/>
+              </a:spcAft>
+              <a:buNone/>
+            </a:pPr>
           </a:p>
         </p:txBody>
       </p:sp>
@@ -15564,37 +14594,28 @@
             <a:off x="1234440" y="3383280"/>
             <a:ext cx="1353312" cy="347472"/>
           </a:xfrm>
-        </p:spPr>
-        <p:txBody>
-          <a:bodyPr/>
-          <a:lstStyle/>
-          <a:p>
-            <a:pPr algn="l" marL="0" marR="0">
-              <a:lnSpc>
-                <a:spcPct val="100000"/>
-              </a:lnSpc>
-              <a:spcBef>
-                <a:spcPts val="0"/>
-              </a:spcBef>
-              <a:spcAft>
-                <a:spcPts val="0"/>
-              </a:spcAft>
-              <a:buNone/>
-            </a:pPr>
-            <a:r>
-              <a:rPr cap="none" sz="100" i="0" b="0" u="none" strike="noStrike">
-                <a:solidFill>
-                  <a:srgbClr val="0D1F3C">
-                    <a:alpha val="100000"/>
-                  </a:srgbClr>
-                </a:solidFill>
-                <a:latin typeface="Calibri"/>
-                <a:cs typeface="Calibri"/>
-                <a:ea typeface="Calibri"/>
-                <a:sym typeface="Calibri"/>
-              </a:rPr>
-              <a:t/>
-            </a:r>
+          <a:solidFill>
+            <a:srgbClr val="0D1F3C">
+              <a:alpha val="100000"/>
+            </a:srgbClr>
+          </a:solidFill>
+        </p:spPr>
+        <p:txBody>
+          <a:bodyPr/>
+          <a:lstStyle/>
+          <a:p>
+            <a:pPr algn="l" marL="0" marR="0">
+              <a:lnSpc>
+                <a:spcPct val="100000"/>
+              </a:lnSpc>
+              <a:spcBef>
+                <a:spcPts val="0"/>
+              </a:spcBef>
+              <a:spcAft>
+                <a:spcPts val="0"/>
+              </a:spcAft>
+              <a:buNone/>
+            </a:pPr>
           </a:p>
         </p:txBody>
       </p:sp>
@@ -15662,37 +14683,28 @@
             <a:off x="2587752" y="3383280"/>
             <a:ext cx="1353312" cy="347472"/>
           </a:xfrm>
-        </p:spPr>
-        <p:txBody>
-          <a:bodyPr/>
-          <a:lstStyle/>
-          <a:p>
-            <a:pPr algn="l" marL="0" marR="0">
-              <a:lnSpc>
-                <a:spcPct val="100000"/>
-              </a:lnSpc>
-              <a:spcBef>
-                <a:spcPts val="0"/>
-              </a:spcBef>
-              <a:spcAft>
-                <a:spcPts val="0"/>
-              </a:spcAft>
-              <a:buNone/>
-            </a:pPr>
-            <a:r>
-              <a:rPr cap="none" sz="100" i="0" b="0" u="none" strike="noStrike">
-                <a:solidFill>
-                  <a:srgbClr val="0D1F3C">
-                    <a:alpha val="100000"/>
-                  </a:srgbClr>
-                </a:solidFill>
-                <a:latin typeface="Calibri"/>
-                <a:cs typeface="Calibri"/>
-                <a:ea typeface="Calibri"/>
-                <a:sym typeface="Calibri"/>
-              </a:rPr>
-              <a:t/>
-            </a:r>
+          <a:solidFill>
+            <a:srgbClr val="0D1F3C">
+              <a:alpha val="100000"/>
+            </a:srgbClr>
+          </a:solidFill>
+        </p:spPr>
+        <p:txBody>
+          <a:bodyPr/>
+          <a:lstStyle/>
+          <a:p>
+            <a:pPr algn="l" marL="0" marR="0">
+              <a:lnSpc>
+                <a:spcPct val="100000"/>
+              </a:lnSpc>
+              <a:spcBef>
+                <a:spcPts val="0"/>
+              </a:spcBef>
+              <a:spcAft>
+                <a:spcPts val="0"/>
+              </a:spcAft>
+              <a:buNone/>
+            </a:pPr>
           </a:p>
         </p:txBody>
       </p:sp>
@@ -15760,37 +14772,28 @@
             <a:off x="3941064" y="3383280"/>
             <a:ext cx="1353312" cy="347472"/>
           </a:xfrm>
-        </p:spPr>
-        <p:txBody>
-          <a:bodyPr/>
-          <a:lstStyle/>
-          <a:p>
-            <a:pPr algn="l" marL="0" marR="0">
-              <a:lnSpc>
-                <a:spcPct val="100000"/>
-              </a:lnSpc>
-              <a:spcBef>
-                <a:spcPts val="0"/>
-              </a:spcBef>
-              <a:spcAft>
-                <a:spcPts val="0"/>
-              </a:spcAft>
-              <a:buNone/>
-            </a:pPr>
-            <a:r>
-              <a:rPr cap="none" sz="100" i="0" b="0" u="none" strike="noStrike">
-                <a:solidFill>
-                  <a:srgbClr val="0D1F3C">
-                    <a:alpha val="100000"/>
-                  </a:srgbClr>
-                </a:solidFill>
-                <a:latin typeface="Calibri"/>
-                <a:cs typeface="Calibri"/>
-                <a:ea typeface="Calibri"/>
-                <a:sym typeface="Calibri"/>
-              </a:rPr>
-              <a:t/>
-            </a:r>
+          <a:solidFill>
+            <a:srgbClr val="0D1F3C">
+              <a:alpha val="100000"/>
+            </a:srgbClr>
+          </a:solidFill>
+        </p:spPr>
+        <p:txBody>
+          <a:bodyPr/>
+          <a:lstStyle/>
+          <a:p>
+            <a:pPr algn="l" marL="0" marR="0">
+              <a:lnSpc>
+                <a:spcPct val="100000"/>
+              </a:lnSpc>
+              <a:spcBef>
+                <a:spcPts val="0"/>
+              </a:spcBef>
+              <a:spcAft>
+                <a:spcPts val="0"/>
+              </a:spcAft>
+              <a:buNone/>
+            </a:pPr>
           </a:p>
         </p:txBody>
       </p:sp>
@@ -15858,37 +14861,28 @@
             <a:off x="5294376" y="3383280"/>
             <a:ext cx="1353312" cy="347472"/>
           </a:xfrm>
-        </p:spPr>
-        <p:txBody>
-          <a:bodyPr/>
-          <a:lstStyle/>
-          <a:p>
-            <a:pPr algn="l" marL="0" marR="0">
-              <a:lnSpc>
-                <a:spcPct val="100000"/>
-              </a:lnSpc>
-              <a:spcBef>
-                <a:spcPts val="0"/>
-              </a:spcBef>
-              <a:spcAft>
-                <a:spcPts val="0"/>
-              </a:spcAft>
-              <a:buNone/>
-            </a:pPr>
-            <a:r>
-              <a:rPr cap="none" sz="100" i="0" b="0" u="none" strike="noStrike">
-                <a:solidFill>
-                  <a:srgbClr val="0D1F3C">
-                    <a:alpha val="100000"/>
-                  </a:srgbClr>
-                </a:solidFill>
-                <a:latin typeface="Calibri"/>
-                <a:cs typeface="Calibri"/>
-                <a:ea typeface="Calibri"/>
-                <a:sym typeface="Calibri"/>
-              </a:rPr>
-              <a:t/>
-            </a:r>
+          <a:solidFill>
+            <a:srgbClr val="0D1F3C">
+              <a:alpha val="100000"/>
+            </a:srgbClr>
+          </a:solidFill>
+        </p:spPr>
+        <p:txBody>
+          <a:bodyPr/>
+          <a:lstStyle/>
+          <a:p>
+            <a:pPr algn="l" marL="0" marR="0">
+              <a:lnSpc>
+                <a:spcPct val="100000"/>
+              </a:lnSpc>
+              <a:spcBef>
+                <a:spcPts val="0"/>
+              </a:spcBef>
+              <a:spcAft>
+                <a:spcPts val="0"/>
+              </a:spcAft>
+              <a:buNone/>
+            </a:pPr>
           </a:p>
         </p:txBody>
       </p:sp>
@@ -15956,37 +14950,28 @@
             <a:off x="6647688" y="3383280"/>
             <a:ext cx="1353312" cy="347472"/>
           </a:xfrm>
-        </p:spPr>
-        <p:txBody>
-          <a:bodyPr/>
-          <a:lstStyle/>
-          <a:p>
-            <a:pPr algn="l" marL="0" marR="0">
-              <a:lnSpc>
-                <a:spcPct val="100000"/>
-              </a:lnSpc>
-              <a:spcBef>
-                <a:spcPts val="0"/>
-              </a:spcBef>
-              <a:spcAft>
-                <a:spcPts val="0"/>
-              </a:spcAft>
-              <a:buNone/>
-            </a:pPr>
-            <a:r>
-              <a:rPr cap="none" sz="100" i="0" b="0" u="none" strike="noStrike">
-                <a:solidFill>
-                  <a:srgbClr val="0D1F3C">
-                    <a:alpha val="100000"/>
-                  </a:srgbClr>
-                </a:solidFill>
-                <a:latin typeface="Calibri"/>
-                <a:cs typeface="Calibri"/>
-                <a:ea typeface="Calibri"/>
-                <a:sym typeface="Calibri"/>
-              </a:rPr>
-              <a:t/>
-            </a:r>
+          <a:solidFill>
+            <a:srgbClr val="0D1F3C">
+              <a:alpha val="100000"/>
+            </a:srgbClr>
+          </a:solidFill>
+        </p:spPr>
+        <p:txBody>
+          <a:bodyPr/>
+          <a:lstStyle/>
+          <a:p>
+            <a:pPr algn="l" marL="0" marR="0">
+              <a:lnSpc>
+                <a:spcPct val="100000"/>
+              </a:lnSpc>
+              <a:spcBef>
+                <a:spcPts val="0"/>
+              </a:spcBef>
+              <a:spcAft>
+                <a:spcPts val="0"/>
+              </a:spcAft>
+              <a:buNone/>
+            </a:pPr>
           </a:p>
         </p:txBody>
       </p:sp>
@@ -16054,37 +15039,28 @@
             <a:off x="8001000" y="3383280"/>
             <a:ext cx="1353312" cy="347472"/>
           </a:xfrm>
-        </p:spPr>
-        <p:txBody>
-          <a:bodyPr/>
-          <a:lstStyle/>
-          <a:p>
-            <a:pPr algn="l" marL="0" marR="0">
-              <a:lnSpc>
-                <a:spcPct val="100000"/>
-              </a:lnSpc>
-              <a:spcBef>
-                <a:spcPts val="0"/>
-              </a:spcBef>
-              <a:spcAft>
-                <a:spcPts val="0"/>
-              </a:spcAft>
-              <a:buNone/>
-            </a:pPr>
-            <a:r>
-              <a:rPr cap="none" sz="100" i="0" b="0" u="none" strike="noStrike">
-                <a:solidFill>
-                  <a:srgbClr val="0D1F3C">
-                    <a:alpha val="100000"/>
-                  </a:srgbClr>
-                </a:solidFill>
-                <a:latin typeface="Calibri"/>
-                <a:cs typeface="Calibri"/>
-                <a:ea typeface="Calibri"/>
-                <a:sym typeface="Calibri"/>
-              </a:rPr>
-              <a:t/>
-            </a:r>
+          <a:solidFill>
+            <a:srgbClr val="0D1F3C">
+              <a:alpha val="100000"/>
+            </a:srgbClr>
+          </a:solidFill>
+        </p:spPr>
+        <p:txBody>
+          <a:bodyPr/>
+          <a:lstStyle/>
+          <a:p>
+            <a:pPr algn="l" marL="0" marR="0">
+              <a:lnSpc>
+                <a:spcPct val="100000"/>
+              </a:lnSpc>
+              <a:spcBef>
+                <a:spcPts val="0"/>
+              </a:spcBef>
+              <a:spcAft>
+                <a:spcPts val="0"/>
+              </a:spcAft>
+              <a:buNone/>
+            </a:pPr>
           </a:p>
         </p:txBody>
       </p:sp>
@@ -16152,37 +15128,28 @@
             <a:off x="228600" y="3749040"/>
             <a:ext cx="1005840" cy="521208"/>
           </a:xfrm>
-        </p:spPr>
-        <p:txBody>
-          <a:bodyPr/>
-          <a:lstStyle/>
-          <a:p>
-            <a:pPr algn="l" marL="0" marR="0">
-              <a:lnSpc>
-                <a:spcPct val="100000"/>
-              </a:lnSpc>
-              <a:spcBef>
-                <a:spcPts val="0"/>
-              </a:spcBef>
-              <a:spcAft>
-                <a:spcPts val="0"/>
-              </a:spcAft>
-              <a:buNone/>
-            </a:pPr>
-            <a:r>
-              <a:rPr cap="none" sz="100" i="0" b="0" u="none" strike="noStrike">
-                <a:solidFill>
-                  <a:srgbClr val="2A2A1A">
-                    <a:alpha val="100000"/>
-                  </a:srgbClr>
-                </a:solidFill>
-                <a:latin typeface="Calibri"/>
-                <a:cs typeface="Calibri"/>
-                <a:ea typeface="Calibri"/>
-                <a:sym typeface="Calibri"/>
-              </a:rPr>
-              <a:t/>
-            </a:r>
+          <a:solidFill>
+            <a:srgbClr val="2A2A1A">
+              <a:alpha val="100000"/>
+            </a:srgbClr>
+          </a:solidFill>
+        </p:spPr>
+        <p:txBody>
+          <a:bodyPr/>
+          <a:lstStyle/>
+          <a:p>
+            <a:pPr algn="l" marL="0" marR="0">
+              <a:lnSpc>
+                <a:spcPct val="100000"/>
+              </a:lnSpc>
+              <a:spcBef>
+                <a:spcPts val="0"/>
+              </a:spcBef>
+              <a:spcAft>
+                <a:spcPts val="0"/>
+              </a:spcAft>
+              <a:buNone/>
+            </a:pPr>
           </a:p>
         </p:txBody>
       </p:sp>
@@ -16250,37 +15217,28 @@
             <a:off x="1234440" y="3749040"/>
             <a:ext cx="1353312" cy="521208"/>
           </a:xfrm>
-        </p:spPr>
-        <p:txBody>
-          <a:bodyPr/>
-          <a:lstStyle/>
-          <a:p>
-            <a:pPr algn="l" marL="0" marR="0">
-              <a:lnSpc>
-                <a:spcPct val="100000"/>
-              </a:lnSpc>
-              <a:spcBef>
-                <a:spcPts val="0"/>
-              </a:spcBef>
-              <a:spcAft>
-                <a:spcPts val="0"/>
-              </a:spcAft>
-              <a:buNone/>
-            </a:pPr>
-            <a:r>
-              <a:rPr cap="none" sz="100" i="0" b="0" u="none" strike="noStrike">
-                <a:solidFill>
-                  <a:srgbClr val="2A2A1A">
-                    <a:alpha val="100000"/>
-                  </a:srgbClr>
-                </a:solidFill>
-                <a:latin typeface="Calibri"/>
-                <a:cs typeface="Calibri"/>
-                <a:ea typeface="Calibri"/>
-                <a:sym typeface="Calibri"/>
-              </a:rPr>
-              <a:t/>
-            </a:r>
+          <a:solidFill>
+            <a:srgbClr val="2A2A1A">
+              <a:alpha val="100000"/>
+            </a:srgbClr>
+          </a:solidFill>
+        </p:spPr>
+        <p:txBody>
+          <a:bodyPr/>
+          <a:lstStyle/>
+          <a:p>
+            <a:pPr algn="l" marL="0" marR="0">
+              <a:lnSpc>
+                <a:spcPct val="100000"/>
+              </a:lnSpc>
+              <a:spcBef>
+                <a:spcPts val="0"/>
+              </a:spcBef>
+              <a:spcAft>
+                <a:spcPts val="0"/>
+              </a:spcAft>
+              <a:buNone/>
+            </a:pPr>
           </a:p>
         </p:txBody>
       </p:sp>
@@ -16348,37 +15306,28 @@
             <a:off x="2587752" y="3749040"/>
             <a:ext cx="1353312" cy="521208"/>
           </a:xfrm>
-        </p:spPr>
-        <p:txBody>
-          <a:bodyPr/>
-          <a:lstStyle/>
-          <a:p>
-            <a:pPr algn="l" marL="0" marR="0">
-              <a:lnSpc>
-                <a:spcPct val="100000"/>
-              </a:lnSpc>
-              <a:spcBef>
-                <a:spcPts val="0"/>
-              </a:spcBef>
-              <a:spcAft>
-                <a:spcPts val="0"/>
-              </a:spcAft>
-              <a:buNone/>
-            </a:pPr>
-            <a:r>
-              <a:rPr cap="none" sz="100" i="0" b="0" u="none" strike="noStrike">
-                <a:solidFill>
-                  <a:srgbClr val="2A2A1A">
-                    <a:alpha val="100000"/>
-                  </a:srgbClr>
-                </a:solidFill>
-                <a:latin typeface="Calibri"/>
-                <a:cs typeface="Calibri"/>
-                <a:ea typeface="Calibri"/>
-                <a:sym typeface="Calibri"/>
-              </a:rPr>
-              <a:t/>
-            </a:r>
+          <a:solidFill>
+            <a:srgbClr val="2A2A1A">
+              <a:alpha val="100000"/>
+            </a:srgbClr>
+          </a:solidFill>
+        </p:spPr>
+        <p:txBody>
+          <a:bodyPr/>
+          <a:lstStyle/>
+          <a:p>
+            <a:pPr algn="l" marL="0" marR="0">
+              <a:lnSpc>
+                <a:spcPct val="100000"/>
+              </a:lnSpc>
+              <a:spcBef>
+                <a:spcPts val="0"/>
+              </a:spcBef>
+              <a:spcAft>
+                <a:spcPts val="0"/>
+              </a:spcAft>
+              <a:buNone/>
+            </a:pPr>
           </a:p>
         </p:txBody>
       </p:sp>
@@ -16446,37 +15395,28 @@
             <a:off x="3941064" y="3749040"/>
             <a:ext cx="1353312" cy="521208"/>
           </a:xfrm>
-        </p:spPr>
-        <p:txBody>
-          <a:bodyPr/>
-          <a:lstStyle/>
-          <a:p>
-            <a:pPr algn="l" marL="0" marR="0">
-              <a:lnSpc>
-                <a:spcPct val="100000"/>
-              </a:lnSpc>
-              <a:spcBef>
-                <a:spcPts val="0"/>
-              </a:spcBef>
-              <a:spcAft>
-                <a:spcPts val="0"/>
-              </a:spcAft>
-              <a:buNone/>
-            </a:pPr>
-            <a:r>
-              <a:rPr cap="none" sz="100" i="0" b="0" u="none" strike="noStrike">
-                <a:solidFill>
-                  <a:srgbClr val="2A2A1A">
-                    <a:alpha val="100000"/>
-                  </a:srgbClr>
-                </a:solidFill>
-                <a:latin typeface="Calibri"/>
-                <a:cs typeface="Calibri"/>
-                <a:ea typeface="Calibri"/>
-                <a:sym typeface="Calibri"/>
-              </a:rPr>
-              <a:t/>
-            </a:r>
+          <a:solidFill>
+            <a:srgbClr val="2A2A1A">
+              <a:alpha val="100000"/>
+            </a:srgbClr>
+          </a:solidFill>
+        </p:spPr>
+        <p:txBody>
+          <a:bodyPr/>
+          <a:lstStyle/>
+          <a:p>
+            <a:pPr algn="l" marL="0" marR="0">
+              <a:lnSpc>
+                <a:spcPct val="100000"/>
+              </a:lnSpc>
+              <a:spcBef>
+                <a:spcPts val="0"/>
+              </a:spcBef>
+              <a:spcAft>
+                <a:spcPts val="0"/>
+              </a:spcAft>
+              <a:buNone/>
+            </a:pPr>
           </a:p>
         </p:txBody>
       </p:sp>
@@ -16544,37 +15484,28 @@
             <a:off x="5294376" y="3749040"/>
             <a:ext cx="1353312" cy="521208"/>
           </a:xfrm>
-        </p:spPr>
-        <p:txBody>
-          <a:bodyPr/>
-          <a:lstStyle/>
-          <a:p>
-            <a:pPr algn="l" marL="0" marR="0">
-              <a:lnSpc>
-                <a:spcPct val="100000"/>
-              </a:lnSpc>
-              <a:spcBef>
-                <a:spcPts val="0"/>
-              </a:spcBef>
-              <a:spcAft>
-                <a:spcPts val="0"/>
-              </a:spcAft>
-              <a:buNone/>
-            </a:pPr>
-            <a:r>
-              <a:rPr cap="none" sz="100" i="0" b="0" u="none" strike="noStrike">
-                <a:solidFill>
-                  <a:srgbClr val="2A2A1A">
-                    <a:alpha val="100000"/>
-                  </a:srgbClr>
-                </a:solidFill>
-                <a:latin typeface="Calibri"/>
-                <a:cs typeface="Calibri"/>
-                <a:ea typeface="Calibri"/>
-                <a:sym typeface="Calibri"/>
-              </a:rPr>
-              <a:t/>
-            </a:r>
+          <a:solidFill>
+            <a:srgbClr val="2A2A1A">
+              <a:alpha val="100000"/>
+            </a:srgbClr>
+          </a:solidFill>
+        </p:spPr>
+        <p:txBody>
+          <a:bodyPr/>
+          <a:lstStyle/>
+          <a:p>
+            <a:pPr algn="l" marL="0" marR="0">
+              <a:lnSpc>
+                <a:spcPct val="100000"/>
+              </a:lnSpc>
+              <a:spcBef>
+                <a:spcPts val="0"/>
+              </a:spcBef>
+              <a:spcAft>
+                <a:spcPts val="0"/>
+              </a:spcAft>
+              <a:buNone/>
+            </a:pPr>
           </a:p>
         </p:txBody>
       </p:sp>
@@ -16642,37 +15573,28 @@
             <a:off x="6647688" y="3749040"/>
             <a:ext cx="1353312" cy="521208"/>
           </a:xfrm>
-        </p:spPr>
-        <p:txBody>
-          <a:bodyPr/>
-          <a:lstStyle/>
-          <a:p>
-            <a:pPr algn="l" marL="0" marR="0">
-              <a:lnSpc>
-                <a:spcPct val="100000"/>
-              </a:lnSpc>
-              <a:spcBef>
-                <a:spcPts val="0"/>
-              </a:spcBef>
-              <a:spcAft>
-                <a:spcPts val="0"/>
-              </a:spcAft>
-              <a:buNone/>
-            </a:pPr>
-            <a:r>
-              <a:rPr cap="none" sz="100" i="0" b="0" u="none" strike="noStrike">
-                <a:solidFill>
-                  <a:srgbClr val="2A2A1A">
-                    <a:alpha val="100000"/>
-                  </a:srgbClr>
-                </a:solidFill>
-                <a:latin typeface="Calibri"/>
-                <a:cs typeface="Calibri"/>
-                <a:ea typeface="Calibri"/>
-                <a:sym typeface="Calibri"/>
-              </a:rPr>
-              <a:t/>
-            </a:r>
+          <a:solidFill>
+            <a:srgbClr val="2A2A1A">
+              <a:alpha val="100000"/>
+            </a:srgbClr>
+          </a:solidFill>
+        </p:spPr>
+        <p:txBody>
+          <a:bodyPr/>
+          <a:lstStyle/>
+          <a:p>
+            <a:pPr algn="l" marL="0" marR="0">
+              <a:lnSpc>
+                <a:spcPct val="100000"/>
+              </a:lnSpc>
+              <a:spcBef>
+                <a:spcPts val="0"/>
+              </a:spcBef>
+              <a:spcAft>
+                <a:spcPts val="0"/>
+              </a:spcAft>
+              <a:buNone/>
+            </a:pPr>
           </a:p>
         </p:txBody>
       </p:sp>
@@ -16740,37 +15662,28 @@
             <a:off x="8001000" y="3749040"/>
             <a:ext cx="1353312" cy="521208"/>
           </a:xfrm>
-        </p:spPr>
-        <p:txBody>
-          <a:bodyPr/>
-          <a:lstStyle/>
-          <a:p>
-            <a:pPr algn="l" marL="0" marR="0">
-              <a:lnSpc>
-                <a:spcPct val="100000"/>
-              </a:lnSpc>
-              <a:spcBef>
-                <a:spcPts val="0"/>
-              </a:spcBef>
-              <a:spcAft>
-                <a:spcPts val="0"/>
-              </a:spcAft>
-              <a:buNone/>
-            </a:pPr>
-            <a:r>
-              <a:rPr cap="none" sz="100" i="0" b="0" u="none" strike="noStrike">
-                <a:solidFill>
-                  <a:srgbClr val="2A2A1A">
-                    <a:alpha val="100000"/>
-                  </a:srgbClr>
-                </a:solidFill>
-                <a:latin typeface="Calibri"/>
-                <a:cs typeface="Calibri"/>
-                <a:ea typeface="Calibri"/>
-                <a:sym typeface="Calibri"/>
-              </a:rPr>
-              <a:t/>
-            </a:r>
+          <a:solidFill>
+            <a:srgbClr val="2A2A1A">
+              <a:alpha val="100000"/>
+            </a:srgbClr>
+          </a:solidFill>
+        </p:spPr>
+        <p:txBody>
+          <a:bodyPr/>
+          <a:lstStyle/>
+          <a:p>
+            <a:pPr algn="l" marL="0" marR="0">
+              <a:lnSpc>
+                <a:spcPct val="100000"/>
+              </a:lnSpc>
+              <a:spcBef>
+                <a:spcPts val="0"/>
+              </a:spcBef>
+              <a:spcAft>
+                <a:spcPts val="0"/>
+              </a:spcAft>
+              <a:buNone/>
+            </a:pPr>
           </a:p>
         </p:txBody>
       </p:sp>
@@ -16838,37 +15751,28 @@
             <a:off x="228600" y="4315968"/>
             <a:ext cx="1005840" cy="521208"/>
           </a:xfrm>
-        </p:spPr>
-        <p:txBody>
-          <a:bodyPr/>
-          <a:lstStyle/>
-          <a:p>
-            <a:pPr algn="l" marL="0" marR="0">
-              <a:lnSpc>
-                <a:spcPct val="100000"/>
-              </a:lnSpc>
-              <a:spcBef>
-                <a:spcPts val="0"/>
-              </a:spcBef>
-              <a:spcAft>
-                <a:spcPts val="0"/>
-              </a:spcAft>
-              <a:buNone/>
-            </a:pPr>
-            <a:r>
-              <a:rPr cap="none" sz="100" i="0" b="0" u="none" strike="noStrike">
-                <a:solidFill>
-                  <a:srgbClr val="1A2A3A">
-                    <a:alpha val="100000"/>
-                  </a:srgbClr>
-                </a:solidFill>
-                <a:latin typeface="Calibri"/>
-                <a:cs typeface="Calibri"/>
-                <a:ea typeface="Calibri"/>
-                <a:sym typeface="Calibri"/>
-              </a:rPr>
-              <a:t/>
-            </a:r>
+          <a:solidFill>
+            <a:srgbClr val="1A2A3A">
+              <a:alpha val="100000"/>
+            </a:srgbClr>
+          </a:solidFill>
+        </p:spPr>
+        <p:txBody>
+          <a:bodyPr/>
+          <a:lstStyle/>
+          <a:p>
+            <a:pPr algn="l" marL="0" marR="0">
+              <a:lnSpc>
+                <a:spcPct val="100000"/>
+              </a:lnSpc>
+              <a:spcBef>
+                <a:spcPts val="0"/>
+              </a:spcBef>
+              <a:spcAft>
+                <a:spcPts val="0"/>
+              </a:spcAft>
+              <a:buNone/>
+            </a:pPr>
           </a:p>
         </p:txBody>
       </p:sp>
@@ -16936,37 +15840,28 @@
             <a:off x="1234440" y="4315968"/>
             <a:ext cx="1353312" cy="521208"/>
           </a:xfrm>
-        </p:spPr>
-        <p:txBody>
-          <a:bodyPr/>
-          <a:lstStyle/>
-          <a:p>
-            <a:pPr algn="l" marL="0" marR="0">
-              <a:lnSpc>
-                <a:spcPct val="100000"/>
-              </a:lnSpc>
-              <a:spcBef>
-                <a:spcPts val="0"/>
-              </a:spcBef>
-              <a:spcAft>
-                <a:spcPts val="0"/>
-              </a:spcAft>
-              <a:buNone/>
-            </a:pPr>
-            <a:r>
-              <a:rPr cap="none" sz="100" i="0" b="0" u="none" strike="noStrike">
-                <a:solidFill>
-                  <a:srgbClr val="1A2A3A">
-                    <a:alpha val="100000"/>
-                  </a:srgbClr>
-                </a:solidFill>
-                <a:latin typeface="Calibri"/>
-                <a:cs typeface="Calibri"/>
-                <a:ea typeface="Calibri"/>
-                <a:sym typeface="Calibri"/>
-              </a:rPr>
-              <a:t/>
-            </a:r>
+          <a:solidFill>
+            <a:srgbClr val="1A2A3A">
+              <a:alpha val="100000"/>
+            </a:srgbClr>
+          </a:solidFill>
+        </p:spPr>
+        <p:txBody>
+          <a:bodyPr/>
+          <a:lstStyle/>
+          <a:p>
+            <a:pPr algn="l" marL="0" marR="0">
+              <a:lnSpc>
+                <a:spcPct val="100000"/>
+              </a:lnSpc>
+              <a:spcBef>
+                <a:spcPts val="0"/>
+              </a:spcBef>
+              <a:spcAft>
+                <a:spcPts val="0"/>
+              </a:spcAft>
+              <a:buNone/>
+            </a:pPr>
           </a:p>
         </p:txBody>
       </p:sp>
@@ -17034,37 +15929,28 @@
             <a:off x="2587752" y="4315968"/>
             <a:ext cx="1353312" cy="521208"/>
           </a:xfrm>
-        </p:spPr>
-        <p:txBody>
-          <a:bodyPr/>
-          <a:lstStyle/>
-          <a:p>
-            <a:pPr algn="l" marL="0" marR="0">
-              <a:lnSpc>
-                <a:spcPct val="100000"/>
-              </a:lnSpc>
-              <a:spcBef>
-                <a:spcPts val="0"/>
-              </a:spcBef>
-              <a:spcAft>
-                <a:spcPts val="0"/>
-              </a:spcAft>
-              <a:buNone/>
-            </a:pPr>
-            <a:r>
-              <a:rPr cap="none" sz="100" i="0" b="0" u="none" strike="noStrike">
-                <a:solidFill>
-                  <a:srgbClr val="1A2A3A">
-                    <a:alpha val="100000"/>
-                  </a:srgbClr>
-                </a:solidFill>
-                <a:latin typeface="Calibri"/>
-                <a:cs typeface="Calibri"/>
-                <a:ea typeface="Calibri"/>
-                <a:sym typeface="Calibri"/>
-              </a:rPr>
-              <a:t/>
-            </a:r>
+          <a:solidFill>
+            <a:srgbClr val="1A2A3A">
+              <a:alpha val="100000"/>
+            </a:srgbClr>
+          </a:solidFill>
+        </p:spPr>
+        <p:txBody>
+          <a:bodyPr/>
+          <a:lstStyle/>
+          <a:p>
+            <a:pPr algn="l" marL="0" marR="0">
+              <a:lnSpc>
+                <a:spcPct val="100000"/>
+              </a:lnSpc>
+              <a:spcBef>
+                <a:spcPts val="0"/>
+              </a:spcBef>
+              <a:spcAft>
+                <a:spcPts val="0"/>
+              </a:spcAft>
+              <a:buNone/>
+            </a:pPr>
           </a:p>
         </p:txBody>
       </p:sp>
@@ -17132,37 +16018,28 @@
             <a:off x="3941064" y="4315968"/>
             <a:ext cx="1353312" cy="521208"/>
           </a:xfrm>
-        </p:spPr>
-        <p:txBody>
-          <a:bodyPr/>
-          <a:lstStyle/>
-          <a:p>
-            <a:pPr algn="l" marL="0" marR="0">
-              <a:lnSpc>
-                <a:spcPct val="100000"/>
-              </a:lnSpc>
-              <a:spcBef>
-                <a:spcPts val="0"/>
-              </a:spcBef>
-              <a:spcAft>
-                <a:spcPts val="0"/>
-              </a:spcAft>
-              <a:buNone/>
-            </a:pPr>
-            <a:r>
-              <a:rPr cap="none" sz="100" i="0" b="0" u="none" strike="noStrike">
-                <a:solidFill>
-                  <a:srgbClr val="1A2A3A">
-                    <a:alpha val="100000"/>
-                  </a:srgbClr>
-                </a:solidFill>
-                <a:latin typeface="Calibri"/>
-                <a:cs typeface="Calibri"/>
-                <a:ea typeface="Calibri"/>
-                <a:sym typeface="Calibri"/>
-              </a:rPr>
-              <a:t/>
-            </a:r>
+          <a:solidFill>
+            <a:srgbClr val="1A2A3A">
+              <a:alpha val="100000"/>
+            </a:srgbClr>
+          </a:solidFill>
+        </p:spPr>
+        <p:txBody>
+          <a:bodyPr/>
+          <a:lstStyle/>
+          <a:p>
+            <a:pPr algn="l" marL="0" marR="0">
+              <a:lnSpc>
+                <a:spcPct val="100000"/>
+              </a:lnSpc>
+              <a:spcBef>
+                <a:spcPts val="0"/>
+              </a:spcBef>
+              <a:spcAft>
+                <a:spcPts val="0"/>
+              </a:spcAft>
+              <a:buNone/>
+            </a:pPr>
           </a:p>
         </p:txBody>
       </p:sp>
@@ -17230,37 +16107,28 @@
             <a:off x="5294376" y="4315968"/>
             <a:ext cx="1353312" cy="521208"/>
           </a:xfrm>
-        </p:spPr>
-        <p:txBody>
-          <a:bodyPr/>
-          <a:lstStyle/>
-          <a:p>
-            <a:pPr algn="l" marL="0" marR="0">
-              <a:lnSpc>
-                <a:spcPct val="100000"/>
-              </a:lnSpc>
-              <a:spcBef>
-                <a:spcPts val="0"/>
-              </a:spcBef>
-              <a:spcAft>
-                <a:spcPts val="0"/>
-              </a:spcAft>
-              <a:buNone/>
-            </a:pPr>
-            <a:r>
-              <a:rPr cap="none" sz="100" i="0" b="0" u="none" strike="noStrike">
-                <a:solidFill>
-                  <a:srgbClr val="1A2A3A">
-                    <a:alpha val="100000"/>
-                  </a:srgbClr>
-                </a:solidFill>
-                <a:latin typeface="Calibri"/>
-                <a:cs typeface="Calibri"/>
-                <a:ea typeface="Calibri"/>
-                <a:sym typeface="Calibri"/>
-              </a:rPr>
-              <a:t/>
-            </a:r>
+          <a:solidFill>
+            <a:srgbClr val="1A2A3A">
+              <a:alpha val="100000"/>
+            </a:srgbClr>
+          </a:solidFill>
+        </p:spPr>
+        <p:txBody>
+          <a:bodyPr/>
+          <a:lstStyle/>
+          <a:p>
+            <a:pPr algn="l" marL="0" marR="0">
+              <a:lnSpc>
+                <a:spcPct val="100000"/>
+              </a:lnSpc>
+              <a:spcBef>
+                <a:spcPts val="0"/>
+              </a:spcBef>
+              <a:spcAft>
+                <a:spcPts val="0"/>
+              </a:spcAft>
+              <a:buNone/>
+            </a:pPr>
           </a:p>
         </p:txBody>
       </p:sp>
@@ -17328,37 +16196,28 @@
             <a:off x="6647688" y="4315968"/>
             <a:ext cx="1353312" cy="521208"/>
           </a:xfrm>
-        </p:spPr>
-        <p:txBody>
-          <a:bodyPr/>
-          <a:lstStyle/>
-          <a:p>
-            <a:pPr algn="l" marL="0" marR="0">
-              <a:lnSpc>
-                <a:spcPct val="100000"/>
-              </a:lnSpc>
-              <a:spcBef>
-                <a:spcPts val="0"/>
-              </a:spcBef>
-              <a:spcAft>
-                <a:spcPts val="0"/>
-              </a:spcAft>
-              <a:buNone/>
-            </a:pPr>
-            <a:r>
-              <a:rPr cap="none" sz="100" i="0" b="0" u="none" strike="noStrike">
-                <a:solidFill>
-                  <a:srgbClr val="1A2A3A">
-                    <a:alpha val="100000"/>
-                  </a:srgbClr>
-                </a:solidFill>
-                <a:latin typeface="Calibri"/>
-                <a:cs typeface="Calibri"/>
-                <a:ea typeface="Calibri"/>
-                <a:sym typeface="Calibri"/>
-              </a:rPr>
-              <a:t/>
-            </a:r>
+          <a:solidFill>
+            <a:srgbClr val="1A2A3A">
+              <a:alpha val="100000"/>
+            </a:srgbClr>
+          </a:solidFill>
+        </p:spPr>
+        <p:txBody>
+          <a:bodyPr/>
+          <a:lstStyle/>
+          <a:p>
+            <a:pPr algn="l" marL="0" marR="0">
+              <a:lnSpc>
+                <a:spcPct val="100000"/>
+              </a:lnSpc>
+              <a:spcBef>
+                <a:spcPts val="0"/>
+              </a:spcBef>
+              <a:spcAft>
+                <a:spcPts val="0"/>
+              </a:spcAft>
+              <a:buNone/>
+            </a:pPr>
           </a:p>
         </p:txBody>
       </p:sp>
@@ -17426,37 +16285,28 @@
             <a:off x="8001000" y="4315968"/>
             <a:ext cx="1353312" cy="521208"/>
           </a:xfrm>
-        </p:spPr>
-        <p:txBody>
-          <a:bodyPr/>
-          <a:lstStyle/>
-          <a:p>
-            <a:pPr algn="l" marL="0" marR="0">
-              <a:lnSpc>
-                <a:spcPct val="100000"/>
-              </a:lnSpc>
-              <a:spcBef>
-                <a:spcPts val="0"/>
-              </a:spcBef>
-              <a:spcAft>
-                <a:spcPts val="0"/>
-              </a:spcAft>
-              <a:buNone/>
-            </a:pPr>
-            <a:r>
-              <a:rPr cap="none" sz="100" i="0" b="0" u="none" strike="noStrike">
-                <a:solidFill>
-                  <a:srgbClr val="1A2A3A">
-                    <a:alpha val="100000"/>
-                  </a:srgbClr>
-                </a:solidFill>
-                <a:latin typeface="Calibri"/>
-                <a:cs typeface="Calibri"/>
-                <a:ea typeface="Calibri"/>
-                <a:sym typeface="Calibri"/>
-              </a:rPr>
-              <a:t/>
-            </a:r>
+          <a:solidFill>
+            <a:srgbClr val="1A2A3A">
+              <a:alpha val="100000"/>
+            </a:srgbClr>
+          </a:solidFill>
+        </p:spPr>
+        <p:txBody>
+          <a:bodyPr/>
+          <a:lstStyle/>
+          <a:p>
+            <a:pPr algn="l" marL="0" marR="0">
+              <a:lnSpc>
+                <a:spcPct val="100000"/>
+              </a:lnSpc>
+              <a:spcBef>
+                <a:spcPts val="0"/>
+              </a:spcBef>
+              <a:spcAft>
+                <a:spcPts val="0"/>
+              </a:spcAft>
+              <a:buNone/>
+            </a:pPr>
           </a:p>
         </p:txBody>
       </p:sp>
@@ -17524,37 +16374,28 @@
             <a:off x="228600" y="4882896"/>
             <a:ext cx="1005840" cy="521208"/>
           </a:xfrm>
-        </p:spPr>
-        <p:txBody>
-          <a:bodyPr/>
-          <a:lstStyle/>
-          <a:p>
-            <a:pPr algn="l" marL="0" marR="0">
-              <a:lnSpc>
-                <a:spcPct val="100000"/>
-              </a:lnSpc>
-              <a:spcBef>
-                <a:spcPts val="0"/>
-              </a:spcBef>
-              <a:spcAft>
-                <a:spcPts val="0"/>
-              </a:spcAft>
-              <a:buNone/>
-            </a:pPr>
-            <a:r>
-              <a:rPr cap="none" sz="100" i="0" b="0" u="none" strike="noStrike">
-                <a:solidFill>
-                  <a:srgbClr val="1A3A2A">
-                    <a:alpha val="100000"/>
-                  </a:srgbClr>
-                </a:solidFill>
-                <a:latin typeface="Calibri"/>
-                <a:cs typeface="Calibri"/>
-                <a:ea typeface="Calibri"/>
-                <a:sym typeface="Calibri"/>
-              </a:rPr>
-              <a:t/>
-            </a:r>
+          <a:solidFill>
+            <a:srgbClr val="1A3A2A">
+              <a:alpha val="100000"/>
+            </a:srgbClr>
+          </a:solidFill>
+        </p:spPr>
+        <p:txBody>
+          <a:bodyPr/>
+          <a:lstStyle/>
+          <a:p>
+            <a:pPr algn="l" marL="0" marR="0">
+              <a:lnSpc>
+                <a:spcPct val="100000"/>
+              </a:lnSpc>
+              <a:spcBef>
+                <a:spcPts val="0"/>
+              </a:spcBef>
+              <a:spcAft>
+                <a:spcPts val="0"/>
+              </a:spcAft>
+              <a:buNone/>
+            </a:pPr>
           </a:p>
         </p:txBody>
       </p:sp>
@@ -17622,37 +16463,28 @@
             <a:off x="1234440" y="4882896"/>
             <a:ext cx="1353312" cy="521208"/>
           </a:xfrm>
-        </p:spPr>
-        <p:txBody>
-          <a:bodyPr/>
-          <a:lstStyle/>
-          <a:p>
-            <a:pPr algn="l" marL="0" marR="0">
-              <a:lnSpc>
-                <a:spcPct val="100000"/>
-              </a:lnSpc>
-              <a:spcBef>
-                <a:spcPts val="0"/>
-              </a:spcBef>
-              <a:spcAft>
-                <a:spcPts val="0"/>
-              </a:spcAft>
-              <a:buNone/>
-            </a:pPr>
-            <a:r>
-              <a:rPr cap="none" sz="100" i="0" b="0" u="none" strike="noStrike">
-                <a:solidFill>
-                  <a:srgbClr val="1A3A2A">
-                    <a:alpha val="100000"/>
-                  </a:srgbClr>
-                </a:solidFill>
-                <a:latin typeface="Calibri"/>
-                <a:cs typeface="Calibri"/>
-                <a:ea typeface="Calibri"/>
-                <a:sym typeface="Calibri"/>
-              </a:rPr>
-              <a:t/>
-            </a:r>
+          <a:solidFill>
+            <a:srgbClr val="1A3A2A">
+              <a:alpha val="100000"/>
+            </a:srgbClr>
+          </a:solidFill>
+        </p:spPr>
+        <p:txBody>
+          <a:bodyPr/>
+          <a:lstStyle/>
+          <a:p>
+            <a:pPr algn="l" marL="0" marR="0">
+              <a:lnSpc>
+                <a:spcPct val="100000"/>
+              </a:lnSpc>
+              <a:spcBef>
+                <a:spcPts val="0"/>
+              </a:spcBef>
+              <a:spcAft>
+                <a:spcPts val="0"/>
+              </a:spcAft>
+              <a:buNone/>
+            </a:pPr>
           </a:p>
         </p:txBody>
       </p:sp>
@@ -17720,37 +16552,28 @@
             <a:off x="2587752" y="4882896"/>
             <a:ext cx="1353312" cy="521208"/>
           </a:xfrm>
-        </p:spPr>
-        <p:txBody>
-          <a:bodyPr/>
-          <a:lstStyle/>
-          <a:p>
-            <a:pPr algn="l" marL="0" marR="0">
-              <a:lnSpc>
-                <a:spcPct val="100000"/>
-              </a:lnSpc>
-              <a:spcBef>
-                <a:spcPts val="0"/>
-              </a:spcBef>
-              <a:spcAft>
-                <a:spcPts val="0"/>
-              </a:spcAft>
-              <a:buNone/>
-            </a:pPr>
-            <a:r>
-              <a:rPr cap="none" sz="100" i="0" b="0" u="none" strike="noStrike">
-                <a:solidFill>
-                  <a:srgbClr val="1A3A2A">
-                    <a:alpha val="100000"/>
-                  </a:srgbClr>
-                </a:solidFill>
-                <a:latin typeface="Calibri"/>
-                <a:cs typeface="Calibri"/>
-                <a:ea typeface="Calibri"/>
-                <a:sym typeface="Calibri"/>
-              </a:rPr>
-              <a:t/>
-            </a:r>
+          <a:solidFill>
+            <a:srgbClr val="1A3A2A">
+              <a:alpha val="100000"/>
+            </a:srgbClr>
+          </a:solidFill>
+        </p:spPr>
+        <p:txBody>
+          <a:bodyPr/>
+          <a:lstStyle/>
+          <a:p>
+            <a:pPr algn="l" marL="0" marR="0">
+              <a:lnSpc>
+                <a:spcPct val="100000"/>
+              </a:lnSpc>
+              <a:spcBef>
+                <a:spcPts val="0"/>
+              </a:spcBef>
+              <a:spcAft>
+                <a:spcPts val="0"/>
+              </a:spcAft>
+              <a:buNone/>
+            </a:pPr>
           </a:p>
         </p:txBody>
       </p:sp>
@@ -17818,37 +16641,28 @@
             <a:off x="3941064" y="4882896"/>
             <a:ext cx="1353312" cy="521208"/>
           </a:xfrm>
-        </p:spPr>
-        <p:txBody>
-          <a:bodyPr/>
-          <a:lstStyle/>
-          <a:p>
-            <a:pPr algn="l" marL="0" marR="0">
-              <a:lnSpc>
-                <a:spcPct val="100000"/>
-              </a:lnSpc>
-              <a:spcBef>
-                <a:spcPts val="0"/>
-              </a:spcBef>
-              <a:spcAft>
-                <a:spcPts val="0"/>
-              </a:spcAft>
-              <a:buNone/>
-            </a:pPr>
-            <a:r>
-              <a:rPr cap="none" sz="100" i="0" b="0" u="none" strike="noStrike">
-                <a:solidFill>
-                  <a:srgbClr val="1A3A2A">
-                    <a:alpha val="100000"/>
-                  </a:srgbClr>
-                </a:solidFill>
-                <a:latin typeface="Calibri"/>
-                <a:cs typeface="Calibri"/>
-                <a:ea typeface="Calibri"/>
-                <a:sym typeface="Calibri"/>
-              </a:rPr>
-              <a:t/>
-            </a:r>
+          <a:solidFill>
+            <a:srgbClr val="1A3A2A">
+              <a:alpha val="100000"/>
+            </a:srgbClr>
+          </a:solidFill>
+        </p:spPr>
+        <p:txBody>
+          <a:bodyPr/>
+          <a:lstStyle/>
+          <a:p>
+            <a:pPr algn="l" marL="0" marR="0">
+              <a:lnSpc>
+                <a:spcPct val="100000"/>
+              </a:lnSpc>
+              <a:spcBef>
+                <a:spcPts val="0"/>
+              </a:spcBef>
+              <a:spcAft>
+                <a:spcPts val="0"/>
+              </a:spcAft>
+              <a:buNone/>
+            </a:pPr>
           </a:p>
         </p:txBody>
       </p:sp>
@@ -17916,37 +16730,28 @@
             <a:off x="5294376" y="4882896"/>
             <a:ext cx="1353312" cy="521208"/>
           </a:xfrm>
-        </p:spPr>
-        <p:txBody>
-          <a:bodyPr/>
-          <a:lstStyle/>
-          <a:p>
-            <a:pPr algn="l" marL="0" marR="0">
-              <a:lnSpc>
-                <a:spcPct val="100000"/>
-              </a:lnSpc>
-              <a:spcBef>
-                <a:spcPts val="0"/>
-              </a:spcBef>
-              <a:spcAft>
-                <a:spcPts val="0"/>
-              </a:spcAft>
-              <a:buNone/>
-            </a:pPr>
-            <a:r>
-              <a:rPr cap="none" sz="100" i="0" b="0" u="none" strike="noStrike">
-                <a:solidFill>
-                  <a:srgbClr val="1A3A2A">
-                    <a:alpha val="100000"/>
-                  </a:srgbClr>
-                </a:solidFill>
-                <a:latin typeface="Calibri"/>
-                <a:cs typeface="Calibri"/>
-                <a:ea typeface="Calibri"/>
-                <a:sym typeface="Calibri"/>
-              </a:rPr>
-              <a:t/>
-            </a:r>
+          <a:solidFill>
+            <a:srgbClr val="1A3A2A">
+              <a:alpha val="100000"/>
+            </a:srgbClr>
+          </a:solidFill>
+        </p:spPr>
+        <p:txBody>
+          <a:bodyPr/>
+          <a:lstStyle/>
+          <a:p>
+            <a:pPr algn="l" marL="0" marR="0">
+              <a:lnSpc>
+                <a:spcPct val="100000"/>
+              </a:lnSpc>
+              <a:spcBef>
+                <a:spcPts val="0"/>
+              </a:spcBef>
+              <a:spcAft>
+                <a:spcPts val="0"/>
+              </a:spcAft>
+              <a:buNone/>
+            </a:pPr>
           </a:p>
         </p:txBody>
       </p:sp>
@@ -18014,37 +16819,28 @@
             <a:off x="6647688" y="4882896"/>
             <a:ext cx="1353312" cy="521208"/>
           </a:xfrm>
-        </p:spPr>
-        <p:txBody>
-          <a:bodyPr/>
-          <a:lstStyle/>
-          <a:p>
-            <a:pPr algn="l" marL="0" marR="0">
-              <a:lnSpc>
-                <a:spcPct val="100000"/>
-              </a:lnSpc>
-              <a:spcBef>
-                <a:spcPts val="0"/>
-              </a:spcBef>
-              <a:spcAft>
-                <a:spcPts val="0"/>
-              </a:spcAft>
-              <a:buNone/>
-            </a:pPr>
-            <a:r>
-              <a:rPr cap="none" sz="100" i="0" b="0" u="none" strike="noStrike">
-                <a:solidFill>
-                  <a:srgbClr val="1A3A2A">
-                    <a:alpha val="100000"/>
-                  </a:srgbClr>
-                </a:solidFill>
-                <a:latin typeface="Calibri"/>
-                <a:cs typeface="Calibri"/>
-                <a:ea typeface="Calibri"/>
-                <a:sym typeface="Calibri"/>
-              </a:rPr>
-              <a:t/>
-            </a:r>
+          <a:solidFill>
+            <a:srgbClr val="1A3A2A">
+              <a:alpha val="100000"/>
+            </a:srgbClr>
+          </a:solidFill>
+        </p:spPr>
+        <p:txBody>
+          <a:bodyPr/>
+          <a:lstStyle/>
+          <a:p>
+            <a:pPr algn="l" marL="0" marR="0">
+              <a:lnSpc>
+                <a:spcPct val="100000"/>
+              </a:lnSpc>
+              <a:spcBef>
+                <a:spcPts val="0"/>
+              </a:spcBef>
+              <a:spcAft>
+                <a:spcPts val="0"/>
+              </a:spcAft>
+              <a:buNone/>
+            </a:pPr>
           </a:p>
         </p:txBody>
       </p:sp>
@@ -18112,37 +16908,28 @@
             <a:off x="8001000" y="4882896"/>
             <a:ext cx="1353312" cy="521208"/>
           </a:xfrm>
-        </p:spPr>
-        <p:txBody>
-          <a:bodyPr/>
-          <a:lstStyle/>
-          <a:p>
-            <a:pPr algn="l" marL="0" marR="0">
-              <a:lnSpc>
-                <a:spcPct val="100000"/>
-              </a:lnSpc>
-              <a:spcBef>
-                <a:spcPts val="0"/>
-              </a:spcBef>
-              <a:spcAft>
-                <a:spcPts val="0"/>
-              </a:spcAft>
-              <a:buNone/>
-            </a:pPr>
-            <a:r>
-              <a:rPr cap="none" sz="100" i="0" b="0" u="none" strike="noStrike">
-                <a:solidFill>
-                  <a:srgbClr val="1A3A2A">
-                    <a:alpha val="100000"/>
-                  </a:srgbClr>
-                </a:solidFill>
-                <a:latin typeface="Calibri"/>
-                <a:cs typeface="Calibri"/>
-                <a:ea typeface="Calibri"/>
-                <a:sym typeface="Calibri"/>
-              </a:rPr>
-              <a:t/>
-            </a:r>
+          <a:solidFill>
+            <a:srgbClr val="1A3A2A">
+              <a:alpha val="100000"/>
+            </a:srgbClr>
+          </a:solidFill>
+        </p:spPr>
+        <p:txBody>
+          <a:bodyPr/>
+          <a:lstStyle/>
+          <a:p>
+            <a:pPr algn="l" marL="0" marR="0">
+              <a:lnSpc>
+                <a:spcPct val="100000"/>
+              </a:lnSpc>
+              <a:spcBef>
+                <a:spcPts val="0"/>
+              </a:spcBef>
+              <a:spcAft>
+                <a:spcPts val="0"/>
+              </a:spcAft>
+              <a:buNone/>
+            </a:pPr>
           </a:p>
         </p:txBody>
       </p:sp>
@@ -18239,7 +17026,7 @@
                 <a:ea typeface="Calibri"/>
                 <a:sym typeface="Calibri"/>
               </a:rPr>
-              <a:t>R$ bilhões — variação acumulada vs. 2018 (efeitos diretos + indiretos via multiplicador Leontief)</a:t>
+              <a:t>R$ bilhões — variação acumulada vs. 2018 · diretos + indiretos via multiplicador Leontief</a:t>
             </a:r>
           </a:p>
         </p:txBody>
@@ -18333,37 +17120,28 @@
             <a:off x="0" y="0"/>
             <a:ext cx="9144000" cy="6858000"/>
           </a:xfrm>
-        </p:spPr>
-        <p:txBody>
-          <a:bodyPr/>
-          <a:lstStyle/>
-          <a:p>
-            <a:pPr algn="l" marL="0" marR="0">
-              <a:lnSpc>
-                <a:spcPct val="100000"/>
-              </a:lnSpc>
-              <a:spcBef>
-                <a:spcPts val="0"/>
-              </a:spcBef>
-              <a:spcAft>
-                <a:spcPts val="0"/>
-              </a:spcAft>
-              <a:buNone/>
-            </a:pPr>
-            <a:r>
-              <a:rPr cap="none" sz="100" i="0" b="0" u="none" strike="noStrike">
-                <a:solidFill>
-                  <a:srgbClr val="1C2B4A">
-                    <a:alpha val="100000"/>
-                  </a:srgbClr>
-                </a:solidFill>
-                <a:latin typeface="Calibri"/>
-                <a:cs typeface="Calibri"/>
-                <a:ea typeface="Calibri"/>
-                <a:sym typeface="Calibri"/>
-              </a:rPr>
-              <a:t/>
-            </a:r>
+          <a:solidFill>
+            <a:srgbClr val="1C2B4A">
+              <a:alpha val="100000"/>
+            </a:srgbClr>
+          </a:solidFill>
+        </p:spPr>
+        <p:txBody>
+          <a:bodyPr/>
+          <a:lstStyle/>
+          <a:p>
+            <a:pPr algn="l" marL="0" marR="0">
+              <a:lnSpc>
+                <a:spcPct val="100000"/>
+              </a:lnSpc>
+              <a:spcBef>
+                <a:spcPts val="0"/>
+              </a:spcBef>
+              <a:spcAft>
+                <a:spcPts val="0"/>
+              </a:spcAft>
+              <a:buNone/>
+            </a:pPr>
           </a:p>
         </p:txBody>
       </p:sp>
@@ -18382,37 +17160,28 @@
             <a:off x="0" y="0"/>
             <a:ext cx="9144000" cy="822960"/>
           </a:xfrm>
-        </p:spPr>
-        <p:txBody>
-          <a:bodyPr/>
-          <a:lstStyle/>
-          <a:p>
-            <a:pPr algn="l" marL="0" marR="0">
-              <a:lnSpc>
-                <a:spcPct val="100000"/>
-              </a:lnSpc>
-              <a:spcBef>
-                <a:spcPts val="0"/>
-              </a:spcBef>
-              <a:spcAft>
-                <a:spcPts val="0"/>
-              </a:spcAft>
-              <a:buNone/>
-            </a:pPr>
-            <a:r>
-              <a:rPr cap="none" sz="100" i="0" b="0" u="none" strike="noStrike">
-                <a:solidFill>
-                  <a:srgbClr val="3DC494">
-                    <a:alpha val="100000"/>
-                  </a:srgbClr>
-                </a:solidFill>
-                <a:latin typeface="Calibri"/>
-                <a:cs typeface="Calibri"/>
-                <a:ea typeface="Calibri"/>
-                <a:sym typeface="Calibri"/>
-              </a:rPr>
-              <a:t/>
-            </a:r>
+          <a:solidFill>
+            <a:srgbClr val="3DC494">
+              <a:alpha val="100000"/>
+            </a:srgbClr>
+          </a:solidFill>
+        </p:spPr>
+        <p:txBody>
+          <a:bodyPr/>
+          <a:lstStyle/>
+          <a:p>
+            <a:pPr algn="l" marL="0" marR="0">
+              <a:lnSpc>
+                <a:spcPct val="100000"/>
+              </a:lnSpc>
+              <a:spcBef>
+                <a:spcPts val="0"/>
+              </a:spcBef>
+              <a:spcAft>
+                <a:spcPts val="0"/>
+              </a:spcAft>
+              <a:buNone/>
+            </a:pPr>
           </a:p>
         </p:txBody>
       </p:sp>
@@ -18480,37 +17249,28 @@
             <a:off x="274320" y="914400"/>
             <a:ext cx="8595360" cy="502920"/>
           </a:xfrm>
-        </p:spPr>
-        <p:txBody>
-          <a:bodyPr/>
-          <a:lstStyle/>
-          <a:p>
-            <a:pPr algn="l" marL="0" marR="0">
-              <a:lnSpc>
-                <a:spcPct val="100000"/>
-              </a:lnSpc>
-              <a:spcBef>
-                <a:spcPts val="0"/>
-              </a:spcBef>
-              <a:spcAft>
-                <a:spcPts val="0"/>
-              </a:spcAft>
-              <a:buNone/>
-            </a:pPr>
-            <a:r>
-              <a:rPr cap="none" sz="100" i="0" b="0" u="none" strike="noStrike">
-                <a:solidFill>
-                  <a:srgbClr val="0D2A1E">
-                    <a:alpha val="100000"/>
-                  </a:srgbClr>
-                </a:solidFill>
-                <a:latin typeface="Calibri"/>
-                <a:cs typeface="Calibri"/>
-                <a:ea typeface="Calibri"/>
-                <a:sym typeface="Calibri"/>
-              </a:rPr>
-              <a:t/>
-            </a:r>
+          <a:solidFill>
+            <a:srgbClr val="0D2A1E">
+              <a:alpha val="100000"/>
+            </a:srgbClr>
+          </a:solidFill>
+        </p:spPr>
+        <p:txBody>
+          <a:bodyPr/>
+          <a:lstStyle/>
+          <a:p>
+            <a:pPr algn="l" marL="0" marR="0">
+              <a:lnSpc>
+                <a:spcPct val="100000"/>
+              </a:lnSpc>
+              <a:spcBef>
+                <a:spcPts val="0"/>
+              </a:spcBef>
+              <a:spcAft>
+                <a:spcPts val="0"/>
+              </a:spcAft>
+              <a:buNone/>
+            </a:pPr>
           </a:p>
         </p:txBody>
       </p:sp>
@@ -18547,7 +17307,7 @@
               <a:buNone/>
             </a:pPr>
             <a:r>
-              <a:rPr cap="none" sz="1300" i="0" b="1" u="none" strike="noStrike">
+              <a:rPr cap="none" sz="1200" i="0" b="1" u="none" strike="noStrike">
                 <a:solidFill>
                   <a:srgbClr val="3DC494">
                     <a:alpha val="100000"/>
@@ -18558,7 +17318,7 @@
                 <a:ea typeface="Calibri"/>
                 <a:sym typeface="Calibri"/>
               </a:rPr>
-              <a:t>🌐  cludovique.github.io/brazil-climate-macro-model/mma_scenarios_dashboard.html</a:t>
+              <a:t>cludovique.github.io/brazil-climate-macro-model/mma_scenarios_dashboard.html</a:t>
             </a:r>
           </a:p>
         </p:txBody>
@@ -18578,37 +17338,28 @@
             <a:off x="182880" y="1508760"/>
             <a:ext cx="1691640" cy="4983480"/>
           </a:xfrm>
-        </p:spPr>
-        <p:txBody>
-          <a:bodyPr/>
-          <a:lstStyle/>
-          <a:p>
-            <a:pPr algn="l" marL="0" marR="0">
-              <a:lnSpc>
-                <a:spcPct val="100000"/>
-              </a:lnSpc>
-              <a:spcBef>
-                <a:spcPts val="0"/>
-              </a:spcBef>
-              <a:spcAft>
-                <a:spcPts val="0"/>
-              </a:spcAft>
-              <a:buNone/>
-            </a:pPr>
-            <a:r>
-              <a:rPr cap="none" sz="100" i="0" b="0" u="none" strike="noStrike">
-                <a:solidFill>
-                  <a:srgbClr val="1A2840">
-                    <a:alpha val="100000"/>
-                  </a:srgbClr>
-                </a:solidFill>
-                <a:latin typeface="Calibri"/>
-                <a:cs typeface="Calibri"/>
-                <a:ea typeface="Calibri"/>
-                <a:sym typeface="Calibri"/>
-              </a:rPr>
-              <a:t/>
-            </a:r>
+          <a:solidFill>
+            <a:srgbClr val="1A2840">
+              <a:alpha val="100000"/>
+            </a:srgbClr>
+          </a:solidFill>
+        </p:spPr>
+        <p:txBody>
+          <a:bodyPr/>
+          <a:lstStyle/>
+          <a:p>
+            <a:pPr algn="l" marL="0" marR="0">
+              <a:lnSpc>
+                <a:spcPct val="100000"/>
+              </a:lnSpc>
+              <a:spcBef>
+                <a:spcPts val="0"/>
+              </a:spcBef>
+              <a:spcAft>
+                <a:spcPts val="0"/>
+              </a:spcAft>
+              <a:buNone/>
+            </a:pPr>
           </a:p>
         </p:txBody>
       </p:sp>
@@ -18627,37 +17378,28 @@
             <a:off x="274320" y="1554480"/>
             <a:ext cx="1508760" cy="54864"/>
           </a:xfrm>
-        </p:spPr>
-        <p:txBody>
-          <a:bodyPr/>
-          <a:lstStyle/>
-          <a:p>
-            <a:pPr algn="l" marL="0" marR="0">
-              <a:lnSpc>
-                <a:spcPct val="100000"/>
-              </a:lnSpc>
-              <a:spcBef>
-                <a:spcPts val="0"/>
-              </a:spcBef>
-              <a:spcAft>
-                <a:spcPts val="0"/>
-              </a:spcAft>
-              <a:buNone/>
-            </a:pPr>
-            <a:r>
-              <a:rPr cap="none" sz="100" i="0" b="0" u="none" strike="noStrike">
-                <a:solidFill>
-                  <a:srgbClr val="1D9E75">
-                    <a:alpha val="100000"/>
-                  </a:srgbClr>
-                </a:solidFill>
-                <a:latin typeface="Calibri"/>
-                <a:cs typeface="Calibri"/>
-                <a:ea typeface="Calibri"/>
-                <a:sym typeface="Calibri"/>
-              </a:rPr>
-              <a:t/>
-            </a:r>
+          <a:solidFill>
+            <a:srgbClr val="1D9E75">
+              <a:alpha val="100000"/>
+            </a:srgbClr>
+          </a:solidFill>
+        </p:spPr>
+        <p:txBody>
+          <a:bodyPr/>
+          <a:lstStyle/>
+          <a:p>
+            <a:pPr algn="l" marL="0" marR="0">
+              <a:lnSpc>
+                <a:spcPct val="100000"/>
+              </a:lnSpc>
+              <a:spcBef>
+                <a:spcPts val="0"/>
+              </a:spcBef>
+              <a:spcAft>
+                <a:spcPts val="0"/>
+              </a:spcAft>
+              <a:buNone/>
+            </a:pPr>
           </a:p>
         </p:txBody>
       </p:sp>
@@ -18831,7 +17573,7 @@
                 <a:ea typeface="Calibri"/>
                 <a:sym typeface="Calibri"/>
               </a:rPr>
-              <a:t>• KPIs: nível absoluto + prêmio ± %</a:t>
+              <a:t>• KPIs nível absoluto + prêmio ± %</a:t>
             </a:r>
           </a:p>
           <a:p>
@@ -18887,7 +17629,7 @@
                 <a:ea typeface="Calibri"/>
                 <a:sym typeface="Calibri"/>
               </a:rPr>
-              <a:t>• Decomp. por grupo de setor (GRP7)</a:t>
+              <a:t>• Decomp. por grupo setorial (GRP7)</a:t>
             </a:r>
           </a:p>
         </p:txBody>
@@ -18907,37 +17649,28 @@
             <a:off x="1965960" y="1508760"/>
             <a:ext cx="1691640" cy="4983480"/>
           </a:xfrm>
-        </p:spPr>
-        <p:txBody>
-          <a:bodyPr/>
-          <a:lstStyle/>
-          <a:p>
-            <a:pPr algn="l" marL="0" marR="0">
-              <a:lnSpc>
-                <a:spcPct val="100000"/>
-              </a:lnSpc>
-              <a:spcBef>
-                <a:spcPts val="0"/>
-              </a:spcBef>
-              <a:spcAft>
-                <a:spcPts val="0"/>
-              </a:spcAft>
-              <a:buNone/>
-            </a:pPr>
-            <a:r>
-              <a:rPr cap="none" sz="100" i="0" b="0" u="none" strike="noStrike">
-                <a:solidFill>
-                  <a:srgbClr val="1A2840">
-                    <a:alpha val="100000"/>
-                  </a:srgbClr>
-                </a:solidFill>
-                <a:latin typeface="Calibri"/>
-                <a:cs typeface="Calibri"/>
-                <a:ea typeface="Calibri"/>
-                <a:sym typeface="Calibri"/>
-              </a:rPr>
-              <a:t/>
-            </a:r>
+          <a:solidFill>
+            <a:srgbClr val="1A2840">
+              <a:alpha val="100000"/>
+            </a:srgbClr>
+          </a:solidFill>
+        </p:spPr>
+        <p:txBody>
+          <a:bodyPr/>
+          <a:lstStyle/>
+          <a:p>
+            <a:pPr algn="l" marL="0" marR="0">
+              <a:lnSpc>
+                <a:spcPct val="100000"/>
+              </a:lnSpc>
+              <a:spcBef>
+                <a:spcPts val="0"/>
+              </a:spcBef>
+              <a:spcAft>
+                <a:spcPts val="0"/>
+              </a:spcAft>
+              <a:buNone/>
+            </a:pPr>
           </a:p>
         </p:txBody>
       </p:sp>
@@ -18956,37 +17689,28 @@
             <a:off x="2057400" y="1554480"/>
             <a:ext cx="1508760" cy="54864"/>
           </a:xfrm>
-        </p:spPr>
-        <p:txBody>
-          <a:bodyPr/>
-          <a:lstStyle/>
-          <a:p>
-            <a:pPr algn="l" marL="0" marR="0">
-              <a:lnSpc>
-                <a:spcPct val="100000"/>
-              </a:lnSpc>
-              <a:spcBef>
-                <a:spcPts val="0"/>
-              </a:spcBef>
-              <a:spcAft>
-                <a:spcPts val="0"/>
-              </a:spcAft>
-              <a:buNone/>
-            </a:pPr>
-            <a:r>
-              <a:rPr cap="none" sz="100" i="0" b="0" u="none" strike="noStrike">
-                <a:solidFill>
-                  <a:srgbClr val="378ADD">
-                    <a:alpha val="100000"/>
-                  </a:srgbClr>
-                </a:solidFill>
-                <a:latin typeface="Calibri"/>
-                <a:cs typeface="Calibri"/>
-                <a:ea typeface="Calibri"/>
-                <a:sym typeface="Calibri"/>
-              </a:rPr>
-              <a:t/>
-            </a:r>
+          <a:solidFill>
+            <a:srgbClr val="378ADD">
+              <a:alpha val="100000"/>
+            </a:srgbClr>
+          </a:solidFill>
+        </p:spPr>
+        <p:txBody>
+          <a:bodyPr/>
+          <a:lstStyle/>
+          <a:p>
+            <a:pPr algn="l" marL="0" marR="0">
+              <a:lnSpc>
+                <a:spcPct val="100000"/>
+              </a:lnSpc>
+              <a:spcBef>
+                <a:spcPts val="0"/>
+              </a:spcBef>
+              <a:spcAft>
+                <a:spcPts val="0"/>
+              </a:spcAft>
+              <a:buNone/>
+            </a:pPr>
           </a:p>
         </p:txBody>
       </p:sp>
@@ -19160,7 +17884,7 @@
                 <a:ea typeface="Calibri"/>
                 <a:sym typeface="Calibri"/>
               </a:rPr>
-              <a:t>• Emprego: base + 100D + prêmio direto/indireto</a:t>
+              <a:t>• Emprego: base + 100D + prêmio dir./ind.</a:t>
             </a:r>
           </a:p>
           <a:p>
@@ -19188,7 +17912,7 @@
                 <a:ea typeface="Calibri"/>
                 <a:sym typeface="Calibri"/>
               </a:rPr>
-              <a:t>• Nível absoluto de empregos setores de energia</a:t>
+              <a:t>• Nível empregos setores de energia</a:t>
             </a:r>
           </a:p>
           <a:p>
@@ -19236,37 +17960,28 @@
             <a:off x="3749040" y="1508760"/>
             <a:ext cx="1691640" cy="4983480"/>
           </a:xfrm>
-        </p:spPr>
-        <p:txBody>
-          <a:bodyPr/>
-          <a:lstStyle/>
-          <a:p>
-            <a:pPr algn="l" marL="0" marR="0">
-              <a:lnSpc>
-                <a:spcPct val="100000"/>
-              </a:lnSpc>
-              <a:spcBef>
-                <a:spcPts val="0"/>
-              </a:spcBef>
-              <a:spcAft>
-                <a:spcPts val="0"/>
-              </a:spcAft>
-              <a:buNone/>
-            </a:pPr>
-            <a:r>
-              <a:rPr cap="none" sz="100" i="0" b="0" u="none" strike="noStrike">
-                <a:solidFill>
-                  <a:srgbClr val="1A2840">
-                    <a:alpha val="100000"/>
-                  </a:srgbClr>
-                </a:solidFill>
-                <a:latin typeface="Calibri"/>
-                <a:cs typeface="Calibri"/>
-                <a:ea typeface="Calibri"/>
-                <a:sym typeface="Calibri"/>
-              </a:rPr>
-              <a:t/>
-            </a:r>
+          <a:solidFill>
+            <a:srgbClr val="1A2840">
+              <a:alpha val="100000"/>
+            </a:srgbClr>
+          </a:solidFill>
+        </p:spPr>
+        <p:txBody>
+          <a:bodyPr/>
+          <a:lstStyle/>
+          <a:p>
+            <a:pPr algn="l" marL="0" marR="0">
+              <a:lnSpc>
+                <a:spcPct val="100000"/>
+              </a:lnSpc>
+              <a:spcBef>
+                <a:spcPts val="0"/>
+              </a:spcBef>
+              <a:spcAft>
+                <a:spcPts val="0"/>
+              </a:spcAft>
+              <a:buNone/>
+            </a:pPr>
           </a:p>
         </p:txBody>
       </p:sp>
@@ -19285,37 +18000,28 @@
             <a:off x="3840480" y="1554480"/>
             <a:ext cx="1508760" cy="54864"/>
           </a:xfrm>
-        </p:spPr>
-        <p:txBody>
-          <a:bodyPr/>
-          <a:lstStyle/>
-          <a:p>
-            <a:pPr algn="l" marL="0" marR="0">
-              <a:lnSpc>
-                <a:spcPct val="100000"/>
-              </a:lnSpc>
-              <a:spcBef>
-                <a:spcPts val="0"/>
-              </a:spcBef>
-              <a:spcAft>
-                <a:spcPts val="0"/>
-              </a:spcAft>
-              <a:buNone/>
-            </a:pPr>
-            <a:r>
-              <a:rPr cap="none" sz="100" i="0" b="0" u="none" strike="noStrike">
-                <a:solidFill>
-                  <a:srgbClr val="F39C12">
-                    <a:alpha val="100000"/>
-                  </a:srgbClr>
-                </a:solidFill>
-                <a:latin typeface="Calibri"/>
-                <a:cs typeface="Calibri"/>
-                <a:ea typeface="Calibri"/>
-                <a:sym typeface="Calibri"/>
-              </a:rPr>
-              <a:t/>
-            </a:r>
+          <a:solidFill>
+            <a:srgbClr val="F39C12">
+              <a:alpha val="100000"/>
+            </a:srgbClr>
+          </a:solidFill>
+        </p:spPr>
+        <p:txBody>
+          <a:bodyPr/>
+          <a:lstStyle/>
+          <a:p>
+            <a:pPr algn="l" marL="0" marR="0">
+              <a:lnSpc>
+                <a:spcPct val="100000"/>
+              </a:lnSpc>
+              <a:spcBef>
+                <a:spcPts val="0"/>
+              </a:spcBef>
+              <a:spcAft>
+                <a:spcPts val="0"/>
+              </a:spcAft>
+              <a:buNone/>
+            </a:pPr>
           </a:p>
         </p:txBody>
       </p:sp>
@@ -19489,7 +18195,7 @@
                 <a:ea typeface="Calibri"/>
                 <a:sym typeface="Calibri"/>
               </a:rPr>
-              <a:t>• Tabela completa 73 setores filtrável</a:t>
+              <a:t>• Tabela 73 setores filtrável</a:t>
             </a:r>
           </a:p>
           <a:p>
@@ -19545,7 +18251,7 @@
                 <a:ea typeface="Calibri"/>
                 <a:sym typeface="Calibri"/>
               </a:rPr>
-              <a:t>• Coeficientes técnicos A* por setor</a:t>
+              <a:t>• Coef. técnicos A* por setor</a:t>
             </a:r>
           </a:p>
         </p:txBody>
@@ -19565,37 +18271,28 @@
             <a:off x="5532120" y="1508760"/>
             <a:ext cx="1691640" cy="4983480"/>
           </a:xfrm>
-        </p:spPr>
-        <p:txBody>
-          <a:bodyPr/>
-          <a:lstStyle/>
-          <a:p>
-            <a:pPr algn="l" marL="0" marR="0">
-              <a:lnSpc>
-                <a:spcPct val="100000"/>
-              </a:lnSpc>
-              <a:spcBef>
-                <a:spcPts val="0"/>
-              </a:spcBef>
-              <a:spcAft>
-                <a:spcPts val="0"/>
-              </a:spcAft>
-              <a:buNone/>
-            </a:pPr>
-            <a:r>
-              <a:rPr cap="none" sz="100" i="0" b="0" u="none" strike="noStrike">
-                <a:solidFill>
-                  <a:srgbClr val="1A2840">
-                    <a:alpha val="100000"/>
-                  </a:srgbClr>
-                </a:solidFill>
-                <a:latin typeface="Calibri"/>
-                <a:cs typeface="Calibri"/>
-                <a:ea typeface="Calibri"/>
-                <a:sym typeface="Calibri"/>
-              </a:rPr>
-              <a:t/>
-            </a:r>
+          <a:solidFill>
+            <a:srgbClr val="1A2840">
+              <a:alpha val="100000"/>
+            </a:srgbClr>
+          </a:solidFill>
+        </p:spPr>
+        <p:txBody>
+          <a:bodyPr/>
+          <a:lstStyle/>
+          <a:p>
+            <a:pPr algn="l" marL="0" marR="0">
+              <a:lnSpc>
+                <a:spcPct val="100000"/>
+              </a:lnSpc>
+              <a:spcBef>
+                <a:spcPts val="0"/>
+              </a:spcBef>
+              <a:spcAft>
+                <a:spcPts val="0"/>
+              </a:spcAft>
+              <a:buNone/>
+            </a:pPr>
           </a:p>
         </p:txBody>
       </p:sp>
@@ -19614,37 +18311,28 @@
             <a:off x="5623560" y="1554480"/>
             <a:ext cx="1508760" cy="54864"/>
           </a:xfrm>
-        </p:spPr>
-        <p:txBody>
-          <a:bodyPr/>
-          <a:lstStyle/>
-          <a:p>
-            <a:pPr algn="l" marL="0" marR="0">
-              <a:lnSpc>
-                <a:spcPct val="100000"/>
-              </a:lnSpc>
-              <a:spcBef>
-                <a:spcPts val="0"/>
-              </a:spcBef>
-              <a:spcAft>
-                <a:spcPts val="0"/>
-              </a:spcAft>
-              <a:buNone/>
-            </a:pPr>
-            <a:r>
-              <a:rPr cap="none" sz="100" i="0" b="0" u="none" strike="noStrike">
-                <a:solidFill>
-                  <a:srgbClr val="3DC494">
-                    <a:alpha val="100000"/>
-                  </a:srgbClr>
-                </a:solidFill>
-                <a:latin typeface="Calibri"/>
-                <a:cs typeface="Calibri"/>
-                <a:ea typeface="Calibri"/>
-                <a:sym typeface="Calibri"/>
-              </a:rPr>
-              <a:t/>
-            </a:r>
+          <a:solidFill>
+            <a:srgbClr val="3DC494">
+              <a:alpha val="100000"/>
+            </a:srgbClr>
+          </a:solidFill>
+        </p:spPr>
+        <p:txBody>
+          <a:bodyPr/>
+          <a:lstStyle/>
+          <a:p>
+            <a:pPr algn="l" marL="0" marR="0">
+              <a:lnSpc>
+                <a:spcPct val="100000"/>
+              </a:lnSpc>
+              <a:spcBef>
+                <a:spcPts val="0"/>
+              </a:spcBef>
+              <a:spcAft>
+                <a:spcPts val="0"/>
+              </a:spcAft>
+              <a:buNone/>
+            </a:pPr>
           </a:p>
         </p:txBody>
       </p:sp>
@@ -19790,7 +18478,7 @@
                 <a:ea typeface="Calibri"/>
                 <a:sym typeface="Calibri"/>
               </a:rPr>
-              <a:t>• Trajetória % eletricidade/bio/fóssil</a:t>
+              <a:t>• Trajetória % elec/bio/fóssil</a:t>
             </a:r>
           </a:p>
           <a:p>
@@ -19818,7 +18506,7 @@
                 <a:ea typeface="Calibri"/>
                 <a:sym typeface="Calibri"/>
               </a:rPr>
-              <a:t>• Por sub-setor MMA (Ferro, Cimento, Transp.)</a:t>
+              <a:t>• Por sub-setor MMA (Ferro, Cimento…)</a:t>
             </a:r>
           </a:p>
           <a:p>
@@ -19874,7 +18562,7 @@
                 <a:ea typeface="Calibri"/>
                 <a:sym typeface="Calibri"/>
               </a:rPr>
-              <a:t>• ALPHA: impacto em ktep por fonte</a:t>
+              <a:t>• ALPHA: impacto ktep por fonte</a:t>
             </a:r>
           </a:p>
         </p:txBody>
@@ -19894,37 +18582,28 @@
             <a:off x="7315200" y="1508760"/>
             <a:ext cx="1691640" cy="4983480"/>
           </a:xfrm>
-        </p:spPr>
-        <p:txBody>
-          <a:bodyPr/>
-          <a:lstStyle/>
-          <a:p>
-            <a:pPr algn="l" marL="0" marR="0">
-              <a:lnSpc>
-                <a:spcPct val="100000"/>
-              </a:lnSpc>
-              <a:spcBef>
-                <a:spcPts val="0"/>
-              </a:spcBef>
-              <a:spcAft>
-                <a:spcPts val="0"/>
-              </a:spcAft>
-              <a:buNone/>
-            </a:pPr>
-            <a:r>
-              <a:rPr cap="none" sz="100" i="0" b="0" u="none" strike="noStrike">
-                <a:solidFill>
-                  <a:srgbClr val="1A2840">
-                    <a:alpha val="100000"/>
-                  </a:srgbClr>
-                </a:solidFill>
-                <a:latin typeface="Calibri"/>
-                <a:cs typeface="Calibri"/>
-                <a:ea typeface="Calibri"/>
-                <a:sym typeface="Calibri"/>
-              </a:rPr>
-              <a:t/>
-            </a:r>
+          <a:solidFill>
+            <a:srgbClr val="1A2840">
+              <a:alpha val="100000"/>
+            </a:srgbClr>
+          </a:solidFill>
+        </p:spPr>
+        <p:txBody>
+          <a:bodyPr/>
+          <a:lstStyle/>
+          <a:p>
+            <a:pPr algn="l" marL="0" marR="0">
+              <a:lnSpc>
+                <a:spcPct val="100000"/>
+              </a:lnSpc>
+              <a:spcBef>
+                <a:spcPts val="0"/>
+              </a:spcBef>
+              <a:spcAft>
+                <a:spcPts val="0"/>
+              </a:spcAft>
+              <a:buNone/>
+            </a:pPr>
           </a:p>
         </p:txBody>
       </p:sp>
@@ -19943,37 +18622,28 @@
             <a:off x="7406640" y="1554480"/>
             <a:ext cx="1508760" cy="54864"/>
           </a:xfrm>
-        </p:spPr>
-        <p:txBody>
-          <a:bodyPr/>
-          <a:lstStyle/>
-          <a:p>
-            <a:pPr algn="l" marL="0" marR="0">
-              <a:lnSpc>
-                <a:spcPct val="100000"/>
-              </a:lnSpc>
-              <a:spcBef>
-                <a:spcPts val="0"/>
-              </a:spcBef>
-              <a:spcAft>
-                <a:spcPts val="0"/>
-              </a:spcAft>
-              <a:buNone/>
-            </a:pPr>
-            <a:r>
-              <a:rPr cap="none" sz="100" i="0" b="0" u="none" strike="noStrike">
-                <a:solidFill>
-                  <a:srgbClr val="8A9BB0">
-                    <a:alpha val="100000"/>
-                  </a:srgbClr>
-                </a:solidFill>
-                <a:latin typeface="Calibri"/>
-                <a:cs typeface="Calibri"/>
-                <a:ea typeface="Calibri"/>
-                <a:sym typeface="Calibri"/>
-              </a:rPr>
-              <a:t/>
-            </a:r>
+          <a:solidFill>
+            <a:srgbClr val="8A9BB0">
+              <a:alpha val="100000"/>
+            </a:srgbClr>
+          </a:solidFill>
+        </p:spPr>
+        <p:txBody>
+          <a:bodyPr/>
+          <a:lstStyle/>
+          <a:p>
+            <a:pPr algn="l" marL="0" marR="0">
+              <a:lnSpc>
+                <a:spcPct val="100000"/>
+              </a:lnSpc>
+              <a:spcBef>
+                <a:spcPts val="0"/>
+              </a:spcBef>
+              <a:spcAft>
+                <a:spcPts val="0"/>
+              </a:spcAft>
+              <a:buNone/>
+            </a:pPr>
           </a:p>
         </p:txBody>
       </p:sp>

--- a/docs/MIP_MMA_PPE_apresentacao.pptx
+++ b/docs/MIP_MMA_PPE_apresentacao.pptx
@@ -17,7 +17,7 @@
     <p:sldId id="265" r:id="rId17"/>
     <p:sldId id="266" r:id="rId18"/>
   </p:sldIdLst>
-  <p:sldSz cx="9144000" cy="6858000" type="screen4x3"/>
+  <p:sldSz cx="12192000" cy="6858000" type="screen16x9"/>
   <p:notesSz cx="6858000" cy="9144000"/>
   <p:custDataLst>
     <p:tags r:id="rId3"/>
@@ -2237,7 +2237,7 @@
         <p:spPr>
           <a:xfrm>
             <a:off x="0" y="0"/>
-            <a:ext cx="9144000" cy="6858000"/>
+            <a:ext cx="12192000" cy="6858000"/>
           </a:xfrm>
           <a:solidFill>
             <a:srgbClr val="1C2B4A">
@@ -2276,7 +2276,7 @@
         </p:nvSpPr>
         <p:spPr>
           <a:xfrm>
-            <a:off x="347472" y="1417320"/>
+            <a:off x="429768" y="1417320"/>
             <a:ext cx="64008" cy="3931920"/>
           </a:xfrm>
           <a:solidFill>
@@ -2316,8 +2316,8 @@
         </p:nvSpPr>
         <p:spPr>
           <a:xfrm>
-            <a:off x="640080" y="1417320"/>
-            <a:ext cx="8229600" cy="1005840"/>
+            <a:off x="850392" y="1417320"/>
+            <a:ext cx="10972800" cy="1005840"/>
           </a:xfrm>
         </p:spPr>
         <p:txBody>
@@ -2365,8 +2365,8 @@
         </p:nvSpPr>
         <p:spPr>
           <a:xfrm>
-            <a:off x="640080" y="2514600"/>
-            <a:ext cx="7772400" cy="1371600"/>
+            <a:off x="850392" y="2514600"/>
+            <a:ext cx="10515600" cy="1371600"/>
           </a:xfrm>
         </p:spPr>
         <p:txBody>
@@ -2415,8 +2415,8 @@
         </p:nvSpPr>
         <p:spPr>
           <a:xfrm>
-            <a:off x="640080" y="3977640"/>
-            <a:ext cx="8229600" cy="457200"/>
+            <a:off x="850392" y="3977640"/>
+            <a:ext cx="10972800" cy="457200"/>
           </a:xfrm>
         </p:spPr>
         <p:txBody>
@@ -2464,8 +2464,8 @@
         </p:nvSpPr>
         <p:spPr>
           <a:xfrm>
-            <a:off x="640080" y="5852160"/>
-            <a:ext cx="4572000" cy="365760"/>
+            <a:off x="850392" y="5852160"/>
+            <a:ext cx="5486400" cy="365760"/>
           </a:xfrm>
         </p:spPr>
         <p:txBody>
@@ -2513,8 +2513,8 @@
         </p:nvSpPr>
         <p:spPr>
           <a:xfrm>
-            <a:off x="4572000" y="5852160"/>
-            <a:ext cx="4297680" cy="365760"/>
+            <a:off x="6400800" y="5852160"/>
+            <a:ext cx="5486400" cy="365760"/>
           </a:xfrm>
         </p:spPr>
         <p:txBody>
@@ -2588,7 +2588,7 @@
         <p:spPr>
           <a:xfrm>
             <a:off x="0" y="0"/>
-            <a:ext cx="9144000" cy="6858000"/>
+            <a:ext cx="12192000" cy="6858000"/>
           </a:xfrm>
           <a:solidFill>
             <a:srgbClr val="1C2B4A">
@@ -2628,7 +2628,7 @@
         <p:spPr>
           <a:xfrm>
             <a:off x="0" y="0"/>
-            <a:ext cx="9144000" cy="822960"/>
+            <a:ext cx="12192000" cy="822960"/>
           </a:xfrm>
           <a:solidFill>
             <a:srgbClr val="F39C12">
@@ -2667,8 +2667,8 @@
         </p:nvSpPr>
         <p:spPr>
           <a:xfrm>
-            <a:off x="365760" y="91440"/>
-            <a:ext cx="8229600" cy="640080"/>
+            <a:off x="457200" y="91440"/>
+            <a:ext cx="11277600" cy="640080"/>
           </a:xfrm>
         </p:spPr>
         <p:txBody>
@@ -2716,8 +2716,8 @@
         </p:nvSpPr>
         <p:spPr>
           <a:xfrm>
-            <a:off x="182880" y="914400"/>
-            <a:ext cx="4297680" cy="5715000"/>
+            <a:off x="246888" y="914400"/>
+            <a:ext cx="5733288" cy="5715000"/>
           </a:xfrm>
           <a:solidFill>
             <a:srgbClr val="1A2840">
@@ -2756,8 +2756,8 @@
         </p:nvSpPr>
         <p:spPr>
           <a:xfrm>
-            <a:off x="365760" y="987552"/>
-            <a:ext cx="3931920" cy="411480"/>
+            <a:off x="493776" y="987552"/>
+            <a:ext cx="5239512" cy="411480"/>
           </a:xfrm>
         </p:spPr>
         <p:txBody>
@@ -2805,8 +2805,8 @@
         </p:nvSpPr>
         <p:spPr>
           <a:xfrm>
-            <a:off x="411480" y="1508760"/>
-            <a:ext cx="3840480" cy="320040"/>
+            <a:off x="548640" y="1508760"/>
+            <a:ext cx="5120640" cy="320040"/>
           </a:xfrm>
         </p:spPr>
         <p:txBody>
@@ -2854,8 +2854,8 @@
         </p:nvSpPr>
         <p:spPr>
           <a:xfrm>
-            <a:off x="411480" y="1810512"/>
-            <a:ext cx="3840480" cy="640080"/>
+            <a:off x="548640" y="1810512"/>
+            <a:ext cx="5120640" cy="640080"/>
           </a:xfrm>
         </p:spPr>
         <p:txBody>
@@ -2903,8 +2903,8 @@
         </p:nvSpPr>
         <p:spPr>
           <a:xfrm>
-            <a:off x="411480" y="2514600"/>
-            <a:ext cx="3840480" cy="320040"/>
+            <a:off x="548640" y="2514600"/>
+            <a:ext cx="5120640" cy="320040"/>
           </a:xfrm>
         </p:spPr>
         <p:txBody>
@@ -2952,8 +2952,8 @@
         </p:nvSpPr>
         <p:spPr>
           <a:xfrm>
-            <a:off x="411480" y="2816352"/>
-            <a:ext cx="3840480" cy="640080"/>
+            <a:off x="548640" y="2816352"/>
+            <a:ext cx="5120640" cy="640080"/>
           </a:xfrm>
         </p:spPr>
         <p:txBody>
@@ -3001,8 +3001,8 @@
         </p:nvSpPr>
         <p:spPr>
           <a:xfrm>
-            <a:off x="411480" y="3520440"/>
-            <a:ext cx="3840480" cy="320040"/>
+            <a:off x="548640" y="3520440"/>
+            <a:ext cx="5120640" cy="320040"/>
           </a:xfrm>
         </p:spPr>
         <p:txBody>
@@ -3050,8 +3050,8 @@
         </p:nvSpPr>
         <p:spPr>
           <a:xfrm>
-            <a:off x="411480" y="3822192"/>
-            <a:ext cx="3840480" cy="640080"/>
+            <a:off x="548640" y="3822192"/>
+            <a:ext cx="5120640" cy="640080"/>
           </a:xfrm>
         </p:spPr>
         <p:txBody>
@@ -3099,8 +3099,8 @@
         </p:nvSpPr>
         <p:spPr>
           <a:xfrm>
-            <a:off x="411480" y="4526280"/>
-            <a:ext cx="3840480" cy="320040"/>
+            <a:off x="548640" y="4526280"/>
+            <a:ext cx="5120640" cy="320040"/>
           </a:xfrm>
         </p:spPr>
         <p:txBody>
@@ -3148,8 +3148,8 @@
         </p:nvSpPr>
         <p:spPr>
           <a:xfrm>
-            <a:off x="411480" y="4828032"/>
-            <a:ext cx="3840480" cy="640080"/>
+            <a:off x="548640" y="4828032"/>
+            <a:ext cx="5120640" cy="640080"/>
           </a:xfrm>
         </p:spPr>
         <p:txBody>
@@ -3197,8 +3197,8 @@
         </p:nvSpPr>
         <p:spPr>
           <a:xfrm>
-            <a:off x="411480" y="5532120"/>
-            <a:ext cx="3840480" cy="320040"/>
+            <a:off x="548640" y="5532120"/>
+            <a:ext cx="5120640" cy="320040"/>
           </a:xfrm>
         </p:spPr>
         <p:txBody>
@@ -3246,8 +3246,8 @@
         </p:nvSpPr>
         <p:spPr>
           <a:xfrm>
-            <a:off x="411480" y="5833872"/>
-            <a:ext cx="3840480" cy="640080"/>
+            <a:off x="548640" y="5833872"/>
+            <a:ext cx="5120640" cy="640080"/>
           </a:xfrm>
         </p:spPr>
         <p:txBody>
@@ -3295,8 +3295,8 @@
         </p:nvSpPr>
         <p:spPr>
           <a:xfrm>
-            <a:off x="4663440" y="914400"/>
-            <a:ext cx="4297680" cy="5715000"/>
+            <a:off x="6217920" y="914400"/>
+            <a:ext cx="5733288" cy="5715000"/>
           </a:xfrm>
           <a:solidFill>
             <a:srgbClr val="1A2840">
@@ -3335,8 +3335,8 @@
         </p:nvSpPr>
         <p:spPr>
           <a:xfrm>
-            <a:off x="4846320" y="987552"/>
-            <a:ext cx="3931920" cy="411480"/>
+            <a:off x="6464808" y="987552"/>
+            <a:ext cx="5239512" cy="411480"/>
           </a:xfrm>
         </p:spPr>
         <p:txBody>
@@ -3384,8 +3384,8 @@
         </p:nvSpPr>
         <p:spPr>
           <a:xfrm>
-            <a:off x="4892040" y="1508760"/>
-            <a:ext cx="3840480" cy="320040"/>
+            <a:off x="6519672" y="1508760"/>
+            <a:ext cx="5120640" cy="320040"/>
           </a:xfrm>
         </p:spPr>
         <p:txBody>
@@ -3433,8 +3433,8 @@
         </p:nvSpPr>
         <p:spPr>
           <a:xfrm>
-            <a:off x="4892040" y="1810512"/>
-            <a:ext cx="3840480" cy="640080"/>
+            <a:off x="6519672" y="1810512"/>
+            <a:ext cx="5120640" cy="640080"/>
           </a:xfrm>
         </p:spPr>
         <p:txBody>
@@ -3482,8 +3482,8 @@
         </p:nvSpPr>
         <p:spPr>
           <a:xfrm>
-            <a:off x="4892040" y="2514600"/>
-            <a:ext cx="3840480" cy="320040"/>
+            <a:off x="6519672" y="2514600"/>
+            <a:ext cx="5120640" cy="320040"/>
           </a:xfrm>
         </p:spPr>
         <p:txBody>
@@ -3531,8 +3531,8 @@
         </p:nvSpPr>
         <p:spPr>
           <a:xfrm>
-            <a:off x="4892040" y="2816352"/>
-            <a:ext cx="3840480" cy="640080"/>
+            <a:off x="6519672" y="2816352"/>
+            <a:ext cx="5120640" cy="640080"/>
           </a:xfrm>
         </p:spPr>
         <p:txBody>
@@ -3580,8 +3580,8 @@
         </p:nvSpPr>
         <p:spPr>
           <a:xfrm>
-            <a:off x="4892040" y="3520440"/>
-            <a:ext cx="3840480" cy="320040"/>
+            <a:off x="6519672" y="3520440"/>
+            <a:ext cx="5120640" cy="320040"/>
           </a:xfrm>
         </p:spPr>
         <p:txBody>
@@ -3629,8 +3629,8 @@
         </p:nvSpPr>
         <p:spPr>
           <a:xfrm>
-            <a:off x="4892040" y="3822192"/>
-            <a:ext cx="3840480" cy="640080"/>
+            <a:off x="6519672" y="3822192"/>
+            <a:ext cx="5120640" cy="640080"/>
           </a:xfrm>
         </p:spPr>
         <p:txBody>
@@ -3678,8 +3678,8 @@
         </p:nvSpPr>
         <p:spPr>
           <a:xfrm>
-            <a:off x="4892040" y="4526280"/>
-            <a:ext cx="3840480" cy="320040"/>
+            <a:off x="6519672" y="4526280"/>
+            <a:ext cx="5120640" cy="320040"/>
           </a:xfrm>
         </p:spPr>
         <p:txBody>
@@ -3727,8 +3727,8 @@
         </p:nvSpPr>
         <p:spPr>
           <a:xfrm>
-            <a:off x="4892040" y="4828032"/>
-            <a:ext cx="3840480" cy="640080"/>
+            <a:off x="6519672" y="4828032"/>
+            <a:ext cx="5120640" cy="640080"/>
           </a:xfrm>
         </p:spPr>
         <p:txBody>
@@ -3776,8 +3776,8 @@
         </p:nvSpPr>
         <p:spPr>
           <a:xfrm>
-            <a:off x="4892040" y="5532120"/>
-            <a:ext cx="3840480" cy="320040"/>
+            <a:off x="6519672" y="5532120"/>
+            <a:ext cx="5120640" cy="320040"/>
           </a:xfrm>
         </p:spPr>
         <p:txBody>
@@ -3825,8 +3825,8 @@
         </p:nvSpPr>
         <p:spPr>
           <a:xfrm>
-            <a:off x="4892040" y="5833872"/>
-            <a:ext cx="3840480" cy="640080"/>
+            <a:off x="6519672" y="5833872"/>
+            <a:ext cx="5120640" cy="640080"/>
           </a:xfrm>
         </p:spPr>
         <p:txBody>
@@ -3900,7 +3900,7 @@
         <p:spPr>
           <a:xfrm>
             <a:off x="0" y="0"/>
-            <a:ext cx="9144000" cy="6858000"/>
+            <a:ext cx="12192000" cy="6858000"/>
           </a:xfrm>
           <a:solidFill>
             <a:srgbClr val="1C2B4A">
@@ -3939,7 +3939,7 @@
         </p:nvSpPr>
         <p:spPr>
           <a:xfrm>
-            <a:off x="320040" y="1828800"/>
+            <a:off x="429768" y="1828800"/>
             <a:ext cx="64008" cy="3200400"/>
           </a:xfrm>
           <a:solidFill>
@@ -3979,8 +3979,8 @@
         </p:nvSpPr>
         <p:spPr>
           <a:xfrm>
-            <a:off x="640080" y="1920240"/>
-            <a:ext cx="8229600" cy="914400"/>
+            <a:off x="850392" y="1920240"/>
+            <a:ext cx="10972800" cy="914400"/>
           </a:xfrm>
         </p:spPr>
         <p:txBody>
@@ -4028,8 +4028,8 @@
         </p:nvSpPr>
         <p:spPr>
           <a:xfrm>
-            <a:off x="640080" y="2926080"/>
-            <a:ext cx="7772400" cy="548640"/>
+            <a:off x="850392" y="2926080"/>
+            <a:ext cx="10515600" cy="548640"/>
           </a:xfrm>
         </p:spPr>
         <p:txBody>
@@ -4077,8 +4077,8 @@
         </p:nvSpPr>
         <p:spPr>
           <a:xfrm>
-            <a:off x="640080" y="3611880"/>
-            <a:ext cx="2651760" cy="411480"/>
+            <a:off x="850392" y="3611880"/>
+            <a:ext cx="3538728" cy="411480"/>
           </a:xfrm>
         </p:spPr>
         <p:txBody>
@@ -4126,8 +4126,8 @@
         </p:nvSpPr>
         <p:spPr>
           <a:xfrm>
-            <a:off x="3383280" y="3611880"/>
-            <a:ext cx="5394960" cy="411480"/>
+            <a:off x="4636008" y="3611880"/>
+            <a:ext cx="7196328" cy="411480"/>
           </a:xfrm>
         </p:spPr>
         <p:txBody>
@@ -4175,8 +4175,8 @@
         </p:nvSpPr>
         <p:spPr>
           <a:xfrm>
-            <a:off x="640080" y="4251960"/>
-            <a:ext cx="2651760" cy="411480"/>
+            <a:off x="850392" y="4251960"/>
+            <a:ext cx="3538728" cy="411480"/>
           </a:xfrm>
         </p:spPr>
         <p:txBody>
@@ -4224,8 +4224,8 @@
         </p:nvSpPr>
         <p:spPr>
           <a:xfrm>
-            <a:off x="3383280" y="4251960"/>
-            <a:ext cx="5394960" cy="411480"/>
+            <a:off x="4636008" y="4251960"/>
+            <a:ext cx="7196328" cy="411480"/>
           </a:xfrm>
         </p:spPr>
         <p:txBody>
@@ -4273,8 +4273,8 @@
         </p:nvSpPr>
         <p:spPr>
           <a:xfrm>
-            <a:off x="640080" y="4892040"/>
-            <a:ext cx="2651760" cy="411480"/>
+            <a:off x="850392" y="4892040"/>
+            <a:ext cx="3538728" cy="411480"/>
           </a:xfrm>
         </p:spPr>
         <p:txBody>
@@ -4322,8 +4322,8 @@
         </p:nvSpPr>
         <p:spPr>
           <a:xfrm>
-            <a:off x="3383280" y="4892040"/>
-            <a:ext cx="5394960" cy="411480"/>
+            <a:off x="4636008" y="4892040"/>
+            <a:ext cx="7196328" cy="411480"/>
           </a:xfrm>
         </p:spPr>
         <p:txBody>
@@ -4397,7 +4397,7 @@
         <p:spPr>
           <a:xfrm>
             <a:off x="0" y="0"/>
-            <a:ext cx="9144000" cy="6858000"/>
+            <a:ext cx="12192000" cy="6858000"/>
           </a:xfrm>
           <a:solidFill>
             <a:srgbClr val="1C2B4A">
@@ -4437,7 +4437,7 @@
         <p:spPr>
           <a:xfrm>
             <a:off x="0" y="0"/>
-            <a:ext cx="9144000" cy="822960"/>
+            <a:ext cx="12192000" cy="822960"/>
           </a:xfrm>
           <a:solidFill>
             <a:srgbClr val="1D9E75">
@@ -4476,8 +4476,8 @@
         </p:nvSpPr>
         <p:spPr>
           <a:xfrm>
-            <a:off x="365760" y="91440"/>
-            <a:ext cx="8229600" cy="640080"/>
+            <a:off x="457200" y="91440"/>
+            <a:ext cx="11277600" cy="640080"/>
           </a:xfrm>
         </p:spPr>
         <p:txBody>
@@ -4525,8 +4525,8 @@
         </p:nvSpPr>
         <p:spPr>
           <a:xfrm>
-            <a:off x="182880" y="960120"/>
-            <a:ext cx="2880360" cy="5212080"/>
+            <a:off x="246888" y="960120"/>
+            <a:ext cx="3840480" cy="5212080"/>
           </a:xfrm>
           <a:solidFill>
             <a:srgbClr val="1A2840">
@@ -4565,8 +4565,8 @@
         </p:nvSpPr>
         <p:spPr>
           <a:xfrm>
-            <a:off x="292608" y="1024128"/>
-            <a:ext cx="2651760" cy="54864"/>
+            <a:off x="393192" y="1024128"/>
+            <a:ext cx="3538728" cy="54864"/>
           </a:xfrm>
           <a:solidFill>
             <a:srgbClr val="F39C12">
@@ -4605,8 +4605,8 @@
         </p:nvSpPr>
         <p:spPr>
           <a:xfrm>
-            <a:off x="320040" y="1115568"/>
-            <a:ext cx="2651760" cy="502920"/>
+            <a:off x="429768" y="1115568"/>
+            <a:ext cx="3538728" cy="502920"/>
           </a:xfrm>
         </p:spPr>
         <p:txBody>
@@ -4654,8 +4654,8 @@
         </p:nvSpPr>
         <p:spPr>
           <a:xfrm>
-            <a:off x="320040" y="1664208"/>
-            <a:ext cx="2651760" cy="4297680"/>
+            <a:off x="429768" y="1664208"/>
+            <a:ext cx="3538728" cy="4297680"/>
           </a:xfrm>
         </p:spPr>
         <p:txBody>
@@ -4787,8 +4787,8 @@
         </p:nvSpPr>
         <p:spPr>
           <a:xfrm>
-            <a:off x="3172968" y="960120"/>
-            <a:ext cx="2880360" cy="5212080"/>
+            <a:off x="4233672" y="960120"/>
+            <a:ext cx="3840480" cy="5212080"/>
           </a:xfrm>
           <a:solidFill>
             <a:srgbClr val="1A2840">
@@ -4827,8 +4827,8 @@
         </p:nvSpPr>
         <p:spPr>
           <a:xfrm>
-            <a:off x="3282696" y="1024128"/>
-            <a:ext cx="2651760" cy="54864"/>
+            <a:off x="4379976" y="1024128"/>
+            <a:ext cx="3538728" cy="54864"/>
           </a:xfrm>
           <a:solidFill>
             <a:srgbClr val="378ADD">
@@ -4867,8 +4867,8 @@
         </p:nvSpPr>
         <p:spPr>
           <a:xfrm>
-            <a:off x="3310128" y="1115568"/>
-            <a:ext cx="2651760" cy="502920"/>
+            <a:off x="4416552" y="1115568"/>
+            <a:ext cx="3538728" cy="502920"/>
           </a:xfrm>
         </p:spPr>
         <p:txBody>
@@ -4916,8 +4916,8 @@
         </p:nvSpPr>
         <p:spPr>
           <a:xfrm>
-            <a:off x="3310128" y="1664208"/>
-            <a:ext cx="2651760" cy="4297680"/>
+            <a:off x="4416552" y="1664208"/>
+            <a:ext cx="3538728" cy="4297680"/>
           </a:xfrm>
         </p:spPr>
         <p:txBody>
@@ -5049,8 +5049,8 @@
         </p:nvSpPr>
         <p:spPr>
           <a:xfrm>
-            <a:off x="6163056" y="960120"/>
-            <a:ext cx="2880360" cy="5212080"/>
+            <a:off x="8220456" y="960120"/>
+            <a:ext cx="3840480" cy="5212080"/>
           </a:xfrm>
           <a:solidFill>
             <a:srgbClr val="1A2840">
@@ -5089,8 +5089,8 @@
         </p:nvSpPr>
         <p:spPr>
           <a:xfrm>
-            <a:off x="6272784" y="1024128"/>
-            <a:ext cx="2651760" cy="54864"/>
+            <a:off x="8366760" y="1024128"/>
+            <a:ext cx="3538728" cy="54864"/>
           </a:xfrm>
           <a:solidFill>
             <a:srgbClr val="1D9E75">
@@ -5129,8 +5129,8 @@
         </p:nvSpPr>
         <p:spPr>
           <a:xfrm>
-            <a:off x="6300216" y="1115568"/>
-            <a:ext cx="2651760" cy="502920"/>
+            <a:off x="8403336" y="1115568"/>
+            <a:ext cx="3538728" cy="502920"/>
           </a:xfrm>
         </p:spPr>
         <p:txBody>
@@ -5178,8 +5178,8 @@
         </p:nvSpPr>
         <p:spPr>
           <a:xfrm>
-            <a:off x="6300216" y="1664208"/>
-            <a:ext cx="2651760" cy="4297680"/>
+            <a:off x="8403336" y="1664208"/>
+            <a:ext cx="3538728" cy="4297680"/>
           </a:xfrm>
         </p:spPr>
         <p:txBody>
@@ -5311,8 +5311,8 @@
         </p:nvSpPr>
         <p:spPr>
           <a:xfrm>
-            <a:off x="274320" y="6309360"/>
-            <a:ext cx="8595360" cy="365760"/>
+            <a:off x="365760" y="6309360"/>
+            <a:ext cx="11430000" cy="365760"/>
           </a:xfrm>
         </p:spPr>
         <p:txBody>
@@ -5386,7 +5386,7 @@
         <p:spPr>
           <a:xfrm>
             <a:off x="0" y="0"/>
-            <a:ext cx="9144000" cy="6858000"/>
+            <a:ext cx="12192000" cy="6858000"/>
           </a:xfrm>
           <a:solidFill>
             <a:srgbClr val="1C2B4A">
@@ -5426,7 +5426,7 @@
         <p:spPr>
           <a:xfrm>
             <a:off x="0" y="0"/>
-            <a:ext cx="9144000" cy="822960"/>
+            <a:ext cx="12192000" cy="822960"/>
           </a:xfrm>
           <a:solidFill>
             <a:srgbClr val="1D9E75">
@@ -5465,8 +5465,8 @@
         </p:nvSpPr>
         <p:spPr>
           <a:xfrm>
-            <a:off x="365760" y="91440"/>
-            <a:ext cx="8229600" cy="640080"/>
+            <a:off x="457200" y="91440"/>
+            <a:ext cx="11277600" cy="640080"/>
           </a:xfrm>
         </p:spPr>
         <p:txBody>
@@ -5514,8 +5514,8 @@
         </p:nvSpPr>
         <p:spPr>
           <a:xfrm>
-            <a:off x="137160" y="987552"/>
-            <a:ext cx="2377440" cy="320040"/>
+            <a:off x="182880" y="987552"/>
+            <a:ext cx="3172968" cy="320040"/>
           </a:xfrm>
         </p:spPr>
         <p:txBody>
@@ -5563,8 +5563,8 @@
         </p:nvSpPr>
         <p:spPr>
           <a:xfrm>
-            <a:off x="2743200" y="987552"/>
-            <a:ext cx="3931920" cy="320040"/>
+            <a:off x="3657600" y="987552"/>
+            <a:ext cx="5239512" cy="320040"/>
           </a:xfrm>
         </p:spPr>
         <p:txBody>
@@ -5612,8 +5612,8 @@
         </p:nvSpPr>
         <p:spPr>
           <a:xfrm>
-            <a:off x="6949440" y="987552"/>
-            <a:ext cx="1920240" cy="320040"/>
+            <a:off x="9262872" y="987552"/>
+            <a:ext cx="2560320" cy="320040"/>
           </a:xfrm>
         </p:spPr>
         <p:txBody>
@@ -5661,8 +5661,8 @@
         </p:nvSpPr>
         <p:spPr>
           <a:xfrm>
-            <a:off x="137160" y="1371600"/>
-            <a:ext cx="2377440" cy="2011680"/>
+            <a:off x="182880" y="1371600"/>
+            <a:ext cx="3172968" cy="2011680"/>
           </a:xfrm>
           <a:solidFill>
             <a:srgbClr val="2A3F6A">
@@ -5701,8 +5701,8 @@
         </p:nvSpPr>
         <p:spPr>
           <a:xfrm>
-            <a:off x="137160" y="1463040"/>
-            <a:ext cx="2377440" cy="594360"/>
+            <a:off x="182880" y="1463040"/>
+            <a:ext cx="3172968" cy="594360"/>
           </a:xfrm>
         </p:spPr>
         <p:txBody>
@@ -5751,8 +5751,8 @@
         </p:nvSpPr>
         <p:spPr>
           <a:xfrm>
-            <a:off x="182880" y="2103120"/>
-            <a:ext cx="2286000" cy="1188720"/>
+            <a:off x="246888" y="2103120"/>
+            <a:ext cx="3044952" cy="1188720"/>
           </a:xfrm>
         </p:spPr>
         <p:txBody>
@@ -5884,8 +5884,8 @@
         </p:nvSpPr>
         <p:spPr>
           <a:xfrm>
-            <a:off x="137160" y="3566160"/>
-            <a:ext cx="2377440" cy="2011680"/>
+            <a:off x="182880" y="3566160"/>
+            <a:ext cx="3172968" cy="2011680"/>
           </a:xfrm>
           <a:solidFill>
             <a:srgbClr val="2A3F6A">
@@ -5924,8 +5924,8 @@
         </p:nvSpPr>
         <p:spPr>
           <a:xfrm>
-            <a:off x="137160" y="3657600"/>
-            <a:ext cx="2377440" cy="594360"/>
+            <a:off x="182880" y="3657600"/>
+            <a:ext cx="3172968" cy="594360"/>
           </a:xfrm>
         </p:spPr>
         <p:txBody>
@@ -5974,8 +5974,8 @@
         </p:nvSpPr>
         <p:spPr>
           <a:xfrm>
-            <a:off x="182880" y="4251960"/>
-            <a:ext cx="2286000" cy="1234440"/>
+            <a:off x="246888" y="4251960"/>
+            <a:ext cx="3044952" cy="1234440"/>
           </a:xfrm>
         </p:spPr>
         <p:txBody>
@@ -6107,8 +6107,8 @@
         </p:nvSpPr>
         <p:spPr>
           <a:xfrm>
-            <a:off x="2542032" y="2148840"/>
-            <a:ext cx="274320" cy="411480"/>
+            <a:off x="3392424" y="2148840"/>
+            <a:ext cx="365760" cy="411480"/>
           </a:xfrm>
         </p:spPr>
         <p:txBody>
@@ -6156,8 +6156,8 @@
         </p:nvSpPr>
         <p:spPr>
           <a:xfrm>
-            <a:off x="2542032" y="3566160"/>
-            <a:ext cx="274320" cy="411480"/>
+            <a:off x="3392424" y="3566160"/>
+            <a:ext cx="365760" cy="411480"/>
           </a:xfrm>
         </p:spPr>
         <p:txBody>
@@ -6205,8 +6205,8 @@
         </p:nvSpPr>
         <p:spPr>
           <a:xfrm>
-            <a:off x="6675120" y="3017520"/>
-            <a:ext cx="274320" cy="457200"/>
+            <a:off x="8897112" y="3017520"/>
+            <a:ext cx="365760" cy="457200"/>
           </a:xfrm>
         </p:spPr>
         <p:txBody>
@@ -6254,8 +6254,8 @@
         </p:nvSpPr>
         <p:spPr>
           <a:xfrm>
-            <a:off x="2743200" y="1371600"/>
-            <a:ext cx="3931920" cy="1234440"/>
+            <a:off x="3657600" y="1371600"/>
+            <a:ext cx="5239512" cy="1234440"/>
           </a:xfrm>
           <a:solidFill>
             <a:srgbClr val="1D5C46">
@@ -6294,8 +6294,8 @@
         </p:nvSpPr>
         <p:spPr>
           <a:xfrm>
-            <a:off x="2880360" y="1444752"/>
-            <a:ext cx="3749040" cy="457200"/>
+            <a:off x="3840480" y="1444752"/>
+            <a:ext cx="4937760" cy="457200"/>
           </a:xfrm>
         </p:spPr>
         <p:txBody>
@@ -6343,8 +6343,8 @@
         </p:nvSpPr>
         <p:spPr>
           <a:xfrm>
-            <a:off x="2880360" y="1920240"/>
-            <a:ext cx="3749040" cy="594360"/>
+            <a:off x="3840480" y="1920240"/>
+            <a:ext cx="4937760" cy="594360"/>
           </a:xfrm>
         </p:spPr>
         <p:txBody>
@@ -6420,8 +6420,8 @@
         </p:nvSpPr>
         <p:spPr>
           <a:xfrm>
-            <a:off x="2743200" y="2788920"/>
-            <a:ext cx="3931920" cy="1234440"/>
+            <a:off x="3657600" y="2788920"/>
+            <a:ext cx="5239512" cy="1234440"/>
           </a:xfrm>
           <a:solidFill>
             <a:srgbClr val="1A4A7A">
@@ -6460,8 +6460,8 @@
         </p:nvSpPr>
         <p:spPr>
           <a:xfrm>
-            <a:off x="2880360" y="2862072"/>
-            <a:ext cx="3749040" cy="457200"/>
+            <a:off x="3840480" y="2862072"/>
+            <a:ext cx="4937760" cy="457200"/>
           </a:xfrm>
         </p:spPr>
         <p:txBody>
@@ -6509,8 +6509,8 @@
         </p:nvSpPr>
         <p:spPr>
           <a:xfrm>
-            <a:off x="2880360" y="3337560"/>
-            <a:ext cx="3749040" cy="594360"/>
+            <a:off x="3840480" y="3337560"/>
+            <a:ext cx="4937760" cy="594360"/>
           </a:xfrm>
         </p:spPr>
         <p:txBody>
@@ -6586,8 +6586,8 @@
         </p:nvSpPr>
         <p:spPr>
           <a:xfrm>
-            <a:off x="2743200" y="4206240"/>
-            <a:ext cx="3931920" cy="1234440"/>
+            <a:off x="3657600" y="4206240"/>
+            <a:ext cx="5239512" cy="1234440"/>
           </a:xfrm>
           <a:solidFill>
             <a:srgbClr val="6B4C1A">
@@ -6626,8 +6626,8 @@
         </p:nvSpPr>
         <p:spPr>
           <a:xfrm>
-            <a:off x="2880360" y="4279392"/>
-            <a:ext cx="3749040" cy="457200"/>
+            <a:off x="3840480" y="4279392"/>
+            <a:ext cx="4937760" cy="457200"/>
           </a:xfrm>
         </p:spPr>
         <p:txBody>
@@ -6675,8 +6675,8 @@
         </p:nvSpPr>
         <p:spPr>
           <a:xfrm>
-            <a:off x="2880360" y="4754880"/>
-            <a:ext cx="3749040" cy="594360"/>
+            <a:off x="3840480" y="4754880"/>
+            <a:ext cx="4937760" cy="594360"/>
           </a:xfrm>
         </p:spPr>
         <p:txBody>
@@ -6752,8 +6752,8 @@
         </p:nvSpPr>
         <p:spPr>
           <a:xfrm>
-            <a:off x="6949440" y="1371600"/>
-            <a:ext cx="2011680" cy="4663440"/>
+            <a:off x="9262872" y="1371600"/>
+            <a:ext cx="2679192" cy="4663440"/>
           </a:xfrm>
           <a:solidFill>
             <a:srgbClr val="1D5038">
@@ -6792,8 +6792,8 @@
         </p:nvSpPr>
         <p:spPr>
           <a:xfrm>
-            <a:off x="6949440" y="1463040"/>
-            <a:ext cx="2011680" cy="365760"/>
+            <a:off x="9262872" y="1463040"/>
+            <a:ext cx="2679192" cy="365760"/>
           </a:xfrm>
         </p:spPr>
         <p:txBody>
@@ -6841,8 +6841,8 @@
         </p:nvSpPr>
         <p:spPr>
           <a:xfrm>
-            <a:off x="6995160" y="1920240"/>
-            <a:ext cx="1920240" cy="3840480"/>
+            <a:off x="9326880" y="1920240"/>
+            <a:ext cx="2560320" cy="3840480"/>
           </a:xfrm>
         </p:spPr>
         <p:txBody>
@@ -7112,7 +7112,7 @@
         <p:spPr>
           <a:xfrm>
             <a:off x="0" y="0"/>
-            <a:ext cx="9144000" cy="6858000"/>
+            <a:ext cx="12192000" cy="6858000"/>
           </a:xfrm>
           <a:solidFill>
             <a:srgbClr val="1C2B4A">
@@ -7152,7 +7152,7 @@
         <p:spPr>
           <a:xfrm>
             <a:off x="0" y="0"/>
-            <a:ext cx="9144000" cy="822960"/>
+            <a:ext cx="12192000" cy="822960"/>
           </a:xfrm>
           <a:solidFill>
             <a:srgbClr val="1D9E75">
@@ -7191,8 +7191,8 @@
         </p:nvSpPr>
         <p:spPr>
           <a:xfrm>
-            <a:off x="365760" y="91440"/>
-            <a:ext cx="8229600" cy="640080"/>
+            <a:off x="457200" y="91440"/>
+            <a:ext cx="11277600" cy="640080"/>
           </a:xfrm>
         </p:spPr>
         <p:txBody>
@@ -7240,8 +7240,8 @@
         </p:nvSpPr>
         <p:spPr>
           <a:xfrm>
-            <a:off x="274320" y="1005840"/>
-            <a:ext cx="2103120" cy="1508760"/>
+            <a:off x="365760" y="1005840"/>
+            <a:ext cx="2807208" cy="1508760"/>
           </a:xfrm>
           <a:solidFill>
             <a:srgbClr val="1A2840">
@@ -7280,7 +7280,7 @@
         </p:nvSpPr>
         <p:spPr>
           <a:xfrm>
-            <a:off x="338328" y="1143000"/>
+            <a:off x="448056" y="1143000"/>
             <a:ext cx="64008" cy="1188720"/>
           </a:xfrm>
           <a:solidFill>
@@ -7320,8 +7320,8 @@
         </p:nvSpPr>
         <p:spPr>
           <a:xfrm>
-            <a:off x="502920" y="1143000"/>
-            <a:ext cx="1828800" cy="502920"/>
+            <a:off x="667512" y="1143000"/>
+            <a:ext cx="2441448" cy="502920"/>
           </a:xfrm>
         </p:spPr>
         <p:txBody>
@@ -7369,8 +7369,8 @@
         </p:nvSpPr>
         <p:spPr>
           <a:xfrm>
-            <a:off x="502920" y="1664208"/>
-            <a:ext cx="1828800" cy="347472"/>
+            <a:off x="667512" y="1664208"/>
+            <a:ext cx="2441448" cy="347472"/>
           </a:xfrm>
         </p:spPr>
         <p:txBody>
@@ -7418,8 +7418,8 @@
         </p:nvSpPr>
         <p:spPr>
           <a:xfrm>
-            <a:off x="502920" y="2011680"/>
-            <a:ext cx="1828800" cy="347472"/>
+            <a:off x="667512" y="2011680"/>
+            <a:ext cx="2441448" cy="347472"/>
           </a:xfrm>
         </p:spPr>
         <p:txBody>
@@ -7467,8 +7467,8 @@
         </p:nvSpPr>
         <p:spPr>
           <a:xfrm>
-            <a:off x="2514600" y="1005840"/>
-            <a:ext cx="2103120" cy="1508760"/>
+            <a:off x="3355848" y="1005840"/>
+            <a:ext cx="2807208" cy="1508760"/>
           </a:xfrm>
           <a:solidFill>
             <a:srgbClr val="1A2840">
@@ -7507,7 +7507,7 @@
         </p:nvSpPr>
         <p:spPr>
           <a:xfrm>
-            <a:off x="2578608" y="1143000"/>
+            <a:off x="3438144" y="1143000"/>
             <a:ext cx="64008" cy="1188720"/>
           </a:xfrm>
           <a:solidFill>
@@ -7547,8 +7547,8 @@
         </p:nvSpPr>
         <p:spPr>
           <a:xfrm>
-            <a:off x="2743200" y="1143000"/>
-            <a:ext cx="1828800" cy="502920"/>
+            <a:off x="3657600" y="1143000"/>
+            <a:ext cx="2441448" cy="502920"/>
           </a:xfrm>
         </p:spPr>
         <p:txBody>
@@ -7596,8 +7596,8 @@
         </p:nvSpPr>
         <p:spPr>
           <a:xfrm>
-            <a:off x="2743200" y="1664208"/>
-            <a:ext cx="1828800" cy="347472"/>
+            <a:off x="3657600" y="1664208"/>
+            <a:ext cx="2441448" cy="347472"/>
           </a:xfrm>
         </p:spPr>
         <p:txBody>
@@ -7645,8 +7645,8 @@
         </p:nvSpPr>
         <p:spPr>
           <a:xfrm>
-            <a:off x="2743200" y="2011680"/>
-            <a:ext cx="1828800" cy="347472"/>
+            <a:off x="3657600" y="2011680"/>
+            <a:ext cx="2441448" cy="347472"/>
           </a:xfrm>
         </p:spPr>
         <p:txBody>
@@ -7694,8 +7694,8 @@
         </p:nvSpPr>
         <p:spPr>
           <a:xfrm>
-            <a:off x="274320" y="2743200"/>
-            <a:ext cx="2103120" cy="1508760"/>
+            <a:off x="365760" y="2743200"/>
+            <a:ext cx="2807208" cy="1508760"/>
           </a:xfrm>
           <a:solidFill>
             <a:srgbClr val="1A2840">
@@ -7734,7 +7734,7 @@
         </p:nvSpPr>
         <p:spPr>
           <a:xfrm>
-            <a:off x="338328" y="2880360"/>
+            <a:off x="448056" y="2880360"/>
             <a:ext cx="64008" cy="1188720"/>
           </a:xfrm>
           <a:solidFill>
@@ -7774,8 +7774,8 @@
         </p:nvSpPr>
         <p:spPr>
           <a:xfrm>
-            <a:off x="502920" y="2880360"/>
-            <a:ext cx="1828800" cy="502920"/>
+            <a:off x="667512" y="2880360"/>
+            <a:ext cx="2441448" cy="502920"/>
           </a:xfrm>
         </p:spPr>
         <p:txBody>
@@ -7823,8 +7823,8 @@
         </p:nvSpPr>
         <p:spPr>
           <a:xfrm>
-            <a:off x="502920" y="3401568"/>
-            <a:ext cx="1828800" cy="347472"/>
+            <a:off x="667512" y="3401568"/>
+            <a:ext cx="2441448" cy="347472"/>
           </a:xfrm>
         </p:spPr>
         <p:txBody>
@@ -7872,8 +7872,8 @@
         </p:nvSpPr>
         <p:spPr>
           <a:xfrm>
-            <a:off x="502920" y="3749040"/>
-            <a:ext cx="1828800" cy="347472"/>
+            <a:off x="667512" y="3749040"/>
+            <a:ext cx="2441448" cy="347472"/>
           </a:xfrm>
         </p:spPr>
         <p:txBody>
@@ -7921,8 +7921,8 @@
         </p:nvSpPr>
         <p:spPr>
           <a:xfrm>
-            <a:off x="2514600" y="2743200"/>
-            <a:ext cx="2103120" cy="1508760"/>
+            <a:off x="3355848" y="2743200"/>
+            <a:ext cx="2807208" cy="1508760"/>
           </a:xfrm>
           <a:solidFill>
             <a:srgbClr val="1A2840">
@@ -7961,7 +7961,7 @@
         </p:nvSpPr>
         <p:spPr>
           <a:xfrm>
-            <a:off x="2578608" y="2880360"/>
+            <a:off x="3438144" y="2880360"/>
             <a:ext cx="64008" cy="1188720"/>
           </a:xfrm>
           <a:solidFill>
@@ -8001,8 +8001,8 @@
         </p:nvSpPr>
         <p:spPr>
           <a:xfrm>
-            <a:off x="2743200" y="2880360"/>
-            <a:ext cx="1828800" cy="502920"/>
+            <a:off x="3657600" y="2880360"/>
+            <a:ext cx="2441448" cy="502920"/>
           </a:xfrm>
         </p:spPr>
         <p:txBody>
@@ -8050,8 +8050,8 @@
         </p:nvSpPr>
         <p:spPr>
           <a:xfrm>
-            <a:off x="2743200" y="3401568"/>
-            <a:ext cx="1828800" cy="347472"/>
+            <a:off x="3657600" y="3401568"/>
+            <a:ext cx="2441448" cy="347472"/>
           </a:xfrm>
         </p:spPr>
         <p:txBody>
@@ -8099,8 +8099,8 @@
         </p:nvSpPr>
         <p:spPr>
           <a:xfrm>
-            <a:off x="2743200" y="3749040"/>
-            <a:ext cx="1828800" cy="347472"/>
+            <a:off x="3657600" y="3749040"/>
+            <a:ext cx="2441448" cy="347472"/>
           </a:xfrm>
         </p:spPr>
         <p:txBody>
@@ -8148,8 +8148,8 @@
         </p:nvSpPr>
         <p:spPr>
           <a:xfrm>
-            <a:off x="4800600" y="1005840"/>
-            <a:ext cx="4160520" cy="5394960"/>
+            <a:off x="6400800" y="1005840"/>
+            <a:ext cx="5550408" cy="5394960"/>
           </a:xfrm>
           <a:solidFill>
             <a:srgbClr val="1A2840">
@@ -8188,8 +8188,8 @@
         </p:nvSpPr>
         <p:spPr>
           <a:xfrm>
-            <a:off x="4983480" y="1097280"/>
-            <a:ext cx="3840480" cy="411480"/>
+            <a:off x="6647688" y="1097280"/>
+            <a:ext cx="5120640" cy="411480"/>
           </a:xfrm>
         </p:spPr>
         <p:txBody>
@@ -8237,8 +8237,8 @@
         </p:nvSpPr>
         <p:spPr>
           <a:xfrm>
-            <a:off x="4983480" y="1508760"/>
-            <a:ext cx="3840480" cy="320040"/>
+            <a:off x="6647688" y="1508760"/>
+            <a:ext cx="5120640" cy="320040"/>
           </a:xfrm>
         </p:spPr>
         <p:txBody>
@@ -8286,7 +8286,7 @@
         </p:nvSpPr>
         <p:spPr>
           <a:xfrm>
-            <a:off x="5001768" y="1920240"/>
+            <a:off x="6675120" y="1920240"/>
             <a:ext cx="64008" cy="457200"/>
           </a:xfrm>
           <a:solidFill>
@@ -8326,8 +8326,8 @@
         </p:nvSpPr>
         <p:spPr>
           <a:xfrm>
-            <a:off x="5166360" y="1920240"/>
-            <a:ext cx="2377440" cy="274320"/>
+            <a:off x="6885432" y="1920240"/>
+            <a:ext cx="3172968" cy="274320"/>
           </a:xfrm>
         </p:spPr>
         <p:txBody>
@@ -8375,8 +8375,8 @@
         </p:nvSpPr>
         <p:spPr>
           <a:xfrm>
-            <a:off x="5166360" y="2194560"/>
-            <a:ext cx="2377440" cy="256032"/>
+            <a:off x="6885432" y="2194560"/>
+            <a:ext cx="3172968" cy="256032"/>
           </a:xfrm>
         </p:spPr>
         <p:txBody>
@@ -8424,7 +8424,7 @@
         </p:nvSpPr>
         <p:spPr>
           <a:xfrm>
-            <a:off x="5001768" y="2624328"/>
+            <a:off x="6675120" y="2624328"/>
             <a:ext cx="64008" cy="457200"/>
           </a:xfrm>
           <a:solidFill>
@@ -8464,8 +8464,8 @@
         </p:nvSpPr>
         <p:spPr>
           <a:xfrm>
-            <a:off x="5166360" y="2624328"/>
-            <a:ext cx="2377440" cy="274320"/>
+            <a:off x="6885432" y="2624328"/>
+            <a:ext cx="3172968" cy="274320"/>
           </a:xfrm>
         </p:spPr>
         <p:txBody>
@@ -8513,8 +8513,8 @@
         </p:nvSpPr>
         <p:spPr>
           <a:xfrm>
-            <a:off x="5166360" y="2898648"/>
-            <a:ext cx="2377440" cy="256032"/>
+            <a:off x="6885432" y="2898648"/>
+            <a:ext cx="3172968" cy="256032"/>
           </a:xfrm>
         </p:spPr>
         <p:txBody>
@@ -8562,7 +8562,7 @@
         </p:nvSpPr>
         <p:spPr>
           <a:xfrm>
-            <a:off x="5001768" y="3328416"/>
+            <a:off x="6675120" y="3328416"/>
             <a:ext cx="64008" cy="457200"/>
           </a:xfrm>
           <a:solidFill>
@@ -8602,8 +8602,8 @@
         </p:nvSpPr>
         <p:spPr>
           <a:xfrm>
-            <a:off x="5166360" y="3328416"/>
-            <a:ext cx="2377440" cy="274320"/>
+            <a:off x="6885432" y="3328416"/>
+            <a:ext cx="3172968" cy="274320"/>
           </a:xfrm>
         </p:spPr>
         <p:txBody>
@@ -8651,8 +8651,8 @@
         </p:nvSpPr>
         <p:spPr>
           <a:xfrm>
-            <a:off x="5166360" y="3602736"/>
-            <a:ext cx="2377440" cy="256032"/>
+            <a:off x="6885432" y="3602736"/>
+            <a:ext cx="3172968" cy="256032"/>
           </a:xfrm>
         </p:spPr>
         <p:txBody>
@@ -8700,7 +8700,7 @@
         </p:nvSpPr>
         <p:spPr>
           <a:xfrm>
-            <a:off x="5001768" y="4032504"/>
+            <a:off x="6675120" y="4032504"/>
             <a:ext cx="64008" cy="457200"/>
           </a:xfrm>
           <a:solidFill>
@@ -8740,8 +8740,8 @@
         </p:nvSpPr>
         <p:spPr>
           <a:xfrm>
-            <a:off x="5166360" y="4032504"/>
-            <a:ext cx="2377440" cy="274320"/>
+            <a:off x="6885432" y="4032504"/>
+            <a:ext cx="3172968" cy="274320"/>
           </a:xfrm>
         </p:spPr>
         <p:txBody>
@@ -8789,8 +8789,8 @@
         </p:nvSpPr>
         <p:spPr>
           <a:xfrm>
-            <a:off x="5166360" y="4306824"/>
-            <a:ext cx="2377440" cy="256032"/>
+            <a:off x="6885432" y="4306824"/>
+            <a:ext cx="3172968" cy="256032"/>
           </a:xfrm>
         </p:spPr>
         <p:txBody>
@@ -8838,7 +8838,7 @@
         </p:nvSpPr>
         <p:spPr>
           <a:xfrm>
-            <a:off x="5001768" y="4736592"/>
+            <a:off x="6675120" y="4736592"/>
             <a:ext cx="64008" cy="457200"/>
           </a:xfrm>
           <a:solidFill>
@@ -8878,8 +8878,8 @@
         </p:nvSpPr>
         <p:spPr>
           <a:xfrm>
-            <a:off x="5166360" y="4736592"/>
-            <a:ext cx="2377440" cy="274320"/>
+            <a:off x="6885432" y="4736592"/>
+            <a:ext cx="3172968" cy="274320"/>
           </a:xfrm>
         </p:spPr>
         <p:txBody>
@@ -8927,8 +8927,8 @@
         </p:nvSpPr>
         <p:spPr>
           <a:xfrm>
-            <a:off x="5166360" y="5010912"/>
-            <a:ext cx="2377440" cy="256032"/>
+            <a:off x="6885432" y="5010912"/>
+            <a:ext cx="3172968" cy="256032"/>
           </a:xfrm>
         </p:spPr>
         <p:txBody>
@@ -8976,7 +8976,7 @@
         </p:nvSpPr>
         <p:spPr>
           <a:xfrm>
-            <a:off x="5001768" y="5440680"/>
+            <a:off x="6675120" y="5440680"/>
             <a:ext cx="64008" cy="457200"/>
           </a:xfrm>
           <a:solidFill>
@@ -9016,8 +9016,8 @@
         </p:nvSpPr>
         <p:spPr>
           <a:xfrm>
-            <a:off x="5166360" y="5440680"/>
-            <a:ext cx="2377440" cy="274320"/>
+            <a:off x="6885432" y="5440680"/>
+            <a:ext cx="3172968" cy="274320"/>
           </a:xfrm>
         </p:spPr>
         <p:txBody>
@@ -9065,8 +9065,8 @@
         </p:nvSpPr>
         <p:spPr>
           <a:xfrm>
-            <a:off x="5166360" y="5715000"/>
-            <a:ext cx="2377440" cy="256032"/>
+            <a:off x="6885432" y="5715000"/>
+            <a:ext cx="3172968" cy="256032"/>
           </a:xfrm>
         </p:spPr>
         <p:txBody>
@@ -9114,8 +9114,8 @@
         </p:nvSpPr>
         <p:spPr>
           <a:xfrm>
-            <a:off x="4983480" y="6126480"/>
-            <a:ext cx="3749040" cy="274320"/>
+            <a:off x="6647688" y="6126480"/>
+            <a:ext cx="5120640" cy="274320"/>
           </a:xfrm>
         </p:spPr>
         <p:txBody>
@@ -9189,7 +9189,7 @@
         <p:spPr>
           <a:xfrm>
             <a:off x="0" y="0"/>
-            <a:ext cx="9144000" cy="6858000"/>
+            <a:ext cx="12192000" cy="6858000"/>
           </a:xfrm>
           <a:solidFill>
             <a:srgbClr val="1C2B4A">
@@ -9229,7 +9229,7 @@
         <p:spPr>
           <a:xfrm>
             <a:off x="0" y="0"/>
-            <a:ext cx="9144000" cy="822960"/>
+            <a:ext cx="12192000" cy="822960"/>
           </a:xfrm>
           <a:solidFill>
             <a:srgbClr val="F39C12">
@@ -9268,8 +9268,8 @@
         </p:nvSpPr>
         <p:spPr>
           <a:xfrm>
-            <a:off x="365760" y="91440"/>
-            <a:ext cx="8229600" cy="640080"/>
+            <a:off x="457200" y="91440"/>
+            <a:ext cx="11277600" cy="640080"/>
           </a:xfrm>
         </p:spPr>
         <p:txBody>
@@ -9317,8 +9317,8 @@
         </p:nvSpPr>
         <p:spPr>
           <a:xfrm>
-            <a:off x="182880" y="1005840"/>
-            <a:ext cx="4160520" cy="5303520"/>
+            <a:off x="246888" y="1005840"/>
+            <a:ext cx="5669280" cy="5303520"/>
           </a:xfrm>
           <a:solidFill>
             <a:srgbClr val="1A2840">
@@ -9357,8 +9357,8 @@
         </p:nvSpPr>
         <p:spPr>
           <a:xfrm>
-            <a:off x="365760" y="1097280"/>
-            <a:ext cx="3840480" cy="457200"/>
+            <a:off x="484632" y="1097280"/>
+            <a:ext cx="5239512" cy="457200"/>
           </a:xfrm>
         </p:spPr>
         <p:txBody>
@@ -9406,8 +9406,8 @@
         </p:nvSpPr>
         <p:spPr>
           <a:xfrm>
-            <a:off x="365760" y="1645920"/>
-            <a:ext cx="3840480" cy="4389120"/>
+            <a:off x="484632" y="1645920"/>
+            <a:ext cx="5239512" cy="4389120"/>
           </a:xfrm>
         </p:spPr>
         <p:txBody>
@@ -9595,8 +9595,8 @@
         </p:nvSpPr>
         <p:spPr>
           <a:xfrm>
-            <a:off x="4617720" y="1005840"/>
-            <a:ext cx="4343400" cy="5303520"/>
+            <a:off x="6153912" y="1005840"/>
+            <a:ext cx="5788152" cy="5303520"/>
           </a:xfrm>
           <a:solidFill>
             <a:srgbClr val="1A2840">
@@ -9635,8 +9635,8 @@
         </p:nvSpPr>
         <p:spPr>
           <a:xfrm>
-            <a:off x="4800600" y="1097280"/>
-            <a:ext cx="4023360" cy="457200"/>
+            <a:off x="6400800" y="1097280"/>
+            <a:ext cx="5367528" cy="457200"/>
           </a:xfrm>
         </p:spPr>
         <p:txBody>
@@ -9684,8 +9684,8 @@
         </p:nvSpPr>
         <p:spPr>
           <a:xfrm>
-            <a:off x="4800600" y="1645920"/>
-            <a:ext cx="4023360" cy="4389120"/>
+            <a:off x="6400800" y="1645920"/>
+            <a:ext cx="5367528" cy="4389120"/>
           </a:xfrm>
         </p:spPr>
         <p:txBody>
@@ -9899,7 +9899,7 @@
         <p:spPr>
           <a:xfrm>
             <a:off x="0" y="0"/>
-            <a:ext cx="9144000" cy="6858000"/>
+            <a:ext cx="12192000" cy="6858000"/>
           </a:xfrm>
           <a:solidFill>
             <a:srgbClr val="1C2B4A">
@@ -9939,7 +9939,7 @@
         <p:spPr>
           <a:xfrm>
             <a:off x="0" y="0"/>
-            <a:ext cx="9144000" cy="822960"/>
+            <a:ext cx="12192000" cy="822960"/>
           </a:xfrm>
           <a:solidFill>
             <a:srgbClr val="378ADD">
@@ -9978,8 +9978,8 @@
         </p:nvSpPr>
         <p:spPr>
           <a:xfrm>
-            <a:off x="365760" y="91440"/>
-            <a:ext cx="8229600" cy="640080"/>
+            <a:off x="457200" y="91440"/>
+            <a:ext cx="11277600" cy="640080"/>
           </a:xfrm>
         </p:spPr>
         <p:txBody>
@@ -10027,8 +10027,8 @@
         </p:nvSpPr>
         <p:spPr>
           <a:xfrm>
-            <a:off x="457200" y="914400"/>
-            <a:ext cx="8229600" cy="411480"/>
+            <a:off x="612648" y="914400"/>
+            <a:ext cx="10972800" cy="411480"/>
           </a:xfrm>
         </p:spPr>
         <p:txBody>
@@ -10076,8 +10076,8 @@
         </p:nvSpPr>
         <p:spPr>
           <a:xfrm>
-            <a:off x="457200" y="1325880"/>
-            <a:ext cx="8229600" cy="365760"/>
+            <a:off x="612648" y="1325880"/>
+            <a:ext cx="10972800" cy="365760"/>
           </a:xfrm>
         </p:spPr>
         <p:txBody>
@@ -10125,8 +10125,8 @@
         </p:nvSpPr>
         <p:spPr>
           <a:xfrm>
-            <a:off x="137160" y="1874520"/>
-            <a:ext cx="2148840" cy="2057400"/>
+            <a:off x="182880" y="1874520"/>
+            <a:ext cx="2862072" cy="2057400"/>
           </a:xfrm>
           <a:solidFill>
             <a:srgbClr val="1A2840">
@@ -10165,8 +10165,8 @@
         </p:nvSpPr>
         <p:spPr>
           <a:xfrm>
-            <a:off x="228600" y="1938528"/>
-            <a:ext cx="1965960" cy="54864"/>
+            <a:off x="301752" y="1938528"/>
+            <a:ext cx="2624328" cy="54864"/>
           </a:xfrm>
           <a:solidFill>
             <a:srgbClr val="F39C12">
@@ -10205,8 +10205,8 @@
         </p:nvSpPr>
         <p:spPr>
           <a:xfrm>
-            <a:off x="246888" y="2039112"/>
-            <a:ext cx="1965960" cy="457200"/>
+            <a:off x="329184" y="2039112"/>
+            <a:ext cx="2624328" cy="457200"/>
           </a:xfrm>
         </p:spPr>
         <p:txBody>
@@ -10254,8 +10254,8 @@
         </p:nvSpPr>
         <p:spPr>
           <a:xfrm>
-            <a:off x="246888" y="2532888"/>
-            <a:ext cx="1965960" cy="594360"/>
+            <a:off x="329184" y="2532888"/>
+            <a:ext cx="2624328" cy="594360"/>
           </a:xfrm>
         </p:spPr>
         <p:txBody>
@@ -10303,8 +10303,8 @@
         </p:nvSpPr>
         <p:spPr>
           <a:xfrm>
-            <a:off x="246888" y="3200400"/>
-            <a:ext cx="1965960" cy="502920"/>
+            <a:off x="329184" y="3200400"/>
+            <a:ext cx="2624328" cy="502920"/>
           </a:xfrm>
         </p:spPr>
         <p:txBody>
@@ -10352,8 +10352,8 @@
         </p:nvSpPr>
         <p:spPr>
           <a:xfrm>
-            <a:off x="2395728" y="1874520"/>
-            <a:ext cx="2148840" cy="2057400"/>
+            <a:off x="3200400" y="1874520"/>
+            <a:ext cx="2862072" cy="2057400"/>
           </a:xfrm>
           <a:solidFill>
             <a:srgbClr val="1A2840">
@@ -10392,8 +10392,8 @@
         </p:nvSpPr>
         <p:spPr>
           <a:xfrm>
-            <a:off x="2487168" y="1938528"/>
-            <a:ext cx="1965960" cy="54864"/>
+            <a:off x="3319272" y="1938528"/>
+            <a:ext cx="2624328" cy="54864"/>
           </a:xfrm>
           <a:solidFill>
             <a:srgbClr val="F39C12">
@@ -10432,8 +10432,8 @@
         </p:nvSpPr>
         <p:spPr>
           <a:xfrm>
-            <a:off x="2505456" y="2039112"/>
-            <a:ext cx="1965960" cy="457200"/>
+            <a:off x="3346704" y="2039112"/>
+            <a:ext cx="2624328" cy="457200"/>
           </a:xfrm>
         </p:spPr>
         <p:txBody>
@@ -10481,8 +10481,8 @@
         </p:nvSpPr>
         <p:spPr>
           <a:xfrm>
-            <a:off x="2505456" y="2532888"/>
-            <a:ext cx="1965960" cy="594360"/>
+            <a:off x="3346704" y="2532888"/>
+            <a:ext cx="2624328" cy="594360"/>
           </a:xfrm>
         </p:spPr>
         <p:txBody>
@@ -10530,8 +10530,8 @@
         </p:nvSpPr>
         <p:spPr>
           <a:xfrm>
-            <a:off x="2505456" y="3200400"/>
-            <a:ext cx="1965960" cy="502920"/>
+            <a:off x="3346704" y="3200400"/>
+            <a:ext cx="2624328" cy="502920"/>
           </a:xfrm>
         </p:spPr>
         <p:txBody>
@@ -10579,8 +10579,8 @@
         </p:nvSpPr>
         <p:spPr>
           <a:xfrm>
-            <a:off x="4654296" y="1874520"/>
-            <a:ext cx="2148840" cy="2057400"/>
+            <a:off x="6217920" y="1874520"/>
+            <a:ext cx="2862072" cy="2057400"/>
           </a:xfrm>
           <a:solidFill>
             <a:srgbClr val="1A2840">
@@ -10619,8 +10619,8 @@
         </p:nvSpPr>
         <p:spPr>
           <a:xfrm>
-            <a:off x="4745736" y="1938528"/>
-            <a:ext cx="1965960" cy="54864"/>
+            <a:off x="6336792" y="1938528"/>
+            <a:ext cx="2624328" cy="54864"/>
           </a:xfrm>
           <a:solidFill>
             <a:srgbClr val="F39C12">
@@ -10659,8 +10659,8 @@
         </p:nvSpPr>
         <p:spPr>
           <a:xfrm>
-            <a:off x="4764024" y="2039112"/>
-            <a:ext cx="1965960" cy="457200"/>
+            <a:off x="6364224" y="2039112"/>
+            <a:ext cx="2624328" cy="457200"/>
           </a:xfrm>
         </p:spPr>
         <p:txBody>
@@ -10708,8 +10708,8 @@
         </p:nvSpPr>
         <p:spPr>
           <a:xfrm>
-            <a:off x="4764024" y="2532888"/>
-            <a:ext cx="1965960" cy="594360"/>
+            <a:off x="6364224" y="2532888"/>
+            <a:ext cx="2624328" cy="594360"/>
           </a:xfrm>
         </p:spPr>
         <p:txBody>
@@ -10757,8 +10757,8 @@
         </p:nvSpPr>
         <p:spPr>
           <a:xfrm>
-            <a:off x="4764024" y="3200400"/>
-            <a:ext cx="1965960" cy="502920"/>
+            <a:off x="6364224" y="3200400"/>
+            <a:ext cx="2624328" cy="502920"/>
           </a:xfrm>
         </p:spPr>
         <p:txBody>
@@ -10806,8 +10806,8 @@
         </p:nvSpPr>
         <p:spPr>
           <a:xfrm>
-            <a:off x="6912864" y="1874520"/>
-            <a:ext cx="2148840" cy="2057400"/>
+            <a:off x="9235440" y="1874520"/>
+            <a:ext cx="2862072" cy="2057400"/>
           </a:xfrm>
           <a:solidFill>
             <a:srgbClr val="1A2840">
@@ -10846,8 +10846,8 @@
         </p:nvSpPr>
         <p:spPr>
           <a:xfrm>
-            <a:off x="7004304" y="1938528"/>
-            <a:ext cx="1965960" cy="54864"/>
+            <a:off x="9354312" y="1938528"/>
+            <a:ext cx="2624328" cy="54864"/>
           </a:xfrm>
           <a:solidFill>
             <a:srgbClr val="F39C12">
@@ -10886,8 +10886,8 @@
         </p:nvSpPr>
         <p:spPr>
           <a:xfrm>
-            <a:off x="7022592" y="2039112"/>
-            <a:ext cx="1965960" cy="457200"/>
+            <a:off x="9381744" y="2039112"/>
+            <a:ext cx="2624328" cy="457200"/>
           </a:xfrm>
         </p:spPr>
         <p:txBody>
@@ -10935,8 +10935,8 @@
         </p:nvSpPr>
         <p:spPr>
           <a:xfrm>
-            <a:off x="7022592" y="2532888"/>
-            <a:ext cx="1965960" cy="594360"/>
+            <a:off x="9381744" y="2532888"/>
+            <a:ext cx="2624328" cy="594360"/>
           </a:xfrm>
         </p:spPr>
         <p:txBody>
@@ -10984,8 +10984,8 @@
         </p:nvSpPr>
         <p:spPr>
           <a:xfrm>
-            <a:off x="7022592" y="3200400"/>
-            <a:ext cx="1965960" cy="502920"/>
+            <a:off x="9381744" y="3200400"/>
+            <a:ext cx="2624328" cy="502920"/>
           </a:xfrm>
         </p:spPr>
         <p:txBody>
@@ -11033,8 +11033,8 @@
         </p:nvSpPr>
         <p:spPr>
           <a:xfrm>
-            <a:off x="137160" y="4160520"/>
-            <a:ext cx="2148840" cy="2057400"/>
+            <a:off x="182880" y="4160520"/>
+            <a:ext cx="2862072" cy="2057400"/>
           </a:xfrm>
           <a:solidFill>
             <a:srgbClr val="1A2840">
@@ -11073,8 +11073,8 @@
         </p:nvSpPr>
         <p:spPr>
           <a:xfrm>
-            <a:off x="228600" y="4224528"/>
-            <a:ext cx="1965960" cy="54864"/>
+            <a:off x="301752" y="4224528"/>
+            <a:ext cx="2624328" cy="54864"/>
           </a:xfrm>
           <a:solidFill>
             <a:srgbClr val="378ADD">
@@ -11113,8 +11113,8 @@
         </p:nvSpPr>
         <p:spPr>
           <a:xfrm>
-            <a:off x="246888" y="4325112"/>
-            <a:ext cx="1965960" cy="457200"/>
+            <a:off x="329184" y="4325112"/>
+            <a:ext cx="2624328" cy="457200"/>
           </a:xfrm>
         </p:spPr>
         <p:txBody>
@@ -11162,8 +11162,8 @@
         </p:nvSpPr>
         <p:spPr>
           <a:xfrm>
-            <a:off x="246888" y="4818888"/>
-            <a:ext cx="1965960" cy="594360"/>
+            <a:off x="329184" y="4818888"/>
+            <a:ext cx="2624328" cy="594360"/>
           </a:xfrm>
         </p:spPr>
         <p:txBody>
@@ -11211,8 +11211,8 @@
         </p:nvSpPr>
         <p:spPr>
           <a:xfrm>
-            <a:off x="246888" y="5486400"/>
-            <a:ext cx="1965960" cy="502920"/>
+            <a:off x="329184" y="5486400"/>
+            <a:ext cx="2624328" cy="502920"/>
           </a:xfrm>
         </p:spPr>
         <p:txBody>
@@ -11260,8 +11260,8 @@
         </p:nvSpPr>
         <p:spPr>
           <a:xfrm>
-            <a:off x="2395728" y="4160520"/>
-            <a:ext cx="2148840" cy="2057400"/>
+            <a:off x="3200400" y="4160520"/>
+            <a:ext cx="2862072" cy="2057400"/>
           </a:xfrm>
           <a:solidFill>
             <a:srgbClr val="1A2840">
@@ -11300,8 +11300,8 @@
         </p:nvSpPr>
         <p:spPr>
           <a:xfrm>
-            <a:off x="2487168" y="4224528"/>
-            <a:ext cx="1965960" cy="54864"/>
+            <a:off x="3319272" y="4224528"/>
+            <a:ext cx="2624328" cy="54864"/>
           </a:xfrm>
           <a:solidFill>
             <a:srgbClr val="1D9E75">
@@ -11340,8 +11340,8 @@
         </p:nvSpPr>
         <p:spPr>
           <a:xfrm>
-            <a:off x="2505456" y="4325112"/>
-            <a:ext cx="1965960" cy="457200"/>
+            <a:off x="3346704" y="4325112"/>
+            <a:ext cx="2624328" cy="457200"/>
           </a:xfrm>
         </p:spPr>
         <p:txBody>
@@ -11389,8 +11389,8 @@
         </p:nvSpPr>
         <p:spPr>
           <a:xfrm>
-            <a:off x="2505456" y="4818888"/>
-            <a:ext cx="1965960" cy="594360"/>
+            <a:off x="3346704" y="4818888"/>
+            <a:ext cx="2624328" cy="594360"/>
           </a:xfrm>
         </p:spPr>
         <p:txBody>
@@ -11438,8 +11438,8 @@
         </p:nvSpPr>
         <p:spPr>
           <a:xfrm>
-            <a:off x="2505456" y="5486400"/>
-            <a:ext cx="1965960" cy="502920"/>
+            <a:off x="3346704" y="5486400"/>
+            <a:ext cx="2624328" cy="502920"/>
           </a:xfrm>
         </p:spPr>
         <p:txBody>
@@ -11487,8 +11487,8 @@
         </p:nvSpPr>
         <p:spPr>
           <a:xfrm>
-            <a:off x="4654296" y="4160520"/>
-            <a:ext cx="2148840" cy="2057400"/>
+            <a:off x="6217920" y="4160520"/>
+            <a:ext cx="2862072" cy="2057400"/>
           </a:xfrm>
           <a:solidFill>
             <a:srgbClr val="1A2840">
@@ -11527,8 +11527,8 @@
         </p:nvSpPr>
         <p:spPr>
           <a:xfrm>
-            <a:off x="4745736" y="4224528"/>
-            <a:ext cx="1965960" cy="54864"/>
+            <a:off x="6336792" y="4224528"/>
+            <a:ext cx="2624328" cy="54864"/>
           </a:xfrm>
           <a:solidFill>
             <a:srgbClr val="3DC494">
@@ -11567,8 +11567,8 @@
         </p:nvSpPr>
         <p:spPr>
           <a:xfrm>
-            <a:off x="4764024" y="4325112"/>
-            <a:ext cx="1965960" cy="457200"/>
+            <a:off x="6364224" y="4325112"/>
+            <a:ext cx="2624328" cy="457200"/>
           </a:xfrm>
         </p:spPr>
         <p:txBody>
@@ -11616,8 +11616,8 @@
         </p:nvSpPr>
         <p:spPr>
           <a:xfrm>
-            <a:off x="4764024" y="4818888"/>
-            <a:ext cx="1965960" cy="594360"/>
+            <a:off x="6364224" y="4818888"/>
+            <a:ext cx="2624328" cy="594360"/>
           </a:xfrm>
         </p:spPr>
         <p:txBody>
@@ -11665,8 +11665,8 @@
         </p:nvSpPr>
         <p:spPr>
           <a:xfrm>
-            <a:off x="4764024" y="5486400"/>
-            <a:ext cx="1965960" cy="502920"/>
+            <a:off x="6364224" y="5486400"/>
+            <a:ext cx="2624328" cy="502920"/>
           </a:xfrm>
         </p:spPr>
         <p:txBody>
@@ -11714,8 +11714,8 @@
         </p:nvSpPr>
         <p:spPr>
           <a:xfrm>
-            <a:off x="6912864" y="4160520"/>
-            <a:ext cx="2148840" cy="2057400"/>
+            <a:off x="9235440" y="4160520"/>
+            <a:ext cx="2862072" cy="2057400"/>
           </a:xfrm>
           <a:solidFill>
             <a:srgbClr val="1A2840">
@@ -11754,8 +11754,8 @@
         </p:nvSpPr>
         <p:spPr>
           <a:xfrm>
-            <a:off x="7004304" y="4224528"/>
-            <a:ext cx="1965960" cy="54864"/>
+            <a:off x="9354312" y="4224528"/>
+            <a:ext cx="2624328" cy="54864"/>
           </a:xfrm>
           <a:solidFill>
             <a:srgbClr val="3DC494">
@@ -11794,8 +11794,8 @@
         </p:nvSpPr>
         <p:spPr>
           <a:xfrm>
-            <a:off x="7022592" y="4325112"/>
-            <a:ext cx="1965960" cy="457200"/>
+            <a:off x="9381744" y="4325112"/>
+            <a:ext cx="2624328" cy="457200"/>
           </a:xfrm>
         </p:spPr>
         <p:txBody>
@@ -11843,8 +11843,8 @@
         </p:nvSpPr>
         <p:spPr>
           <a:xfrm>
-            <a:off x="7022592" y="4818888"/>
-            <a:ext cx="1965960" cy="594360"/>
+            <a:off x="9381744" y="4818888"/>
+            <a:ext cx="2624328" cy="594360"/>
           </a:xfrm>
         </p:spPr>
         <p:txBody>
@@ -11892,8 +11892,8 @@
         </p:nvSpPr>
         <p:spPr>
           <a:xfrm>
-            <a:off x="7022592" y="5486400"/>
-            <a:ext cx="1965960" cy="502920"/>
+            <a:off x="9381744" y="5486400"/>
+            <a:ext cx="2624328" cy="502920"/>
           </a:xfrm>
         </p:spPr>
         <p:txBody>
@@ -11941,8 +11941,8 @@
         </p:nvSpPr>
         <p:spPr>
           <a:xfrm>
-            <a:off x="182880" y="6492240"/>
-            <a:ext cx="8778240" cy="320040"/>
+            <a:off x="246888" y="6492240"/>
+            <a:ext cx="11704320" cy="320040"/>
           </a:xfrm>
         </p:spPr>
         <p:txBody>
@@ -12016,7 +12016,7 @@
         <p:spPr>
           <a:xfrm>
             <a:off x="0" y="0"/>
-            <a:ext cx="9144000" cy="6858000"/>
+            <a:ext cx="12192000" cy="6858000"/>
           </a:xfrm>
           <a:solidFill>
             <a:srgbClr val="1C2B4A">
@@ -12056,7 +12056,7 @@
         <p:spPr>
           <a:xfrm>
             <a:off x="0" y="0"/>
-            <a:ext cx="9144000" cy="822960"/>
+            <a:ext cx="12192000" cy="822960"/>
           </a:xfrm>
           <a:solidFill>
             <a:srgbClr val="F39C12">
@@ -12095,8 +12095,8 @@
         </p:nvSpPr>
         <p:spPr>
           <a:xfrm>
-            <a:off x="365760" y="91440"/>
-            <a:ext cx="8229600" cy="640080"/>
+            <a:off x="457200" y="91440"/>
+            <a:ext cx="11277600" cy="640080"/>
           </a:xfrm>
         </p:spPr>
         <p:txBody>
@@ -12144,8 +12144,8 @@
         </p:nvSpPr>
         <p:spPr>
           <a:xfrm>
-            <a:off x="274320" y="914400"/>
-            <a:ext cx="8686800" cy="411480"/>
+            <a:off x="365760" y="914400"/>
+            <a:ext cx="11457432" cy="411480"/>
           </a:xfrm>
         </p:spPr>
         <p:txBody>
@@ -12193,8 +12193,8 @@
         </p:nvSpPr>
         <p:spPr>
           <a:xfrm>
-            <a:off x="182880" y="1508760"/>
-            <a:ext cx="2834640" cy="2194560"/>
+            <a:off x="246888" y="1508760"/>
+            <a:ext cx="3776472" cy="2194560"/>
           </a:xfrm>
           <a:solidFill>
             <a:srgbClr val="1A2840">
@@ -12233,8 +12233,8 @@
         </p:nvSpPr>
         <p:spPr>
           <a:xfrm>
-            <a:off x="320040" y="1618488"/>
-            <a:ext cx="2651760" cy="502920"/>
+            <a:off x="429768" y="1618488"/>
+            <a:ext cx="3538728" cy="502920"/>
           </a:xfrm>
         </p:spPr>
         <p:txBody>
@@ -12282,8 +12282,8 @@
         </p:nvSpPr>
         <p:spPr>
           <a:xfrm>
-            <a:off x="320040" y="2167128"/>
-            <a:ext cx="2651760" cy="594360"/>
+            <a:off x="429768" y="2167128"/>
+            <a:ext cx="3538728" cy="594360"/>
           </a:xfrm>
         </p:spPr>
         <p:txBody>
@@ -12331,8 +12331,8 @@
         </p:nvSpPr>
         <p:spPr>
           <a:xfrm>
-            <a:off x="320040" y="2807208"/>
-            <a:ext cx="2651760" cy="640080"/>
+            <a:off x="429768" y="2807208"/>
+            <a:ext cx="3538728" cy="640080"/>
           </a:xfrm>
         </p:spPr>
         <p:txBody>
@@ -12380,8 +12380,8 @@
         </p:nvSpPr>
         <p:spPr>
           <a:xfrm>
-            <a:off x="3172968" y="1508760"/>
-            <a:ext cx="2834640" cy="2194560"/>
+            <a:off x="4233672" y="1508760"/>
+            <a:ext cx="3776472" cy="2194560"/>
           </a:xfrm>
           <a:solidFill>
             <a:srgbClr val="1A2840">
@@ -12420,8 +12420,8 @@
         </p:nvSpPr>
         <p:spPr>
           <a:xfrm>
-            <a:off x="3310128" y="1618488"/>
-            <a:ext cx="2651760" cy="502920"/>
+            <a:off x="4416552" y="1618488"/>
+            <a:ext cx="3538728" cy="502920"/>
           </a:xfrm>
         </p:spPr>
         <p:txBody>
@@ -12469,8 +12469,8 @@
         </p:nvSpPr>
         <p:spPr>
           <a:xfrm>
-            <a:off x="3310128" y="2167128"/>
-            <a:ext cx="2651760" cy="594360"/>
+            <a:off x="4416552" y="2167128"/>
+            <a:ext cx="3538728" cy="594360"/>
           </a:xfrm>
         </p:spPr>
         <p:txBody>
@@ -12518,8 +12518,8 @@
         </p:nvSpPr>
         <p:spPr>
           <a:xfrm>
-            <a:off x="3310128" y="2807208"/>
-            <a:ext cx="2651760" cy="640080"/>
+            <a:off x="4416552" y="2807208"/>
+            <a:ext cx="3538728" cy="640080"/>
           </a:xfrm>
         </p:spPr>
         <p:txBody>
@@ -12567,8 +12567,8 @@
         </p:nvSpPr>
         <p:spPr>
           <a:xfrm>
-            <a:off x="6163056" y="1508760"/>
-            <a:ext cx="2834640" cy="2194560"/>
+            <a:off x="8220456" y="1508760"/>
+            <a:ext cx="3776472" cy="2194560"/>
           </a:xfrm>
           <a:solidFill>
             <a:srgbClr val="1A2840">
@@ -12607,8 +12607,8 @@
         </p:nvSpPr>
         <p:spPr>
           <a:xfrm>
-            <a:off x="6300216" y="1618488"/>
-            <a:ext cx="2651760" cy="502920"/>
+            <a:off x="8403336" y="1618488"/>
+            <a:ext cx="3538728" cy="502920"/>
           </a:xfrm>
         </p:spPr>
         <p:txBody>
@@ -12656,8 +12656,8 @@
         </p:nvSpPr>
         <p:spPr>
           <a:xfrm>
-            <a:off x="6300216" y="2167128"/>
-            <a:ext cx="2651760" cy="594360"/>
+            <a:off x="8403336" y="2167128"/>
+            <a:ext cx="3538728" cy="594360"/>
           </a:xfrm>
         </p:spPr>
         <p:txBody>
@@ -12705,8 +12705,8 @@
         </p:nvSpPr>
         <p:spPr>
           <a:xfrm>
-            <a:off x="6300216" y="2807208"/>
-            <a:ext cx="2651760" cy="640080"/>
+            <a:off x="8403336" y="2807208"/>
+            <a:ext cx="3538728" cy="640080"/>
           </a:xfrm>
         </p:spPr>
         <p:txBody>
@@ -12754,8 +12754,8 @@
         </p:nvSpPr>
         <p:spPr>
           <a:xfrm>
-            <a:off x="182880" y="3886200"/>
-            <a:ext cx="2834640" cy="2194560"/>
+            <a:off x="246888" y="3886200"/>
+            <a:ext cx="3776472" cy="2194560"/>
           </a:xfrm>
           <a:solidFill>
             <a:srgbClr val="1A2840">
@@ -12794,8 +12794,8 @@
         </p:nvSpPr>
         <p:spPr>
           <a:xfrm>
-            <a:off x="320040" y="3995928"/>
-            <a:ext cx="2651760" cy="502920"/>
+            <a:off x="429768" y="3995928"/>
+            <a:ext cx="3538728" cy="502920"/>
           </a:xfrm>
         </p:spPr>
         <p:txBody>
@@ -12843,8 +12843,8 @@
         </p:nvSpPr>
         <p:spPr>
           <a:xfrm>
-            <a:off x="320040" y="4544568"/>
-            <a:ext cx="2651760" cy="594360"/>
+            <a:off x="429768" y="4544568"/>
+            <a:ext cx="3538728" cy="594360"/>
           </a:xfrm>
         </p:spPr>
         <p:txBody>
@@ -12892,8 +12892,8 @@
         </p:nvSpPr>
         <p:spPr>
           <a:xfrm>
-            <a:off x="320040" y="5184648"/>
-            <a:ext cx="2651760" cy="640080"/>
+            <a:off x="429768" y="5184648"/>
+            <a:ext cx="3538728" cy="640080"/>
           </a:xfrm>
         </p:spPr>
         <p:txBody>
@@ -12941,8 +12941,8 @@
         </p:nvSpPr>
         <p:spPr>
           <a:xfrm>
-            <a:off x="3172968" y="3886200"/>
-            <a:ext cx="2834640" cy="2194560"/>
+            <a:off x="4233672" y="3886200"/>
+            <a:ext cx="3776472" cy="2194560"/>
           </a:xfrm>
           <a:solidFill>
             <a:srgbClr val="1A2840">
@@ -12981,8 +12981,8 @@
         </p:nvSpPr>
         <p:spPr>
           <a:xfrm>
-            <a:off x="3310128" y="3995928"/>
-            <a:ext cx="2651760" cy="502920"/>
+            <a:off x="4416552" y="3995928"/>
+            <a:ext cx="3538728" cy="502920"/>
           </a:xfrm>
         </p:spPr>
         <p:txBody>
@@ -13030,8 +13030,8 @@
         </p:nvSpPr>
         <p:spPr>
           <a:xfrm>
-            <a:off x="3310128" y="4544568"/>
-            <a:ext cx="2651760" cy="594360"/>
+            <a:off x="4416552" y="4544568"/>
+            <a:ext cx="3538728" cy="594360"/>
           </a:xfrm>
         </p:spPr>
         <p:txBody>
@@ -13079,8 +13079,8 @@
         </p:nvSpPr>
         <p:spPr>
           <a:xfrm>
-            <a:off x="3310128" y="5184648"/>
-            <a:ext cx="2651760" cy="640080"/>
+            <a:off x="4416552" y="5184648"/>
+            <a:ext cx="3538728" cy="640080"/>
           </a:xfrm>
         </p:spPr>
         <p:txBody>
@@ -13128,8 +13128,8 @@
         </p:nvSpPr>
         <p:spPr>
           <a:xfrm>
-            <a:off x="6163056" y="3886200"/>
-            <a:ext cx="2834640" cy="2194560"/>
+            <a:off x="8220456" y="3886200"/>
+            <a:ext cx="3776472" cy="2194560"/>
           </a:xfrm>
           <a:solidFill>
             <a:srgbClr val="1A2840">
@@ -13168,8 +13168,8 @@
         </p:nvSpPr>
         <p:spPr>
           <a:xfrm>
-            <a:off x="6300216" y="3995928"/>
-            <a:ext cx="2651760" cy="502920"/>
+            <a:off x="8403336" y="3995928"/>
+            <a:ext cx="3538728" cy="502920"/>
           </a:xfrm>
         </p:spPr>
         <p:txBody>
@@ -13217,8 +13217,8 @@
         </p:nvSpPr>
         <p:spPr>
           <a:xfrm>
-            <a:off x="6300216" y="4544568"/>
-            <a:ext cx="2651760" cy="594360"/>
+            <a:off x="8403336" y="4544568"/>
+            <a:ext cx="3538728" cy="594360"/>
           </a:xfrm>
         </p:spPr>
         <p:txBody>
@@ -13266,8 +13266,8 @@
         </p:nvSpPr>
         <p:spPr>
           <a:xfrm>
-            <a:off x="6300216" y="5184648"/>
-            <a:ext cx="2651760" cy="640080"/>
+            <a:off x="8403336" y="5184648"/>
+            <a:ext cx="3538728" cy="640080"/>
           </a:xfrm>
         </p:spPr>
         <p:txBody>
@@ -13341,7 +13341,7 @@
         <p:spPr>
           <a:xfrm>
             <a:off x="0" y="0"/>
-            <a:ext cx="9144000" cy="6858000"/>
+            <a:ext cx="12192000" cy="6858000"/>
           </a:xfrm>
           <a:solidFill>
             <a:srgbClr val="1C2B4A">
@@ -13381,7 +13381,7 @@
         <p:spPr>
           <a:xfrm>
             <a:off x="0" y="0"/>
-            <a:ext cx="9144000" cy="822960"/>
+            <a:ext cx="12192000" cy="822960"/>
           </a:xfrm>
           <a:solidFill>
             <a:srgbClr val="1D9E75">
@@ -13420,8 +13420,8 @@
         </p:nvSpPr>
         <p:spPr>
           <a:xfrm>
-            <a:off x="365760" y="91440"/>
-            <a:ext cx="8229600" cy="640080"/>
+            <a:off x="457200" y="91440"/>
+            <a:ext cx="11277600" cy="640080"/>
           </a:xfrm>
         </p:spPr>
         <p:txBody>
@@ -13469,8 +13469,8 @@
         </p:nvSpPr>
         <p:spPr>
           <a:xfrm>
-            <a:off x="274320" y="868680"/>
-            <a:ext cx="8595360" cy="365760"/>
+            <a:off x="365760" y="868680"/>
+            <a:ext cx="11457432" cy="365760"/>
           </a:xfrm>
         </p:spPr>
         <p:txBody>
@@ -13518,8 +13518,8 @@
         </p:nvSpPr>
         <p:spPr>
           <a:xfrm>
-            <a:off x="137160" y="1325880"/>
-            <a:ext cx="1691640" cy="1463040"/>
+            <a:off x="182880" y="1325880"/>
+            <a:ext cx="2258568" cy="1463040"/>
           </a:xfrm>
           <a:solidFill>
             <a:srgbClr val="1A2840">
@@ -13558,8 +13558,8 @@
         </p:nvSpPr>
         <p:spPr>
           <a:xfrm>
-            <a:off x="182880" y="1389888"/>
-            <a:ext cx="1600200" cy="502920"/>
+            <a:off x="246888" y="1389888"/>
+            <a:ext cx="2130552" cy="502920"/>
           </a:xfrm>
         </p:spPr>
         <p:txBody>
@@ -13607,8 +13607,8 @@
         </p:nvSpPr>
         <p:spPr>
           <a:xfrm>
-            <a:off x="182880" y="1911096"/>
-            <a:ext cx="1600200" cy="320040"/>
+            <a:off x="246888" y="1911096"/>
+            <a:ext cx="2130552" cy="320040"/>
           </a:xfrm>
         </p:spPr>
         <p:txBody>
@@ -13656,8 +13656,8 @@
         </p:nvSpPr>
         <p:spPr>
           <a:xfrm>
-            <a:off x="182880" y="2231136"/>
-            <a:ext cx="1600200" cy="411480"/>
+            <a:off x="246888" y="2231136"/>
+            <a:ext cx="2130552" cy="411480"/>
           </a:xfrm>
         </p:spPr>
         <p:txBody>
@@ -13705,8 +13705,8 @@
         </p:nvSpPr>
         <p:spPr>
           <a:xfrm>
-            <a:off x="1938528" y="1325880"/>
-            <a:ext cx="1691640" cy="1463040"/>
+            <a:off x="2560320" y="1325880"/>
+            <a:ext cx="2258568" cy="1463040"/>
           </a:xfrm>
           <a:solidFill>
             <a:srgbClr val="1A2840">
@@ -13745,8 +13745,8 @@
         </p:nvSpPr>
         <p:spPr>
           <a:xfrm>
-            <a:off x="1984248" y="1389888"/>
-            <a:ext cx="1600200" cy="502920"/>
+            <a:off x="2624328" y="1389888"/>
+            <a:ext cx="2130552" cy="502920"/>
           </a:xfrm>
         </p:spPr>
         <p:txBody>
@@ -13794,8 +13794,8 @@
         </p:nvSpPr>
         <p:spPr>
           <a:xfrm>
-            <a:off x="1984248" y="1911096"/>
-            <a:ext cx="1600200" cy="320040"/>
+            <a:off x="2624328" y="1911096"/>
+            <a:ext cx="2130552" cy="320040"/>
           </a:xfrm>
         </p:spPr>
         <p:txBody>
@@ -13843,8 +13843,8 @@
         </p:nvSpPr>
         <p:spPr>
           <a:xfrm>
-            <a:off x="1984248" y="2231136"/>
-            <a:ext cx="1600200" cy="411480"/>
+            <a:off x="2624328" y="2231136"/>
+            <a:ext cx="2130552" cy="411480"/>
           </a:xfrm>
         </p:spPr>
         <p:txBody>
@@ -13892,8 +13892,8 @@
         </p:nvSpPr>
         <p:spPr>
           <a:xfrm>
-            <a:off x="3739896" y="1325880"/>
-            <a:ext cx="1691640" cy="1463040"/>
+            <a:off x="4937760" y="1325880"/>
+            <a:ext cx="2258568" cy="1463040"/>
           </a:xfrm>
           <a:solidFill>
             <a:srgbClr val="1A2840">
@@ -13932,8 +13932,8 @@
         </p:nvSpPr>
         <p:spPr>
           <a:xfrm>
-            <a:off x="3785616" y="1389888"/>
-            <a:ext cx="1600200" cy="502920"/>
+            <a:off x="5001768" y="1389888"/>
+            <a:ext cx="2130552" cy="502920"/>
           </a:xfrm>
         </p:spPr>
         <p:txBody>
@@ -13981,8 +13981,8 @@
         </p:nvSpPr>
         <p:spPr>
           <a:xfrm>
-            <a:off x="3785616" y="1911096"/>
-            <a:ext cx="1600200" cy="320040"/>
+            <a:off x="5001768" y="1911096"/>
+            <a:ext cx="2130552" cy="320040"/>
           </a:xfrm>
         </p:spPr>
         <p:txBody>
@@ -14030,8 +14030,8 @@
         </p:nvSpPr>
         <p:spPr>
           <a:xfrm>
-            <a:off x="3785616" y="2231136"/>
-            <a:ext cx="1600200" cy="411480"/>
+            <a:off x="5001768" y="2231136"/>
+            <a:ext cx="2130552" cy="411480"/>
           </a:xfrm>
         </p:spPr>
         <p:txBody>
@@ -14079,8 +14079,8 @@
         </p:nvSpPr>
         <p:spPr>
           <a:xfrm>
-            <a:off x="5541264" y="1325880"/>
-            <a:ext cx="1691640" cy="1463040"/>
+            <a:off x="7315200" y="1325880"/>
+            <a:ext cx="2258568" cy="1463040"/>
           </a:xfrm>
           <a:solidFill>
             <a:srgbClr val="1A2840">
@@ -14119,8 +14119,8 @@
         </p:nvSpPr>
         <p:spPr>
           <a:xfrm>
-            <a:off x="5586984" y="1389888"/>
-            <a:ext cx="1600200" cy="502920"/>
+            <a:off x="7379208" y="1389888"/>
+            <a:ext cx="2130552" cy="502920"/>
           </a:xfrm>
         </p:spPr>
         <p:txBody>
@@ -14168,8 +14168,8 @@
         </p:nvSpPr>
         <p:spPr>
           <a:xfrm>
-            <a:off x="5586984" y="1911096"/>
-            <a:ext cx="1600200" cy="320040"/>
+            <a:off x="7379208" y="1911096"/>
+            <a:ext cx="2130552" cy="320040"/>
           </a:xfrm>
         </p:spPr>
         <p:txBody>
@@ -14217,8 +14217,8 @@
         </p:nvSpPr>
         <p:spPr>
           <a:xfrm>
-            <a:off x="5586984" y="2231136"/>
-            <a:ext cx="1600200" cy="411480"/>
+            <a:off x="7379208" y="2231136"/>
+            <a:ext cx="2130552" cy="411480"/>
           </a:xfrm>
         </p:spPr>
         <p:txBody>
@@ -14266,8 +14266,8 @@
         </p:nvSpPr>
         <p:spPr>
           <a:xfrm>
-            <a:off x="7342632" y="1325880"/>
-            <a:ext cx="1691640" cy="1463040"/>
+            <a:off x="9692640" y="1325880"/>
+            <a:ext cx="2258568" cy="1463040"/>
           </a:xfrm>
           <a:solidFill>
             <a:srgbClr val="1A2840">
@@ -14306,8 +14306,8 @@
         </p:nvSpPr>
         <p:spPr>
           <a:xfrm>
-            <a:off x="7388352" y="1389888"/>
-            <a:ext cx="1600200" cy="502920"/>
+            <a:off x="9756648" y="1389888"/>
+            <a:ext cx="2130552" cy="502920"/>
           </a:xfrm>
         </p:spPr>
         <p:txBody>
@@ -14355,8 +14355,8 @@
         </p:nvSpPr>
         <p:spPr>
           <a:xfrm>
-            <a:off x="7388352" y="1911096"/>
-            <a:ext cx="1600200" cy="320040"/>
+            <a:off x="9756648" y="1911096"/>
+            <a:ext cx="2130552" cy="320040"/>
           </a:xfrm>
         </p:spPr>
         <p:txBody>
@@ -14404,8 +14404,8 @@
         </p:nvSpPr>
         <p:spPr>
           <a:xfrm>
-            <a:off x="7388352" y="2231136"/>
-            <a:ext cx="1600200" cy="411480"/>
+            <a:off x="9756648" y="2231136"/>
+            <a:ext cx="2130552" cy="411480"/>
           </a:xfrm>
         </p:spPr>
         <p:txBody>
@@ -14453,8 +14453,8 @@
         </p:nvSpPr>
         <p:spPr>
           <a:xfrm>
-            <a:off x="274320" y="2971800"/>
-            <a:ext cx="8595360" cy="384048"/>
+            <a:off x="365760" y="2971800"/>
+            <a:ext cx="11457432" cy="384048"/>
           </a:xfrm>
         </p:spPr>
         <p:txBody>
@@ -14502,8 +14502,8 @@
         </p:nvSpPr>
         <p:spPr>
           <a:xfrm>
-            <a:off x="228600" y="3383280"/>
-            <a:ext cx="1005840" cy="347472"/>
+            <a:off x="365760" y="3383280"/>
+            <a:ext cx="1216152" cy="347472"/>
           </a:xfrm>
           <a:solidFill>
             <a:srgbClr val="0D1F3C">
@@ -14542,8 +14542,8 @@
         </p:nvSpPr>
         <p:spPr>
           <a:xfrm>
-            <a:off x="256032" y="3410712"/>
-            <a:ext cx="950976" cy="292608"/>
+            <a:off x="402336" y="3410712"/>
+            <a:ext cx="1143000" cy="292608"/>
           </a:xfrm>
         </p:spPr>
         <p:txBody>
@@ -14591,8 +14591,8 @@
         </p:nvSpPr>
         <p:spPr>
           <a:xfrm>
-            <a:off x="1234440" y="3383280"/>
-            <a:ext cx="1353312" cy="347472"/>
+            <a:off x="1581912" y="3383280"/>
+            <a:ext cx="1709928" cy="347472"/>
           </a:xfrm>
           <a:solidFill>
             <a:srgbClr val="0D1F3C">
@@ -14631,8 +14631,8 @@
         </p:nvSpPr>
         <p:spPr>
           <a:xfrm>
-            <a:off x="1261872" y="3410712"/>
-            <a:ext cx="1298448" cy="292608"/>
+            <a:off x="1618488" y="3410712"/>
+            <a:ext cx="1636776" cy="292608"/>
           </a:xfrm>
         </p:spPr>
         <p:txBody>
@@ -14680,8 +14680,8 @@
         </p:nvSpPr>
         <p:spPr>
           <a:xfrm>
-            <a:off x="2587752" y="3383280"/>
-            <a:ext cx="1353312" cy="347472"/>
+            <a:off x="3291840" y="3383280"/>
+            <a:ext cx="1709928" cy="347472"/>
           </a:xfrm>
           <a:solidFill>
             <a:srgbClr val="0D1F3C">
@@ -14720,8 +14720,8 @@
         </p:nvSpPr>
         <p:spPr>
           <a:xfrm>
-            <a:off x="2615184" y="3410712"/>
-            <a:ext cx="1298448" cy="292608"/>
+            <a:off x="3328416" y="3410712"/>
+            <a:ext cx="1636776" cy="292608"/>
           </a:xfrm>
         </p:spPr>
         <p:txBody>
@@ -14769,8 +14769,8 @@
         </p:nvSpPr>
         <p:spPr>
           <a:xfrm>
-            <a:off x="3941064" y="3383280"/>
-            <a:ext cx="1353312" cy="347472"/>
+            <a:off x="5001768" y="3383280"/>
+            <a:ext cx="1709928" cy="347472"/>
           </a:xfrm>
           <a:solidFill>
             <a:srgbClr val="0D1F3C">
@@ -14809,8 +14809,8 @@
         </p:nvSpPr>
         <p:spPr>
           <a:xfrm>
-            <a:off x="3968496" y="3410712"/>
-            <a:ext cx="1298448" cy="292608"/>
+            <a:off x="5038344" y="3410712"/>
+            <a:ext cx="1636776" cy="292608"/>
           </a:xfrm>
         </p:spPr>
         <p:txBody>
@@ -14858,8 +14858,8 @@
         </p:nvSpPr>
         <p:spPr>
           <a:xfrm>
-            <a:off x="5294376" y="3383280"/>
-            <a:ext cx="1353312" cy="347472"/>
+            <a:off x="6711696" y="3383280"/>
+            <a:ext cx="1709928" cy="347472"/>
           </a:xfrm>
           <a:solidFill>
             <a:srgbClr val="0D1F3C">
@@ -14898,8 +14898,8 @@
         </p:nvSpPr>
         <p:spPr>
           <a:xfrm>
-            <a:off x="5321808" y="3410712"/>
-            <a:ext cx="1298448" cy="292608"/>
+            <a:off x="6748272" y="3410712"/>
+            <a:ext cx="1636776" cy="292608"/>
           </a:xfrm>
         </p:spPr>
         <p:txBody>
@@ -14947,8 +14947,8 @@
         </p:nvSpPr>
         <p:spPr>
           <a:xfrm>
-            <a:off x="6647688" y="3383280"/>
-            <a:ext cx="1353312" cy="347472"/>
+            <a:off x="8421624" y="3383280"/>
+            <a:ext cx="1709928" cy="347472"/>
           </a:xfrm>
           <a:solidFill>
             <a:srgbClr val="0D1F3C">
@@ -14987,8 +14987,8 @@
         </p:nvSpPr>
         <p:spPr>
           <a:xfrm>
-            <a:off x="6675120" y="3410712"/>
-            <a:ext cx="1298448" cy="292608"/>
+            <a:off x="8458200" y="3410712"/>
+            <a:ext cx="1636776" cy="292608"/>
           </a:xfrm>
         </p:spPr>
         <p:txBody>
@@ -15036,8 +15036,8 @@
         </p:nvSpPr>
         <p:spPr>
           <a:xfrm>
-            <a:off x="8001000" y="3383280"/>
-            <a:ext cx="1353312" cy="347472"/>
+            <a:off x="10131552" y="3383280"/>
+            <a:ext cx="1709928" cy="347472"/>
           </a:xfrm>
           <a:solidFill>
             <a:srgbClr val="0D1F3C">
@@ -15076,8 +15076,8 @@
         </p:nvSpPr>
         <p:spPr>
           <a:xfrm>
-            <a:off x="8028432" y="3410712"/>
-            <a:ext cx="1298448" cy="292608"/>
+            <a:off x="10168128" y="3410712"/>
+            <a:ext cx="1636776" cy="292608"/>
           </a:xfrm>
         </p:spPr>
         <p:txBody>
@@ -15125,8 +15125,8 @@
         </p:nvSpPr>
         <p:spPr>
           <a:xfrm>
-            <a:off x="228600" y="3749040"/>
-            <a:ext cx="1005840" cy="521208"/>
+            <a:off x="365760" y="3749040"/>
+            <a:ext cx="1216152" cy="521208"/>
           </a:xfrm>
           <a:solidFill>
             <a:srgbClr val="2A2A1A">
@@ -15165,8 +15165,8 @@
         </p:nvSpPr>
         <p:spPr>
           <a:xfrm>
-            <a:off x="256032" y="3840480"/>
-            <a:ext cx="950976" cy="347472"/>
+            <a:off x="402336" y="3840480"/>
+            <a:ext cx="1143000" cy="347472"/>
           </a:xfrm>
         </p:spPr>
         <p:txBody>
@@ -15214,8 +15214,8 @@
         </p:nvSpPr>
         <p:spPr>
           <a:xfrm>
-            <a:off x="1234440" y="3749040"/>
-            <a:ext cx="1353312" cy="521208"/>
+            <a:off x="1581912" y="3749040"/>
+            <a:ext cx="1709928" cy="521208"/>
           </a:xfrm>
           <a:solidFill>
             <a:srgbClr val="2A2A1A">
@@ -15254,8 +15254,8 @@
         </p:nvSpPr>
         <p:spPr>
           <a:xfrm>
-            <a:off x="1261872" y="3840480"/>
-            <a:ext cx="1298448" cy="347472"/>
+            <a:off x="1618488" y="3840480"/>
+            <a:ext cx="1636776" cy="347472"/>
           </a:xfrm>
         </p:spPr>
         <p:txBody>
@@ -15303,8 +15303,8 @@
         </p:nvSpPr>
         <p:spPr>
           <a:xfrm>
-            <a:off x="2587752" y="3749040"/>
-            <a:ext cx="1353312" cy="521208"/>
+            <a:off x="3291840" y="3749040"/>
+            <a:ext cx="1709928" cy="521208"/>
           </a:xfrm>
           <a:solidFill>
             <a:srgbClr val="2A2A1A">
@@ -15343,8 +15343,8 @@
         </p:nvSpPr>
         <p:spPr>
           <a:xfrm>
-            <a:off x="2615184" y="3840480"/>
-            <a:ext cx="1298448" cy="347472"/>
+            <a:off x="3328416" y="3840480"/>
+            <a:ext cx="1636776" cy="347472"/>
           </a:xfrm>
         </p:spPr>
         <p:txBody>
@@ -15392,8 +15392,8 @@
         </p:nvSpPr>
         <p:spPr>
           <a:xfrm>
-            <a:off x="3941064" y="3749040"/>
-            <a:ext cx="1353312" cy="521208"/>
+            <a:off x="5001768" y="3749040"/>
+            <a:ext cx="1709928" cy="521208"/>
           </a:xfrm>
           <a:solidFill>
             <a:srgbClr val="2A2A1A">
@@ -15432,8 +15432,8 @@
         </p:nvSpPr>
         <p:spPr>
           <a:xfrm>
-            <a:off x="3968496" y="3840480"/>
-            <a:ext cx="1298448" cy="347472"/>
+            <a:off x="5038344" y="3840480"/>
+            <a:ext cx="1636776" cy="347472"/>
           </a:xfrm>
         </p:spPr>
         <p:txBody>
@@ -15481,8 +15481,8 @@
         </p:nvSpPr>
         <p:spPr>
           <a:xfrm>
-            <a:off x="5294376" y="3749040"/>
-            <a:ext cx="1353312" cy="521208"/>
+            <a:off x="6711696" y="3749040"/>
+            <a:ext cx="1709928" cy="521208"/>
           </a:xfrm>
           <a:solidFill>
             <a:srgbClr val="2A2A1A">
@@ -15521,8 +15521,8 @@
         </p:nvSpPr>
         <p:spPr>
           <a:xfrm>
-            <a:off x="5321808" y="3840480"/>
-            <a:ext cx="1298448" cy="347472"/>
+            <a:off x="6748272" y="3840480"/>
+            <a:ext cx="1636776" cy="347472"/>
           </a:xfrm>
         </p:spPr>
         <p:txBody>
@@ -15570,8 +15570,8 @@
         </p:nvSpPr>
         <p:spPr>
           <a:xfrm>
-            <a:off x="6647688" y="3749040"/>
-            <a:ext cx="1353312" cy="521208"/>
+            <a:off x="8421624" y="3749040"/>
+            <a:ext cx="1709928" cy="521208"/>
           </a:xfrm>
           <a:solidFill>
             <a:srgbClr val="2A2A1A">
@@ -15610,8 +15610,8 @@
         </p:nvSpPr>
         <p:spPr>
           <a:xfrm>
-            <a:off x="6675120" y="3840480"/>
-            <a:ext cx="1298448" cy="347472"/>
+            <a:off x="8458200" y="3840480"/>
+            <a:ext cx="1636776" cy="347472"/>
           </a:xfrm>
         </p:spPr>
         <p:txBody>
@@ -15659,8 +15659,8 @@
         </p:nvSpPr>
         <p:spPr>
           <a:xfrm>
-            <a:off x="8001000" y="3749040"/>
-            <a:ext cx="1353312" cy="521208"/>
+            <a:off x="10131552" y="3749040"/>
+            <a:ext cx="1709928" cy="521208"/>
           </a:xfrm>
           <a:solidFill>
             <a:srgbClr val="2A2A1A">
@@ -15699,8 +15699,8 @@
         </p:nvSpPr>
         <p:spPr>
           <a:xfrm>
-            <a:off x="8028432" y="3840480"/>
-            <a:ext cx="1298448" cy="347472"/>
+            <a:off x="10168128" y="3840480"/>
+            <a:ext cx="1636776" cy="347472"/>
           </a:xfrm>
         </p:spPr>
         <p:txBody>
@@ -15748,8 +15748,8 @@
         </p:nvSpPr>
         <p:spPr>
           <a:xfrm>
-            <a:off x="228600" y="4315968"/>
-            <a:ext cx="1005840" cy="521208"/>
+            <a:off x="365760" y="4315968"/>
+            <a:ext cx="1216152" cy="521208"/>
           </a:xfrm>
           <a:solidFill>
             <a:srgbClr val="1A2A3A">
@@ -15788,8 +15788,8 @@
         </p:nvSpPr>
         <p:spPr>
           <a:xfrm>
-            <a:off x="256032" y="4407408"/>
-            <a:ext cx="950976" cy="347472"/>
+            <a:off x="402336" y="4407408"/>
+            <a:ext cx="1143000" cy="347472"/>
           </a:xfrm>
         </p:spPr>
         <p:txBody>
@@ -15837,8 +15837,8 @@
         </p:nvSpPr>
         <p:spPr>
           <a:xfrm>
-            <a:off x="1234440" y="4315968"/>
-            <a:ext cx="1353312" cy="521208"/>
+            <a:off x="1581912" y="4315968"/>
+            <a:ext cx="1709928" cy="521208"/>
           </a:xfrm>
           <a:solidFill>
             <a:srgbClr val="1A2A3A">
@@ -15877,8 +15877,8 @@
         </p:nvSpPr>
         <p:spPr>
           <a:xfrm>
-            <a:off x="1261872" y="4407408"/>
-            <a:ext cx="1298448" cy="347472"/>
+            <a:off x="1618488" y="4407408"/>
+            <a:ext cx="1636776" cy="347472"/>
           </a:xfrm>
         </p:spPr>
         <p:txBody>
@@ -15926,8 +15926,8 @@
         </p:nvSpPr>
         <p:spPr>
           <a:xfrm>
-            <a:off x="2587752" y="4315968"/>
-            <a:ext cx="1353312" cy="521208"/>
+            <a:off x="3291840" y="4315968"/>
+            <a:ext cx="1709928" cy="521208"/>
           </a:xfrm>
           <a:solidFill>
             <a:srgbClr val="1A2A3A">
@@ -15966,8 +15966,8 @@
         </p:nvSpPr>
         <p:spPr>
           <a:xfrm>
-            <a:off x="2615184" y="4407408"/>
-            <a:ext cx="1298448" cy="347472"/>
+            <a:off x="3328416" y="4407408"/>
+            <a:ext cx="1636776" cy="347472"/>
           </a:xfrm>
         </p:spPr>
         <p:txBody>
@@ -16015,8 +16015,8 @@
         </p:nvSpPr>
         <p:spPr>
           <a:xfrm>
-            <a:off x="3941064" y="4315968"/>
-            <a:ext cx="1353312" cy="521208"/>
+            <a:off x="5001768" y="4315968"/>
+            <a:ext cx="1709928" cy="521208"/>
           </a:xfrm>
           <a:solidFill>
             <a:srgbClr val="1A2A3A">
@@ -16055,8 +16055,8 @@
         </p:nvSpPr>
         <p:spPr>
           <a:xfrm>
-            <a:off x="3968496" y="4407408"/>
-            <a:ext cx="1298448" cy="347472"/>
+            <a:off x="5038344" y="4407408"/>
+            <a:ext cx="1636776" cy="347472"/>
           </a:xfrm>
         </p:spPr>
         <p:txBody>
@@ -16104,8 +16104,8 @@
         </p:nvSpPr>
         <p:spPr>
           <a:xfrm>
-            <a:off x="5294376" y="4315968"/>
-            <a:ext cx="1353312" cy="521208"/>
+            <a:off x="6711696" y="4315968"/>
+            <a:ext cx="1709928" cy="521208"/>
           </a:xfrm>
           <a:solidFill>
             <a:srgbClr val="1A2A3A">
@@ -16144,8 +16144,8 @@
         </p:nvSpPr>
         <p:spPr>
           <a:xfrm>
-            <a:off x="5321808" y="4407408"/>
-            <a:ext cx="1298448" cy="347472"/>
+            <a:off x="6748272" y="4407408"/>
+            <a:ext cx="1636776" cy="347472"/>
           </a:xfrm>
         </p:spPr>
         <p:txBody>
@@ -16193,8 +16193,8 @@
         </p:nvSpPr>
         <p:spPr>
           <a:xfrm>
-            <a:off x="6647688" y="4315968"/>
-            <a:ext cx="1353312" cy="521208"/>
+            <a:off x="8421624" y="4315968"/>
+            <a:ext cx="1709928" cy="521208"/>
           </a:xfrm>
           <a:solidFill>
             <a:srgbClr val="1A2A3A">
@@ -16233,8 +16233,8 @@
         </p:nvSpPr>
         <p:spPr>
           <a:xfrm>
-            <a:off x="6675120" y="4407408"/>
-            <a:ext cx="1298448" cy="347472"/>
+            <a:off x="8458200" y="4407408"/>
+            <a:ext cx="1636776" cy="347472"/>
           </a:xfrm>
         </p:spPr>
         <p:txBody>
@@ -16282,8 +16282,8 @@
         </p:nvSpPr>
         <p:spPr>
           <a:xfrm>
-            <a:off x="8001000" y="4315968"/>
-            <a:ext cx="1353312" cy="521208"/>
+            <a:off x="10131552" y="4315968"/>
+            <a:ext cx="1709928" cy="521208"/>
           </a:xfrm>
           <a:solidFill>
             <a:srgbClr val="1A2A3A">
@@ -16322,8 +16322,8 @@
         </p:nvSpPr>
         <p:spPr>
           <a:xfrm>
-            <a:off x="8028432" y="4407408"/>
-            <a:ext cx="1298448" cy="347472"/>
+            <a:off x="10168128" y="4407408"/>
+            <a:ext cx="1636776" cy="347472"/>
           </a:xfrm>
         </p:spPr>
         <p:txBody>
@@ -16371,8 +16371,8 @@
         </p:nvSpPr>
         <p:spPr>
           <a:xfrm>
-            <a:off x="228600" y="4882896"/>
-            <a:ext cx="1005840" cy="521208"/>
+            <a:off x="365760" y="4882896"/>
+            <a:ext cx="1216152" cy="521208"/>
           </a:xfrm>
           <a:solidFill>
             <a:srgbClr val="1A3A2A">
@@ -16411,8 +16411,8 @@
         </p:nvSpPr>
         <p:spPr>
           <a:xfrm>
-            <a:off x="256032" y="4974336"/>
-            <a:ext cx="950976" cy="347472"/>
+            <a:off x="402336" y="4974336"/>
+            <a:ext cx="1143000" cy="347472"/>
           </a:xfrm>
         </p:spPr>
         <p:txBody>
@@ -16460,8 +16460,8 @@
         </p:nvSpPr>
         <p:spPr>
           <a:xfrm>
-            <a:off x="1234440" y="4882896"/>
-            <a:ext cx="1353312" cy="521208"/>
+            <a:off x="1581912" y="4882896"/>
+            <a:ext cx="1709928" cy="521208"/>
           </a:xfrm>
           <a:solidFill>
             <a:srgbClr val="1A3A2A">
@@ -16500,8 +16500,8 @@
         </p:nvSpPr>
         <p:spPr>
           <a:xfrm>
-            <a:off x="1261872" y="4974336"/>
-            <a:ext cx="1298448" cy="347472"/>
+            <a:off x="1618488" y="4974336"/>
+            <a:ext cx="1636776" cy="347472"/>
           </a:xfrm>
         </p:spPr>
         <p:txBody>
@@ -16549,8 +16549,8 @@
         </p:nvSpPr>
         <p:spPr>
           <a:xfrm>
-            <a:off x="2587752" y="4882896"/>
-            <a:ext cx="1353312" cy="521208"/>
+            <a:off x="3291840" y="4882896"/>
+            <a:ext cx="1709928" cy="521208"/>
           </a:xfrm>
           <a:solidFill>
             <a:srgbClr val="1A3A2A">
@@ -16589,8 +16589,8 @@
         </p:nvSpPr>
         <p:spPr>
           <a:xfrm>
-            <a:off x="2615184" y="4974336"/>
-            <a:ext cx="1298448" cy="347472"/>
+            <a:off x="3328416" y="4974336"/>
+            <a:ext cx="1636776" cy="347472"/>
           </a:xfrm>
         </p:spPr>
         <p:txBody>
@@ -16638,8 +16638,8 @@
         </p:nvSpPr>
         <p:spPr>
           <a:xfrm>
-            <a:off x="3941064" y="4882896"/>
-            <a:ext cx="1353312" cy="521208"/>
+            <a:off x="5001768" y="4882896"/>
+            <a:ext cx="1709928" cy="521208"/>
           </a:xfrm>
           <a:solidFill>
             <a:srgbClr val="1A3A2A">
@@ -16678,8 +16678,8 @@
         </p:nvSpPr>
         <p:spPr>
           <a:xfrm>
-            <a:off x="3968496" y="4974336"/>
-            <a:ext cx="1298448" cy="347472"/>
+            <a:off x="5038344" y="4974336"/>
+            <a:ext cx="1636776" cy="347472"/>
           </a:xfrm>
         </p:spPr>
         <p:txBody>
@@ -16727,8 +16727,8 @@
         </p:nvSpPr>
         <p:spPr>
           <a:xfrm>
-            <a:off x="5294376" y="4882896"/>
-            <a:ext cx="1353312" cy="521208"/>
+            <a:off x="6711696" y="4882896"/>
+            <a:ext cx="1709928" cy="521208"/>
           </a:xfrm>
           <a:solidFill>
             <a:srgbClr val="1A3A2A">
@@ -16767,8 +16767,8 @@
         </p:nvSpPr>
         <p:spPr>
           <a:xfrm>
-            <a:off x="5321808" y="4974336"/>
-            <a:ext cx="1298448" cy="347472"/>
+            <a:off x="6748272" y="4974336"/>
+            <a:ext cx="1636776" cy="347472"/>
           </a:xfrm>
         </p:spPr>
         <p:txBody>
@@ -16816,8 +16816,8 @@
         </p:nvSpPr>
         <p:spPr>
           <a:xfrm>
-            <a:off x="6647688" y="4882896"/>
-            <a:ext cx="1353312" cy="521208"/>
+            <a:off x="8421624" y="4882896"/>
+            <a:ext cx="1709928" cy="521208"/>
           </a:xfrm>
           <a:solidFill>
             <a:srgbClr val="1A3A2A">
@@ -16856,8 +16856,8 @@
         </p:nvSpPr>
         <p:spPr>
           <a:xfrm>
-            <a:off x="6675120" y="4974336"/>
-            <a:ext cx="1298448" cy="347472"/>
+            <a:off x="8458200" y="4974336"/>
+            <a:ext cx="1636776" cy="347472"/>
           </a:xfrm>
         </p:spPr>
         <p:txBody>
@@ -16905,8 +16905,8 @@
         </p:nvSpPr>
         <p:spPr>
           <a:xfrm>
-            <a:off x="8001000" y="4882896"/>
-            <a:ext cx="1353312" cy="521208"/>
+            <a:off x="10131552" y="4882896"/>
+            <a:ext cx="1709928" cy="521208"/>
           </a:xfrm>
           <a:solidFill>
             <a:srgbClr val="1A3A2A">
@@ -16945,8 +16945,8 @@
         </p:nvSpPr>
         <p:spPr>
           <a:xfrm>
-            <a:off x="8028432" y="4974336"/>
-            <a:ext cx="1298448" cy="347472"/>
+            <a:off x="10168128" y="4974336"/>
+            <a:ext cx="1636776" cy="347472"/>
           </a:xfrm>
         </p:spPr>
         <p:txBody>
@@ -16994,8 +16994,8 @@
         </p:nvSpPr>
         <p:spPr>
           <a:xfrm>
-            <a:off x="228600" y="5486400"/>
-            <a:ext cx="8686800" cy="320040"/>
+            <a:off x="301752" y="5486400"/>
+            <a:ext cx="11585448" cy="320040"/>
           </a:xfrm>
         </p:spPr>
         <p:txBody>
@@ -17043,8 +17043,8 @@
         </p:nvSpPr>
         <p:spPr>
           <a:xfrm>
-            <a:off x="228600" y="5852160"/>
-            <a:ext cx="8686800" cy="320040"/>
+            <a:off x="301752" y="5852160"/>
+            <a:ext cx="11585448" cy="320040"/>
           </a:xfrm>
         </p:spPr>
         <p:txBody>
@@ -17118,7 +17118,7 @@
         <p:spPr>
           <a:xfrm>
             <a:off x="0" y="0"/>
-            <a:ext cx="9144000" cy="6858000"/>
+            <a:ext cx="12192000" cy="6858000"/>
           </a:xfrm>
           <a:solidFill>
             <a:srgbClr val="1C2B4A">
@@ -17158,7 +17158,7 @@
         <p:spPr>
           <a:xfrm>
             <a:off x="0" y="0"/>
-            <a:ext cx="9144000" cy="822960"/>
+            <a:ext cx="12192000" cy="822960"/>
           </a:xfrm>
           <a:solidFill>
             <a:srgbClr val="3DC494">
@@ -17197,8 +17197,8 @@
         </p:nvSpPr>
         <p:spPr>
           <a:xfrm>
-            <a:off x="365760" y="91440"/>
-            <a:ext cx="8229600" cy="640080"/>
+            <a:off x="457200" y="91440"/>
+            <a:ext cx="11277600" cy="640080"/>
           </a:xfrm>
         </p:spPr>
         <p:txBody>
@@ -17246,8 +17246,8 @@
         </p:nvSpPr>
         <p:spPr>
           <a:xfrm>
-            <a:off x="274320" y="914400"/>
-            <a:ext cx="8595360" cy="502920"/>
+            <a:off x="365760" y="914400"/>
+            <a:ext cx="11457432" cy="502920"/>
           </a:xfrm>
           <a:solidFill>
             <a:srgbClr val="0D2A1E">
@@ -17286,8 +17286,8 @@
         </p:nvSpPr>
         <p:spPr>
           <a:xfrm>
-            <a:off x="274320" y="978408"/>
-            <a:ext cx="8595360" cy="365760"/>
+            <a:off x="365760" y="978408"/>
+            <a:ext cx="11457432" cy="365760"/>
           </a:xfrm>
         </p:spPr>
         <p:txBody>
@@ -17335,8 +17335,8 @@
         </p:nvSpPr>
         <p:spPr>
           <a:xfrm>
-            <a:off x="182880" y="1508760"/>
-            <a:ext cx="1691640" cy="4983480"/>
+            <a:off x="246888" y="1508760"/>
+            <a:ext cx="2258568" cy="4983480"/>
           </a:xfrm>
           <a:solidFill>
             <a:srgbClr val="1A2840">
@@ -17375,8 +17375,8 @@
         </p:nvSpPr>
         <p:spPr>
           <a:xfrm>
-            <a:off x="274320" y="1554480"/>
-            <a:ext cx="1508760" cy="54864"/>
+            <a:off x="365760" y="1554480"/>
+            <a:ext cx="2011680" cy="54864"/>
           </a:xfrm>
           <a:solidFill>
             <a:srgbClr val="1D9E75">
@@ -17415,8 +17415,8 @@
         </p:nvSpPr>
         <p:spPr>
           <a:xfrm>
-            <a:off x="228600" y="1627632"/>
-            <a:ext cx="1600200" cy="292608"/>
+            <a:off x="310896" y="1627632"/>
+            <a:ext cx="2130552" cy="292608"/>
           </a:xfrm>
         </p:spPr>
         <p:txBody>
@@ -17464,8 +17464,8 @@
         </p:nvSpPr>
         <p:spPr>
           <a:xfrm>
-            <a:off x="228600" y="1938528"/>
-            <a:ext cx="1600200" cy="457200"/>
+            <a:off x="310896" y="1938528"/>
+            <a:ext cx="2130552" cy="457200"/>
           </a:xfrm>
         </p:spPr>
         <p:txBody>
@@ -17513,8 +17513,8 @@
         </p:nvSpPr>
         <p:spPr>
           <a:xfrm>
-            <a:off x="292608" y="2468880"/>
-            <a:ext cx="1508760" cy="3840480"/>
+            <a:off x="393192" y="2468880"/>
+            <a:ext cx="2011680" cy="3840480"/>
           </a:xfrm>
         </p:spPr>
         <p:txBody>
@@ -17646,8 +17646,8 @@
         </p:nvSpPr>
         <p:spPr>
           <a:xfrm>
-            <a:off x="1965960" y="1508760"/>
-            <a:ext cx="1691640" cy="4983480"/>
+            <a:off x="2624328" y="1508760"/>
+            <a:ext cx="2258568" cy="4983480"/>
           </a:xfrm>
           <a:solidFill>
             <a:srgbClr val="1A2840">
@@ -17686,8 +17686,8 @@
         </p:nvSpPr>
         <p:spPr>
           <a:xfrm>
-            <a:off x="2057400" y="1554480"/>
-            <a:ext cx="1508760" cy="54864"/>
+            <a:off x="2743200" y="1554480"/>
+            <a:ext cx="2011680" cy="54864"/>
           </a:xfrm>
           <a:solidFill>
             <a:srgbClr val="378ADD">
@@ -17726,8 +17726,8 @@
         </p:nvSpPr>
         <p:spPr>
           <a:xfrm>
-            <a:off x="2011680" y="1627632"/>
-            <a:ext cx="1600200" cy="292608"/>
+            <a:off x="2688336" y="1627632"/>
+            <a:ext cx="2130552" cy="292608"/>
           </a:xfrm>
         </p:spPr>
         <p:txBody>
@@ -17775,8 +17775,8 @@
         </p:nvSpPr>
         <p:spPr>
           <a:xfrm>
-            <a:off x="2011680" y="1938528"/>
-            <a:ext cx="1600200" cy="457200"/>
+            <a:off x="2688336" y="1938528"/>
+            <a:ext cx="2130552" cy="457200"/>
           </a:xfrm>
         </p:spPr>
         <p:txBody>
@@ -17824,8 +17824,8 @@
         </p:nvSpPr>
         <p:spPr>
           <a:xfrm>
-            <a:off x="2075688" y="2468880"/>
-            <a:ext cx="1508760" cy="3840480"/>
+            <a:off x="2770632" y="2468880"/>
+            <a:ext cx="2011680" cy="3840480"/>
           </a:xfrm>
         </p:spPr>
         <p:txBody>
@@ -17957,8 +17957,8 @@
         </p:nvSpPr>
         <p:spPr>
           <a:xfrm>
-            <a:off x="3749040" y="1508760"/>
-            <a:ext cx="1691640" cy="4983480"/>
+            <a:off x="5001768" y="1508760"/>
+            <a:ext cx="2258568" cy="4983480"/>
           </a:xfrm>
           <a:solidFill>
             <a:srgbClr val="1A2840">
@@ -17997,8 +17997,8 @@
         </p:nvSpPr>
         <p:spPr>
           <a:xfrm>
-            <a:off x="3840480" y="1554480"/>
-            <a:ext cx="1508760" cy="54864"/>
+            <a:off x="5120640" y="1554480"/>
+            <a:ext cx="2011680" cy="54864"/>
           </a:xfrm>
           <a:solidFill>
             <a:srgbClr val="F39C12">
@@ -18037,8 +18037,8 @@
         </p:nvSpPr>
         <p:spPr>
           <a:xfrm>
-            <a:off x="3794760" y="1627632"/>
-            <a:ext cx="1600200" cy="292608"/>
+            <a:off x="5065776" y="1627632"/>
+            <a:ext cx="2130552" cy="292608"/>
           </a:xfrm>
         </p:spPr>
         <p:txBody>
@@ -18086,8 +18086,8 @@
         </p:nvSpPr>
         <p:spPr>
           <a:xfrm>
-            <a:off x="3794760" y="1938528"/>
-            <a:ext cx="1600200" cy="457200"/>
+            <a:off x="5065776" y="1938528"/>
+            <a:ext cx="2130552" cy="457200"/>
           </a:xfrm>
         </p:spPr>
         <p:txBody>
@@ -18135,8 +18135,8 @@
         </p:nvSpPr>
         <p:spPr>
           <a:xfrm>
-            <a:off x="3858768" y="2468880"/>
-            <a:ext cx="1508760" cy="3840480"/>
+            <a:off x="5148072" y="2468880"/>
+            <a:ext cx="2011680" cy="3840480"/>
           </a:xfrm>
         </p:spPr>
         <p:txBody>
@@ -18268,8 +18268,8 @@
         </p:nvSpPr>
         <p:spPr>
           <a:xfrm>
-            <a:off x="5532120" y="1508760"/>
-            <a:ext cx="1691640" cy="4983480"/>
+            <a:off x="7379208" y="1508760"/>
+            <a:ext cx="2258568" cy="4983480"/>
           </a:xfrm>
           <a:solidFill>
             <a:srgbClr val="1A2840">
@@ -18308,8 +18308,8 @@
         </p:nvSpPr>
         <p:spPr>
           <a:xfrm>
-            <a:off x="5623560" y="1554480"/>
-            <a:ext cx="1508760" cy="54864"/>
+            <a:off x="7498080" y="1554480"/>
+            <a:ext cx="2011680" cy="54864"/>
           </a:xfrm>
           <a:solidFill>
             <a:srgbClr val="3DC494">
@@ -18348,8 +18348,8 @@
         </p:nvSpPr>
         <p:spPr>
           <a:xfrm>
-            <a:off x="5577840" y="1627632"/>
-            <a:ext cx="1600200" cy="292608"/>
+            <a:off x="7443216" y="1627632"/>
+            <a:ext cx="2130552" cy="292608"/>
           </a:xfrm>
         </p:spPr>
         <p:txBody>
@@ -18397,8 +18397,8 @@
         </p:nvSpPr>
         <p:spPr>
           <a:xfrm>
-            <a:off x="5577840" y="1938528"/>
-            <a:ext cx="1600200" cy="457200"/>
+            <a:off x="7443216" y="1938528"/>
+            <a:ext cx="2130552" cy="457200"/>
           </a:xfrm>
         </p:spPr>
         <p:txBody>
@@ -18446,8 +18446,8 @@
         </p:nvSpPr>
         <p:spPr>
           <a:xfrm>
-            <a:off x="5641848" y="2468880"/>
-            <a:ext cx="1508760" cy="3840480"/>
+            <a:off x="7525512" y="2468880"/>
+            <a:ext cx="2011680" cy="3840480"/>
           </a:xfrm>
         </p:spPr>
         <p:txBody>
@@ -18579,8 +18579,8 @@
         </p:nvSpPr>
         <p:spPr>
           <a:xfrm>
-            <a:off x="7315200" y="1508760"/>
-            <a:ext cx="1691640" cy="4983480"/>
+            <a:off x="9756648" y="1508760"/>
+            <a:ext cx="2258568" cy="4983480"/>
           </a:xfrm>
           <a:solidFill>
             <a:srgbClr val="1A2840">
@@ -18619,8 +18619,8 @@
         </p:nvSpPr>
         <p:spPr>
           <a:xfrm>
-            <a:off x="7406640" y="1554480"/>
-            <a:ext cx="1508760" cy="54864"/>
+            <a:off x="9875520" y="1554480"/>
+            <a:ext cx="2011680" cy="54864"/>
           </a:xfrm>
           <a:solidFill>
             <a:srgbClr val="8A9BB0">
@@ -18659,8 +18659,8 @@
         </p:nvSpPr>
         <p:spPr>
           <a:xfrm>
-            <a:off x="7360920" y="1627632"/>
-            <a:ext cx="1600200" cy="292608"/>
+            <a:off x="9820656" y="1627632"/>
+            <a:ext cx="2130552" cy="292608"/>
           </a:xfrm>
         </p:spPr>
         <p:txBody>
@@ -18708,8 +18708,8 @@
         </p:nvSpPr>
         <p:spPr>
           <a:xfrm>
-            <a:off x="7360920" y="1938528"/>
-            <a:ext cx="1600200" cy="457200"/>
+            <a:off x="9820656" y="1938528"/>
+            <a:ext cx="2130552" cy="457200"/>
           </a:xfrm>
         </p:spPr>
         <p:txBody>
@@ -18757,8 +18757,8 @@
         </p:nvSpPr>
         <p:spPr>
           <a:xfrm>
-            <a:off x="7424928" y="2468880"/>
-            <a:ext cx="1508760" cy="3840480"/>
+            <a:off x="9902952" y="2468880"/>
+            <a:ext cx="2011680" cy="3840480"/>
           </a:xfrm>
         </p:spPr>
         <p:txBody>
